--- a/presentation/meridian_mattia_vincenzi.pptx
+++ b/presentation/meridian_mattia_vincenzi.pptx
@@ -5,7 +5,7 @@
     <p:sldMasterId id="2147483648" r:id="rId1"/>
   </p:sldMasterIdLst>
   <p:notesMasterIdLst>
-    <p:notesMasterId r:id="rId28"/>
+    <p:notesMasterId r:id="rId27"/>
   </p:notesMasterIdLst>
   <p:sldIdLst>
     <p:sldId id="271" r:id="rId2"/>
@@ -29,11 +29,10 @@
     <p:sldId id="266" r:id="rId20"/>
     <p:sldId id="284" r:id="rId21"/>
     <p:sldId id="285" r:id="rId22"/>
-    <p:sldId id="282" r:id="rId23"/>
-    <p:sldId id="267" r:id="rId24"/>
-    <p:sldId id="268" r:id="rId25"/>
-    <p:sldId id="269" r:id="rId26"/>
-    <p:sldId id="270" r:id="rId27"/>
+    <p:sldId id="267" r:id="rId23"/>
+    <p:sldId id="268" r:id="rId24"/>
+    <p:sldId id="269" r:id="rId25"/>
+    <p:sldId id="270" r:id="rId26"/>
   </p:sldIdLst>
   <p:sldSz cx="12192000" cy="6858000"/>
   <p:notesSz cx="6858000" cy="12192000"/>
@@ -1383,13 +1382,7 @@
   <p:cSld>
     <p:spTree>
       <p:nvGrpSpPr>
-        <p:cNvPr id="1" name="">
-          <a:extLst>
-            <a:ext uri="{FF2B5EF4-FFF2-40B4-BE49-F238E27FC236}">
-              <a16:creationId xmlns:a16="http://schemas.microsoft.com/office/drawing/2014/main" id="{C8B66D44-06E2-CFC2-9C0A-D45DF0E4E3D3}"/>
-            </a:ext>
-          </a:extLst>
-        </p:cNvPr>
+        <p:cNvPr id="1" name=""/>
         <p:cNvGrpSpPr/>
         <p:nvPr/>
       </p:nvGrpSpPr>
@@ -1403,13 +1396,7 @@
       </p:grpSpPr>
       <p:sp>
         <p:nvSpPr>
-          <p:cNvPr id="2" name="Slide Image Placeholder 1">
-            <a:extLst>
-              <a:ext uri="{FF2B5EF4-FFF2-40B4-BE49-F238E27FC236}">
-                <a16:creationId xmlns:a16="http://schemas.microsoft.com/office/drawing/2014/main" id="{3A8C9345-FE15-AE03-FE6F-61FFFF6CD795}"/>
-              </a:ext>
-            </a:extLst>
-          </p:cNvPr>
+          <p:cNvPr id="2" name="Slide Image Placeholder 1"/>
           <p:cNvSpPr>
             <a:spLocks noGrp="1" noRot="1" noChangeAspect="1"/>
           </p:cNvSpPr>
@@ -1421,13 +1408,7 @@
       </p:sp>
       <p:sp>
         <p:nvSpPr>
-          <p:cNvPr id="3" name="Notes Placeholder 2">
-            <a:extLst>
-              <a:ext uri="{FF2B5EF4-FFF2-40B4-BE49-F238E27FC236}">
-                <a16:creationId xmlns:a16="http://schemas.microsoft.com/office/drawing/2014/main" id="{65FDBA5E-F5F3-7AF7-D61F-3C96C9C4F296}"/>
-              </a:ext>
-            </a:extLst>
-          </p:cNvPr>
+          <p:cNvPr id="3" name="Notes Placeholder 2"/>
           <p:cNvSpPr>
             <a:spLocks noGrp="1"/>
           </p:cNvSpPr>
@@ -1442,20 +1423,14 @@
           <a:p>
             <a:r>
               <a:rPr lang="en-US" dirty="0"/>
-              <a:t>Corrected network view: distinguish Region and VPC. Show public subnets for ALB and NAT, private subnets for EKS and RDS, two AZs, one NAT per AZ, S3 gateway endpoint and regional S3 outside the VPC. SQS and Step Functions are regional managed services outside subnets. WAF is associated with the ALB, not shown as a subnet appliance. Provider connectivity through NAT does not equal residency approval; controls and contracts are still needed.</a:t>
-            </a:r>
-          </a:p>
-        </p:txBody>
-      </p:sp>
-      <p:sp>
-        <p:nvSpPr>
-          <p:cNvPr id="4" name="Slide Number Placeholder 3">
-            <a:extLst>
-              <a:ext uri="{FF2B5EF4-FFF2-40B4-BE49-F238E27FC236}">
-                <a16:creationId xmlns:a16="http://schemas.microsoft.com/office/drawing/2014/main" id="{8987337E-AFAC-1AD6-CCF6-98924CD28063}"/>
-              </a:ext>
-            </a:extLst>
-          </p:cNvPr>
+              <a:t>Use this slide only if asked for more detail on why the outbox is necessary and what it does not solve. It prevents loss of accepted work between a database commit and a remote call, but it does not guarantee exactly-once delivery. Stable operation identifiers, provider idempotency and reconciliation remain required.</a:t>
+            </a:r>
+          </a:p>
+        </p:txBody>
+      </p:sp>
+      <p:sp>
+        <p:nvSpPr>
+          <p:cNvPr id="4" name="Slide Number Placeholder 3"/>
           <p:cNvSpPr>
             <a:spLocks noGrp="1"/>
           </p:cNvSpPr>
@@ -1479,7 +1454,7 @@
     </p:spTree>
     <p:extLst>
       <p:ext uri="{BB962C8B-B14F-4D97-AF65-F5344CB8AC3E}">
-        <p14:creationId xmlns:p14="http://schemas.microsoft.com/office/powerpoint/2010/main" val="18966578"/>
+        <p14:creationId xmlns:p14="http://schemas.microsoft.com/office/powerpoint/2010/main" val="1024086991"/>
       </p:ext>
     </p:extLst>
   </p:cSld>
@@ -1535,7 +1510,7 @@
           <a:p>
             <a:r>
               <a:rPr lang="en-US" dirty="0"/>
-              <a:t>Use this slide only if asked for more detail on why the outbox is necessary and what it does not solve. It prevents loss of accepted work between a database commit and a remote call, but it does not guarantee exactly-once delivery. Stable operation identifiers, provider idempotency and reconciliation remain required.</a:t>
+              <a:t>Cost detail is taken from the documented estimate. Public AWS prices were checked on 18 September 2026, with Ireland eu-west-1, one production environment, on-demand Linux nodes, standard EKS/PostgreSQL support, 730 hours/month and no credits, commitments or free-tier deductions. Telemetry and other services remain allowances, not a validated bill.</a:t>
             </a:r>
           </a:p>
         </p:txBody>
@@ -1622,7 +1597,7 @@
           <a:p>
             <a:r>
               <a:rPr lang="en-US" dirty="0"/>
-              <a:t>Cost detail is taken from the documented estimate. Public AWS prices were checked on 18 September 2026, with Ireland eu-west-1, one production environment, on-demand Linux nodes, standard EKS/PostgreSQL support, 730 hours/month and no credits, commitments or free-tier deductions. Telemetry and other services remain allowances, not a validated bill.</a:t>
+              <a:t>This is the evidence matrix for launch readiness. Use it to make clear what is planned versus what has been demonstrated. The strongest validation priorities are journey continuity, safe external effects, deployment compatibility, recovery measurement, security and sustainable load.</a:t>
             </a:r>
           </a:p>
         </p:txBody>
@@ -1709,7 +1684,7 @@
           <a:p>
             <a:r>
               <a:rPr lang="en-US" dirty="0"/>
-              <a:t>This is the evidence matrix for launch readiness. Use it to make clear what is planned versus what has been demonstrated. The strongest validation priorities are journey continuity, safe external effects, deployment compatibility, recovery measurement, security and sustainable load.</a:t>
+              <a:t>Keep this slide available for discussion. It collects the material uncertainties that affect the design: recovery scope, residency, provider contracts, operational ownership and traffic/cost assumptions. Emphasize that these do not relax the requirements; they define what must be confirmed or demonstrated.</a:t>
             </a:r>
           </a:p>
         </p:txBody>
@@ -1732,93 +1707,6 @@
             <a:fld id="{F7021451-1387-4CA6-816F-3879F97B5CBC}" type="slidenum">
               <a:rPr lang="en-US"/>
               <a:t>25</a:t>
-            </a:fld>
-            <a:endParaRPr lang="en-US"/>
-          </a:p>
-        </p:txBody>
-      </p:sp>
-    </p:spTree>
-    <p:extLst>
-      <p:ext uri="{BB962C8B-B14F-4D97-AF65-F5344CB8AC3E}">
-        <p14:creationId xmlns:p14="http://schemas.microsoft.com/office/powerpoint/2010/main" val="1024086991"/>
-      </p:ext>
-    </p:extLst>
-  </p:cSld>
-  <p:clrMapOvr>
-    <a:masterClrMapping/>
-  </p:clrMapOvr>
-</p:notes>
-</file>
-
-<file path=ppt/notesSlides/notesSlide24.xml><?xml version="1.0" encoding="utf-8"?>
-<p:notes xmlns:a="http://schemas.openxmlformats.org/drawingml/2006/main" xmlns:r="http://schemas.openxmlformats.org/officeDocument/2006/relationships" xmlns:p="http://schemas.openxmlformats.org/presentationml/2006/main">
-  <p:cSld>
-    <p:spTree>
-      <p:nvGrpSpPr>
-        <p:cNvPr id="1" name=""/>
-        <p:cNvGrpSpPr/>
-        <p:nvPr/>
-      </p:nvGrpSpPr>
-      <p:grpSpPr>
-        <a:xfrm>
-          <a:off x="0" y="0"/>
-          <a:ext cx="0" cy="0"/>
-          <a:chOff x="0" y="0"/>
-          <a:chExt cx="0" cy="0"/>
-        </a:xfrm>
-      </p:grpSpPr>
-      <p:sp>
-        <p:nvSpPr>
-          <p:cNvPr id="2" name="Slide Image Placeholder 1"/>
-          <p:cNvSpPr>
-            <a:spLocks noGrp="1" noRot="1" noChangeAspect="1"/>
-          </p:cNvSpPr>
-          <p:nvPr>
-            <p:ph type="sldImg"/>
-          </p:nvPr>
-        </p:nvSpPr>
-        <p:spPr/>
-      </p:sp>
-      <p:sp>
-        <p:nvSpPr>
-          <p:cNvPr id="3" name="Notes Placeholder 2"/>
-          <p:cNvSpPr>
-            <a:spLocks noGrp="1"/>
-          </p:cNvSpPr>
-          <p:nvPr>
-            <p:ph type="body" idx="1"/>
-          </p:nvPr>
-        </p:nvSpPr>
-        <p:spPr/>
-        <p:txBody>
-          <a:bodyPr/>
-          <a:lstStyle/>
-          <a:p>
-            <a:r>
-              <a:rPr lang="en-US" dirty="0"/>
-              <a:t>Keep this slide available for discussion. It collects the material uncertainties that affect the design: recovery scope, residency, provider contracts, operational ownership and traffic/cost assumptions. Emphasize that these do not relax the requirements; they define what must be confirmed or demonstrated.</a:t>
-            </a:r>
-          </a:p>
-        </p:txBody>
-      </p:sp>
-      <p:sp>
-        <p:nvSpPr>
-          <p:cNvPr id="4" name="Slide Number Placeholder 3"/>
-          <p:cNvSpPr>
-            <a:spLocks noGrp="1"/>
-          </p:cNvSpPr>
-          <p:nvPr>
-            <p:ph type="sldNum" sz="quarter" idx="10"/>
-          </p:nvPr>
-        </p:nvSpPr>
-        <p:spPr/>
-        <p:txBody>
-          <a:bodyPr/>
-          <a:lstStyle/>
-          <a:p>
-            <a:fld id="{F7021451-1387-4CA6-816F-3879F97B5CBC}" type="slidenum">
-              <a:rPr lang="en-US"/>
-              <a:t>26</a:t>
             </a:fld>
             <a:endParaRPr lang="en-US"/>
           </a:p>
@@ -18097,2083 +17985,6 @@
 
 <file path=ppt/slides/slide22.xml><?xml version="1.0" encoding="utf-8"?>
 <p:sld xmlns:a="http://schemas.openxmlformats.org/drawingml/2006/main" xmlns:r="http://schemas.openxmlformats.org/officeDocument/2006/relationships" xmlns:p="http://schemas.openxmlformats.org/presentationml/2006/main" show="0">
-  <p:cSld>
-    <p:spTree>
-      <p:nvGrpSpPr>
-        <p:cNvPr id="1" name="">
-          <a:extLst>
-            <a:ext uri="{FF2B5EF4-FFF2-40B4-BE49-F238E27FC236}">
-              <a16:creationId xmlns:a16="http://schemas.microsoft.com/office/drawing/2014/main" id="{DD14D941-5160-CF2A-6A5C-1925E64BCE17}"/>
-            </a:ext>
-          </a:extLst>
-        </p:cNvPr>
-        <p:cNvGrpSpPr/>
-        <p:nvPr/>
-      </p:nvGrpSpPr>
-      <p:grpSpPr>
-        <a:xfrm>
-          <a:off x="0" y="0"/>
-          <a:ext cx="0" cy="0"/>
-          <a:chOff x="0" y="0"/>
-          <a:chExt cx="0" cy="0"/>
-        </a:xfrm>
-      </p:grpSpPr>
-      <p:sp>
-        <p:nvSpPr>
-          <p:cNvPr id="3" name="Text 1">
-            <a:extLst>
-              <a:ext uri="{FF2B5EF4-FFF2-40B4-BE49-F238E27FC236}">
-                <a16:creationId xmlns:a16="http://schemas.microsoft.com/office/drawing/2014/main" id="{A2F509EB-C7E6-0323-E800-DFE923D135D5}"/>
-              </a:ext>
-            </a:extLst>
-          </p:cNvPr>
-          <p:cNvSpPr/>
-          <p:nvPr/>
-        </p:nvSpPr>
-        <p:spPr>
-          <a:xfrm>
-            <a:off x="502920" y="438912"/>
-            <a:ext cx="10972800" cy="438912"/>
-          </a:xfrm>
-          <a:prstGeom prst="rect">
-            <a:avLst/>
-          </a:prstGeom>
-          <a:noFill/>
-          <a:ln/>
-        </p:spPr>
-        <p:txBody>
-          <a:bodyPr wrap="square" lIns="0" tIns="0" rIns="0" bIns="0" rtlCol="0" anchor="ctr">
-            <a:normAutofit/>
-          </a:bodyPr>
-          <a:lstStyle/>
-          <a:p>
-            <a:pPr marL="0" indent="0">
-              <a:buNone/>
-            </a:pPr>
-            <a:r>
-              <a:rPr lang="en-US" sz="2750" b="1" dirty="0">
-                <a:solidFill>
-                  <a:srgbClr val="07133D"/>
-                </a:solidFill>
-                <a:latin typeface="Aptos Display" pitchFamily="34" charset="0"/>
-                <a:ea typeface="Aptos Display" pitchFamily="34" charset="-122"/>
-                <a:cs typeface="Aptos Display" pitchFamily="34" charset="-120"/>
-              </a:rPr>
-              <a:t>Network and platform view</a:t>
-            </a:r>
-            <a:endParaRPr lang="en-US" sz="2750" dirty="0"/>
-          </a:p>
-        </p:txBody>
-      </p:sp>
-      <p:sp>
-        <p:nvSpPr>
-          <p:cNvPr id="5" name="Shape 3">
-            <a:extLst>
-              <a:ext uri="{FF2B5EF4-FFF2-40B4-BE49-F238E27FC236}">
-                <a16:creationId xmlns:a16="http://schemas.microsoft.com/office/drawing/2014/main" id="{E73EA08E-D12B-4F53-B8CB-A260FD1B3B70}"/>
-              </a:ext>
-            </a:extLst>
-          </p:cNvPr>
-          <p:cNvSpPr/>
-          <p:nvPr/>
-        </p:nvSpPr>
-        <p:spPr>
-          <a:xfrm>
-            <a:off x="502920" y="1115568"/>
-            <a:ext cx="11155680" cy="0"/>
-          </a:xfrm>
-          <a:prstGeom prst="line">
-            <a:avLst/>
-          </a:prstGeom>
-          <a:noFill/>
-          <a:ln w="12700">
-            <a:solidFill>
-              <a:srgbClr val="D6DEE9"/>
-            </a:solidFill>
-            <a:prstDash val="solid"/>
-          </a:ln>
-        </p:spPr>
-        <p:txBody>
-          <a:bodyPr/>
-          <a:lstStyle/>
-          <a:p>
-            <a:endParaRPr lang="it-IT"/>
-          </a:p>
-        </p:txBody>
-      </p:sp>
-      <p:sp>
-        <p:nvSpPr>
-          <p:cNvPr id="6" name="Shape 4">
-            <a:extLst>
-              <a:ext uri="{FF2B5EF4-FFF2-40B4-BE49-F238E27FC236}">
-                <a16:creationId xmlns:a16="http://schemas.microsoft.com/office/drawing/2014/main" id="{5F618DAB-1062-D7EF-9BF1-81E8B0BB1282}"/>
-              </a:ext>
-            </a:extLst>
-          </p:cNvPr>
-          <p:cNvSpPr/>
-          <p:nvPr/>
-        </p:nvSpPr>
-        <p:spPr>
-          <a:xfrm>
-            <a:off x="502920" y="6455664"/>
-            <a:ext cx="11155680" cy="0"/>
-          </a:xfrm>
-          <a:prstGeom prst="line">
-            <a:avLst/>
-          </a:prstGeom>
-          <a:noFill/>
-          <a:ln w="10160">
-            <a:solidFill>
-              <a:srgbClr val="E1E7F0"/>
-            </a:solidFill>
-            <a:prstDash val="solid"/>
-          </a:ln>
-        </p:spPr>
-        <p:txBody>
-          <a:bodyPr/>
-          <a:lstStyle/>
-          <a:p>
-            <a:endParaRPr lang="it-IT"/>
-          </a:p>
-        </p:txBody>
-      </p:sp>
-      <p:sp>
-        <p:nvSpPr>
-          <p:cNvPr id="7" name="Text 5">
-            <a:extLst>
-              <a:ext uri="{FF2B5EF4-FFF2-40B4-BE49-F238E27FC236}">
-                <a16:creationId xmlns:a16="http://schemas.microsoft.com/office/drawing/2014/main" id="{27ED6543-1A26-6936-F7DE-2154D4738BA1}"/>
-              </a:ext>
-            </a:extLst>
-          </p:cNvPr>
-          <p:cNvSpPr/>
-          <p:nvPr/>
-        </p:nvSpPr>
-        <p:spPr>
-          <a:xfrm>
-            <a:off x="502920" y="6519672"/>
-            <a:ext cx="2286000" cy="201168"/>
-          </a:xfrm>
-          <a:prstGeom prst="rect">
-            <a:avLst/>
-          </a:prstGeom>
-          <a:noFill/>
-          <a:ln/>
-        </p:spPr>
-        <p:txBody>
-          <a:bodyPr wrap="square" lIns="0" tIns="0" rIns="0" bIns="0" rtlCol="0" anchor="ctr"/>
-          <a:lstStyle/>
-          <a:p>
-            <a:pPr marL="0" indent="0">
-              <a:buNone/>
-            </a:pPr>
-            <a:r>
-              <a:rPr lang="en-US" sz="850" dirty="0">
-                <a:solidFill>
-                  <a:srgbClr val="7B8497"/>
-                </a:solidFill>
-              </a:rPr>
-              <a:t>Backup A</a:t>
-            </a:r>
-            <a:endParaRPr lang="en-US" sz="850" dirty="0"/>
-          </a:p>
-        </p:txBody>
-      </p:sp>
-      <p:sp>
-        <p:nvSpPr>
-          <p:cNvPr id="8" name="Text 6">
-            <a:extLst>
-              <a:ext uri="{FF2B5EF4-FFF2-40B4-BE49-F238E27FC236}">
-                <a16:creationId xmlns:a16="http://schemas.microsoft.com/office/drawing/2014/main" id="{B5AD3809-3301-1928-49C7-D71E1C6D034B}"/>
-              </a:ext>
-            </a:extLst>
-          </p:cNvPr>
-          <p:cNvSpPr/>
-          <p:nvPr/>
-        </p:nvSpPr>
-        <p:spPr>
-          <a:xfrm>
-            <a:off x="7818120" y="6519672"/>
-            <a:ext cx="3840480" cy="201168"/>
-          </a:xfrm>
-          <a:prstGeom prst="rect">
-            <a:avLst/>
-          </a:prstGeom>
-          <a:noFill/>
-          <a:ln/>
-        </p:spPr>
-        <p:txBody>
-          <a:bodyPr wrap="square" lIns="0" tIns="0" rIns="0" bIns="0" rtlCol="0" anchor="ctr"/>
-          <a:lstStyle/>
-          <a:p>
-            <a:pPr marL="0" indent="0" algn="r">
-              <a:buNone/>
-            </a:pPr>
-            <a:r>
-              <a:rPr lang="en-US" sz="850" dirty="0">
-                <a:solidFill>
-                  <a:srgbClr val="7B8497"/>
-                </a:solidFill>
-              </a:rPr>
-              <a:t>Durable journeys. Connected experiences.</a:t>
-            </a:r>
-            <a:endParaRPr lang="en-US" sz="850" dirty="0"/>
-          </a:p>
-        </p:txBody>
-      </p:sp>
-      <p:sp>
-        <p:nvSpPr>
-          <p:cNvPr id="9" name="Shape 7">
-            <a:extLst>
-              <a:ext uri="{FF2B5EF4-FFF2-40B4-BE49-F238E27FC236}">
-                <a16:creationId xmlns:a16="http://schemas.microsoft.com/office/drawing/2014/main" id="{BB2CEE8F-99AD-099D-F714-966698046FDD}"/>
-              </a:ext>
-            </a:extLst>
-          </p:cNvPr>
-          <p:cNvSpPr/>
-          <p:nvPr/>
-        </p:nvSpPr>
-        <p:spPr>
-          <a:xfrm>
-            <a:off x="1828800" y="1417320"/>
-            <a:ext cx="9052560" cy="4553712"/>
-          </a:xfrm>
-          <a:prstGeom prst="roundRect">
-            <a:avLst>
-              <a:gd name="adj" fmla="val 2410"/>
-            </a:avLst>
-          </a:prstGeom>
-          <a:solidFill>
-            <a:srgbClr val="F8FAFC"/>
-          </a:solidFill>
-          <a:ln w="15240">
-            <a:solidFill>
-              <a:srgbClr val="A5B2C5"/>
-            </a:solidFill>
-            <a:prstDash val="solid"/>
-          </a:ln>
-        </p:spPr>
-        <p:txBody>
-          <a:bodyPr/>
-          <a:lstStyle/>
-          <a:p>
-            <a:endParaRPr lang="it-IT"/>
-          </a:p>
-        </p:txBody>
-      </p:sp>
-      <p:sp>
-        <p:nvSpPr>
-          <p:cNvPr id="10" name="Text 8">
-            <a:extLst>
-              <a:ext uri="{FF2B5EF4-FFF2-40B4-BE49-F238E27FC236}">
-                <a16:creationId xmlns:a16="http://schemas.microsoft.com/office/drawing/2014/main" id="{18E78A9E-BE9E-79E8-031D-3EC44081EE6A}"/>
-              </a:ext>
-            </a:extLst>
-          </p:cNvPr>
-          <p:cNvSpPr/>
-          <p:nvPr/>
-        </p:nvSpPr>
-        <p:spPr>
-          <a:xfrm>
-            <a:off x="2048256" y="1572768"/>
-            <a:ext cx="1463040" cy="201168"/>
-          </a:xfrm>
-          <a:prstGeom prst="rect">
-            <a:avLst/>
-          </a:prstGeom>
-          <a:noFill/>
-          <a:ln/>
-        </p:spPr>
-        <p:txBody>
-          <a:bodyPr wrap="square" lIns="254" tIns="254" rIns="254" bIns="254" rtlCol="0" anchor="t">
-            <a:normAutofit/>
-          </a:bodyPr>
-          <a:lstStyle/>
-          <a:p>
-            <a:pPr marL="0" indent="0" algn="l">
-              <a:buNone/>
-            </a:pPr>
-            <a:r>
-              <a:rPr lang="en-US" sz="1300" b="1" dirty="0">
-                <a:solidFill>
-                  <a:srgbClr val="07133D"/>
-                </a:solidFill>
-                <a:latin typeface="Aptos" pitchFamily="34" charset="0"/>
-                <a:ea typeface="Aptos" pitchFamily="34" charset="-122"/>
-                <a:cs typeface="Aptos" pitchFamily="34" charset="-120"/>
-              </a:rPr>
-              <a:t>AWS Region</a:t>
-            </a:r>
-            <a:endParaRPr lang="en-US" sz="1300" dirty="0"/>
-          </a:p>
-        </p:txBody>
-      </p:sp>
-      <p:sp>
-        <p:nvSpPr>
-          <p:cNvPr id="11" name="Shape 9">
-            <a:extLst>
-              <a:ext uri="{FF2B5EF4-FFF2-40B4-BE49-F238E27FC236}">
-                <a16:creationId xmlns:a16="http://schemas.microsoft.com/office/drawing/2014/main" id="{F32F9EBC-5C56-BC32-1B56-49847E09EABF}"/>
-              </a:ext>
-            </a:extLst>
-          </p:cNvPr>
-          <p:cNvSpPr/>
-          <p:nvPr/>
-        </p:nvSpPr>
-        <p:spPr>
-          <a:xfrm>
-            <a:off x="2221992" y="1883664"/>
-            <a:ext cx="8001000" cy="3429000"/>
-          </a:xfrm>
-          <a:prstGeom prst="roundRect">
-            <a:avLst>
-              <a:gd name="adj" fmla="val 2667"/>
-            </a:avLst>
-          </a:prstGeom>
-          <a:solidFill>
-            <a:srgbClr val="FFFFFF">
-              <a:alpha val="90000"/>
-            </a:srgbClr>
-          </a:solidFill>
-          <a:ln w="12700">
-            <a:solidFill>
-              <a:srgbClr val="C8D3E2"/>
-            </a:solidFill>
-            <a:prstDash val="solid"/>
-          </a:ln>
-        </p:spPr>
-        <p:txBody>
-          <a:bodyPr/>
-          <a:lstStyle/>
-          <a:p>
-            <a:endParaRPr lang="it-IT"/>
-          </a:p>
-        </p:txBody>
-      </p:sp>
-      <p:sp>
-        <p:nvSpPr>
-          <p:cNvPr id="12" name="Text 10">
-            <a:extLst>
-              <a:ext uri="{FF2B5EF4-FFF2-40B4-BE49-F238E27FC236}">
-                <a16:creationId xmlns:a16="http://schemas.microsoft.com/office/drawing/2014/main" id="{BBACE488-9FA3-EF5C-FB51-9A2321424C62}"/>
-              </a:ext>
-            </a:extLst>
-          </p:cNvPr>
-          <p:cNvSpPr/>
-          <p:nvPr/>
-        </p:nvSpPr>
-        <p:spPr>
-          <a:xfrm>
-            <a:off x="2423160" y="2020824"/>
-            <a:ext cx="1737360" cy="182880"/>
-          </a:xfrm>
-          <a:prstGeom prst="rect">
-            <a:avLst/>
-          </a:prstGeom>
-          <a:noFill/>
-          <a:ln/>
-        </p:spPr>
-        <p:txBody>
-          <a:bodyPr wrap="square" lIns="254" tIns="254" rIns="254" bIns="254" rtlCol="0" anchor="t">
-            <a:normAutofit/>
-          </a:bodyPr>
-          <a:lstStyle/>
-          <a:p>
-            <a:pPr marL="0" indent="0" algn="l">
-              <a:buNone/>
-            </a:pPr>
-            <a:r>
-              <a:rPr lang="en-US" sz="1000" b="1" dirty="0">
-                <a:solidFill>
-                  <a:srgbClr val="5B6475"/>
-                </a:solidFill>
-                <a:latin typeface="Aptos" pitchFamily="34" charset="0"/>
-                <a:ea typeface="Aptos" pitchFamily="34" charset="-122"/>
-                <a:cs typeface="Aptos" pitchFamily="34" charset="-120"/>
-              </a:rPr>
-              <a:t>VPC across two AZs</a:t>
-            </a:r>
-            <a:endParaRPr lang="en-US" sz="1000" dirty="0"/>
-          </a:p>
-        </p:txBody>
-      </p:sp>
-      <p:sp>
-        <p:nvSpPr>
-          <p:cNvPr id="13" name="Shape 11">
-            <a:extLst>
-              <a:ext uri="{FF2B5EF4-FFF2-40B4-BE49-F238E27FC236}">
-                <a16:creationId xmlns:a16="http://schemas.microsoft.com/office/drawing/2014/main" id="{8EE89050-2DE8-517B-B64F-45D4AA439FFA}"/>
-              </a:ext>
-            </a:extLst>
-          </p:cNvPr>
-          <p:cNvSpPr/>
-          <p:nvPr/>
-        </p:nvSpPr>
-        <p:spPr>
-          <a:xfrm>
-            <a:off x="2514600" y="2331720"/>
-            <a:ext cx="3520440" cy="2578608"/>
-          </a:xfrm>
-          <a:prstGeom prst="roundRect">
-            <a:avLst>
-              <a:gd name="adj" fmla="val 2837"/>
-            </a:avLst>
-          </a:prstGeom>
-          <a:solidFill>
-            <a:srgbClr val="F3F8FF"/>
-          </a:solidFill>
-          <a:ln w="12700">
-            <a:solidFill>
-              <a:srgbClr val="BAD2F1"/>
-            </a:solidFill>
-            <a:prstDash val="solid"/>
-          </a:ln>
-        </p:spPr>
-        <p:txBody>
-          <a:bodyPr/>
-          <a:lstStyle/>
-          <a:p>
-            <a:endParaRPr lang="it-IT"/>
-          </a:p>
-        </p:txBody>
-      </p:sp>
-      <p:sp>
-        <p:nvSpPr>
-          <p:cNvPr id="14" name="Shape 12">
-            <a:extLst>
-              <a:ext uri="{FF2B5EF4-FFF2-40B4-BE49-F238E27FC236}">
-                <a16:creationId xmlns:a16="http://schemas.microsoft.com/office/drawing/2014/main" id="{F2755593-81B9-E897-8A85-415E34DE5BA8}"/>
-              </a:ext>
-            </a:extLst>
-          </p:cNvPr>
-          <p:cNvSpPr/>
-          <p:nvPr/>
-        </p:nvSpPr>
-        <p:spPr>
-          <a:xfrm>
-            <a:off x="6355080" y="2331720"/>
-            <a:ext cx="3520440" cy="2578608"/>
-          </a:xfrm>
-          <a:prstGeom prst="roundRect">
-            <a:avLst>
-              <a:gd name="adj" fmla="val 2837"/>
-            </a:avLst>
-          </a:prstGeom>
-          <a:solidFill>
-            <a:srgbClr val="F3F8FF"/>
-          </a:solidFill>
-          <a:ln w="12700">
-            <a:solidFill>
-              <a:srgbClr val="BAD2F1"/>
-            </a:solidFill>
-            <a:prstDash val="solid"/>
-          </a:ln>
-        </p:spPr>
-        <p:txBody>
-          <a:bodyPr/>
-          <a:lstStyle/>
-          <a:p>
-            <a:endParaRPr lang="it-IT"/>
-          </a:p>
-        </p:txBody>
-      </p:sp>
-      <p:sp>
-        <p:nvSpPr>
-          <p:cNvPr id="15" name="Text 13">
-            <a:extLst>
-              <a:ext uri="{FF2B5EF4-FFF2-40B4-BE49-F238E27FC236}">
-                <a16:creationId xmlns:a16="http://schemas.microsoft.com/office/drawing/2014/main" id="{03EA4DDF-4A44-1634-5EA0-5FFBC485B759}"/>
-              </a:ext>
-            </a:extLst>
-          </p:cNvPr>
-          <p:cNvSpPr/>
-          <p:nvPr/>
-        </p:nvSpPr>
-        <p:spPr>
-          <a:xfrm>
-            <a:off x="2688336" y="2487168"/>
-            <a:ext cx="640080" cy="164592"/>
-          </a:xfrm>
-          <a:prstGeom prst="rect">
-            <a:avLst/>
-          </a:prstGeom>
-          <a:noFill/>
-          <a:ln/>
-        </p:spPr>
-        <p:txBody>
-          <a:bodyPr wrap="square" lIns="254" tIns="254" rIns="254" bIns="254" rtlCol="0" anchor="t">
-            <a:normAutofit/>
-          </a:bodyPr>
-          <a:lstStyle/>
-          <a:p>
-            <a:pPr marL="0" indent="0" algn="l">
-              <a:buNone/>
-            </a:pPr>
-            <a:r>
-              <a:rPr lang="en-US" sz="900" b="1" dirty="0">
-                <a:solidFill>
-                  <a:srgbClr val="0B63E5"/>
-                </a:solidFill>
-                <a:latin typeface="Aptos" pitchFamily="34" charset="0"/>
-                <a:ea typeface="Aptos" pitchFamily="34" charset="-122"/>
-                <a:cs typeface="Aptos" pitchFamily="34" charset="-120"/>
-              </a:rPr>
-              <a:t>AZ A</a:t>
-            </a:r>
-            <a:endParaRPr lang="en-US" sz="900" dirty="0"/>
-          </a:p>
-        </p:txBody>
-      </p:sp>
-      <p:sp>
-        <p:nvSpPr>
-          <p:cNvPr id="16" name="Text 14">
-            <a:extLst>
-              <a:ext uri="{FF2B5EF4-FFF2-40B4-BE49-F238E27FC236}">
-                <a16:creationId xmlns:a16="http://schemas.microsoft.com/office/drawing/2014/main" id="{1A6CE0B8-ED5F-B3FD-5625-E3DAC976B07F}"/>
-              </a:ext>
-            </a:extLst>
-          </p:cNvPr>
-          <p:cNvSpPr/>
-          <p:nvPr/>
-        </p:nvSpPr>
-        <p:spPr>
-          <a:xfrm>
-            <a:off x="6528816" y="2487168"/>
-            <a:ext cx="640080" cy="164592"/>
-          </a:xfrm>
-          <a:prstGeom prst="rect">
-            <a:avLst/>
-          </a:prstGeom>
-          <a:noFill/>
-          <a:ln/>
-        </p:spPr>
-        <p:txBody>
-          <a:bodyPr wrap="square" lIns="254" tIns="254" rIns="254" bIns="254" rtlCol="0" anchor="t">
-            <a:normAutofit/>
-          </a:bodyPr>
-          <a:lstStyle/>
-          <a:p>
-            <a:pPr marL="0" indent="0" algn="l">
-              <a:buNone/>
-            </a:pPr>
-            <a:r>
-              <a:rPr lang="en-US" sz="900" b="1" dirty="0">
-                <a:solidFill>
-                  <a:srgbClr val="0B63E5"/>
-                </a:solidFill>
-                <a:latin typeface="Aptos" pitchFamily="34" charset="0"/>
-                <a:ea typeface="Aptos" pitchFamily="34" charset="-122"/>
-                <a:cs typeface="Aptos" pitchFamily="34" charset="-120"/>
-              </a:rPr>
-              <a:t>AZ B</a:t>
-            </a:r>
-            <a:endParaRPr lang="en-US" sz="900" dirty="0"/>
-          </a:p>
-        </p:txBody>
-      </p:sp>
-      <p:sp>
-        <p:nvSpPr>
-          <p:cNvPr id="17" name="Shape 15">
-            <a:extLst>
-              <a:ext uri="{FF2B5EF4-FFF2-40B4-BE49-F238E27FC236}">
-                <a16:creationId xmlns:a16="http://schemas.microsoft.com/office/drawing/2014/main" id="{3715EA4A-F444-D683-C429-441AC3A00A90}"/>
-              </a:ext>
-            </a:extLst>
-          </p:cNvPr>
-          <p:cNvSpPr/>
-          <p:nvPr/>
-        </p:nvSpPr>
-        <p:spPr>
-          <a:xfrm>
-            <a:off x="2816352" y="2788920"/>
-            <a:ext cx="2834640" cy="493776"/>
-          </a:xfrm>
-          <a:prstGeom prst="roundRect">
-            <a:avLst>
-              <a:gd name="adj" fmla="val 14815"/>
-            </a:avLst>
-          </a:prstGeom>
-          <a:solidFill>
-            <a:srgbClr val="FFF4E4"/>
-          </a:solidFill>
-          <a:ln w="13970">
-            <a:solidFill>
-              <a:srgbClr val="F28A00"/>
-            </a:solidFill>
-            <a:prstDash val="solid"/>
-          </a:ln>
-        </p:spPr>
-        <p:txBody>
-          <a:bodyPr/>
-          <a:lstStyle/>
-          <a:p>
-            <a:endParaRPr lang="it-IT"/>
-          </a:p>
-        </p:txBody>
-      </p:sp>
-      <p:sp>
-        <p:nvSpPr>
-          <p:cNvPr id="18" name="Text 16">
-            <a:extLst>
-              <a:ext uri="{FF2B5EF4-FFF2-40B4-BE49-F238E27FC236}">
-                <a16:creationId xmlns:a16="http://schemas.microsoft.com/office/drawing/2014/main" id="{60FE4C38-14AC-7888-3B95-70E0D2F81E9E}"/>
-              </a:ext>
-            </a:extLst>
-          </p:cNvPr>
-          <p:cNvSpPr/>
-          <p:nvPr/>
-        </p:nvSpPr>
-        <p:spPr>
-          <a:xfrm>
-            <a:off x="2926080" y="2935224"/>
-            <a:ext cx="2615184" cy="164592"/>
-          </a:xfrm>
-          <a:prstGeom prst="rect">
-            <a:avLst/>
-          </a:prstGeom>
-          <a:noFill/>
-          <a:ln/>
-        </p:spPr>
-        <p:txBody>
-          <a:bodyPr wrap="square" lIns="0" tIns="0" rIns="0" bIns="0" rtlCol="0" anchor="ctr">
-            <a:normAutofit/>
-          </a:bodyPr>
-          <a:lstStyle/>
-          <a:p>
-            <a:pPr marL="0" indent="0" algn="ctr">
-              <a:buNone/>
-            </a:pPr>
-            <a:r>
-              <a:rPr lang="en-US" sz="940" b="1" dirty="0">
-                <a:solidFill>
-                  <a:srgbClr val="07133D"/>
-                </a:solidFill>
-              </a:rPr>
-              <a:t>Public subnet: ALB + NAT GW A</a:t>
-            </a:r>
-            <a:endParaRPr lang="en-US" sz="940" dirty="0"/>
-          </a:p>
-        </p:txBody>
-      </p:sp>
-      <p:sp>
-        <p:nvSpPr>
-          <p:cNvPr id="19" name="Shape 17">
-            <a:extLst>
-              <a:ext uri="{FF2B5EF4-FFF2-40B4-BE49-F238E27FC236}">
-                <a16:creationId xmlns:a16="http://schemas.microsoft.com/office/drawing/2014/main" id="{3DF2EB26-445D-6C82-85E7-11129E7F4FF4}"/>
-              </a:ext>
-            </a:extLst>
-          </p:cNvPr>
-          <p:cNvSpPr/>
-          <p:nvPr/>
-        </p:nvSpPr>
-        <p:spPr>
-          <a:xfrm>
-            <a:off x="6656832" y="2788920"/>
-            <a:ext cx="2834640" cy="493776"/>
-          </a:xfrm>
-          <a:prstGeom prst="roundRect">
-            <a:avLst>
-              <a:gd name="adj" fmla="val 14815"/>
-            </a:avLst>
-          </a:prstGeom>
-          <a:solidFill>
-            <a:srgbClr val="FFF4E4"/>
-          </a:solidFill>
-          <a:ln w="13970">
-            <a:solidFill>
-              <a:srgbClr val="F28A00"/>
-            </a:solidFill>
-            <a:prstDash val="solid"/>
-          </a:ln>
-        </p:spPr>
-        <p:txBody>
-          <a:bodyPr/>
-          <a:lstStyle/>
-          <a:p>
-            <a:endParaRPr lang="it-IT"/>
-          </a:p>
-        </p:txBody>
-      </p:sp>
-      <p:sp>
-        <p:nvSpPr>
-          <p:cNvPr id="20" name="Text 18">
-            <a:extLst>
-              <a:ext uri="{FF2B5EF4-FFF2-40B4-BE49-F238E27FC236}">
-                <a16:creationId xmlns:a16="http://schemas.microsoft.com/office/drawing/2014/main" id="{F20DC8B5-CDAC-FF18-1EA1-B7B9EAEFE194}"/>
-              </a:ext>
-            </a:extLst>
-          </p:cNvPr>
-          <p:cNvSpPr/>
-          <p:nvPr/>
-        </p:nvSpPr>
-        <p:spPr>
-          <a:xfrm>
-            <a:off x="6766560" y="2935224"/>
-            <a:ext cx="2615184" cy="164592"/>
-          </a:xfrm>
-          <a:prstGeom prst="rect">
-            <a:avLst/>
-          </a:prstGeom>
-          <a:noFill/>
-          <a:ln/>
-        </p:spPr>
-        <p:txBody>
-          <a:bodyPr wrap="square" lIns="0" tIns="0" rIns="0" bIns="0" rtlCol="0" anchor="ctr">
-            <a:normAutofit/>
-          </a:bodyPr>
-          <a:lstStyle/>
-          <a:p>
-            <a:pPr marL="0" indent="0" algn="ctr">
-              <a:buNone/>
-            </a:pPr>
-            <a:r>
-              <a:rPr lang="en-US" sz="940" b="1" dirty="0">
-                <a:solidFill>
-                  <a:srgbClr val="07133D"/>
-                </a:solidFill>
-              </a:rPr>
-              <a:t>Public subnet: NAT GW B</a:t>
-            </a:r>
-            <a:endParaRPr lang="en-US" sz="940" dirty="0"/>
-          </a:p>
-        </p:txBody>
-      </p:sp>
-      <p:sp>
-        <p:nvSpPr>
-          <p:cNvPr id="21" name="Shape 19">
-            <a:extLst>
-              <a:ext uri="{FF2B5EF4-FFF2-40B4-BE49-F238E27FC236}">
-                <a16:creationId xmlns:a16="http://schemas.microsoft.com/office/drawing/2014/main" id="{6B1119A0-99A3-6D2B-CC99-435A2D1FAD41}"/>
-              </a:ext>
-            </a:extLst>
-          </p:cNvPr>
-          <p:cNvSpPr/>
-          <p:nvPr/>
-        </p:nvSpPr>
-        <p:spPr>
-          <a:xfrm>
-            <a:off x="2816352" y="3703320"/>
-            <a:ext cx="2834640" cy="621792"/>
-          </a:xfrm>
-          <a:prstGeom prst="roundRect">
-            <a:avLst>
-              <a:gd name="adj" fmla="val 11765"/>
-            </a:avLst>
-          </a:prstGeom>
-          <a:solidFill>
-            <a:srgbClr val="EAF5FF"/>
-          </a:solidFill>
-          <a:ln w="13970">
-            <a:solidFill>
-              <a:srgbClr val="0B63E5"/>
-            </a:solidFill>
-            <a:prstDash val="solid"/>
-          </a:ln>
-        </p:spPr>
-        <p:txBody>
-          <a:bodyPr/>
-          <a:lstStyle/>
-          <a:p>
-            <a:endParaRPr lang="it-IT"/>
-          </a:p>
-        </p:txBody>
-      </p:sp>
-      <p:sp>
-        <p:nvSpPr>
-          <p:cNvPr id="22" name="Text 20">
-            <a:extLst>
-              <a:ext uri="{FF2B5EF4-FFF2-40B4-BE49-F238E27FC236}">
-                <a16:creationId xmlns:a16="http://schemas.microsoft.com/office/drawing/2014/main" id="{40DA86AB-2CF8-00B3-43A5-4292BD48BC6A}"/>
-              </a:ext>
-            </a:extLst>
-          </p:cNvPr>
-          <p:cNvSpPr/>
-          <p:nvPr/>
-        </p:nvSpPr>
-        <p:spPr>
-          <a:xfrm>
-            <a:off x="2926080" y="3794760"/>
-            <a:ext cx="2615184" cy="228600"/>
-          </a:xfrm>
-          <a:prstGeom prst="rect">
-            <a:avLst/>
-          </a:prstGeom>
-          <a:noFill/>
-          <a:ln/>
-        </p:spPr>
-        <p:txBody>
-          <a:bodyPr wrap="square" lIns="0" tIns="0" rIns="0" bIns="0" rtlCol="0" anchor="ctr">
-            <a:normAutofit/>
-          </a:bodyPr>
-          <a:lstStyle/>
-          <a:p>
-            <a:pPr marL="0" indent="0" algn="ctr">
-              <a:buNone/>
-            </a:pPr>
-            <a:r>
-              <a:rPr lang="en-US" sz="980" b="1" dirty="0">
-                <a:solidFill>
-                  <a:srgbClr val="07133D"/>
-                </a:solidFill>
-              </a:rPr>
-              <a:t>Private EKS nodes</a:t>
-            </a:r>
-            <a:endParaRPr lang="en-US" sz="980" dirty="0"/>
-          </a:p>
-        </p:txBody>
-      </p:sp>
-      <p:sp>
-        <p:nvSpPr>
-          <p:cNvPr id="23" name="Text 21">
-            <a:extLst>
-              <a:ext uri="{FF2B5EF4-FFF2-40B4-BE49-F238E27FC236}">
-                <a16:creationId xmlns:a16="http://schemas.microsoft.com/office/drawing/2014/main" id="{B71A9263-94FC-67CB-B0A7-F786E3EA5133}"/>
-              </a:ext>
-            </a:extLst>
-          </p:cNvPr>
-          <p:cNvSpPr/>
-          <p:nvPr/>
-        </p:nvSpPr>
-        <p:spPr>
-          <a:xfrm>
-            <a:off x="2944368" y="4087368"/>
-            <a:ext cx="2578608" cy="146304"/>
-          </a:xfrm>
-          <a:prstGeom prst="rect">
-            <a:avLst/>
-          </a:prstGeom>
-          <a:noFill/>
-          <a:ln/>
-        </p:spPr>
-        <p:txBody>
-          <a:bodyPr wrap="square" lIns="254" tIns="254" rIns="254" bIns="254" rtlCol="0" anchor="ctr">
-            <a:normAutofit/>
-          </a:bodyPr>
-          <a:lstStyle/>
-          <a:p>
-            <a:pPr marL="0" indent="0" algn="ctr">
-              <a:buNone/>
-            </a:pPr>
-            <a:r>
-              <a:rPr lang="en-US" sz="750" dirty="0">
-                <a:solidFill>
-                  <a:srgbClr val="5B6475"/>
-                </a:solidFill>
-              </a:rPr>
-              <a:t>API · dispatcher · workers</a:t>
-            </a:r>
-            <a:endParaRPr lang="en-US" sz="750" dirty="0"/>
-          </a:p>
-        </p:txBody>
-      </p:sp>
-      <p:sp>
-        <p:nvSpPr>
-          <p:cNvPr id="24" name="Shape 22">
-            <a:extLst>
-              <a:ext uri="{FF2B5EF4-FFF2-40B4-BE49-F238E27FC236}">
-                <a16:creationId xmlns:a16="http://schemas.microsoft.com/office/drawing/2014/main" id="{1C1DF046-7342-CDB5-4C56-0E1F10DEF3CE}"/>
-              </a:ext>
-            </a:extLst>
-          </p:cNvPr>
-          <p:cNvSpPr/>
-          <p:nvPr/>
-        </p:nvSpPr>
-        <p:spPr>
-          <a:xfrm>
-            <a:off x="6656832" y="3703320"/>
-            <a:ext cx="2834640" cy="621792"/>
-          </a:xfrm>
-          <a:prstGeom prst="roundRect">
-            <a:avLst>
-              <a:gd name="adj" fmla="val 11765"/>
-            </a:avLst>
-          </a:prstGeom>
-          <a:solidFill>
-            <a:srgbClr val="EAF5FF"/>
-          </a:solidFill>
-          <a:ln w="13970">
-            <a:solidFill>
-              <a:srgbClr val="0B63E5"/>
-            </a:solidFill>
-            <a:prstDash val="solid"/>
-          </a:ln>
-        </p:spPr>
-        <p:txBody>
-          <a:bodyPr/>
-          <a:lstStyle/>
-          <a:p>
-            <a:endParaRPr lang="it-IT"/>
-          </a:p>
-        </p:txBody>
-      </p:sp>
-      <p:sp>
-        <p:nvSpPr>
-          <p:cNvPr id="25" name="Text 23">
-            <a:extLst>
-              <a:ext uri="{FF2B5EF4-FFF2-40B4-BE49-F238E27FC236}">
-                <a16:creationId xmlns:a16="http://schemas.microsoft.com/office/drawing/2014/main" id="{CBB665DE-96A2-E01F-7A80-461837EE0BCD}"/>
-              </a:ext>
-            </a:extLst>
-          </p:cNvPr>
-          <p:cNvSpPr/>
-          <p:nvPr/>
-        </p:nvSpPr>
-        <p:spPr>
-          <a:xfrm>
-            <a:off x="6766560" y="3794760"/>
-            <a:ext cx="2615184" cy="228600"/>
-          </a:xfrm>
-          <a:prstGeom prst="rect">
-            <a:avLst/>
-          </a:prstGeom>
-          <a:noFill/>
-          <a:ln/>
-        </p:spPr>
-        <p:txBody>
-          <a:bodyPr wrap="square" lIns="0" tIns="0" rIns="0" bIns="0" rtlCol="0" anchor="ctr">
-            <a:normAutofit/>
-          </a:bodyPr>
-          <a:lstStyle/>
-          <a:p>
-            <a:pPr marL="0" indent="0" algn="ctr">
-              <a:buNone/>
-            </a:pPr>
-            <a:r>
-              <a:rPr lang="en-US" sz="980" b="1" dirty="0">
-                <a:solidFill>
-                  <a:srgbClr val="07133D"/>
-                </a:solidFill>
-              </a:rPr>
-              <a:t>Private EKS nodes</a:t>
-            </a:r>
-            <a:endParaRPr lang="en-US" sz="980" dirty="0"/>
-          </a:p>
-        </p:txBody>
-      </p:sp>
-      <p:sp>
-        <p:nvSpPr>
-          <p:cNvPr id="26" name="Text 24">
-            <a:extLst>
-              <a:ext uri="{FF2B5EF4-FFF2-40B4-BE49-F238E27FC236}">
-                <a16:creationId xmlns:a16="http://schemas.microsoft.com/office/drawing/2014/main" id="{B2A5C4AC-0FB8-7246-9554-E8EA04BE13ED}"/>
-              </a:ext>
-            </a:extLst>
-          </p:cNvPr>
-          <p:cNvSpPr/>
-          <p:nvPr/>
-        </p:nvSpPr>
-        <p:spPr>
-          <a:xfrm>
-            <a:off x="6784848" y="4087368"/>
-            <a:ext cx="2578608" cy="146304"/>
-          </a:xfrm>
-          <a:prstGeom prst="rect">
-            <a:avLst/>
-          </a:prstGeom>
-          <a:noFill/>
-          <a:ln/>
-        </p:spPr>
-        <p:txBody>
-          <a:bodyPr wrap="square" lIns="254" tIns="254" rIns="254" bIns="254" rtlCol="0" anchor="ctr">
-            <a:normAutofit/>
-          </a:bodyPr>
-          <a:lstStyle/>
-          <a:p>
-            <a:pPr marL="0" indent="0" algn="ctr">
-              <a:buNone/>
-            </a:pPr>
-            <a:r>
-              <a:rPr lang="en-US" sz="750" dirty="0">
-                <a:solidFill>
-                  <a:srgbClr val="5B6475"/>
-                </a:solidFill>
-              </a:rPr>
-              <a:t>API · dispatcher · workers</a:t>
-            </a:r>
-            <a:endParaRPr lang="en-US" sz="750" dirty="0"/>
-          </a:p>
-        </p:txBody>
-      </p:sp>
-      <p:sp>
-        <p:nvSpPr>
-          <p:cNvPr id="27" name="Shape 25">
-            <a:extLst>
-              <a:ext uri="{FF2B5EF4-FFF2-40B4-BE49-F238E27FC236}">
-                <a16:creationId xmlns:a16="http://schemas.microsoft.com/office/drawing/2014/main" id="{742AFD85-3A37-CFA6-95CB-74D5E9CB15A0}"/>
-              </a:ext>
-            </a:extLst>
-          </p:cNvPr>
-          <p:cNvSpPr/>
-          <p:nvPr/>
-        </p:nvSpPr>
-        <p:spPr>
-          <a:xfrm>
-            <a:off x="2816352" y="4572000"/>
-            <a:ext cx="1828800" cy="411480"/>
-          </a:xfrm>
-          <a:prstGeom prst="roundRect">
-            <a:avLst>
-              <a:gd name="adj" fmla="val 17778"/>
-            </a:avLst>
-          </a:prstGeom>
-          <a:solidFill>
-            <a:srgbClr val="E8F7EE"/>
-          </a:solidFill>
-          <a:ln w="13970">
-            <a:solidFill>
-              <a:srgbClr val="0B9F63"/>
-            </a:solidFill>
-            <a:prstDash val="solid"/>
-          </a:ln>
-        </p:spPr>
-        <p:txBody>
-          <a:bodyPr/>
-          <a:lstStyle/>
-          <a:p>
-            <a:endParaRPr lang="it-IT"/>
-          </a:p>
-        </p:txBody>
-      </p:sp>
-      <p:sp>
-        <p:nvSpPr>
-          <p:cNvPr id="28" name="Text 26">
-            <a:extLst>
-              <a:ext uri="{FF2B5EF4-FFF2-40B4-BE49-F238E27FC236}">
-                <a16:creationId xmlns:a16="http://schemas.microsoft.com/office/drawing/2014/main" id="{1A46A097-748F-B52A-F38A-698F14D1CF6C}"/>
-              </a:ext>
-            </a:extLst>
-          </p:cNvPr>
-          <p:cNvSpPr/>
-          <p:nvPr/>
-        </p:nvSpPr>
-        <p:spPr>
-          <a:xfrm>
-            <a:off x="2926080" y="4690872"/>
-            <a:ext cx="1609344" cy="146304"/>
-          </a:xfrm>
-          <a:prstGeom prst="rect">
-            <a:avLst/>
-          </a:prstGeom>
-          <a:noFill/>
-          <a:ln/>
-        </p:spPr>
-        <p:txBody>
-          <a:bodyPr wrap="square" lIns="0" tIns="0" rIns="0" bIns="0" rtlCol="0" anchor="ctr">
-            <a:normAutofit/>
-          </a:bodyPr>
-          <a:lstStyle/>
-          <a:p>
-            <a:pPr marL="0" indent="0" algn="ctr">
-              <a:buNone/>
-            </a:pPr>
-            <a:r>
-              <a:rPr lang="en-US" sz="880" b="1" dirty="0">
-                <a:solidFill>
-                  <a:srgbClr val="07133D"/>
-                </a:solidFill>
-              </a:rPr>
-              <a:t>RDS primary</a:t>
-            </a:r>
-            <a:endParaRPr lang="en-US" sz="880" dirty="0"/>
-          </a:p>
-        </p:txBody>
-      </p:sp>
-      <p:sp>
-        <p:nvSpPr>
-          <p:cNvPr id="29" name="Shape 27">
-            <a:extLst>
-              <a:ext uri="{FF2B5EF4-FFF2-40B4-BE49-F238E27FC236}">
-                <a16:creationId xmlns:a16="http://schemas.microsoft.com/office/drawing/2014/main" id="{A02A41C6-0743-CCEE-0463-442A77DDE8B5}"/>
-              </a:ext>
-            </a:extLst>
-          </p:cNvPr>
-          <p:cNvSpPr/>
-          <p:nvPr/>
-        </p:nvSpPr>
-        <p:spPr>
-          <a:xfrm>
-            <a:off x="7662672" y="4572000"/>
-            <a:ext cx="1828800" cy="411480"/>
-          </a:xfrm>
-          <a:prstGeom prst="roundRect">
-            <a:avLst>
-              <a:gd name="adj" fmla="val 17778"/>
-            </a:avLst>
-          </a:prstGeom>
-          <a:solidFill>
-            <a:srgbClr val="E8F7EE"/>
-          </a:solidFill>
-          <a:ln w="13970">
-            <a:solidFill>
-              <a:srgbClr val="0B9F63"/>
-            </a:solidFill>
-            <a:prstDash val="solid"/>
-          </a:ln>
-        </p:spPr>
-        <p:txBody>
-          <a:bodyPr/>
-          <a:lstStyle/>
-          <a:p>
-            <a:endParaRPr lang="it-IT"/>
-          </a:p>
-        </p:txBody>
-      </p:sp>
-      <p:sp>
-        <p:nvSpPr>
-          <p:cNvPr id="30" name="Text 28">
-            <a:extLst>
-              <a:ext uri="{FF2B5EF4-FFF2-40B4-BE49-F238E27FC236}">
-                <a16:creationId xmlns:a16="http://schemas.microsoft.com/office/drawing/2014/main" id="{01222E46-30AF-1536-FE4F-9D8F2A634815}"/>
-              </a:ext>
-            </a:extLst>
-          </p:cNvPr>
-          <p:cNvSpPr/>
-          <p:nvPr/>
-        </p:nvSpPr>
-        <p:spPr>
-          <a:xfrm>
-            <a:off x="7772400" y="4690872"/>
-            <a:ext cx="1609344" cy="146304"/>
-          </a:xfrm>
-          <a:prstGeom prst="rect">
-            <a:avLst/>
-          </a:prstGeom>
-          <a:noFill/>
-          <a:ln/>
-        </p:spPr>
-        <p:txBody>
-          <a:bodyPr wrap="square" lIns="0" tIns="0" rIns="0" bIns="0" rtlCol="0" anchor="ctr">
-            <a:normAutofit/>
-          </a:bodyPr>
-          <a:lstStyle/>
-          <a:p>
-            <a:pPr marL="0" indent="0" algn="ctr">
-              <a:buNone/>
-            </a:pPr>
-            <a:r>
-              <a:rPr lang="en-US" sz="880" b="1" dirty="0">
-                <a:solidFill>
-                  <a:srgbClr val="07133D"/>
-                </a:solidFill>
-              </a:rPr>
-              <a:t>RDS standby</a:t>
-            </a:r>
-            <a:endParaRPr lang="en-US" sz="880" dirty="0"/>
-          </a:p>
-        </p:txBody>
-      </p:sp>
-      <p:sp>
-        <p:nvSpPr>
-          <p:cNvPr id="31" name="Shape 29">
-            <a:extLst>
-              <a:ext uri="{FF2B5EF4-FFF2-40B4-BE49-F238E27FC236}">
-                <a16:creationId xmlns:a16="http://schemas.microsoft.com/office/drawing/2014/main" id="{6AD747D7-446E-7294-36B9-64FF3616E1B1}"/>
-              </a:ext>
-            </a:extLst>
-          </p:cNvPr>
-          <p:cNvSpPr/>
-          <p:nvPr/>
-        </p:nvSpPr>
-        <p:spPr>
-          <a:xfrm>
-            <a:off x="5148072" y="5449824"/>
-            <a:ext cx="1828800" cy="384048"/>
-          </a:xfrm>
-          <a:prstGeom prst="roundRect">
-            <a:avLst>
-              <a:gd name="adj" fmla="val 19048"/>
-            </a:avLst>
-          </a:prstGeom>
-          <a:solidFill>
-            <a:srgbClr val="E8F7EE"/>
-          </a:solidFill>
-          <a:ln w="13970">
-            <a:solidFill>
-              <a:srgbClr val="0B9F63"/>
-            </a:solidFill>
-            <a:prstDash val="solid"/>
-          </a:ln>
-        </p:spPr>
-        <p:txBody>
-          <a:bodyPr/>
-          <a:lstStyle/>
-          <a:p>
-            <a:endParaRPr lang="it-IT"/>
-          </a:p>
-        </p:txBody>
-      </p:sp>
-      <p:sp>
-        <p:nvSpPr>
-          <p:cNvPr id="32" name="Text 30">
-            <a:extLst>
-              <a:ext uri="{FF2B5EF4-FFF2-40B4-BE49-F238E27FC236}">
-                <a16:creationId xmlns:a16="http://schemas.microsoft.com/office/drawing/2014/main" id="{A308A640-B3C7-7CF1-6D13-4ECA017A9DFC}"/>
-              </a:ext>
-            </a:extLst>
-          </p:cNvPr>
-          <p:cNvSpPr/>
-          <p:nvPr/>
-        </p:nvSpPr>
-        <p:spPr>
-          <a:xfrm>
-            <a:off x="5257800" y="5559552"/>
-            <a:ext cx="1609344" cy="146304"/>
-          </a:xfrm>
-          <a:prstGeom prst="rect">
-            <a:avLst/>
-          </a:prstGeom>
-          <a:noFill/>
-          <a:ln/>
-        </p:spPr>
-        <p:txBody>
-          <a:bodyPr wrap="square" lIns="0" tIns="0" rIns="0" bIns="0" rtlCol="0" anchor="ctr">
-            <a:normAutofit/>
-          </a:bodyPr>
-          <a:lstStyle/>
-          <a:p>
-            <a:pPr marL="0" indent="0" algn="ctr">
-              <a:buNone/>
-            </a:pPr>
-            <a:r>
-              <a:rPr lang="en-US" sz="840" b="1" dirty="0">
-                <a:solidFill>
-                  <a:srgbClr val="07133D"/>
-                </a:solidFill>
-              </a:rPr>
-              <a:t>S3 gateway endpoint</a:t>
-            </a:r>
-            <a:endParaRPr lang="en-US" sz="840" dirty="0"/>
-          </a:p>
-        </p:txBody>
-      </p:sp>
-      <p:sp>
-        <p:nvSpPr>
-          <p:cNvPr id="33" name="Shape 31">
-            <a:extLst>
-              <a:ext uri="{FF2B5EF4-FFF2-40B4-BE49-F238E27FC236}">
-                <a16:creationId xmlns:a16="http://schemas.microsoft.com/office/drawing/2014/main" id="{73DB22DE-F090-9B4A-9D02-C2B55EB7B6CD}"/>
-              </a:ext>
-            </a:extLst>
-          </p:cNvPr>
-          <p:cNvSpPr/>
-          <p:nvPr/>
-        </p:nvSpPr>
-        <p:spPr>
-          <a:xfrm>
-            <a:off x="548640" y="2990088"/>
-            <a:ext cx="1143000" cy="713232"/>
-          </a:xfrm>
-          <a:prstGeom prst="roundRect">
-            <a:avLst>
-              <a:gd name="adj" fmla="val 10256"/>
-            </a:avLst>
-          </a:prstGeom>
-          <a:solidFill>
-            <a:srgbClr val="EAF5FF"/>
-          </a:solidFill>
-          <a:ln w="13970">
-            <a:solidFill>
-              <a:srgbClr val="0B63E5"/>
-            </a:solidFill>
-            <a:prstDash val="solid"/>
-          </a:ln>
-        </p:spPr>
-        <p:txBody>
-          <a:bodyPr/>
-          <a:lstStyle/>
-          <a:p>
-            <a:endParaRPr lang="it-IT"/>
-          </a:p>
-        </p:txBody>
-      </p:sp>
-      <p:sp>
-        <p:nvSpPr>
-          <p:cNvPr id="34" name="Text 32">
-            <a:extLst>
-              <a:ext uri="{FF2B5EF4-FFF2-40B4-BE49-F238E27FC236}">
-                <a16:creationId xmlns:a16="http://schemas.microsoft.com/office/drawing/2014/main" id="{15A5DDD0-E853-5133-67CE-F5D9F18B4ADA}"/>
-              </a:ext>
-            </a:extLst>
-          </p:cNvPr>
-          <p:cNvSpPr/>
-          <p:nvPr/>
-        </p:nvSpPr>
-        <p:spPr>
-          <a:xfrm>
-            <a:off x="658368" y="3172968"/>
-            <a:ext cx="923544" cy="164592"/>
-          </a:xfrm>
-          <a:prstGeom prst="rect">
-            <a:avLst/>
-          </a:prstGeom>
-          <a:noFill/>
-          <a:ln/>
-        </p:spPr>
-        <p:txBody>
-          <a:bodyPr wrap="square" lIns="0" tIns="0" rIns="0" bIns="0" rtlCol="0" anchor="ctr">
-            <a:normAutofit fontScale="85000" lnSpcReduction="10000"/>
-          </a:bodyPr>
-          <a:lstStyle/>
-          <a:p>
-            <a:pPr marL="0" indent="0" algn="ctr">
-              <a:buNone/>
-            </a:pPr>
-            <a:r>
-              <a:rPr lang="en-US" sz="920" b="1" dirty="0">
-                <a:solidFill>
-                  <a:srgbClr val="07133D"/>
-                </a:solidFill>
-              </a:rPr>
-              <a:t>Internet / customer</a:t>
-            </a:r>
-            <a:endParaRPr lang="en-US" sz="920" dirty="0"/>
-          </a:p>
-        </p:txBody>
-      </p:sp>
-      <p:sp>
-        <p:nvSpPr>
-          <p:cNvPr id="35" name="Shape 33">
-            <a:extLst>
-              <a:ext uri="{FF2B5EF4-FFF2-40B4-BE49-F238E27FC236}">
-                <a16:creationId xmlns:a16="http://schemas.microsoft.com/office/drawing/2014/main" id="{C2D4D357-0E22-36E3-91BB-74AE6E177493}"/>
-              </a:ext>
-            </a:extLst>
-          </p:cNvPr>
-          <p:cNvSpPr/>
-          <p:nvPr/>
-        </p:nvSpPr>
-        <p:spPr>
-          <a:xfrm>
-            <a:off x="11064240" y="2496312"/>
-            <a:ext cx="914400" cy="713232"/>
-          </a:xfrm>
-          <a:prstGeom prst="roundRect">
-            <a:avLst>
-              <a:gd name="adj" fmla="val 10256"/>
-            </a:avLst>
-          </a:prstGeom>
-          <a:solidFill>
-            <a:srgbClr val="F1ECFF"/>
-          </a:solidFill>
-          <a:ln w="13970">
-            <a:solidFill>
-              <a:srgbClr val="673AB7"/>
-            </a:solidFill>
-            <a:prstDash val="solid"/>
-          </a:ln>
-        </p:spPr>
-        <p:txBody>
-          <a:bodyPr/>
-          <a:lstStyle/>
-          <a:p>
-            <a:endParaRPr lang="it-IT"/>
-          </a:p>
-        </p:txBody>
-      </p:sp>
-      <p:sp>
-        <p:nvSpPr>
-          <p:cNvPr id="36" name="Text 34">
-            <a:extLst>
-              <a:ext uri="{FF2B5EF4-FFF2-40B4-BE49-F238E27FC236}">
-                <a16:creationId xmlns:a16="http://schemas.microsoft.com/office/drawing/2014/main" id="{25ECBC37-80C9-A7FA-3BA0-B1D89A958EE6}"/>
-              </a:ext>
-            </a:extLst>
-          </p:cNvPr>
-          <p:cNvSpPr/>
-          <p:nvPr/>
-        </p:nvSpPr>
-        <p:spPr>
-          <a:xfrm>
-            <a:off x="11173968" y="2587752"/>
-            <a:ext cx="694944" cy="228600"/>
-          </a:xfrm>
-          <a:prstGeom prst="rect">
-            <a:avLst/>
-          </a:prstGeom>
-          <a:noFill/>
-          <a:ln/>
-        </p:spPr>
-        <p:txBody>
-          <a:bodyPr wrap="square" lIns="0" tIns="0" rIns="0" bIns="0" rtlCol="0" anchor="ctr">
-            <a:normAutofit/>
-          </a:bodyPr>
-          <a:lstStyle/>
-          <a:p>
-            <a:pPr marL="0" indent="0" algn="ctr">
-              <a:buNone/>
-            </a:pPr>
-            <a:r>
-              <a:rPr lang="en-US" sz="880" b="1" dirty="0">
-                <a:solidFill>
-                  <a:srgbClr val="07133D"/>
-                </a:solidFill>
-              </a:rPr>
-              <a:t>Providers</a:t>
-            </a:r>
-            <a:endParaRPr lang="en-US" sz="880" dirty="0"/>
-          </a:p>
-        </p:txBody>
-      </p:sp>
-      <p:sp>
-        <p:nvSpPr>
-          <p:cNvPr id="37" name="Text 35">
-            <a:extLst>
-              <a:ext uri="{FF2B5EF4-FFF2-40B4-BE49-F238E27FC236}">
-                <a16:creationId xmlns:a16="http://schemas.microsoft.com/office/drawing/2014/main" id="{9270DBF8-C0AB-8F7E-A294-693B83DDE1AA}"/>
-              </a:ext>
-            </a:extLst>
-          </p:cNvPr>
-          <p:cNvSpPr/>
-          <p:nvPr/>
-        </p:nvSpPr>
-        <p:spPr>
-          <a:xfrm>
-            <a:off x="11192256" y="2880360"/>
-            <a:ext cx="658368" cy="237744"/>
-          </a:xfrm>
-          <a:prstGeom prst="rect">
-            <a:avLst/>
-          </a:prstGeom>
-          <a:noFill/>
-          <a:ln/>
-        </p:spPr>
-        <p:txBody>
-          <a:bodyPr wrap="square" lIns="254" tIns="254" rIns="254" bIns="254" rtlCol="0" anchor="ctr">
-            <a:normAutofit/>
-          </a:bodyPr>
-          <a:lstStyle/>
-          <a:p>
-            <a:pPr marL="0" indent="0" algn="ctr">
-              <a:buNone/>
-            </a:pPr>
-            <a:r>
-              <a:rPr lang="en-US" sz="700" dirty="0">
-                <a:solidFill>
-                  <a:srgbClr val="5B6475"/>
-                </a:solidFill>
-              </a:rPr>
-              <a:t>AI / business</a:t>
-            </a:r>
-            <a:endParaRPr lang="en-US" sz="700" dirty="0"/>
-          </a:p>
-        </p:txBody>
-      </p:sp>
-      <p:sp>
-        <p:nvSpPr>
-          <p:cNvPr id="38" name="Shape 36">
-            <a:extLst>
-              <a:ext uri="{FF2B5EF4-FFF2-40B4-BE49-F238E27FC236}">
-                <a16:creationId xmlns:a16="http://schemas.microsoft.com/office/drawing/2014/main" id="{60401B4E-6228-D21D-18CB-BD0006F6D0C6}"/>
-              </a:ext>
-            </a:extLst>
-          </p:cNvPr>
-          <p:cNvSpPr/>
-          <p:nvPr/>
-        </p:nvSpPr>
-        <p:spPr>
-          <a:xfrm>
-            <a:off x="11064240" y="4892040"/>
-            <a:ext cx="914400" cy="502920"/>
-          </a:xfrm>
-          <a:prstGeom prst="roundRect">
-            <a:avLst>
-              <a:gd name="adj" fmla="val 14545"/>
-            </a:avLst>
-          </a:prstGeom>
-          <a:solidFill>
-            <a:srgbClr val="E8F7EE"/>
-          </a:solidFill>
-          <a:ln w="13970">
-            <a:solidFill>
-              <a:srgbClr val="0B9F63"/>
-            </a:solidFill>
-            <a:prstDash val="solid"/>
-          </a:ln>
-        </p:spPr>
-        <p:txBody>
-          <a:bodyPr/>
-          <a:lstStyle/>
-          <a:p>
-            <a:endParaRPr lang="it-IT"/>
-          </a:p>
-        </p:txBody>
-      </p:sp>
-      <p:sp>
-        <p:nvSpPr>
-          <p:cNvPr id="39" name="Text 37">
-            <a:extLst>
-              <a:ext uri="{FF2B5EF4-FFF2-40B4-BE49-F238E27FC236}">
-                <a16:creationId xmlns:a16="http://schemas.microsoft.com/office/drawing/2014/main" id="{86EFBBD1-07F1-DD58-5625-847C64989808}"/>
-              </a:ext>
-            </a:extLst>
-          </p:cNvPr>
-          <p:cNvSpPr/>
-          <p:nvPr/>
-        </p:nvSpPr>
-        <p:spPr>
-          <a:xfrm>
-            <a:off x="11173968" y="4983480"/>
-            <a:ext cx="694944" cy="228600"/>
-          </a:xfrm>
-          <a:prstGeom prst="rect">
-            <a:avLst/>
-          </a:prstGeom>
-          <a:noFill/>
-          <a:ln/>
-        </p:spPr>
-        <p:txBody>
-          <a:bodyPr wrap="square" lIns="0" tIns="0" rIns="0" bIns="0" rtlCol="0" anchor="ctr">
-            <a:normAutofit/>
-          </a:bodyPr>
-          <a:lstStyle/>
-          <a:p>
-            <a:pPr marL="0" indent="0" algn="ctr">
-              <a:buNone/>
-            </a:pPr>
-            <a:r>
-              <a:rPr lang="en-US" sz="880" b="1" dirty="0">
-                <a:solidFill>
-                  <a:srgbClr val="07133D"/>
-                </a:solidFill>
-              </a:rPr>
-              <a:t>S3</a:t>
-            </a:r>
-            <a:endParaRPr lang="en-US" sz="880" dirty="0"/>
-          </a:p>
-        </p:txBody>
-      </p:sp>
-      <p:sp>
-        <p:nvSpPr>
-          <p:cNvPr id="40" name="Text 38">
-            <a:extLst>
-              <a:ext uri="{FF2B5EF4-FFF2-40B4-BE49-F238E27FC236}">
-                <a16:creationId xmlns:a16="http://schemas.microsoft.com/office/drawing/2014/main" id="{D8CD5158-96F0-8117-6CBE-33E95CA707E7}"/>
-              </a:ext>
-            </a:extLst>
-          </p:cNvPr>
-          <p:cNvSpPr/>
-          <p:nvPr/>
-        </p:nvSpPr>
-        <p:spPr>
-          <a:xfrm>
-            <a:off x="11192256" y="5276088"/>
-            <a:ext cx="658368" cy="27432"/>
-          </a:xfrm>
-          <a:prstGeom prst="rect">
-            <a:avLst/>
-          </a:prstGeom>
-          <a:noFill/>
-          <a:ln/>
-        </p:spPr>
-        <p:txBody>
-          <a:bodyPr wrap="square" lIns="254" tIns="254" rIns="254" bIns="254" rtlCol="0" anchor="ctr">
-            <a:normAutofit fontScale="32500" lnSpcReduction="20000"/>
-          </a:bodyPr>
-          <a:lstStyle/>
-          <a:p>
-            <a:pPr marL="0" indent="0" algn="ctr">
-              <a:buNone/>
-            </a:pPr>
-            <a:r>
-              <a:rPr lang="en-US" sz="700" dirty="0">
-                <a:solidFill>
-                  <a:srgbClr val="5B6475"/>
-                </a:solidFill>
-              </a:rPr>
-              <a:t>regional</a:t>
-            </a:r>
-            <a:endParaRPr lang="en-US" sz="700" dirty="0"/>
-          </a:p>
-        </p:txBody>
-      </p:sp>
-      <p:sp>
-        <p:nvSpPr>
-          <p:cNvPr id="41" name="Shape 39">
-            <a:extLst>
-              <a:ext uri="{FF2B5EF4-FFF2-40B4-BE49-F238E27FC236}">
-                <a16:creationId xmlns:a16="http://schemas.microsoft.com/office/drawing/2014/main" id="{4F3222A7-C3B2-D7D7-7E2C-3E0080B0FE2E}"/>
-              </a:ext>
-            </a:extLst>
-          </p:cNvPr>
-          <p:cNvSpPr/>
-          <p:nvPr/>
-        </p:nvSpPr>
-        <p:spPr>
-          <a:xfrm>
-            <a:off x="1691640" y="3346704"/>
-            <a:ext cx="1124712" cy="0"/>
-          </a:xfrm>
-          <a:prstGeom prst="line">
-            <a:avLst/>
-          </a:prstGeom>
-          <a:noFill/>
-          <a:ln w="17780">
-            <a:solidFill>
-              <a:srgbClr val="0B63E5"/>
-            </a:solidFill>
-            <a:prstDash val="solid"/>
-            <a:tailEnd type="triangle"/>
-          </a:ln>
-        </p:spPr>
-        <p:txBody>
-          <a:bodyPr/>
-          <a:lstStyle/>
-          <a:p>
-            <a:endParaRPr lang="it-IT"/>
-          </a:p>
-        </p:txBody>
-      </p:sp>
-      <p:sp>
-        <p:nvSpPr>
-          <p:cNvPr id="42" name="Shape 40">
-            <a:extLst>
-              <a:ext uri="{FF2B5EF4-FFF2-40B4-BE49-F238E27FC236}">
-                <a16:creationId xmlns:a16="http://schemas.microsoft.com/office/drawing/2014/main" id="{59843842-2E56-027F-5C51-9C6719C67E45}"/>
-              </a:ext>
-            </a:extLst>
-          </p:cNvPr>
-          <p:cNvSpPr/>
-          <p:nvPr/>
-        </p:nvSpPr>
-        <p:spPr>
-          <a:xfrm>
-            <a:off x="3547872" y="3282696"/>
-            <a:ext cx="521208" cy="420624"/>
-          </a:xfrm>
-          <a:prstGeom prst="line">
-            <a:avLst/>
-          </a:prstGeom>
-          <a:noFill/>
-          <a:ln w="12700">
-            <a:solidFill>
-              <a:srgbClr val="0B63E5"/>
-            </a:solidFill>
-            <a:prstDash val="solid"/>
-            <a:tailEnd type="triangle"/>
-          </a:ln>
-        </p:spPr>
-        <p:txBody>
-          <a:bodyPr/>
-          <a:lstStyle/>
-          <a:p>
-            <a:endParaRPr lang="it-IT"/>
-          </a:p>
-        </p:txBody>
-      </p:sp>
-      <p:sp>
-        <p:nvSpPr>
-          <p:cNvPr id="43" name="Shape 41">
-            <a:extLst>
-              <a:ext uri="{FF2B5EF4-FFF2-40B4-BE49-F238E27FC236}">
-                <a16:creationId xmlns:a16="http://schemas.microsoft.com/office/drawing/2014/main" id="{44625EED-865D-44CC-523E-DB493C85F25D}"/>
-              </a:ext>
-            </a:extLst>
-          </p:cNvPr>
-          <p:cNvSpPr/>
-          <p:nvPr/>
-        </p:nvSpPr>
-        <p:spPr>
-          <a:xfrm>
-            <a:off x="7772400" y="3282696"/>
-            <a:ext cx="320040" cy="420624"/>
-          </a:xfrm>
-          <a:prstGeom prst="line">
-            <a:avLst/>
-          </a:prstGeom>
-          <a:noFill/>
-          <a:ln w="12700">
-            <a:solidFill>
-              <a:srgbClr val="0B63E5"/>
-            </a:solidFill>
-            <a:prstDash val="solid"/>
-            <a:tailEnd type="triangle"/>
-          </a:ln>
-        </p:spPr>
-        <p:txBody>
-          <a:bodyPr/>
-          <a:lstStyle/>
-          <a:p>
-            <a:endParaRPr lang="it-IT"/>
-          </a:p>
-        </p:txBody>
-      </p:sp>
-      <p:sp>
-        <p:nvSpPr>
-          <p:cNvPr id="44" name="Shape 42">
-            <a:extLst>
-              <a:ext uri="{FF2B5EF4-FFF2-40B4-BE49-F238E27FC236}">
-                <a16:creationId xmlns:a16="http://schemas.microsoft.com/office/drawing/2014/main" id="{4FC92486-08E8-A13B-BE51-9E9DE40EF0C3}"/>
-              </a:ext>
-            </a:extLst>
-          </p:cNvPr>
-          <p:cNvSpPr/>
-          <p:nvPr/>
-        </p:nvSpPr>
-        <p:spPr>
-          <a:xfrm>
-            <a:off x="4206240" y="4325112"/>
-            <a:ext cx="0" cy="246888"/>
-          </a:xfrm>
-          <a:prstGeom prst="line">
-            <a:avLst/>
-          </a:prstGeom>
-          <a:noFill/>
-          <a:ln w="12700">
-            <a:solidFill>
-              <a:srgbClr val="0B9F63"/>
-            </a:solidFill>
-            <a:prstDash val="solid"/>
-            <a:tailEnd type="triangle"/>
-          </a:ln>
-        </p:spPr>
-        <p:txBody>
-          <a:bodyPr/>
-          <a:lstStyle/>
-          <a:p>
-            <a:endParaRPr lang="it-IT"/>
-          </a:p>
-        </p:txBody>
-      </p:sp>
-      <p:sp>
-        <p:nvSpPr>
-          <p:cNvPr id="45" name="Shape 43">
-            <a:extLst>
-              <a:ext uri="{FF2B5EF4-FFF2-40B4-BE49-F238E27FC236}">
-                <a16:creationId xmlns:a16="http://schemas.microsoft.com/office/drawing/2014/main" id="{FA6FDC81-62F6-8662-9B45-7E10EEB08BEC}"/>
-              </a:ext>
-            </a:extLst>
-          </p:cNvPr>
-          <p:cNvSpPr/>
-          <p:nvPr/>
-        </p:nvSpPr>
-        <p:spPr>
-          <a:xfrm>
-            <a:off x="8092440" y="4325112"/>
-            <a:ext cx="484632" cy="246888"/>
-          </a:xfrm>
-          <a:prstGeom prst="line">
-            <a:avLst/>
-          </a:prstGeom>
-          <a:noFill/>
-          <a:ln w="12700">
-            <a:solidFill>
-              <a:srgbClr val="0B9F63"/>
-            </a:solidFill>
-            <a:prstDash val="solid"/>
-            <a:tailEnd type="triangle"/>
-          </a:ln>
-        </p:spPr>
-        <p:txBody>
-          <a:bodyPr/>
-          <a:lstStyle/>
-          <a:p>
-            <a:endParaRPr lang="it-IT"/>
-          </a:p>
-        </p:txBody>
-      </p:sp>
-      <p:sp>
-        <p:nvSpPr>
-          <p:cNvPr id="46" name="Shape 44">
-            <a:extLst>
-              <a:ext uri="{FF2B5EF4-FFF2-40B4-BE49-F238E27FC236}">
-                <a16:creationId xmlns:a16="http://schemas.microsoft.com/office/drawing/2014/main" id="{10A85717-6C90-9F06-6D66-335BD517E731}"/>
-              </a:ext>
-            </a:extLst>
-          </p:cNvPr>
-          <p:cNvSpPr/>
-          <p:nvPr/>
-        </p:nvSpPr>
-        <p:spPr>
-          <a:xfrm>
-            <a:off x="5650992" y="4325112"/>
-            <a:ext cx="411480" cy="1124712"/>
-          </a:xfrm>
-          <a:prstGeom prst="line">
-            <a:avLst/>
-          </a:prstGeom>
-          <a:noFill/>
-          <a:ln w="12700">
-            <a:solidFill>
-              <a:srgbClr val="0B9F63"/>
-            </a:solidFill>
-            <a:prstDash val="solid"/>
-            <a:tailEnd type="triangle"/>
-          </a:ln>
-        </p:spPr>
-        <p:txBody>
-          <a:bodyPr/>
-          <a:lstStyle/>
-          <a:p>
-            <a:endParaRPr lang="it-IT"/>
-          </a:p>
-        </p:txBody>
-      </p:sp>
-      <p:sp>
-        <p:nvSpPr>
-          <p:cNvPr id="47" name="Shape 45">
-            <a:extLst>
-              <a:ext uri="{FF2B5EF4-FFF2-40B4-BE49-F238E27FC236}">
-                <a16:creationId xmlns:a16="http://schemas.microsoft.com/office/drawing/2014/main" id="{3FB0CF42-886A-E732-C570-61199B67964E}"/>
-              </a:ext>
-            </a:extLst>
-          </p:cNvPr>
-          <p:cNvSpPr/>
-          <p:nvPr/>
-        </p:nvSpPr>
-        <p:spPr>
-          <a:xfrm>
-            <a:off x="6976872" y="5449824"/>
-            <a:ext cx="4087368" cy="0"/>
-          </a:xfrm>
-          <a:prstGeom prst="line">
-            <a:avLst/>
-          </a:prstGeom>
-          <a:noFill/>
-          <a:ln w="12700">
-            <a:solidFill>
-              <a:srgbClr val="0B9F63"/>
-            </a:solidFill>
-            <a:prstDash val="solid"/>
-            <a:tailEnd type="triangle"/>
-          </a:ln>
-        </p:spPr>
-        <p:txBody>
-          <a:bodyPr/>
-          <a:lstStyle/>
-          <a:p>
-            <a:endParaRPr lang="it-IT"/>
-          </a:p>
-        </p:txBody>
-      </p:sp>
-      <p:sp>
-        <p:nvSpPr>
-          <p:cNvPr id="48" name="Shape 46">
-            <a:extLst>
-              <a:ext uri="{FF2B5EF4-FFF2-40B4-BE49-F238E27FC236}">
-                <a16:creationId xmlns:a16="http://schemas.microsoft.com/office/drawing/2014/main" id="{3053114C-4FBF-1604-0AFE-3882C6629842}"/>
-              </a:ext>
-            </a:extLst>
-          </p:cNvPr>
-          <p:cNvSpPr/>
-          <p:nvPr/>
-        </p:nvSpPr>
-        <p:spPr>
-          <a:xfrm>
-            <a:off x="9491472" y="3035808"/>
-            <a:ext cx="1572768" cy="0"/>
-          </a:xfrm>
-          <a:prstGeom prst="line">
-            <a:avLst/>
-          </a:prstGeom>
-          <a:noFill/>
-          <a:ln w="13970">
-            <a:solidFill>
-              <a:srgbClr val="673AB7"/>
-            </a:solidFill>
-            <a:prstDash val="solid"/>
-            <a:tailEnd type="triangle"/>
-          </a:ln>
-        </p:spPr>
-        <p:txBody>
-          <a:bodyPr/>
-          <a:lstStyle/>
-          <a:p>
-            <a:endParaRPr lang="it-IT"/>
-          </a:p>
-        </p:txBody>
-      </p:sp>
-      <p:sp>
-        <p:nvSpPr>
-          <p:cNvPr id="49" name="Shape 47">
-            <a:extLst>
-              <a:ext uri="{FF2B5EF4-FFF2-40B4-BE49-F238E27FC236}">
-                <a16:creationId xmlns:a16="http://schemas.microsoft.com/office/drawing/2014/main" id="{DD2FEA92-F6C3-453C-2571-AB9A0F75A605}"/>
-              </a:ext>
-            </a:extLst>
-          </p:cNvPr>
-          <p:cNvSpPr/>
-          <p:nvPr/>
-        </p:nvSpPr>
-        <p:spPr>
-          <a:xfrm>
-            <a:off x="11064240" y="3035808"/>
-            <a:ext cx="0" cy="0"/>
-          </a:xfrm>
-          <a:prstGeom prst="line">
-            <a:avLst/>
-          </a:prstGeom>
-          <a:noFill/>
-          <a:ln w="12700">
-            <a:solidFill>
-              <a:srgbClr val="F28A00"/>
-            </a:solidFill>
-            <a:prstDash val="solid"/>
-            <a:headEnd type="triangle"/>
-          </a:ln>
-        </p:spPr>
-        <p:txBody>
-          <a:bodyPr/>
-          <a:lstStyle/>
-          <a:p>
-            <a:endParaRPr lang="it-IT"/>
-          </a:p>
-        </p:txBody>
-      </p:sp>
-      <p:sp>
-        <p:nvSpPr>
-          <p:cNvPr id="50" name="Text 48">
-            <a:extLst>
-              <a:ext uri="{FF2B5EF4-FFF2-40B4-BE49-F238E27FC236}">
-                <a16:creationId xmlns:a16="http://schemas.microsoft.com/office/drawing/2014/main" id="{1E52C7A8-FA31-76C0-DE21-E48F6D82CC94}"/>
-              </a:ext>
-            </a:extLst>
-          </p:cNvPr>
-          <p:cNvSpPr/>
-          <p:nvPr/>
-        </p:nvSpPr>
-        <p:spPr>
-          <a:xfrm>
-            <a:off x="2450592" y="5742432"/>
-            <a:ext cx="3840480" cy="146304"/>
-          </a:xfrm>
-          <a:prstGeom prst="rect">
-            <a:avLst/>
-          </a:prstGeom>
-          <a:noFill/>
-          <a:ln/>
-        </p:spPr>
-        <p:txBody>
-          <a:bodyPr wrap="square" lIns="254" tIns="254" rIns="254" bIns="254" rtlCol="0" anchor="t">
-            <a:normAutofit/>
-          </a:bodyPr>
-          <a:lstStyle/>
-          <a:p>
-            <a:pPr marL="0" indent="0" algn="l">
-              <a:buNone/>
-            </a:pPr>
-            <a:r>
-              <a:rPr lang="en-US" sz="850" dirty="0">
-                <a:solidFill>
-                  <a:srgbClr val="5B6475"/>
-                </a:solidFill>
-                <a:latin typeface="Aptos" pitchFamily="34" charset="0"/>
-                <a:ea typeface="Aptos" pitchFamily="34" charset="-122"/>
-                <a:cs typeface="Aptos" pitchFamily="34" charset="-120"/>
-              </a:rPr>
-              <a:t>WAF associated with ALB, not an appliance inside the subnet.</a:t>
-            </a:r>
-            <a:endParaRPr lang="en-US" sz="850" dirty="0"/>
-          </a:p>
-        </p:txBody>
-      </p:sp>
-      <p:sp>
-        <p:nvSpPr>
-          <p:cNvPr id="51" name="Text 49">
-            <a:extLst>
-              <a:ext uri="{FF2B5EF4-FFF2-40B4-BE49-F238E27FC236}">
-                <a16:creationId xmlns:a16="http://schemas.microsoft.com/office/drawing/2014/main" id="{B3F68560-21C1-4B2D-1714-69E7252D3FAC}"/>
-              </a:ext>
-            </a:extLst>
-          </p:cNvPr>
-          <p:cNvSpPr/>
-          <p:nvPr/>
-        </p:nvSpPr>
-        <p:spPr>
-          <a:xfrm>
-            <a:off x="6903720" y="5742432"/>
-            <a:ext cx="3657600" cy="146304"/>
-          </a:xfrm>
-          <a:prstGeom prst="rect">
-            <a:avLst/>
-          </a:prstGeom>
-          <a:noFill/>
-          <a:ln/>
-        </p:spPr>
-        <p:txBody>
-          <a:bodyPr wrap="square" lIns="254" tIns="254" rIns="254" bIns="254" rtlCol="0" anchor="t">
-            <a:normAutofit/>
-          </a:bodyPr>
-          <a:lstStyle/>
-          <a:p>
-            <a:pPr marL="0" indent="0" algn="r">
-              <a:buNone/>
-            </a:pPr>
-            <a:r>
-              <a:rPr lang="en-US" sz="850" dirty="0">
-                <a:solidFill>
-                  <a:srgbClr val="5B6475"/>
-                </a:solidFill>
-                <a:latin typeface="Aptos" pitchFamily="34" charset="0"/>
-                <a:ea typeface="Aptos" pitchFamily="34" charset="-122"/>
-                <a:cs typeface="Aptos" pitchFamily="34" charset="-120"/>
-              </a:rPr>
-              <a:t>SQS / Step Functions are managed regional services outside VPC subnets.</a:t>
-            </a:r>
-            <a:endParaRPr lang="en-US" sz="850" dirty="0"/>
-          </a:p>
-        </p:txBody>
-      </p:sp>
-      <p:sp>
-        <p:nvSpPr>
-          <p:cNvPr id="52" name="Text 0">
-            <a:extLst>
-              <a:ext uri="{FF2B5EF4-FFF2-40B4-BE49-F238E27FC236}">
-                <a16:creationId xmlns:a16="http://schemas.microsoft.com/office/drawing/2014/main" id="{83F89F5E-61DF-7BE6-3B36-F710B516A46F}"/>
-              </a:ext>
-            </a:extLst>
-          </p:cNvPr>
-          <p:cNvSpPr/>
-          <p:nvPr/>
-        </p:nvSpPr>
-        <p:spPr>
-          <a:xfrm>
-            <a:off x="502920" y="219456"/>
-            <a:ext cx="2194560" cy="201168"/>
-          </a:xfrm>
-          <a:prstGeom prst="rect">
-            <a:avLst/>
-          </a:prstGeom>
-          <a:noFill/>
-          <a:ln/>
-        </p:spPr>
-        <p:txBody>
-          <a:bodyPr wrap="square" lIns="0" tIns="0" rIns="0" bIns="0" rtlCol="0" anchor="ctr"/>
-          <a:lstStyle/>
-          <a:p>
-            <a:pPr marL="0" indent="0">
-              <a:buNone/>
-            </a:pPr>
-            <a:r>
-              <a:rPr lang="en-US" sz="780" b="1" dirty="0">
-                <a:solidFill>
-                  <a:srgbClr val="0B63E5"/>
-                </a:solidFill>
-                <a:latin typeface="Aptos" pitchFamily="34" charset="0"/>
-                <a:ea typeface="Aptos" pitchFamily="34" charset="-122"/>
-                <a:cs typeface="Aptos" pitchFamily="34" charset="-120"/>
-              </a:rPr>
-              <a:t>MERIDIAN TELECOM</a:t>
-            </a:r>
-            <a:endParaRPr lang="en-US" sz="780" dirty="0"/>
-          </a:p>
-        </p:txBody>
-      </p:sp>
-    </p:spTree>
-    <p:extLst>
-      <p:ext uri="{BB962C8B-B14F-4D97-AF65-F5344CB8AC3E}">
-        <p14:creationId xmlns:p14="http://schemas.microsoft.com/office/powerpoint/2010/main" val="3785727049"/>
-      </p:ext>
-    </p:extLst>
-  </p:cSld>
-  <p:clrMapOvr>
-    <a:masterClrMapping/>
-  </p:clrMapOvr>
-</p:sld>
-</file>
-
-<file path=ppt/slides/slide23.xml><?xml version="1.0" encoding="utf-8"?>
-<p:sld xmlns:a="http://schemas.openxmlformats.org/drawingml/2006/main" xmlns:r="http://schemas.openxmlformats.org/officeDocument/2006/relationships" xmlns:p="http://schemas.openxmlformats.org/presentationml/2006/main" show="0">
   <p:cSld name="Slide 12">
     <p:bg>
       <p:bgPr>
@@ -21221,7 +19032,7 @@
 </p:sld>
 </file>
 
-<file path=ppt/slides/slide24.xml><?xml version="1.0" encoding="utf-8"?>
+<file path=ppt/slides/slide23.xml><?xml version="1.0" encoding="utf-8"?>
 <p:sld xmlns:a="http://schemas.openxmlformats.org/drawingml/2006/main" xmlns:r="http://schemas.openxmlformats.org/officeDocument/2006/relationships" xmlns:p="http://schemas.openxmlformats.org/presentationml/2006/main" show="0">
   <p:cSld name="Slide 13">
     <p:bg>
@@ -23185,7 +20996,7 @@
 </p:sld>
 </file>
 
-<file path=ppt/slides/slide25.xml><?xml version="1.0" encoding="utf-8"?>
+<file path=ppt/slides/slide24.xml><?xml version="1.0" encoding="utf-8"?>
 <p:sld xmlns:a="http://schemas.openxmlformats.org/drawingml/2006/main" xmlns:r="http://schemas.openxmlformats.org/officeDocument/2006/relationships" xmlns:p="http://schemas.openxmlformats.org/presentationml/2006/main" show="0">
   <p:cSld name="Slide 14">
     <p:bg>
@@ -24855,7 +22666,7 @@
 </p:sld>
 </file>
 
-<file path=ppt/slides/slide26.xml><?xml version="1.0" encoding="utf-8"?>
+<file path=ppt/slides/slide25.xml><?xml version="1.0" encoding="utf-8"?>
 <p:sld xmlns:a="http://schemas.openxmlformats.org/drawingml/2006/main" xmlns:r="http://schemas.openxmlformats.org/officeDocument/2006/relationships" xmlns:p="http://schemas.openxmlformats.org/presentationml/2006/main" show="0">
   <p:cSld name="Slide 15">
     <p:bg>

--- a/presentation/meridian_mattia_vincenzi.pptx
+++ b/presentation/meridian_mattia_vincenzi.pptx
@@ -5,7 +5,7 @@
     <p:sldMasterId id="2147483648" r:id="rId1"/>
   </p:sldMasterIdLst>
   <p:notesMasterIdLst>
-    <p:notesMasterId r:id="rId27"/>
+    <p:notesMasterId r:id="rId28"/>
   </p:notesMasterIdLst>
   <p:sldIdLst>
     <p:sldId id="271" r:id="rId2"/>
@@ -21,18 +21,19 @@
     <p:sldId id="280" r:id="rId12"/>
     <p:sldId id="260" r:id="rId13"/>
     <p:sldId id="261" r:id="rId14"/>
-    <p:sldId id="281" r:id="rId15"/>
-    <p:sldId id="262" r:id="rId16"/>
-    <p:sldId id="263" r:id="rId17"/>
-    <p:sldId id="264" r:id="rId18"/>
-    <p:sldId id="265" r:id="rId19"/>
-    <p:sldId id="266" r:id="rId20"/>
-    <p:sldId id="284" r:id="rId21"/>
-    <p:sldId id="285" r:id="rId22"/>
-    <p:sldId id="267" r:id="rId23"/>
-    <p:sldId id="268" r:id="rId24"/>
-    <p:sldId id="269" r:id="rId25"/>
-    <p:sldId id="270" r:id="rId26"/>
+    <p:sldId id="286" r:id="rId15"/>
+    <p:sldId id="281" r:id="rId16"/>
+    <p:sldId id="262" r:id="rId17"/>
+    <p:sldId id="263" r:id="rId18"/>
+    <p:sldId id="264" r:id="rId19"/>
+    <p:sldId id="265" r:id="rId20"/>
+    <p:sldId id="266" r:id="rId21"/>
+    <p:sldId id="284" r:id="rId22"/>
+    <p:sldId id="285" r:id="rId23"/>
+    <p:sldId id="267" r:id="rId24"/>
+    <p:sldId id="268" r:id="rId25"/>
+    <p:sldId id="269" r:id="rId26"/>
+    <p:sldId id="270" r:id="rId27"/>
   </p:sldIdLst>
   <p:sldSz cx="12192000" cy="6858000"/>
   <p:notesSz cx="6858000" cy="12192000"/>
@@ -728,6 +729,117 @@
         <p:cNvPr id="1" name="">
           <a:extLst>
             <a:ext uri="{FF2B5EF4-FFF2-40B4-BE49-F238E27FC236}">
+              <a16:creationId xmlns:a16="http://schemas.microsoft.com/office/drawing/2014/main" id="{B11A5DEA-FA65-185D-2C4D-E63F73E76A14}"/>
+            </a:ext>
+          </a:extLst>
+        </p:cNvPr>
+        <p:cNvGrpSpPr/>
+        <p:nvPr/>
+      </p:nvGrpSpPr>
+      <p:grpSpPr>
+        <a:xfrm>
+          <a:off x="0" y="0"/>
+          <a:ext cx="0" cy="0"/>
+          <a:chOff x="0" y="0"/>
+          <a:chExt cx="0" cy="0"/>
+        </a:xfrm>
+      </p:grpSpPr>
+      <p:sp>
+        <p:nvSpPr>
+          <p:cNvPr id="2" name="Slide Image Placeholder 1">
+            <a:extLst>
+              <a:ext uri="{FF2B5EF4-FFF2-40B4-BE49-F238E27FC236}">
+                <a16:creationId xmlns:a16="http://schemas.microsoft.com/office/drawing/2014/main" id="{9502FDE1-C6F3-843B-4CA8-46F221595A30}"/>
+              </a:ext>
+            </a:extLst>
+          </p:cNvPr>
+          <p:cNvSpPr>
+            <a:spLocks noGrp="1" noRot="1" noChangeAspect="1"/>
+          </p:cNvSpPr>
+          <p:nvPr>
+            <p:ph type="sldImg"/>
+          </p:nvPr>
+        </p:nvSpPr>
+        <p:spPr/>
+      </p:sp>
+      <p:sp>
+        <p:nvSpPr>
+          <p:cNvPr id="3" name="Notes Placeholder 2">
+            <a:extLst>
+              <a:ext uri="{FF2B5EF4-FFF2-40B4-BE49-F238E27FC236}">
+                <a16:creationId xmlns:a16="http://schemas.microsoft.com/office/drawing/2014/main" id="{3B5035C3-A7A8-C24B-FDBC-8870DD10F22D}"/>
+              </a:ext>
+            </a:extLst>
+          </p:cNvPr>
+          <p:cNvSpPr>
+            <a:spLocks noGrp="1"/>
+          </p:cNvSpPr>
+          <p:nvPr>
+            <p:ph type="body" idx="1"/>
+          </p:nvPr>
+        </p:nvSpPr>
+        <p:spPr/>
+        <p:txBody>
+          <a:bodyPr/>
+          <a:lstStyle/>
+          <a:p>
+            <a:r>
+              <a:rPr lang="en-US" dirty="0"/>
+              <a:t>Every request must be authorized against the customer's journey. Verify residency for inference, providers, logs, backups and support access. Protect uploads and secrets, and remove sensitive data from telemetry. The audit record preserves agent runs, model versions, approvals and external actions; it does not depend on trace sampling. Distinguish legitimate waits from stuck processes and assign alert ownership. Platform provides execution, monitoring and operational tooling; AI Engineers own workflow and reconciliation logic; Business owns customer exceptions.</a:t>
+            </a:r>
+          </a:p>
+        </p:txBody>
+      </p:sp>
+      <p:sp>
+        <p:nvSpPr>
+          <p:cNvPr id="4" name="Slide Number Placeholder 3">
+            <a:extLst>
+              <a:ext uri="{FF2B5EF4-FFF2-40B4-BE49-F238E27FC236}">
+                <a16:creationId xmlns:a16="http://schemas.microsoft.com/office/drawing/2014/main" id="{D68665DA-E6B2-6630-7CC3-0FF88F10BDD7}"/>
+              </a:ext>
+            </a:extLst>
+          </p:cNvPr>
+          <p:cNvSpPr>
+            <a:spLocks noGrp="1"/>
+          </p:cNvSpPr>
+          <p:nvPr>
+            <p:ph type="sldNum" sz="quarter" idx="10"/>
+          </p:nvPr>
+        </p:nvSpPr>
+        <p:spPr/>
+        <p:txBody>
+          <a:bodyPr/>
+          <a:lstStyle/>
+          <a:p>
+            <a:fld id="{F7021451-1387-4CA6-816F-3879F97B5CBC}" type="slidenum">
+              <a:rPr lang="en-US"/>
+              <a:t>14</a:t>
+            </a:fld>
+            <a:endParaRPr lang="en-US"/>
+          </a:p>
+        </p:txBody>
+      </p:sp>
+    </p:spTree>
+    <p:extLst>
+      <p:ext uri="{BB962C8B-B14F-4D97-AF65-F5344CB8AC3E}">
+        <p14:creationId xmlns:p14="http://schemas.microsoft.com/office/powerpoint/2010/main" val="1112779268"/>
+      </p:ext>
+    </p:extLst>
+  </p:cSld>
+  <p:clrMapOvr>
+    <a:masterClrMapping/>
+  </p:clrMapOvr>
+</p:notes>
+</file>
+
+<file path=ppt/notesSlides/notesSlide15.xml><?xml version="1.0" encoding="utf-8"?>
+<p:notes xmlns:a="http://schemas.openxmlformats.org/drawingml/2006/main" xmlns:r="http://schemas.openxmlformats.org/officeDocument/2006/relationships" xmlns:p="http://schemas.openxmlformats.org/presentationml/2006/main">
+  <p:cSld>
+    <p:spTree>
+      <p:nvGrpSpPr>
+        <p:cNvPr id="1" name="">
+          <a:extLst>
+            <a:ext uri="{FF2B5EF4-FFF2-40B4-BE49-F238E27FC236}">
               <a16:creationId xmlns:a16="http://schemas.microsoft.com/office/drawing/2014/main" id="{427DAF87-2EA8-B515-EA16-F42DB602B10B}"/>
             </a:ext>
           </a:extLst>
@@ -812,7 +924,7 @@
           <a:p>
             <a:fld id="{F7021451-1387-4CA6-816F-3879F97B5CBC}" type="slidenum">
               <a:rPr lang="en-US"/>
-              <a:t>14</a:t>
+              <a:t>15</a:t>
             </a:fld>
             <a:endParaRPr lang="en-US"/>
           </a:p>
@@ -822,93 +934,6 @@
     <p:extLst>
       <p:ext uri="{BB962C8B-B14F-4D97-AF65-F5344CB8AC3E}">
         <p14:creationId xmlns:p14="http://schemas.microsoft.com/office/powerpoint/2010/main" val="1739325906"/>
-      </p:ext>
-    </p:extLst>
-  </p:cSld>
-  <p:clrMapOvr>
-    <a:masterClrMapping/>
-  </p:clrMapOvr>
-</p:notes>
-</file>
-
-<file path=ppt/notesSlides/notesSlide15.xml><?xml version="1.0" encoding="utf-8"?>
-<p:notes xmlns:a="http://schemas.openxmlformats.org/drawingml/2006/main" xmlns:r="http://schemas.openxmlformats.org/officeDocument/2006/relationships" xmlns:p="http://schemas.openxmlformats.org/presentationml/2006/main">
-  <p:cSld>
-    <p:spTree>
-      <p:nvGrpSpPr>
-        <p:cNvPr id="1" name=""/>
-        <p:cNvGrpSpPr/>
-        <p:nvPr/>
-      </p:nvGrpSpPr>
-      <p:grpSpPr>
-        <a:xfrm>
-          <a:off x="0" y="0"/>
-          <a:ext cx="0" cy="0"/>
-          <a:chOff x="0" y="0"/>
-          <a:chExt cx="0" cy="0"/>
-        </a:xfrm>
-      </p:grpSpPr>
-      <p:sp>
-        <p:nvSpPr>
-          <p:cNvPr id="2" name="Slide Image Placeholder 1"/>
-          <p:cNvSpPr>
-            <a:spLocks noGrp="1" noRot="1" noChangeAspect="1"/>
-          </p:cNvSpPr>
-          <p:nvPr>
-            <p:ph type="sldImg"/>
-          </p:nvPr>
-        </p:nvSpPr>
-        <p:spPr/>
-      </p:sp>
-      <p:sp>
-        <p:nvSpPr>
-          <p:cNvPr id="3" name="Notes Placeholder 2"/>
-          <p:cNvSpPr>
-            <a:spLocks noGrp="1"/>
-          </p:cNvSpPr>
-          <p:nvPr>
-            <p:ph type="body" idx="1"/>
-          </p:nvPr>
-        </p:nvSpPr>
-        <p:spPr/>
-        <p:txBody>
-          <a:bodyPr/>
-          <a:lstStyle/>
-          <a:p>
-            <a:r>
-              <a:rPr lang="en-US" dirty="0"/>
-              <a:t>The number of users alone does not size the platform. We need task duration, concurrency, bursts and model mix. At launch, workloads share nodes with requests and limits. Workers scale on backlog and drain time; nodes scale through Managed Node Groups and Cluster Autoscaler; application signals need an adapter or KEDA. SQS absorbs bursts while capacity starts. Limit replicas and provider calls. Add CPU pools, caches or GPUs only when measurements justify them.</a:t>
-            </a:r>
-          </a:p>
-        </p:txBody>
-      </p:sp>
-      <p:sp>
-        <p:nvSpPr>
-          <p:cNvPr id="4" name="Slide Number Placeholder 3"/>
-          <p:cNvSpPr>
-            <a:spLocks noGrp="1"/>
-          </p:cNvSpPr>
-          <p:nvPr>
-            <p:ph type="sldNum" sz="quarter" idx="10"/>
-          </p:nvPr>
-        </p:nvSpPr>
-        <p:spPr/>
-        <p:txBody>
-          <a:bodyPr/>
-          <a:lstStyle/>
-          <a:p>
-            <a:fld id="{F7021451-1387-4CA6-816F-3879F97B5CBC}" type="slidenum">
-              <a:rPr lang="en-US"/>
-              <a:t>15</a:t>
-            </a:fld>
-            <a:endParaRPr lang="en-US"/>
-          </a:p>
-        </p:txBody>
-      </p:sp>
-    </p:spTree>
-    <p:extLst>
-      <p:ext uri="{BB962C8B-B14F-4D97-AF65-F5344CB8AC3E}">
-        <p14:creationId xmlns:p14="http://schemas.microsoft.com/office/powerpoint/2010/main" val="1024086991"/>
       </p:ext>
     </p:extLst>
   </p:cSld>
@@ -964,7 +989,7 @@
           <a:p>
             <a:r>
               <a:rPr lang="en-US" dirty="0"/>
-              <a:t>Amounts come from the solution assumptions, not from a validated invoice. Resilience and Kubernetes create a minimum cost even with few users. Capacity and usage must be verified; the budget is not a hard cap. Platform controls infrastructure and capacity; AI Engineers control model selection and consumption. The overall economic view includes retries and abandoned journeys. Tag spend by environment and component, apply alerts and limits, and compare cheaper baselines against recovery and operational effort.</a:t>
+              <a:t>The number of users alone does not size the platform. We need task duration, concurrency, bursts and model mix. At launch, workloads share nodes with requests and limits. Workers scale on backlog and drain time; nodes scale through Managed Node Groups and Cluster Autoscaler; application signals need an adapter or KEDA. SQS absorbs bursts while capacity starts. Limit replicas and provider calls. Add CPU pools, caches or GPUs only when measurements justify them.</a:t>
             </a:r>
           </a:p>
         </p:txBody>
@@ -1051,7 +1076,7 @@
           <a:p>
             <a:r>
               <a:rPr lang="en-US" dirty="0"/>
-              <a:t>Use reviewed Terraform with remote S3 state, encryption and locking. CI checks infrastructure, application and workflows. Platform and AI teams build one complete journey early and exercise its failures: concurrent confirmations, duplicate, early and late events, lost callbacks, provider unavailability, restarts and deployments. Verify sustainable load, cost and alert ownership. Failures of correctness, residency or recovery block launch. These are planned checks, not tests already executed.</a:t>
+              <a:t>Amounts come from the solution assumptions, not from a validated invoice. Resilience and Kubernetes create a minimum cost even with few users. Capacity and usage must be verified; the budget is not a hard cap. Platform controls infrastructure and capacity; AI Engineers control model selection and consumption. The overall economic view includes retries and abandoned journeys. Tag spend by environment and component, apply alerts and limits, and compare cheaper baselines against recovery and operational effort.</a:t>
             </a:r>
           </a:p>
         </p:txBody>
@@ -1138,7 +1163,7 @@
           <a:p>
             <a:r>
               <a:rPr lang="en-US" dirty="0"/>
-              <a:t>AI supported analysis and preparation; the decisions remain my responsibility. I kept document checks separate from operational guarantees still to be demonstrated. The confirmations that most affect feasibility are recovery scope, provider guarantees and ownership of review and escalation. Region and residency remain launch conditions even if not all are repeated in the main talk. Leave this slide visible for the discussion.</a:t>
+              <a:t>Use reviewed Terraform with remote S3 state, encryption and locking. CI checks infrastructure, application and workflows. Platform and AI teams build one complete journey early and exercise its failures: concurrent confirmations, duplicate, early and late events, lost callbacks, provider unavailability, restarts and deployments. Verify sustainable load, cost and alert ownership. Failures of correctness, residency or recovery block launch. These are planned checks, not tests already executed.</a:t>
             </a:r>
           </a:p>
         </p:txBody>
@@ -1225,7 +1250,7 @@
           <a:p>
             <a:r>
               <a:rPr lang="en-US" dirty="0"/>
-              <a:t>Corrected network view: distinguish Region and VPC. Show public subnets for ALB and NAT, private subnets for EKS and RDS, two AZs, one NAT per AZ, S3 gateway endpoint and regional S3 outside the VPC. SQS and Step Functions are regional managed services outside subnets. WAF is associated with the ALB, not shown as a subnet appliance. Provider connectivity through NAT does not equal residency approval; controls and contracts are still needed.</a:t>
+              <a:t>AI supported analysis and preparation; the decisions remain my responsibility. I kept document checks separate from operational guarantees still to be demonstrated. The confirmations that most affect feasibility are recovery scope, provider guarantees and ownership of review and escalation. Region and residency remain launch conditions even if not all are repeated in the main talk. Leave this slide visible for the discussion.</a:t>
             </a:r>
           </a:p>
         </p:txBody>
@@ -1423,7 +1448,7 @@
           <a:p>
             <a:r>
               <a:rPr lang="en-US" dirty="0"/>
-              <a:t>Use this slide only if asked for more detail on why the outbox is necessary and what it does not solve. It prevents loss of accepted work between a database commit and a remote call, but it does not guarantee exactly-once delivery. Stable operation identifiers, provider idempotency and reconciliation remain required.</a:t>
+              <a:t>Corrected network view: distinguish Region and VPC. Show public subnets for ALB and NAT, private subnets for EKS and RDS, two AZs, one NAT per AZ, S3 gateway endpoint and regional S3 outside the VPC. SQS and Step Functions are regional managed services outside subnets. WAF is associated with the ALB, not shown as a subnet appliance. Provider connectivity through NAT does not equal residency approval; controls and contracts are still needed.</a:t>
             </a:r>
           </a:p>
         </p:txBody>
@@ -1445,7 +1470,7 @@
           <a:p>
             <a:fld id="{F7021451-1387-4CA6-816F-3879F97B5CBC}" type="slidenum">
               <a:rPr lang="en-US"/>
-              <a:t>22</a:t>
+              <a:t>20</a:t>
             </a:fld>
             <a:endParaRPr lang="en-US"/>
           </a:p>
@@ -1510,7 +1535,7 @@
           <a:p>
             <a:r>
               <a:rPr lang="en-US" dirty="0"/>
-              <a:t>Cost detail is taken from the documented estimate. Public AWS prices were checked on 18 September 2026, with Ireland eu-west-1, one production environment, on-demand Linux nodes, standard EKS/PostgreSQL support, 730 hours/month and no credits, commitments or free-tier deductions. Telemetry and other services remain allowances, not a validated bill.</a:t>
+              <a:t>Use this slide only if asked for more detail on why the outbox is necessary and what it does not solve. It prevents loss of accepted work between a database commit and a remote call, but it does not guarantee exactly-once delivery. Stable operation identifiers, provider idempotency and reconciliation remain required.</a:t>
             </a:r>
           </a:p>
         </p:txBody>
@@ -1597,7 +1622,7 @@
           <a:p>
             <a:r>
               <a:rPr lang="en-US" dirty="0"/>
-              <a:t>This is the evidence matrix for launch readiness. Use it to make clear what is planned versus what has been demonstrated. The strongest validation priorities are journey continuity, safe external effects, deployment compatibility, recovery measurement, security and sustainable load.</a:t>
+              <a:t>Cost detail is taken from the documented estimate. Public AWS prices were checked on 18 September 2026, with Ireland eu-west-1, one production environment, on-demand Linux nodes, standard EKS/PostgreSQL support, 730 hours/month and no credits, commitments or free-tier deductions. Telemetry and other services remain allowances, not a validated bill.</a:t>
             </a:r>
           </a:p>
         </p:txBody>
@@ -1684,7 +1709,7 @@
           <a:p>
             <a:r>
               <a:rPr lang="en-US" dirty="0"/>
-              <a:t>Keep this slide available for discussion. It collects the material uncertainties that affect the design: recovery scope, residency, provider contracts, operational ownership and traffic/cost assumptions. Emphasize that these do not relax the requirements; they define what must be confirmed or demonstrated.</a:t>
+              <a:t>This is the evidence matrix for launch readiness. Use it to make clear what is planned versus what has been demonstrated. The strongest validation priorities are journey continuity, safe external effects, deployment compatibility, recovery measurement, security and sustainable load.</a:t>
             </a:r>
           </a:p>
         </p:txBody>
@@ -1707,6 +1732,93 @@
             <a:fld id="{F7021451-1387-4CA6-816F-3879F97B5CBC}" type="slidenum">
               <a:rPr lang="en-US"/>
               <a:t>25</a:t>
+            </a:fld>
+            <a:endParaRPr lang="en-US"/>
+          </a:p>
+        </p:txBody>
+      </p:sp>
+    </p:spTree>
+    <p:extLst>
+      <p:ext uri="{BB962C8B-B14F-4D97-AF65-F5344CB8AC3E}">
+        <p14:creationId xmlns:p14="http://schemas.microsoft.com/office/powerpoint/2010/main" val="1024086991"/>
+      </p:ext>
+    </p:extLst>
+  </p:cSld>
+  <p:clrMapOvr>
+    <a:masterClrMapping/>
+  </p:clrMapOvr>
+</p:notes>
+</file>
+
+<file path=ppt/notesSlides/notesSlide24.xml><?xml version="1.0" encoding="utf-8"?>
+<p:notes xmlns:a="http://schemas.openxmlformats.org/drawingml/2006/main" xmlns:r="http://schemas.openxmlformats.org/officeDocument/2006/relationships" xmlns:p="http://schemas.openxmlformats.org/presentationml/2006/main">
+  <p:cSld>
+    <p:spTree>
+      <p:nvGrpSpPr>
+        <p:cNvPr id="1" name=""/>
+        <p:cNvGrpSpPr/>
+        <p:nvPr/>
+      </p:nvGrpSpPr>
+      <p:grpSpPr>
+        <a:xfrm>
+          <a:off x="0" y="0"/>
+          <a:ext cx="0" cy="0"/>
+          <a:chOff x="0" y="0"/>
+          <a:chExt cx="0" cy="0"/>
+        </a:xfrm>
+      </p:grpSpPr>
+      <p:sp>
+        <p:nvSpPr>
+          <p:cNvPr id="2" name="Slide Image Placeholder 1"/>
+          <p:cNvSpPr>
+            <a:spLocks noGrp="1" noRot="1" noChangeAspect="1"/>
+          </p:cNvSpPr>
+          <p:nvPr>
+            <p:ph type="sldImg"/>
+          </p:nvPr>
+        </p:nvSpPr>
+        <p:spPr/>
+      </p:sp>
+      <p:sp>
+        <p:nvSpPr>
+          <p:cNvPr id="3" name="Notes Placeholder 2"/>
+          <p:cNvSpPr>
+            <a:spLocks noGrp="1"/>
+          </p:cNvSpPr>
+          <p:nvPr>
+            <p:ph type="body" idx="1"/>
+          </p:nvPr>
+        </p:nvSpPr>
+        <p:spPr/>
+        <p:txBody>
+          <a:bodyPr/>
+          <a:lstStyle/>
+          <a:p>
+            <a:r>
+              <a:rPr lang="en-US" dirty="0"/>
+              <a:t>Keep this slide available for discussion. It collects the material uncertainties that affect the design: recovery scope, residency, provider contracts, operational ownership and traffic/cost assumptions. Emphasize that these do not relax the requirements; they define what must be confirmed or demonstrated.</a:t>
+            </a:r>
+          </a:p>
+        </p:txBody>
+      </p:sp>
+      <p:sp>
+        <p:nvSpPr>
+          <p:cNvPr id="4" name="Slide Number Placeholder 3"/>
+          <p:cNvSpPr>
+            <a:spLocks noGrp="1"/>
+          </p:cNvSpPr>
+          <p:nvPr>
+            <p:ph type="sldNum" sz="quarter" idx="10"/>
+          </p:nvPr>
+        </p:nvSpPr>
+        <p:spPr/>
+        <p:txBody>
+          <a:bodyPr/>
+          <a:lstStyle/>
+          <a:p>
+            <a:fld id="{F7021451-1387-4CA6-816F-3879F97B5CBC}" type="slidenum">
+              <a:rPr lang="en-US"/>
+              <a:t>26</a:t>
             </a:fld>
             <a:endParaRPr lang="en-US"/>
           </a:p>
@@ -2921,7 +3033,7 @@
         </p:nvSpPr>
         <p:spPr>
           <a:xfrm>
-            <a:off x="777240" y="1170432"/>
+            <a:off x="769620" y="904215"/>
             <a:ext cx="10652760" cy="0"/>
           </a:xfrm>
           <a:prstGeom prst="line">
@@ -3894,7 +4006,7 @@
           <p:nvPr>
             <p:extLst>
               <p:ext uri="{D42A27DB-BD31-4B8C-83A1-F6EECF244321}">
-                <p14:modId xmlns:p14="http://schemas.microsoft.com/office/powerpoint/2010/main" val="1400000679"/>
+                <p14:modId xmlns:p14="http://schemas.microsoft.com/office/powerpoint/2010/main" val="18102636"/>
               </p:ext>
             </p:extLst>
           </p:nvPr>
@@ -4237,8 +4349,12 @@
                         </a:defRPr>
                       </a:pPr>
                       <a:r>
+                        <a:rPr lang="it-IT" dirty="0" err="1"/>
+                        <a:t>W</a:t>
+                      </a:r>
+                      <a:r>
                         <a:rPr dirty="0"/>
-                        <a:t>Open, weeks-long customer journeys successfully survive a rolling update or rollback.</a:t>
+                        <a:t>eeks-long customer journeys successfully survive a rolling update or rollback.</a:t>
                       </a:r>
                     </a:p>
                   </a:txBody>
@@ -5181,7 +5297,7 @@
         <p:spPr>
           <a:xfrm>
             <a:off x="850392" y="3945636"/>
-            <a:ext cx="2148840" cy="384048"/>
+            <a:ext cx="2148840" cy="772668"/>
           </a:xfrm>
           <a:prstGeom prst="rect">
             <a:avLst/>
@@ -5207,7 +5323,7 @@
                 <a:ea typeface="Aptos" pitchFamily="34" charset="-122"/>
                 <a:cs typeface="Aptos" pitchFamily="34" charset="-120"/>
               </a:rPr>
-              <a:t>Enforce journey ownership and least-privilege access.</a:t>
+              <a:t>Enforce journey ownership and least-privilege access for users and workloads.</a:t>
             </a:r>
             <a:endParaRPr lang="en-US" sz="1100" dirty="0"/>
           </a:p>
@@ -5694,8 +5810,8 @@
         </p:nvSpPr>
         <p:spPr>
           <a:xfrm>
-            <a:off x="6556248" y="2720340"/>
-            <a:ext cx="2148840" cy="384048"/>
+            <a:off x="6556248" y="2720339"/>
+            <a:ext cx="2148840" cy="548641"/>
           </a:xfrm>
           <a:prstGeom prst="rect">
             <a:avLst/>
@@ -6178,20 +6294,20 @@
       </p:sp>
       <p:sp>
         <p:nvSpPr>
-          <p:cNvPr id="126" name="Shape 41">
-            <a:extLst>
-              <a:ext uri="{FF2B5EF4-FFF2-40B4-BE49-F238E27FC236}">
-                <a16:creationId xmlns:a16="http://schemas.microsoft.com/office/drawing/2014/main" id="{1705151D-5139-54EB-2C16-7DC4BEA4A46D}"/>
-              </a:ext>
-            </a:extLst>
-          </p:cNvPr>
-          <p:cNvSpPr/>
-          <p:nvPr/>
-        </p:nvSpPr>
-        <p:spPr>
-          <a:xfrm>
-            <a:off x="2284012" y="5349240"/>
-            <a:ext cx="7782339" cy="475488"/>
+          <p:cNvPr id="12" name="Shape 41">
+            <a:extLst>
+              <a:ext uri="{FF2B5EF4-FFF2-40B4-BE49-F238E27FC236}">
+                <a16:creationId xmlns:a16="http://schemas.microsoft.com/office/drawing/2014/main" id="{52DBF9A5-836E-F7C8-40C9-89451D7BD2F6}"/>
+              </a:ext>
+            </a:extLst>
+          </p:cNvPr>
+          <p:cNvSpPr/>
+          <p:nvPr/>
+        </p:nvSpPr>
+        <p:spPr>
+          <a:xfrm>
+            <a:off x="502920" y="5247462"/>
+            <a:ext cx="11210544" cy="1009115"/>
           </a:xfrm>
           <a:prstGeom prst="roundRect">
             <a:avLst>
@@ -6218,20 +6334,20 @@
       </p:sp>
       <p:sp>
         <p:nvSpPr>
-          <p:cNvPr id="127" name="Text 42">
-            <a:extLst>
-              <a:ext uri="{FF2B5EF4-FFF2-40B4-BE49-F238E27FC236}">
-                <a16:creationId xmlns:a16="http://schemas.microsoft.com/office/drawing/2014/main" id="{DDB74AC0-C018-BF62-4632-A25FD77CE64A}"/>
-              </a:ext>
-            </a:extLst>
-          </p:cNvPr>
-          <p:cNvSpPr/>
-          <p:nvPr/>
-        </p:nvSpPr>
-        <p:spPr>
-          <a:xfrm>
-            <a:off x="2466892" y="5509260"/>
-            <a:ext cx="10744200" cy="155448"/>
+          <p:cNvPr id="13" name="Text 42">
+            <a:extLst>
+              <a:ext uri="{FF2B5EF4-FFF2-40B4-BE49-F238E27FC236}">
+                <a16:creationId xmlns:a16="http://schemas.microsoft.com/office/drawing/2014/main" id="{1300D607-4784-CF2C-0D8B-203FD10EC79C}"/>
+              </a:ext>
+            </a:extLst>
+          </p:cNvPr>
+          <p:cNvSpPr/>
+          <p:nvPr/>
+        </p:nvSpPr>
+        <p:spPr>
+          <a:xfrm>
+            <a:off x="850392" y="5415968"/>
+            <a:ext cx="10707624" cy="338327"/>
           </a:xfrm>
           <a:prstGeom prst="rect">
             <a:avLst/>
@@ -6241,7 +6357,7 @@
         </p:spPr>
         <p:txBody>
           <a:bodyPr wrap="square" lIns="0" tIns="0" rIns="0" bIns="0" rtlCol="0" anchor="t">
-            <a:normAutofit lnSpcReduction="10000"/>
+            <a:normAutofit/>
           </a:bodyPr>
           <a:lstStyle/>
           <a:p>
@@ -6249,7 +6365,7 @@
               <a:buNone/>
             </a:pPr>
             <a:r>
-              <a:rPr lang="en-US" sz="1040" b="1" dirty="0">
+              <a:rPr lang="en-US" sz="1400" b="1" dirty="0">
                 <a:solidFill>
                   <a:srgbClr val="07133D"/>
                 </a:solidFill>
@@ -6257,20 +6373,42 @@
                 <a:ea typeface="Aptos" pitchFamily="34" charset="-122"/>
                 <a:cs typeface="Aptos" pitchFamily="34" charset="-120"/>
               </a:rPr>
-              <a:t>Telemetry: </a:t>
-            </a:r>
-            <a:r>
-              <a:rPr lang="en-US" sz="1040" dirty="0">
-                <a:solidFill>
-                  <a:srgbClr val="1D2433"/>
+              <a:t>Telemetry (</a:t>
+            </a:r>
+            <a:r>
+              <a:rPr lang="en-US" sz="1400" b="1" dirty="0" err="1">
+                <a:solidFill>
+                  <a:srgbClr val="07133D"/>
                 </a:solidFill>
                 <a:latin typeface="Aptos" pitchFamily="34" charset="0"/>
                 <a:ea typeface="Aptos" pitchFamily="34" charset="-122"/>
                 <a:cs typeface="Aptos" pitchFamily="34" charset="-120"/>
               </a:rPr>
-              <a:t>application logs + service/infrastructure metrics + OpenTelemetry traces → regional monitoring, dashboards and alarms</a:t>
-            </a:r>
-            <a:endParaRPr lang="en-US" sz="1040" dirty="0"/>
+              <a:t>OpenTelemetry</a:t>
+            </a:r>
+            <a:r>
+              <a:rPr lang="en-US" sz="1400" b="1" dirty="0">
+                <a:solidFill>
+                  <a:srgbClr val="07133D"/>
+                </a:solidFill>
+                <a:latin typeface="Aptos" pitchFamily="34" charset="0"/>
+                <a:ea typeface="Aptos" pitchFamily="34" charset="-122"/>
+                <a:cs typeface="Aptos" pitchFamily="34" charset="-120"/>
+              </a:rPr>
+              <a:t>): </a:t>
+            </a:r>
+            <a:r>
+              <a:rPr lang="en-US" sz="1400" dirty="0">
+                <a:solidFill>
+                  <a:srgbClr val="1D2433"/>
+                </a:solidFill>
+                <a:latin typeface="Aptos" pitchFamily="34" charset="0"/>
+                <a:ea typeface="Aptos" pitchFamily="34" charset="-122"/>
+                <a:cs typeface="Aptos" pitchFamily="34" charset="-120"/>
+              </a:rPr>
+              <a:t>application logs + service/infrastructure metrics + traces → regional monitoring, dashboards and alarms</a:t>
+            </a:r>
+            <a:endParaRPr lang="en-US" sz="1400" dirty="0"/>
           </a:p>
         </p:txBody>
       </p:sp>
@@ -6283,6 +6421,1757 @@
 </file>
 
 <file path=ppt/slides/slide14.xml><?xml version="1.0" encoding="utf-8"?>
+<p:sld xmlns:a="http://schemas.openxmlformats.org/drawingml/2006/main" xmlns:r="http://schemas.openxmlformats.org/officeDocument/2006/relationships" xmlns:p="http://schemas.openxmlformats.org/presentationml/2006/main">
+  <p:cSld>
+    <p:spTree>
+      <p:nvGrpSpPr>
+        <p:cNvPr id="1" name="">
+          <a:extLst>
+            <a:ext uri="{FF2B5EF4-FFF2-40B4-BE49-F238E27FC236}">
+              <a16:creationId xmlns:a16="http://schemas.microsoft.com/office/drawing/2014/main" id="{0715D20E-7F70-29B1-D544-3580DDF04CA8}"/>
+            </a:ext>
+          </a:extLst>
+        </p:cNvPr>
+        <p:cNvGrpSpPr/>
+        <p:nvPr/>
+      </p:nvGrpSpPr>
+      <p:grpSpPr>
+        <a:xfrm>
+          <a:off x="0" y="0"/>
+          <a:ext cx="0" cy="0"/>
+          <a:chOff x="0" y="0"/>
+          <a:chExt cx="0" cy="0"/>
+        </a:xfrm>
+      </p:grpSpPr>
+      <p:sp>
+        <p:nvSpPr>
+          <p:cNvPr id="2" name="Text 0">
+            <a:extLst>
+              <a:ext uri="{FF2B5EF4-FFF2-40B4-BE49-F238E27FC236}">
+                <a16:creationId xmlns:a16="http://schemas.microsoft.com/office/drawing/2014/main" id="{157B1A8E-82B5-0405-3008-C02F3405D21D}"/>
+              </a:ext>
+            </a:extLst>
+          </p:cNvPr>
+          <p:cNvSpPr/>
+          <p:nvPr/>
+        </p:nvSpPr>
+        <p:spPr>
+          <a:xfrm>
+            <a:off x="502920" y="219456"/>
+            <a:ext cx="2194560" cy="201168"/>
+          </a:xfrm>
+          <a:prstGeom prst="rect">
+            <a:avLst/>
+          </a:prstGeom>
+          <a:noFill/>
+          <a:ln/>
+        </p:spPr>
+        <p:txBody>
+          <a:bodyPr wrap="square" lIns="0" tIns="0" rIns="0" bIns="0" rtlCol="0" anchor="ctr"/>
+          <a:lstStyle/>
+          <a:p>
+            <a:pPr marL="0" indent="0">
+              <a:buNone/>
+            </a:pPr>
+            <a:r>
+              <a:rPr lang="en-US" sz="780" b="1" dirty="0">
+                <a:solidFill>
+                  <a:srgbClr val="0B63E5"/>
+                </a:solidFill>
+                <a:latin typeface="Aptos" pitchFamily="34" charset="0"/>
+                <a:ea typeface="Aptos" pitchFamily="34" charset="-122"/>
+                <a:cs typeface="Aptos" pitchFamily="34" charset="-120"/>
+              </a:rPr>
+              <a:t>MERIDIAN TELECOM</a:t>
+            </a:r>
+            <a:endParaRPr lang="en-US" sz="780" dirty="0"/>
+          </a:p>
+        </p:txBody>
+      </p:sp>
+      <p:sp>
+        <p:nvSpPr>
+          <p:cNvPr id="3" name="Text 1">
+            <a:extLst>
+              <a:ext uri="{FF2B5EF4-FFF2-40B4-BE49-F238E27FC236}">
+                <a16:creationId xmlns:a16="http://schemas.microsoft.com/office/drawing/2014/main" id="{612006B3-344D-46BB-FC87-DFFB467D7554}"/>
+              </a:ext>
+            </a:extLst>
+          </p:cNvPr>
+          <p:cNvSpPr/>
+          <p:nvPr/>
+        </p:nvSpPr>
+        <p:spPr>
+          <a:xfrm>
+            <a:off x="502920" y="438912"/>
+            <a:ext cx="10972800" cy="438912"/>
+          </a:xfrm>
+          <a:prstGeom prst="rect">
+            <a:avLst/>
+          </a:prstGeom>
+          <a:noFill/>
+          <a:ln/>
+        </p:spPr>
+        <p:txBody>
+          <a:bodyPr wrap="square" lIns="0" tIns="0" rIns="0" bIns="0" rtlCol="0" anchor="ctr">
+            <a:normAutofit/>
+          </a:bodyPr>
+          <a:lstStyle/>
+          <a:p>
+            <a:pPr marL="0" indent="0">
+              <a:buNone/>
+            </a:pPr>
+            <a:r>
+              <a:rPr lang="en-US" sz="2750" b="1" dirty="0">
+                <a:solidFill>
+                  <a:srgbClr val="07133D"/>
+                </a:solidFill>
+                <a:latin typeface="Aptos Display" pitchFamily="34" charset="0"/>
+                <a:ea typeface="Aptos Display" pitchFamily="34" charset="-122"/>
+                <a:cs typeface="Aptos Display" pitchFamily="34" charset="-120"/>
+              </a:rPr>
+              <a:t>Security, observability and operational responsibility</a:t>
+            </a:r>
+            <a:endParaRPr lang="en-US" sz="2750" dirty="0"/>
+          </a:p>
+        </p:txBody>
+      </p:sp>
+      <p:sp>
+        <p:nvSpPr>
+          <p:cNvPr id="4" name="Shape 2">
+            <a:extLst>
+              <a:ext uri="{FF2B5EF4-FFF2-40B4-BE49-F238E27FC236}">
+                <a16:creationId xmlns:a16="http://schemas.microsoft.com/office/drawing/2014/main" id="{A1852DB1-096C-8FF8-32B4-697E5834AD3E}"/>
+              </a:ext>
+            </a:extLst>
+          </p:cNvPr>
+          <p:cNvSpPr/>
+          <p:nvPr/>
+        </p:nvSpPr>
+        <p:spPr>
+          <a:xfrm>
+            <a:off x="502920" y="1115568"/>
+            <a:ext cx="11155680" cy="0"/>
+          </a:xfrm>
+          <a:prstGeom prst="line">
+            <a:avLst/>
+          </a:prstGeom>
+          <a:noFill/>
+          <a:ln w="12700">
+            <a:solidFill>
+              <a:srgbClr val="D6DEE9"/>
+            </a:solidFill>
+            <a:prstDash val="solid"/>
+          </a:ln>
+        </p:spPr>
+        <p:txBody>
+          <a:bodyPr/>
+          <a:lstStyle/>
+          <a:p>
+            <a:endParaRPr lang="it-IT"/>
+          </a:p>
+        </p:txBody>
+      </p:sp>
+      <p:sp>
+        <p:nvSpPr>
+          <p:cNvPr id="5" name="Shape 3">
+            <a:extLst>
+              <a:ext uri="{FF2B5EF4-FFF2-40B4-BE49-F238E27FC236}">
+                <a16:creationId xmlns:a16="http://schemas.microsoft.com/office/drawing/2014/main" id="{CCDEE030-FFE3-711E-9D64-745135218332}"/>
+              </a:ext>
+            </a:extLst>
+          </p:cNvPr>
+          <p:cNvSpPr/>
+          <p:nvPr/>
+        </p:nvSpPr>
+        <p:spPr>
+          <a:xfrm>
+            <a:off x="502920" y="6432514"/>
+            <a:ext cx="11155680" cy="0"/>
+          </a:xfrm>
+          <a:prstGeom prst="line">
+            <a:avLst/>
+          </a:prstGeom>
+          <a:noFill/>
+          <a:ln w="10160">
+            <a:solidFill>
+              <a:srgbClr val="E1E7F0"/>
+            </a:solidFill>
+            <a:prstDash val="solid"/>
+          </a:ln>
+        </p:spPr>
+        <p:txBody>
+          <a:bodyPr/>
+          <a:lstStyle/>
+          <a:p>
+            <a:endParaRPr lang="it-IT"/>
+          </a:p>
+        </p:txBody>
+      </p:sp>
+      <p:sp>
+        <p:nvSpPr>
+          <p:cNvPr id="6" name="Text 4">
+            <a:extLst>
+              <a:ext uri="{FF2B5EF4-FFF2-40B4-BE49-F238E27FC236}">
+                <a16:creationId xmlns:a16="http://schemas.microsoft.com/office/drawing/2014/main" id="{72EFDD6A-824B-3B58-3505-D6694524A4B2}"/>
+              </a:ext>
+            </a:extLst>
+          </p:cNvPr>
+          <p:cNvSpPr/>
+          <p:nvPr/>
+        </p:nvSpPr>
+        <p:spPr>
+          <a:xfrm>
+            <a:off x="502920" y="6519672"/>
+            <a:ext cx="2286000" cy="201168"/>
+          </a:xfrm>
+          <a:prstGeom prst="rect">
+            <a:avLst/>
+          </a:prstGeom>
+          <a:noFill/>
+          <a:ln/>
+        </p:spPr>
+        <p:txBody>
+          <a:bodyPr wrap="square" lIns="0" tIns="0" rIns="0" bIns="0" rtlCol="0" anchor="ctr"/>
+          <a:lstStyle/>
+          <a:p>
+            <a:pPr marL="0" indent="0">
+              <a:buNone/>
+            </a:pPr>
+            <a:r>
+              <a:rPr lang="en-US" sz="850" dirty="0">
+                <a:solidFill>
+                  <a:srgbClr val="7B8497"/>
+                </a:solidFill>
+              </a:rPr>
+              <a:t>6/10</a:t>
+            </a:r>
+            <a:endParaRPr lang="en-US" sz="850" dirty="0"/>
+          </a:p>
+        </p:txBody>
+      </p:sp>
+      <p:sp>
+        <p:nvSpPr>
+          <p:cNvPr id="89" name="Shape 4">
+            <a:extLst>
+              <a:ext uri="{FF2B5EF4-FFF2-40B4-BE49-F238E27FC236}">
+                <a16:creationId xmlns:a16="http://schemas.microsoft.com/office/drawing/2014/main" id="{C56B75F5-2B5B-8C0A-E445-67AD091FF174}"/>
+              </a:ext>
+            </a:extLst>
+          </p:cNvPr>
+          <p:cNvSpPr/>
+          <p:nvPr/>
+        </p:nvSpPr>
+        <p:spPr>
+          <a:xfrm>
+            <a:off x="502920" y="1961388"/>
+            <a:ext cx="2651760" cy="2999232"/>
+          </a:xfrm>
+          <a:prstGeom prst="roundRect">
+            <a:avLst>
+              <a:gd name="adj" fmla="val 2759"/>
+            </a:avLst>
+          </a:prstGeom>
+          <a:solidFill>
+            <a:srgbClr val="EAF5FF"/>
+          </a:solidFill>
+          <a:ln w="14605">
+            <a:solidFill>
+              <a:srgbClr val="0B63E5"/>
+            </a:solidFill>
+            <a:prstDash val="solid"/>
+          </a:ln>
+        </p:spPr>
+        <p:txBody>
+          <a:bodyPr/>
+          <a:lstStyle/>
+          <a:p>
+            <a:endParaRPr lang="it-IT"/>
+          </a:p>
+        </p:txBody>
+      </p:sp>
+      <p:sp>
+        <p:nvSpPr>
+          <p:cNvPr id="91" name="Text 6">
+            <a:extLst>
+              <a:ext uri="{FF2B5EF4-FFF2-40B4-BE49-F238E27FC236}">
+                <a16:creationId xmlns:a16="http://schemas.microsoft.com/office/drawing/2014/main" id="{9F40D1C9-4EF4-4FC8-1791-185BE540D9A1}"/>
+              </a:ext>
+            </a:extLst>
+          </p:cNvPr>
+          <p:cNvSpPr/>
+          <p:nvPr/>
+        </p:nvSpPr>
+        <p:spPr>
+          <a:xfrm>
+            <a:off x="667512" y="2089404"/>
+            <a:ext cx="2322576" cy="210312"/>
+          </a:xfrm>
+          <a:prstGeom prst="rect">
+            <a:avLst/>
+          </a:prstGeom>
+          <a:noFill/>
+          <a:ln/>
+        </p:spPr>
+        <p:txBody>
+          <a:bodyPr wrap="square" lIns="381" tIns="381" rIns="381" bIns="381" rtlCol="0" anchor="ctr">
+            <a:normAutofit/>
+          </a:bodyPr>
+          <a:lstStyle/>
+          <a:p>
+            <a:pPr marL="0" indent="0" algn="l">
+              <a:buNone/>
+            </a:pPr>
+            <a:r>
+              <a:rPr lang="en-US" sz="1300" b="1" dirty="0">
+                <a:solidFill>
+                  <a:srgbClr val="07133D"/>
+                </a:solidFill>
+                <a:latin typeface="Aptos" pitchFamily="34" charset="0"/>
+                <a:ea typeface="Aptos" pitchFamily="34" charset="-122"/>
+                <a:cs typeface="Aptos" pitchFamily="34" charset="-120"/>
+              </a:rPr>
+              <a:t>1. Protect access</a:t>
+            </a:r>
+            <a:endParaRPr lang="en-US" sz="1300" dirty="0"/>
+          </a:p>
+        </p:txBody>
+      </p:sp>
+      <p:sp>
+        <p:nvSpPr>
+          <p:cNvPr id="92" name="Shape 7">
+            <a:extLst>
+              <a:ext uri="{FF2B5EF4-FFF2-40B4-BE49-F238E27FC236}">
+                <a16:creationId xmlns:a16="http://schemas.microsoft.com/office/drawing/2014/main" id="{E8D22EF9-D39F-2A41-6A36-E3BE3C8DCBC6}"/>
+              </a:ext>
+            </a:extLst>
+          </p:cNvPr>
+          <p:cNvSpPr/>
+          <p:nvPr/>
+        </p:nvSpPr>
+        <p:spPr>
+          <a:xfrm>
+            <a:off x="685800" y="2759302"/>
+            <a:ext cx="91440" cy="91440"/>
+          </a:xfrm>
+          <a:prstGeom prst="ellipse">
+            <a:avLst/>
+          </a:prstGeom>
+          <a:solidFill>
+            <a:srgbClr val="0B63E5"/>
+          </a:solidFill>
+          <a:ln w="12700">
+            <a:solidFill>
+              <a:srgbClr val="0B63E5"/>
+            </a:solidFill>
+            <a:prstDash val="solid"/>
+          </a:ln>
+        </p:spPr>
+        <p:txBody>
+          <a:bodyPr/>
+          <a:lstStyle/>
+          <a:p>
+            <a:endParaRPr lang="it-IT"/>
+          </a:p>
+        </p:txBody>
+      </p:sp>
+      <p:sp>
+        <p:nvSpPr>
+          <p:cNvPr id="93" name="Text 8">
+            <a:extLst>
+              <a:ext uri="{FF2B5EF4-FFF2-40B4-BE49-F238E27FC236}">
+                <a16:creationId xmlns:a16="http://schemas.microsoft.com/office/drawing/2014/main" id="{495505BB-ABD8-A76D-7EF4-2EE06044FC92}"/>
+              </a:ext>
+            </a:extLst>
+          </p:cNvPr>
+          <p:cNvSpPr/>
+          <p:nvPr/>
+        </p:nvSpPr>
+        <p:spPr>
+          <a:xfrm>
+            <a:off x="850392" y="2720340"/>
+            <a:ext cx="2148840" cy="384048"/>
+          </a:xfrm>
+          <a:prstGeom prst="rect">
+            <a:avLst/>
+          </a:prstGeom>
+          <a:noFill/>
+          <a:ln/>
+        </p:spPr>
+        <p:txBody>
+          <a:bodyPr wrap="square" lIns="381" tIns="381" rIns="381" bIns="381" rtlCol="0" anchor="t">
+            <a:normAutofit/>
+          </a:bodyPr>
+          <a:lstStyle/>
+          <a:p>
+            <a:pPr marL="0" indent="0" algn="l">
+              <a:buNone/>
+            </a:pPr>
+            <a:r>
+              <a:rPr lang="en-US" sz="1100" dirty="0">
+                <a:solidFill>
+                  <a:srgbClr val="1D2433"/>
+                </a:solidFill>
+                <a:latin typeface="Aptos" pitchFamily="34" charset="0"/>
+                <a:ea typeface="Aptos" pitchFamily="34" charset="-122"/>
+                <a:cs typeface="Aptos" pitchFamily="34" charset="-120"/>
+              </a:rPr>
+              <a:t>Authenticate customers, operators and provider callbacks.</a:t>
+            </a:r>
+            <a:endParaRPr lang="en-US" sz="1100" dirty="0"/>
+          </a:p>
+        </p:txBody>
+      </p:sp>
+      <p:sp>
+        <p:nvSpPr>
+          <p:cNvPr id="94" name="Shape 9">
+            <a:extLst>
+              <a:ext uri="{FF2B5EF4-FFF2-40B4-BE49-F238E27FC236}">
+                <a16:creationId xmlns:a16="http://schemas.microsoft.com/office/drawing/2014/main" id="{EBEE4817-2184-6074-0A30-18DAE0C945D2}"/>
+              </a:ext>
+            </a:extLst>
+          </p:cNvPr>
+          <p:cNvSpPr/>
+          <p:nvPr/>
+        </p:nvSpPr>
+        <p:spPr>
+          <a:xfrm>
+            <a:off x="685800" y="3371950"/>
+            <a:ext cx="91440" cy="91440"/>
+          </a:xfrm>
+          <a:prstGeom prst="ellipse">
+            <a:avLst/>
+          </a:prstGeom>
+          <a:solidFill>
+            <a:srgbClr val="0B63E5"/>
+          </a:solidFill>
+          <a:ln w="12700">
+            <a:solidFill>
+              <a:srgbClr val="0B63E5"/>
+            </a:solidFill>
+            <a:prstDash val="solid"/>
+          </a:ln>
+        </p:spPr>
+        <p:txBody>
+          <a:bodyPr/>
+          <a:lstStyle/>
+          <a:p>
+            <a:endParaRPr lang="it-IT"/>
+          </a:p>
+        </p:txBody>
+      </p:sp>
+      <p:sp>
+        <p:nvSpPr>
+          <p:cNvPr id="95" name="Text 10">
+            <a:extLst>
+              <a:ext uri="{FF2B5EF4-FFF2-40B4-BE49-F238E27FC236}">
+                <a16:creationId xmlns:a16="http://schemas.microsoft.com/office/drawing/2014/main" id="{AD0AF50B-CCB3-0FE0-DAAA-BF486A726CB9}"/>
+              </a:ext>
+            </a:extLst>
+          </p:cNvPr>
+          <p:cNvSpPr/>
+          <p:nvPr/>
+        </p:nvSpPr>
+        <p:spPr>
+          <a:xfrm>
+            <a:off x="850392" y="3332988"/>
+            <a:ext cx="2148840" cy="384048"/>
+          </a:xfrm>
+          <a:prstGeom prst="rect">
+            <a:avLst/>
+          </a:prstGeom>
+          <a:noFill/>
+          <a:ln/>
+        </p:spPr>
+        <p:txBody>
+          <a:bodyPr wrap="square" lIns="381" tIns="381" rIns="381" bIns="381" rtlCol="0" anchor="t">
+            <a:noAutofit/>
+          </a:bodyPr>
+          <a:lstStyle/>
+          <a:p>
+            <a:pPr marL="0" indent="0" algn="l">
+              <a:buNone/>
+            </a:pPr>
+            <a:r>
+              <a:rPr lang="en-US" sz="1100" dirty="0">
+                <a:solidFill>
+                  <a:srgbClr val="1D2433"/>
+                </a:solidFill>
+                <a:latin typeface="Aptos" pitchFamily="34" charset="0"/>
+                <a:ea typeface="Aptos" pitchFamily="34" charset="-122"/>
+                <a:cs typeface="Aptos" pitchFamily="34" charset="-120"/>
+              </a:rPr>
+              <a:t>Keep workloads and databases private; expose API via TLS/WAF/ALB.</a:t>
+            </a:r>
+            <a:endParaRPr lang="en-US" sz="1100" dirty="0"/>
+          </a:p>
+        </p:txBody>
+      </p:sp>
+      <p:sp>
+        <p:nvSpPr>
+          <p:cNvPr id="96" name="Shape 11">
+            <a:extLst>
+              <a:ext uri="{FF2B5EF4-FFF2-40B4-BE49-F238E27FC236}">
+                <a16:creationId xmlns:a16="http://schemas.microsoft.com/office/drawing/2014/main" id="{ACD78C64-E447-F622-FCB8-8211FB6628CC}"/>
+              </a:ext>
+            </a:extLst>
+          </p:cNvPr>
+          <p:cNvSpPr/>
+          <p:nvPr/>
+        </p:nvSpPr>
+        <p:spPr>
+          <a:xfrm>
+            <a:off x="685800" y="3984598"/>
+            <a:ext cx="91440" cy="91440"/>
+          </a:xfrm>
+          <a:prstGeom prst="ellipse">
+            <a:avLst/>
+          </a:prstGeom>
+          <a:solidFill>
+            <a:srgbClr val="0B63E5"/>
+          </a:solidFill>
+          <a:ln w="12700">
+            <a:solidFill>
+              <a:srgbClr val="0B63E5"/>
+            </a:solidFill>
+            <a:prstDash val="solid"/>
+          </a:ln>
+        </p:spPr>
+        <p:txBody>
+          <a:bodyPr/>
+          <a:lstStyle/>
+          <a:p>
+            <a:endParaRPr lang="it-IT"/>
+          </a:p>
+        </p:txBody>
+      </p:sp>
+      <p:sp>
+        <p:nvSpPr>
+          <p:cNvPr id="97" name="Text 12">
+            <a:extLst>
+              <a:ext uri="{FF2B5EF4-FFF2-40B4-BE49-F238E27FC236}">
+                <a16:creationId xmlns:a16="http://schemas.microsoft.com/office/drawing/2014/main" id="{F7A98E20-F4A4-096F-31A3-DC7A0A4FB1A5}"/>
+              </a:ext>
+            </a:extLst>
+          </p:cNvPr>
+          <p:cNvSpPr/>
+          <p:nvPr/>
+        </p:nvSpPr>
+        <p:spPr>
+          <a:xfrm>
+            <a:off x="850392" y="3945636"/>
+            <a:ext cx="2148840" cy="772668"/>
+          </a:xfrm>
+          <a:prstGeom prst="rect">
+            <a:avLst/>
+          </a:prstGeom>
+          <a:noFill/>
+          <a:ln/>
+        </p:spPr>
+        <p:txBody>
+          <a:bodyPr wrap="square" lIns="381" tIns="381" rIns="381" bIns="381" rtlCol="0" anchor="t">
+            <a:normAutofit/>
+          </a:bodyPr>
+          <a:lstStyle/>
+          <a:p>
+            <a:pPr marL="0" indent="0" algn="l">
+              <a:buNone/>
+            </a:pPr>
+            <a:r>
+              <a:rPr lang="en-US" sz="1100" dirty="0">
+                <a:solidFill>
+                  <a:srgbClr val="1D2433"/>
+                </a:solidFill>
+                <a:latin typeface="Aptos" pitchFamily="34" charset="0"/>
+                <a:ea typeface="Aptos" pitchFamily="34" charset="-122"/>
+                <a:cs typeface="Aptos" pitchFamily="34" charset="-120"/>
+              </a:rPr>
+              <a:t>Enforce journey ownership and least-privilege access for users and workloads.</a:t>
+            </a:r>
+            <a:endParaRPr lang="en-US" sz="1100" dirty="0"/>
+          </a:p>
+        </p:txBody>
+      </p:sp>
+      <p:sp>
+        <p:nvSpPr>
+          <p:cNvPr id="98" name="Shape 13">
+            <a:extLst>
+              <a:ext uri="{FF2B5EF4-FFF2-40B4-BE49-F238E27FC236}">
+                <a16:creationId xmlns:a16="http://schemas.microsoft.com/office/drawing/2014/main" id="{FF754E36-0CB7-2E87-90F5-898D193C7997}"/>
+              </a:ext>
+            </a:extLst>
+          </p:cNvPr>
+          <p:cNvSpPr/>
+          <p:nvPr/>
+        </p:nvSpPr>
+        <p:spPr>
+          <a:xfrm>
+            <a:off x="3355848" y="1961388"/>
+            <a:ext cx="2651760" cy="2999232"/>
+          </a:xfrm>
+          <a:prstGeom prst="roundRect">
+            <a:avLst>
+              <a:gd name="adj" fmla="val 2759"/>
+            </a:avLst>
+          </a:prstGeom>
+          <a:solidFill>
+            <a:srgbClr val="F1ECFF"/>
+          </a:solidFill>
+          <a:ln w="14605">
+            <a:solidFill>
+              <a:srgbClr val="673AB7"/>
+            </a:solidFill>
+            <a:prstDash val="solid"/>
+          </a:ln>
+        </p:spPr>
+        <p:txBody>
+          <a:bodyPr/>
+          <a:lstStyle/>
+          <a:p>
+            <a:endParaRPr lang="it-IT"/>
+          </a:p>
+        </p:txBody>
+      </p:sp>
+      <p:sp>
+        <p:nvSpPr>
+          <p:cNvPr id="100" name="Text 15">
+            <a:extLst>
+              <a:ext uri="{FF2B5EF4-FFF2-40B4-BE49-F238E27FC236}">
+                <a16:creationId xmlns:a16="http://schemas.microsoft.com/office/drawing/2014/main" id="{A79906E9-1533-6B35-C9A3-8CC0589F851A}"/>
+              </a:ext>
+            </a:extLst>
+          </p:cNvPr>
+          <p:cNvSpPr/>
+          <p:nvPr/>
+        </p:nvSpPr>
+        <p:spPr>
+          <a:xfrm>
+            <a:off x="3520440" y="2089404"/>
+            <a:ext cx="2322576" cy="210312"/>
+          </a:xfrm>
+          <a:prstGeom prst="rect">
+            <a:avLst/>
+          </a:prstGeom>
+          <a:noFill/>
+          <a:ln/>
+        </p:spPr>
+        <p:txBody>
+          <a:bodyPr wrap="square" lIns="381" tIns="381" rIns="381" bIns="381" rtlCol="0" anchor="ctr">
+            <a:normAutofit/>
+          </a:bodyPr>
+          <a:lstStyle/>
+          <a:p>
+            <a:pPr marL="0" indent="0" algn="l">
+              <a:buNone/>
+            </a:pPr>
+            <a:r>
+              <a:rPr lang="en-US" sz="1300" b="1" dirty="0">
+                <a:solidFill>
+                  <a:srgbClr val="07133D"/>
+                </a:solidFill>
+                <a:latin typeface="Aptos" pitchFamily="34" charset="0"/>
+                <a:ea typeface="Aptos" pitchFamily="34" charset="-122"/>
+                <a:cs typeface="Aptos" pitchFamily="34" charset="-120"/>
+              </a:rPr>
+              <a:t>2. Constrain AI &amp; data</a:t>
+            </a:r>
+            <a:endParaRPr lang="en-US" sz="1300" dirty="0"/>
+          </a:p>
+        </p:txBody>
+      </p:sp>
+      <p:sp>
+        <p:nvSpPr>
+          <p:cNvPr id="101" name="Shape 16">
+            <a:extLst>
+              <a:ext uri="{FF2B5EF4-FFF2-40B4-BE49-F238E27FC236}">
+                <a16:creationId xmlns:a16="http://schemas.microsoft.com/office/drawing/2014/main" id="{E6813A6D-CD49-252C-C0C3-254E359C86C7}"/>
+              </a:ext>
+            </a:extLst>
+          </p:cNvPr>
+          <p:cNvSpPr/>
+          <p:nvPr/>
+        </p:nvSpPr>
+        <p:spPr>
+          <a:xfrm>
+            <a:off x="3538728" y="2759302"/>
+            <a:ext cx="91440" cy="91440"/>
+          </a:xfrm>
+          <a:prstGeom prst="ellipse">
+            <a:avLst/>
+          </a:prstGeom>
+          <a:solidFill>
+            <a:srgbClr val="673AB7"/>
+          </a:solidFill>
+          <a:ln w="12700">
+            <a:solidFill>
+              <a:srgbClr val="673AB7"/>
+            </a:solidFill>
+            <a:prstDash val="solid"/>
+          </a:ln>
+        </p:spPr>
+        <p:txBody>
+          <a:bodyPr/>
+          <a:lstStyle/>
+          <a:p>
+            <a:endParaRPr lang="it-IT"/>
+          </a:p>
+        </p:txBody>
+      </p:sp>
+      <p:sp>
+        <p:nvSpPr>
+          <p:cNvPr id="102" name="Text 17">
+            <a:extLst>
+              <a:ext uri="{FF2B5EF4-FFF2-40B4-BE49-F238E27FC236}">
+                <a16:creationId xmlns:a16="http://schemas.microsoft.com/office/drawing/2014/main" id="{A4E66C4E-606C-E036-74F2-FC36B8DF2C1E}"/>
+              </a:ext>
+            </a:extLst>
+          </p:cNvPr>
+          <p:cNvSpPr/>
+          <p:nvPr/>
+        </p:nvSpPr>
+        <p:spPr>
+          <a:xfrm>
+            <a:off x="3703320" y="2720340"/>
+            <a:ext cx="2148840" cy="384048"/>
+          </a:xfrm>
+          <a:prstGeom prst="rect">
+            <a:avLst/>
+          </a:prstGeom>
+          <a:noFill/>
+          <a:ln/>
+        </p:spPr>
+        <p:txBody>
+          <a:bodyPr wrap="square" lIns="381" tIns="381" rIns="381" bIns="381" rtlCol="0" anchor="t">
+            <a:normAutofit/>
+          </a:bodyPr>
+          <a:lstStyle/>
+          <a:p>
+            <a:pPr marL="0" indent="0" algn="l">
+              <a:buNone/>
+            </a:pPr>
+            <a:r>
+              <a:rPr lang="en-US" sz="1100" dirty="0">
+                <a:solidFill>
+                  <a:srgbClr val="1D2433"/>
+                </a:solidFill>
+                <a:latin typeface="Aptos" pitchFamily="34" charset="0"/>
+                <a:ea typeface="Aptos" pitchFamily="34" charset="-122"/>
+                <a:cs typeface="Aptos" pitchFamily="34" charset="-120"/>
+              </a:rPr>
+              <a:t>Validate model-proposed actions in application code.</a:t>
+            </a:r>
+            <a:endParaRPr lang="en-US" sz="1100" dirty="0"/>
+          </a:p>
+        </p:txBody>
+      </p:sp>
+      <p:sp>
+        <p:nvSpPr>
+          <p:cNvPr id="103" name="Shape 18">
+            <a:extLst>
+              <a:ext uri="{FF2B5EF4-FFF2-40B4-BE49-F238E27FC236}">
+                <a16:creationId xmlns:a16="http://schemas.microsoft.com/office/drawing/2014/main" id="{6A042B2A-9437-79F5-07CD-0C8FF1529EB0}"/>
+              </a:ext>
+            </a:extLst>
+          </p:cNvPr>
+          <p:cNvSpPr/>
+          <p:nvPr/>
+        </p:nvSpPr>
+        <p:spPr>
+          <a:xfrm>
+            <a:off x="3538728" y="3379901"/>
+            <a:ext cx="91440" cy="91440"/>
+          </a:xfrm>
+          <a:prstGeom prst="ellipse">
+            <a:avLst/>
+          </a:prstGeom>
+          <a:solidFill>
+            <a:srgbClr val="673AB7"/>
+          </a:solidFill>
+          <a:ln w="12700">
+            <a:solidFill>
+              <a:srgbClr val="673AB7"/>
+            </a:solidFill>
+            <a:prstDash val="solid"/>
+          </a:ln>
+        </p:spPr>
+        <p:txBody>
+          <a:bodyPr/>
+          <a:lstStyle/>
+          <a:p>
+            <a:endParaRPr lang="it-IT"/>
+          </a:p>
+        </p:txBody>
+      </p:sp>
+      <p:sp>
+        <p:nvSpPr>
+          <p:cNvPr id="104" name="Text 19">
+            <a:extLst>
+              <a:ext uri="{FF2B5EF4-FFF2-40B4-BE49-F238E27FC236}">
+                <a16:creationId xmlns:a16="http://schemas.microsoft.com/office/drawing/2014/main" id="{57DEAED3-00AA-B4D5-621F-F8F82AAB5202}"/>
+              </a:ext>
+            </a:extLst>
+          </p:cNvPr>
+          <p:cNvSpPr/>
+          <p:nvPr/>
+        </p:nvSpPr>
+        <p:spPr>
+          <a:xfrm>
+            <a:off x="3703320" y="3332988"/>
+            <a:ext cx="2148840" cy="384048"/>
+          </a:xfrm>
+          <a:prstGeom prst="rect">
+            <a:avLst/>
+          </a:prstGeom>
+          <a:noFill/>
+          <a:ln/>
+        </p:spPr>
+        <p:txBody>
+          <a:bodyPr wrap="square" lIns="381" tIns="381" rIns="381" bIns="381" rtlCol="0" anchor="t">
+            <a:normAutofit/>
+          </a:bodyPr>
+          <a:lstStyle/>
+          <a:p>
+            <a:pPr marL="0" indent="0" algn="l">
+              <a:buNone/>
+            </a:pPr>
+            <a:r>
+              <a:rPr lang="en-US" sz="1100" dirty="0">
+                <a:solidFill>
+                  <a:srgbClr val="1D2433"/>
+                </a:solidFill>
+                <a:latin typeface="Aptos" pitchFamily="34" charset="0"/>
+                <a:ea typeface="Aptos" pitchFamily="34" charset="-122"/>
+                <a:cs typeface="Aptos" pitchFamily="34" charset="-120"/>
+              </a:rPr>
+              <a:t>Treat external content as untrusted and bound AI usage.</a:t>
+            </a:r>
+            <a:endParaRPr lang="en-US" sz="1100" dirty="0"/>
+          </a:p>
+        </p:txBody>
+      </p:sp>
+      <p:sp>
+        <p:nvSpPr>
+          <p:cNvPr id="105" name="Shape 20">
+            <a:extLst>
+              <a:ext uri="{FF2B5EF4-FFF2-40B4-BE49-F238E27FC236}">
+                <a16:creationId xmlns:a16="http://schemas.microsoft.com/office/drawing/2014/main" id="{5E86188E-3E9B-BE89-2591-28984809A157}"/>
+              </a:ext>
+            </a:extLst>
+          </p:cNvPr>
+          <p:cNvSpPr/>
+          <p:nvPr/>
+        </p:nvSpPr>
+        <p:spPr>
+          <a:xfrm>
+            <a:off x="3538728" y="3992549"/>
+            <a:ext cx="91440" cy="91440"/>
+          </a:xfrm>
+          <a:prstGeom prst="ellipse">
+            <a:avLst/>
+          </a:prstGeom>
+          <a:solidFill>
+            <a:srgbClr val="673AB7"/>
+          </a:solidFill>
+          <a:ln w="12700">
+            <a:solidFill>
+              <a:srgbClr val="673AB7"/>
+            </a:solidFill>
+            <a:prstDash val="solid"/>
+          </a:ln>
+        </p:spPr>
+        <p:txBody>
+          <a:bodyPr/>
+          <a:lstStyle/>
+          <a:p>
+            <a:endParaRPr lang="it-IT"/>
+          </a:p>
+        </p:txBody>
+      </p:sp>
+      <p:sp>
+        <p:nvSpPr>
+          <p:cNvPr id="106" name="Text 21">
+            <a:extLst>
+              <a:ext uri="{FF2B5EF4-FFF2-40B4-BE49-F238E27FC236}">
+                <a16:creationId xmlns:a16="http://schemas.microsoft.com/office/drawing/2014/main" id="{C0931886-0C9C-7CB3-4D0D-DD8640092635}"/>
+              </a:ext>
+            </a:extLst>
+          </p:cNvPr>
+          <p:cNvSpPr/>
+          <p:nvPr/>
+        </p:nvSpPr>
+        <p:spPr>
+          <a:xfrm>
+            <a:off x="3703320" y="3945636"/>
+            <a:ext cx="2148840" cy="384048"/>
+          </a:xfrm>
+          <a:prstGeom prst="rect">
+            <a:avLst/>
+          </a:prstGeom>
+          <a:noFill/>
+          <a:ln/>
+        </p:spPr>
+        <p:txBody>
+          <a:bodyPr wrap="square" lIns="381" tIns="381" rIns="381" bIns="381" rtlCol="0" anchor="t">
+            <a:normAutofit/>
+          </a:bodyPr>
+          <a:lstStyle/>
+          <a:p>
+            <a:pPr marL="0" indent="0" algn="l">
+              <a:buNone/>
+            </a:pPr>
+            <a:r>
+              <a:rPr lang="en-US" sz="1100" dirty="0">
+                <a:solidFill>
+                  <a:srgbClr val="1D2433"/>
+                </a:solidFill>
+                <a:latin typeface="Aptos" pitchFamily="34" charset="0"/>
+                <a:ea typeface="Aptos" pitchFamily="34" charset="-122"/>
+                <a:cs typeface="Aptos" pitchFamily="34" charset="-120"/>
+              </a:rPr>
+              <a:t>Keep confidential data within approved regional paths.</a:t>
+            </a:r>
+            <a:endParaRPr lang="en-US" sz="1100" dirty="0"/>
+          </a:p>
+        </p:txBody>
+      </p:sp>
+      <p:sp>
+        <p:nvSpPr>
+          <p:cNvPr id="107" name="Shape 22">
+            <a:extLst>
+              <a:ext uri="{FF2B5EF4-FFF2-40B4-BE49-F238E27FC236}">
+                <a16:creationId xmlns:a16="http://schemas.microsoft.com/office/drawing/2014/main" id="{1A5CFA70-B746-E2D7-BAD5-254BE1357895}"/>
+              </a:ext>
+            </a:extLst>
+          </p:cNvPr>
+          <p:cNvSpPr/>
+          <p:nvPr/>
+        </p:nvSpPr>
+        <p:spPr>
+          <a:xfrm>
+            <a:off x="6208776" y="1961388"/>
+            <a:ext cx="2651760" cy="2999232"/>
+          </a:xfrm>
+          <a:prstGeom prst="roundRect">
+            <a:avLst>
+              <a:gd name="adj" fmla="val 2759"/>
+            </a:avLst>
+          </a:prstGeom>
+          <a:solidFill>
+            <a:srgbClr val="E8F7EE"/>
+          </a:solidFill>
+          <a:ln w="14605">
+            <a:solidFill>
+              <a:srgbClr val="0B9F63"/>
+            </a:solidFill>
+            <a:prstDash val="solid"/>
+          </a:ln>
+        </p:spPr>
+        <p:txBody>
+          <a:bodyPr/>
+          <a:lstStyle/>
+          <a:p>
+            <a:endParaRPr lang="it-IT"/>
+          </a:p>
+        </p:txBody>
+      </p:sp>
+      <p:sp>
+        <p:nvSpPr>
+          <p:cNvPr id="109" name="Text 24">
+            <a:extLst>
+              <a:ext uri="{FF2B5EF4-FFF2-40B4-BE49-F238E27FC236}">
+                <a16:creationId xmlns:a16="http://schemas.microsoft.com/office/drawing/2014/main" id="{7F66D223-FF3D-D7F6-BD5A-9DD602E12495}"/>
+              </a:ext>
+            </a:extLst>
+          </p:cNvPr>
+          <p:cNvSpPr/>
+          <p:nvPr/>
+        </p:nvSpPr>
+        <p:spPr>
+          <a:xfrm>
+            <a:off x="6373368" y="2089404"/>
+            <a:ext cx="2322576" cy="210312"/>
+          </a:xfrm>
+          <a:prstGeom prst="rect">
+            <a:avLst/>
+          </a:prstGeom>
+          <a:noFill/>
+          <a:ln/>
+        </p:spPr>
+        <p:txBody>
+          <a:bodyPr wrap="square" lIns="381" tIns="381" rIns="381" bIns="381" rtlCol="0" anchor="ctr">
+            <a:normAutofit/>
+          </a:bodyPr>
+          <a:lstStyle/>
+          <a:p>
+            <a:pPr marL="0" indent="0" algn="l">
+              <a:buNone/>
+            </a:pPr>
+            <a:r>
+              <a:rPr lang="en-US" sz="1300" b="1" dirty="0">
+                <a:solidFill>
+                  <a:srgbClr val="07133D"/>
+                </a:solidFill>
+                <a:latin typeface="Aptos" pitchFamily="34" charset="0"/>
+                <a:ea typeface="Aptos" pitchFamily="34" charset="-122"/>
+                <a:cs typeface="Aptos" pitchFamily="34" charset="-120"/>
+              </a:rPr>
+              <a:t>3. Preserve auditability</a:t>
+            </a:r>
+            <a:endParaRPr lang="en-US" sz="1300" dirty="0"/>
+          </a:p>
+        </p:txBody>
+      </p:sp>
+      <p:sp>
+        <p:nvSpPr>
+          <p:cNvPr id="110" name="Shape 25">
+            <a:extLst>
+              <a:ext uri="{FF2B5EF4-FFF2-40B4-BE49-F238E27FC236}">
+                <a16:creationId xmlns:a16="http://schemas.microsoft.com/office/drawing/2014/main" id="{9CBB125C-0136-89FD-2A1F-5755CB7A87A6}"/>
+              </a:ext>
+            </a:extLst>
+          </p:cNvPr>
+          <p:cNvSpPr/>
+          <p:nvPr/>
+        </p:nvSpPr>
+        <p:spPr>
+          <a:xfrm>
+            <a:off x="6391656" y="2767253"/>
+            <a:ext cx="91440" cy="91440"/>
+          </a:xfrm>
+          <a:prstGeom prst="ellipse">
+            <a:avLst/>
+          </a:prstGeom>
+          <a:solidFill>
+            <a:srgbClr val="0B9F63"/>
+          </a:solidFill>
+          <a:ln w="12700">
+            <a:solidFill>
+              <a:srgbClr val="0B9F63"/>
+            </a:solidFill>
+            <a:prstDash val="solid"/>
+          </a:ln>
+        </p:spPr>
+        <p:txBody>
+          <a:bodyPr/>
+          <a:lstStyle/>
+          <a:p>
+            <a:endParaRPr lang="it-IT"/>
+          </a:p>
+        </p:txBody>
+      </p:sp>
+      <p:sp>
+        <p:nvSpPr>
+          <p:cNvPr id="111" name="Text 26">
+            <a:extLst>
+              <a:ext uri="{FF2B5EF4-FFF2-40B4-BE49-F238E27FC236}">
+                <a16:creationId xmlns:a16="http://schemas.microsoft.com/office/drawing/2014/main" id="{AA1102BA-EA87-C1D5-CCF9-143376508A06}"/>
+              </a:ext>
+            </a:extLst>
+          </p:cNvPr>
+          <p:cNvSpPr/>
+          <p:nvPr/>
+        </p:nvSpPr>
+        <p:spPr>
+          <a:xfrm>
+            <a:off x="6556248" y="2720339"/>
+            <a:ext cx="2148840" cy="548641"/>
+          </a:xfrm>
+          <a:prstGeom prst="rect">
+            <a:avLst/>
+          </a:prstGeom>
+          <a:noFill/>
+          <a:ln/>
+        </p:spPr>
+        <p:txBody>
+          <a:bodyPr wrap="square" lIns="381" tIns="381" rIns="381" bIns="381" rtlCol="0" anchor="t">
+            <a:noAutofit/>
+          </a:bodyPr>
+          <a:lstStyle/>
+          <a:p>
+            <a:pPr marL="0" indent="0" algn="l">
+              <a:buNone/>
+            </a:pPr>
+            <a:r>
+              <a:rPr lang="en-US" sz="1100" dirty="0">
+                <a:solidFill>
+                  <a:srgbClr val="1D2433"/>
+                </a:solidFill>
+                <a:latin typeface="Aptos" pitchFamily="34" charset="0"/>
+                <a:ea typeface="Aptos" pitchFamily="34" charset="-122"/>
+                <a:cs typeface="Aptos" pitchFamily="34" charset="-120"/>
+              </a:rPr>
+              <a:t>Keep unsampled audit records of agent runs, approvals and external actions.</a:t>
+            </a:r>
+            <a:endParaRPr lang="en-US" sz="1100" dirty="0"/>
+          </a:p>
+        </p:txBody>
+      </p:sp>
+      <p:sp>
+        <p:nvSpPr>
+          <p:cNvPr id="112" name="Shape 27">
+            <a:extLst>
+              <a:ext uri="{FF2B5EF4-FFF2-40B4-BE49-F238E27FC236}">
+                <a16:creationId xmlns:a16="http://schemas.microsoft.com/office/drawing/2014/main" id="{50BB8808-D2C0-CE10-ACA4-C82D34245A5A}"/>
+              </a:ext>
+            </a:extLst>
+          </p:cNvPr>
+          <p:cNvSpPr/>
+          <p:nvPr/>
+        </p:nvSpPr>
+        <p:spPr>
+          <a:xfrm>
+            <a:off x="6391656" y="3371950"/>
+            <a:ext cx="91440" cy="91440"/>
+          </a:xfrm>
+          <a:prstGeom prst="ellipse">
+            <a:avLst/>
+          </a:prstGeom>
+          <a:solidFill>
+            <a:srgbClr val="0B9F63"/>
+          </a:solidFill>
+          <a:ln w="12700">
+            <a:solidFill>
+              <a:srgbClr val="0B9F63"/>
+            </a:solidFill>
+            <a:prstDash val="solid"/>
+          </a:ln>
+        </p:spPr>
+        <p:txBody>
+          <a:bodyPr/>
+          <a:lstStyle/>
+          <a:p>
+            <a:endParaRPr lang="it-IT"/>
+          </a:p>
+        </p:txBody>
+      </p:sp>
+      <p:sp>
+        <p:nvSpPr>
+          <p:cNvPr id="113" name="Text 28">
+            <a:extLst>
+              <a:ext uri="{FF2B5EF4-FFF2-40B4-BE49-F238E27FC236}">
+                <a16:creationId xmlns:a16="http://schemas.microsoft.com/office/drawing/2014/main" id="{36F38D36-F71E-142C-F104-28585CA97D65}"/>
+              </a:ext>
+            </a:extLst>
+          </p:cNvPr>
+          <p:cNvSpPr/>
+          <p:nvPr/>
+        </p:nvSpPr>
+        <p:spPr>
+          <a:xfrm>
+            <a:off x="6556248" y="3332988"/>
+            <a:ext cx="2148840" cy="384048"/>
+          </a:xfrm>
+          <a:prstGeom prst="rect">
+            <a:avLst/>
+          </a:prstGeom>
+          <a:noFill/>
+          <a:ln/>
+        </p:spPr>
+        <p:txBody>
+          <a:bodyPr wrap="square" lIns="381" tIns="381" rIns="381" bIns="381" rtlCol="0" anchor="t">
+            <a:normAutofit/>
+          </a:bodyPr>
+          <a:lstStyle/>
+          <a:p>
+            <a:pPr marL="0" indent="0" algn="l">
+              <a:buNone/>
+            </a:pPr>
+            <a:r>
+              <a:rPr lang="en-US" sz="1100" dirty="0">
+                <a:solidFill>
+                  <a:srgbClr val="1D2433"/>
+                </a:solidFill>
+                <a:latin typeface="Aptos" pitchFamily="34" charset="0"/>
+                <a:ea typeface="Aptos" pitchFamily="34" charset="-122"/>
+                <a:cs typeface="Aptos" pitchFamily="34" charset="-120"/>
+              </a:rPr>
+              <a:t>Correlate logs and traces by journey/operation ID.</a:t>
+            </a:r>
+            <a:endParaRPr lang="en-US" sz="1100" dirty="0"/>
+          </a:p>
+        </p:txBody>
+      </p:sp>
+      <p:sp>
+        <p:nvSpPr>
+          <p:cNvPr id="114" name="Shape 29">
+            <a:extLst>
+              <a:ext uri="{FF2B5EF4-FFF2-40B4-BE49-F238E27FC236}">
+                <a16:creationId xmlns:a16="http://schemas.microsoft.com/office/drawing/2014/main" id="{A280E9E5-A22C-C631-80FB-92C0A215F7ED}"/>
+              </a:ext>
+            </a:extLst>
+          </p:cNvPr>
+          <p:cNvSpPr/>
+          <p:nvPr/>
+        </p:nvSpPr>
+        <p:spPr>
+          <a:xfrm>
+            <a:off x="6391656" y="3992549"/>
+            <a:ext cx="91440" cy="91440"/>
+          </a:xfrm>
+          <a:prstGeom prst="ellipse">
+            <a:avLst/>
+          </a:prstGeom>
+          <a:solidFill>
+            <a:srgbClr val="0B9F63"/>
+          </a:solidFill>
+          <a:ln w="12700">
+            <a:solidFill>
+              <a:srgbClr val="0B9F63"/>
+            </a:solidFill>
+            <a:prstDash val="solid"/>
+          </a:ln>
+        </p:spPr>
+        <p:txBody>
+          <a:bodyPr/>
+          <a:lstStyle/>
+          <a:p>
+            <a:endParaRPr lang="it-IT"/>
+          </a:p>
+        </p:txBody>
+      </p:sp>
+      <p:sp>
+        <p:nvSpPr>
+          <p:cNvPr id="115" name="Text 30">
+            <a:extLst>
+              <a:ext uri="{FF2B5EF4-FFF2-40B4-BE49-F238E27FC236}">
+                <a16:creationId xmlns:a16="http://schemas.microsoft.com/office/drawing/2014/main" id="{49D44F57-9AC4-DC2E-6639-FDE58D83A6DD}"/>
+              </a:ext>
+            </a:extLst>
+          </p:cNvPr>
+          <p:cNvSpPr/>
+          <p:nvPr/>
+        </p:nvSpPr>
+        <p:spPr>
+          <a:xfrm>
+            <a:off x="6556248" y="3945636"/>
+            <a:ext cx="2148840" cy="384048"/>
+          </a:xfrm>
+          <a:prstGeom prst="rect">
+            <a:avLst/>
+          </a:prstGeom>
+          <a:noFill/>
+          <a:ln/>
+        </p:spPr>
+        <p:txBody>
+          <a:bodyPr wrap="square" lIns="381" tIns="381" rIns="381" bIns="381" rtlCol="0" anchor="t">
+            <a:normAutofit/>
+          </a:bodyPr>
+          <a:lstStyle/>
+          <a:p>
+            <a:pPr marL="0" indent="0" algn="l">
+              <a:buNone/>
+            </a:pPr>
+            <a:r>
+              <a:rPr lang="en-US" sz="1100" dirty="0">
+                <a:solidFill>
+                  <a:srgbClr val="1D2433"/>
+                </a:solidFill>
+                <a:latin typeface="Aptos" pitchFamily="34" charset="0"/>
+                <a:ea typeface="Aptos" pitchFamily="34" charset="-122"/>
+                <a:cs typeface="Aptos" pitchFamily="34" charset="-120"/>
+              </a:rPr>
+              <a:t>Redact personal data and tokens; define retention and deletion.</a:t>
+            </a:r>
+            <a:endParaRPr lang="en-US" sz="1100" dirty="0"/>
+          </a:p>
+        </p:txBody>
+      </p:sp>
+      <p:sp>
+        <p:nvSpPr>
+          <p:cNvPr id="116" name="Shape 31">
+            <a:extLst>
+              <a:ext uri="{FF2B5EF4-FFF2-40B4-BE49-F238E27FC236}">
+                <a16:creationId xmlns:a16="http://schemas.microsoft.com/office/drawing/2014/main" id="{64059E2C-CDDD-EFF2-84EE-C632F0E95E68}"/>
+              </a:ext>
+            </a:extLst>
+          </p:cNvPr>
+          <p:cNvSpPr/>
+          <p:nvPr/>
+        </p:nvSpPr>
+        <p:spPr>
+          <a:xfrm>
+            <a:off x="9061704" y="1961388"/>
+            <a:ext cx="2651760" cy="2999232"/>
+          </a:xfrm>
+          <a:prstGeom prst="roundRect">
+            <a:avLst>
+              <a:gd name="adj" fmla="val 2759"/>
+            </a:avLst>
+          </a:prstGeom>
+          <a:solidFill>
+            <a:srgbClr val="E5F5F4"/>
+          </a:solidFill>
+          <a:ln w="14605">
+            <a:solidFill>
+              <a:srgbClr val="0F766E"/>
+            </a:solidFill>
+            <a:prstDash val="solid"/>
+          </a:ln>
+        </p:spPr>
+        <p:txBody>
+          <a:bodyPr/>
+          <a:lstStyle/>
+          <a:p>
+            <a:endParaRPr lang="it-IT"/>
+          </a:p>
+        </p:txBody>
+      </p:sp>
+      <p:sp>
+        <p:nvSpPr>
+          <p:cNvPr id="118" name="Text 33">
+            <a:extLst>
+              <a:ext uri="{FF2B5EF4-FFF2-40B4-BE49-F238E27FC236}">
+                <a16:creationId xmlns:a16="http://schemas.microsoft.com/office/drawing/2014/main" id="{E0A08966-A92A-BD30-01D6-42766E50A6AC}"/>
+              </a:ext>
+            </a:extLst>
+          </p:cNvPr>
+          <p:cNvSpPr/>
+          <p:nvPr/>
+        </p:nvSpPr>
+        <p:spPr>
+          <a:xfrm>
+            <a:off x="9226296" y="2089404"/>
+            <a:ext cx="2322576" cy="210312"/>
+          </a:xfrm>
+          <a:prstGeom prst="rect">
+            <a:avLst/>
+          </a:prstGeom>
+          <a:noFill/>
+          <a:ln/>
+        </p:spPr>
+        <p:txBody>
+          <a:bodyPr wrap="square" lIns="381" tIns="381" rIns="381" bIns="381" rtlCol="0" anchor="ctr">
+            <a:normAutofit/>
+          </a:bodyPr>
+          <a:lstStyle/>
+          <a:p>
+            <a:pPr marL="0" indent="0" algn="l">
+              <a:buNone/>
+            </a:pPr>
+            <a:r>
+              <a:rPr lang="en-US" sz="1300" b="1" dirty="0">
+                <a:solidFill>
+                  <a:srgbClr val="07133D"/>
+                </a:solidFill>
+                <a:latin typeface="Aptos" pitchFamily="34" charset="0"/>
+                <a:ea typeface="Aptos" pitchFamily="34" charset="-122"/>
+                <a:cs typeface="Aptos" pitchFamily="34" charset="-120"/>
+              </a:rPr>
+              <a:t>4. Operate daily</a:t>
+            </a:r>
+            <a:endParaRPr lang="en-US" sz="1300" dirty="0"/>
+          </a:p>
+        </p:txBody>
+      </p:sp>
+      <p:sp>
+        <p:nvSpPr>
+          <p:cNvPr id="120" name="Shape 35">
+            <a:extLst>
+              <a:ext uri="{FF2B5EF4-FFF2-40B4-BE49-F238E27FC236}">
+                <a16:creationId xmlns:a16="http://schemas.microsoft.com/office/drawing/2014/main" id="{37E1C867-547C-158A-5EDE-04BE7F8F4223}"/>
+              </a:ext>
+            </a:extLst>
+          </p:cNvPr>
+          <p:cNvSpPr/>
+          <p:nvPr/>
+        </p:nvSpPr>
+        <p:spPr>
+          <a:xfrm>
+            <a:off x="9244584" y="2786734"/>
+            <a:ext cx="91440" cy="91440"/>
+          </a:xfrm>
+          <a:prstGeom prst="ellipse">
+            <a:avLst/>
+          </a:prstGeom>
+          <a:solidFill>
+            <a:srgbClr val="0F766E"/>
+          </a:solidFill>
+          <a:ln w="12700">
+            <a:solidFill>
+              <a:srgbClr val="0F766E"/>
+            </a:solidFill>
+            <a:prstDash val="solid"/>
+          </a:ln>
+        </p:spPr>
+        <p:txBody>
+          <a:bodyPr/>
+          <a:lstStyle/>
+          <a:p>
+            <a:endParaRPr lang="it-IT"/>
+          </a:p>
+        </p:txBody>
+      </p:sp>
+      <p:sp>
+        <p:nvSpPr>
+          <p:cNvPr id="121" name="Text 36">
+            <a:extLst>
+              <a:ext uri="{FF2B5EF4-FFF2-40B4-BE49-F238E27FC236}">
+                <a16:creationId xmlns:a16="http://schemas.microsoft.com/office/drawing/2014/main" id="{48868F49-A1EC-CBC4-A975-CC61EBE9A5A9}"/>
+              </a:ext>
+            </a:extLst>
+          </p:cNvPr>
+          <p:cNvSpPr/>
+          <p:nvPr/>
+        </p:nvSpPr>
+        <p:spPr>
+          <a:xfrm>
+            <a:off x="9409176" y="2747772"/>
+            <a:ext cx="2148840" cy="384048"/>
+          </a:xfrm>
+          <a:prstGeom prst="rect">
+            <a:avLst/>
+          </a:prstGeom>
+          <a:noFill/>
+          <a:ln/>
+        </p:spPr>
+        <p:txBody>
+          <a:bodyPr wrap="square" lIns="381" tIns="381" rIns="381" bIns="381" rtlCol="0" anchor="t">
+            <a:noAutofit/>
+          </a:bodyPr>
+          <a:lstStyle/>
+          <a:p>
+            <a:pPr marL="0" indent="0" algn="l">
+              <a:buNone/>
+            </a:pPr>
+            <a:r>
+              <a:rPr lang="en-US" sz="1100" b="1" dirty="0">
+                <a:solidFill>
+                  <a:srgbClr val="1D2433"/>
+                </a:solidFill>
+                <a:latin typeface="Aptos" pitchFamily="34" charset="0"/>
+                <a:ea typeface="Aptos" pitchFamily="34" charset="-122"/>
+                <a:cs typeface="Aptos" pitchFamily="34" charset="-120"/>
+              </a:rPr>
+              <a:t>Service dashboard</a:t>
+            </a:r>
+            <a:r>
+              <a:rPr lang="en-US" sz="1100" dirty="0">
+                <a:solidFill>
+                  <a:srgbClr val="1D2433"/>
+                </a:solidFill>
+                <a:latin typeface="Aptos" pitchFamily="34" charset="0"/>
+                <a:ea typeface="Aptos" pitchFamily="34" charset="-122"/>
+                <a:cs typeface="Aptos" pitchFamily="34" charset="-120"/>
+              </a:rPr>
+              <a:t>: availability, latency, errors and infrastructure health.</a:t>
+            </a:r>
+            <a:endParaRPr lang="en-US" sz="1100" dirty="0"/>
+          </a:p>
+        </p:txBody>
+      </p:sp>
+      <p:sp>
+        <p:nvSpPr>
+          <p:cNvPr id="122" name="Shape 37">
+            <a:extLst>
+              <a:ext uri="{FF2B5EF4-FFF2-40B4-BE49-F238E27FC236}">
+                <a16:creationId xmlns:a16="http://schemas.microsoft.com/office/drawing/2014/main" id="{624B0C2A-DC53-5F3A-0916-D559192BBE80}"/>
+              </a:ext>
+            </a:extLst>
+          </p:cNvPr>
+          <p:cNvSpPr/>
+          <p:nvPr/>
+        </p:nvSpPr>
+        <p:spPr>
+          <a:xfrm>
+            <a:off x="9244584" y="3407333"/>
+            <a:ext cx="91440" cy="91440"/>
+          </a:xfrm>
+          <a:prstGeom prst="ellipse">
+            <a:avLst/>
+          </a:prstGeom>
+          <a:solidFill>
+            <a:srgbClr val="0F766E"/>
+          </a:solidFill>
+          <a:ln w="12700">
+            <a:solidFill>
+              <a:srgbClr val="0F766E"/>
+            </a:solidFill>
+            <a:prstDash val="solid"/>
+          </a:ln>
+        </p:spPr>
+        <p:txBody>
+          <a:bodyPr/>
+          <a:lstStyle/>
+          <a:p>
+            <a:endParaRPr lang="it-IT"/>
+          </a:p>
+        </p:txBody>
+      </p:sp>
+      <p:sp>
+        <p:nvSpPr>
+          <p:cNvPr id="123" name="Text 38">
+            <a:extLst>
+              <a:ext uri="{FF2B5EF4-FFF2-40B4-BE49-F238E27FC236}">
+                <a16:creationId xmlns:a16="http://schemas.microsoft.com/office/drawing/2014/main" id="{9F4638F7-372D-6B64-78DE-D1227EDE6C70}"/>
+              </a:ext>
+            </a:extLst>
+          </p:cNvPr>
+          <p:cNvSpPr/>
+          <p:nvPr/>
+        </p:nvSpPr>
+        <p:spPr>
+          <a:xfrm>
+            <a:off x="9409176" y="3360420"/>
+            <a:ext cx="2148840" cy="384048"/>
+          </a:xfrm>
+          <a:prstGeom prst="rect">
+            <a:avLst/>
+          </a:prstGeom>
+          <a:noFill/>
+          <a:ln/>
+        </p:spPr>
+        <p:txBody>
+          <a:bodyPr wrap="square" lIns="381" tIns="381" rIns="381" bIns="381" rtlCol="0" anchor="t">
+            <a:noAutofit/>
+          </a:bodyPr>
+          <a:lstStyle/>
+          <a:p>
+            <a:pPr marL="0" indent="0" algn="l">
+              <a:buNone/>
+            </a:pPr>
+            <a:r>
+              <a:rPr lang="en-US" sz="1100" b="1" dirty="0">
+                <a:solidFill>
+                  <a:srgbClr val="1D2433"/>
+                </a:solidFill>
+                <a:latin typeface="Aptos" pitchFamily="34" charset="0"/>
+                <a:ea typeface="Aptos" pitchFamily="34" charset="-122"/>
+                <a:cs typeface="Aptos" pitchFamily="34" charset="-120"/>
+              </a:rPr>
+              <a:t>Journey dashboard</a:t>
+            </a:r>
+            <a:r>
+              <a:rPr lang="en-US" sz="1100" dirty="0">
+                <a:solidFill>
+                  <a:srgbClr val="1D2433"/>
+                </a:solidFill>
+                <a:latin typeface="Aptos" pitchFamily="34" charset="0"/>
+                <a:ea typeface="Aptos" pitchFamily="34" charset="-122"/>
+                <a:cs typeface="Aptos" pitchFamily="34" charset="-120"/>
+              </a:rPr>
+              <a:t>: queue/outbox age, stalled journeys, uncertain outcomes and provider throttling.</a:t>
+            </a:r>
+            <a:endParaRPr lang="en-US" sz="1100" dirty="0"/>
+          </a:p>
+        </p:txBody>
+      </p:sp>
+      <p:sp>
+        <p:nvSpPr>
+          <p:cNvPr id="126" name="Shape 41">
+            <a:extLst>
+              <a:ext uri="{FF2B5EF4-FFF2-40B4-BE49-F238E27FC236}">
+                <a16:creationId xmlns:a16="http://schemas.microsoft.com/office/drawing/2014/main" id="{E50F11AA-0B39-DEB2-48E6-78BBF664FC15}"/>
+              </a:ext>
+            </a:extLst>
+          </p:cNvPr>
+          <p:cNvSpPr/>
+          <p:nvPr/>
+        </p:nvSpPr>
+        <p:spPr>
+          <a:xfrm>
+            <a:off x="502920" y="5247462"/>
+            <a:ext cx="11210544" cy="1009115"/>
+          </a:xfrm>
+          <a:prstGeom prst="roundRect">
+            <a:avLst>
+              <a:gd name="adj" fmla="val 9615"/>
+            </a:avLst>
+          </a:prstGeom>
+          <a:solidFill>
+            <a:srgbClr val="F8FAFC"/>
+          </a:solidFill>
+          <a:ln w="12700">
+            <a:solidFill>
+              <a:srgbClr val="D6DEE9"/>
+            </a:solidFill>
+            <a:prstDash val="solid"/>
+          </a:ln>
+        </p:spPr>
+        <p:txBody>
+          <a:bodyPr/>
+          <a:lstStyle/>
+          <a:p>
+            <a:endParaRPr lang="it-IT"/>
+          </a:p>
+        </p:txBody>
+      </p:sp>
+      <p:sp>
+        <p:nvSpPr>
+          <p:cNvPr id="127" name="Text 42">
+            <a:extLst>
+              <a:ext uri="{FF2B5EF4-FFF2-40B4-BE49-F238E27FC236}">
+                <a16:creationId xmlns:a16="http://schemas.microsoft.com/office/drawing/2014/main" id="{4E1353A1-7FAF-A338-0390-B7FD4ADBC24E}"/>
+              </a:ext>
+            </a:extLst>
+          </p:cNvPr>
+          <p:cNvSpPr/>
+          <p:nvPr/>
+        </p:nvSpPr>
+        <p:spPr>
+          <a:xfrm>
+            <a:off x="850392" y="5415968"/>
+            <a:ext cx="10707624" cy="338327"/>
+          </a:xfrm>
+          <a:prstGeom prst="rect">
+            <a:avLst/>
+          </a:prstGeom>
+          <a:noFill/>
+          <a:ln/>
+        </p:spPr>
+        <p:txBody>
+          <a:bodyPr wrap="square" lIns="0" tIns="0" rIns="0" bIns="0" rtlCol="0" anchor="t">
+            <a:normAutofit/>
+          </a:bodyPr>
+          <a:lstStyle/>
+          <a:p>
+            <a:pPr marL="0" indent="0" algn="l">
+              <a:buNone/>
+            </a:pPr>
+            <a:r>
+              <a:rPr lang="en-US" sz="1400" b="1" dirty="0">
+                <a:solidFill>
+                  <a:srgbClr val="07133D"/>
+                </a:solidFill>
+                <a:latin typeface="Aptos" pitchFamily="34" charset="0"/>
+                <a:ea typeface="Aptos" pitchFamily="34" charset="-122"/>
+                <a:cs typeface="Aptos" pitchFamily="34" charset="-120"/>
+              </a:rPr>
+              <a:t>Telemetry (</a:t>
+            </a:r>
+            <a:r>
+              <a:rPr lang="en-US" sz="1400" b="1" dirty="0" err="1">
+                <a:solidFill>
+                  <a:srgbClr val="07133D"/>
+                </a:solidFill>
+                <a:latin typeface="Aptos" pitchFamily="34" charset="0"/>
+                <a:ea typeface="Aptos" pitchFamily="34" charset="-122"/>
+                <a:cs typeface="Aptos" pitchFamily="34" charset="-120"/>
+              </a:rPr>
+              <a:t>OpenTelemetry</a:t>
+            </a:r>
+            <a:r>
+              <a:rPr lang="en-US" sz="1400" b="1" dirty="0">
+                <a:solidFill>
+                  <a:srgbClr val="07133D"/>
+                </a:solidFill>
+                <a:latin typeface="Aptos" pitchFamily="34" charset="0"/>
+                <a:ea typeface="Aptos" pitchFamily="34" charset="-122"/>
+                <a:cs typeface="Aptos" pitchFamily="34" charset="-120"/>
+              </a:rPr>
+              <a:t>): </a:t>
+            </a:r>
+            <a:r>
+              <a:rPr lang="en-US" sz="1400" dirty="0">
+                <a:solidFill>
+                  <a:srgbClr val="1D2433"/>
+                </a:solidFill>
+                <a:latin typeface="Aptos" pitchFamily="34" charset="0"/>
+                <a:ea typeface="Aptos" pitchFamily="34" charset="-122"/>
+                <a:cs typeface="Aptos" pitchFamily="34" charset="-120"/>
+              </a:rPr>
+              <a:t>application logs + service/infrastructure metrics + traces → regional monitoring, dashboards and alarms</a:t>
+            </a:r>
+            <a:endParaRPr lang="en-US" sz="1400" dirty="0"/>
+          </a:p>
+        </p:txBody>
+      </p:sp>
+      <p:sp>
+        <p:nvSpPr>
+          <p:cNvPr id="7" name="CasellaDiTesto 6">
+            <a:extLst>
+              <a:ext uri="{FF2B5EF4-FFF2-40B4-BE49-F238E27FC236}">
+                <a16:creationId xmlns:a16="http://schemas.microsoft.com/office/drawing/2014/main" id="{67915442-1F35-D21D-D449-FCF0DB1F2CA2}"/>
+              </a:ext>
+            </a:extLst>
+          </p:cNvPr>
+          <p:cNvSpPr txBox="1"/>
+          <p:nvPr/>
+        </p:nvSpPr>
+        <p:spPr>
+          <a:xfrm>
+            <a:off x="1504710" y="5753524"/>
+            <a:ext cx="9375492" cy="338554"/>
+          </a:xfrm>
+          <a:prstGeom prst="rect">
+            <a:avLst/>
+          </a:prstGeom>
+          <a:noFill/>
+        </p:spPr>
+        <p:txBody>
+          <a:bodyPr wrap="square" rtlCol="0">
+            <a:spAutoFit/>
+          </a:bodyPr>
+          <a:lstStyle/>
+          <a:p>
+            <a:r>
+              <a:rPr lang="it-IT" sz="1600" b="1" dirty="0">
+                <a:solidFill>
+                  <a:srgbClr val="C00000"/>
+                </a:solidFill>
+              </a:rPr>
+              <a:t>Amazon </a:t>
+            </a:r>
+            <a:r>
+              <a:rPr lang="it-IT" sz="1600" b="1" dirty="0" err="1">
+                <a:solidFill>
+                  <a:srgbClr val="C00000"/>
+                </a:solidFill>
+              </a:rPr>
+              <a:t>CloudWatch</a:t>
+            </a:r>
+            <a:r>
+              <a:rPr lang="it-IT" sz="1600" b="1" dirty="0"/>
+              <a:t> </a:t>
+            </a:r>
+            <a:r>
+              <a:rPr lang="it-IT" sz="1600" dirty="0"/>
+              <a:t>(AWS-</a:t>
+            </a:r>
+            <a:r>
+              <a:rPr lang="it-IT" sz="1600" dirty="0" err="1"/>
+              <a:t>managed</a:t>
+            </a:r>
+            <a:r>
+              <a:rPr lang="it-IT" sz="1600" dirty="0"/>
+              <a:t>) </a:t>
+            </a:r>
+            <a:r>
+              <a:rPr lang="it-IT" sz="1600" i="1" dirty="0"/>
+              <a:t>vs. Prometheus + </a:t>
+            </a:r>
+            <a:r>
+              <a:rPr lang="it-IT" sz="1600" i="1" dirty="0" err="1"/>
+              <a:t>Grafana</a:t>
+            </a:r>
+            <a:r>
+              <a:rPr lang="it-IT" sz="1600" i="1" dirty="0"/>
+              <a:t> + Loki + Tempo (self-</a:t>
+            </a:r>
+            <a:r>
+              <a:rPr lang="it-IT" sz="1600" i="1" dirty="0" err="1"/>
+              <a:t>managed</a:t>
+            </a:r>
+            <a:r>
+              <a:rPr lang="it-IT" sz="1600" i="1" dirty="0"/>
+              <a:t>)</a:t>
+            </a:r>
+            <a:endParaRPr lang="it-IT" sz="1600" dirty="0"/>
+          </a:p>
+        </p:txBody>
+      </p:sp>
+    </p:spTree>
+    <p:extLst>
+      <p:ext uri="{BB962C8B-B14F-4D97-AF65-F5344CB8AC3E}">
+        <p14:creationId xmlns:p14="http://schemas.microsoft.com/office/powerpoint/2010/main" val="774899699"/>
+      </p:ext>
+    </p:extLst>
+  </p:cSld>
+  <p:clrMapOvr>
+    <a:masterClrMapping/>
+  </p:clrMapOvr>
+</p:sld>
+</file>
+
+<file path=ppt/slides/slide15.xml><?xml version="1.0" encoding="utf-8"?>
 <p:sld xmlns:a="http://schemas.openxmlformats.org/drawingml/2006/main" xmlns:r="http://schemas.openxmlformats.org/officeDocument/2006/relationships" xmlns:p="http://schemas.openxmlformats.org/presentationml/2006/main" show="0">
   <p:cSld>
     <p:spTree>
@@ -8463,7 +10352,7 @@
 </p:sld>
 </file>
 
-<file path=ppt/slides/slide15.xml><?xml version="1.0" encoding="utf-8"?>
+<file path=ppt/slides/slide16.xml><?xml version="1.0" encoding="utf-8"?>
 <p:sld xmlns:a="http://schemas.openxmlformats.org/drawingml/2006/main" xmlns:r="http://schemas.openxmlformats.org/officeDocument/2006/relationships" xmlns:p="http://schemas.openxmlformats.org/presentationml/2006/main">
   <p:cSld name="Slide 7">
     <p:bg>
@@ -8562,7 +10451,7 @@
                 <a:ea typeface="Aptos Display" pitchFamily="34" charset="-122"/>
                 <a:cs typeface="Aptos Display" pitchFamily="34" charset="-120"/>
               </a:rPr>
-              <a:t>Scaling gradually but according to external limits</a:t>
+              <a:t>Scaling gradually according to external limits</a:t>
             </a:r>
             <a:endParaRPr lang="en-US" sz="2750" dirty="0"/>
           </a:p>
@@ -9268,7 +11157,7 @@
         <p:spPr>
           <a:xfrm>
             <a:off x="1001467" y="3754218"/>
-            <a:ext cx="3154680" cy="2165527"/>
+            <a:ext cx="3154680" cy="2463694"/>
           </a:xfrm>
           <a:prstGeom prst="roundRect">
             <a:avLst>
@@ -9373,7 +11262,7 @@
         <p:spPr>
           <a:xfrm>
             <a:off x="1152144" y="4253949"/>
-            <a:ext cx="2825496" cy="1477328"/>
+            <a:ext cx="2825496" cy="1754326"/>
           </a:xfrm>
           <a:prstGeom prst="rect">
             <a:avLst/>
@@ -9391,7 +11280,7 @@
               <a:buChar char="•"/>
             </a:pPr>
             <a:r>
-              <a:rPr lang="it-IT" sz="1000" dirty="0" err="1">
+              <a:rPr lang="it-IT" sz="1200" dirty="0" err="1">
                 <a:solidFill>
                   <a:srgbClr val="07133D"/>
                 </a:solidFill>
@@ -9399,7 +11288,7 @@
               <a:t>Workloads</a:t>
             </a:r>
             <a:r>
-              <a:rPr lang="it-IT" sz="1000" dirty="0">
+              <a:rPr lang="it-IT" sz="1200" dirty="0">
                 <a:solidFill>
                   <a:srgbClr val="07133D"/>
                 </a:solidFill>
@@ -9407,7 +11296,7 @@
               <a:t> share </a:t>
             </a:r>
             <a:r>
-              <a:rPr lang="it-IT" sz="1000" dirty="0" err="1">
+              <a:rPr lang="it-IT" sz="1200" dirty="0" err="1">
                 <a:solidFill>
                   <a:srgbClr val="07133D"/>
                 </a:solidFill>
@@ -9415,7 +11304,7 @@
               <a:t>nodes</a:t>
             </a:r>
             <a:r>
-              <a:rPr lang="it-IT" sz="1000" dirty="0">
+              <a:rPr lang="it-IT" sz="1200" dirty="0">
                 <a:solidFill>
                   <a:srgbClr val="07133D"/>
                 </a:solidFill>
@@ -9423,7 +11312,7 @@
               <a:t>, with </a:t>
             </a:r>
             <a:r>
-              <a:rPr lang="it-IT" sz="1000" dirty="0" err="1">
+              <a:rPr lang="it-IT" sz="1200" dirty="0" err="1">
                 <a:solidFill>
                   <a:srgbClr val="07133D"/>
                 </a:solidFill>
@@ -9431,7 +11320,7 @@
               <a:t>requests</a:t>
             </a:r>
             <a:r>
-              <a:rPr lang="it-IT" sz="1000" dirty="0">
+              <a:rPr lang="it-IT" sz="1200" dirty="0">
                 <a:solidFill>
                   <a:srgbClr val="07133D"/>
                 </a:solidFill>
@@ -9439,7 +11328,7 @@
               <a:t>/</a:t>
             </a:r>
             <a:r>
-              <a:rPr lang="it-IT" sz="1000" dirty="0" err="1">
+              <a:rPr lang="it-IT" sz="1200" dirty="0" err="1">
                 <a:solidFill>
                   <a:srgbClr val="07133D"/>
                 </a:solidFill>
@@ -9447,7 +11336,7 @@
               <a:t>limits</a:t>
             </a:r>
             <a:r>
-              <a:rPr lang="it-IT" sz="1000" dirty="0">
+              <a:rPr lang="it-IT" sz="1200" dirty="0">
                 <a:solidFill>
                   <a:srgbClr val="07133D"/>
                 </a:solidFill>
@@ -9455,7 +11344,7 @@
               <a:t> </a:t>
             </a:r>
             <a:r>
-              <a:rPr lang="it-IT" sz="1000" dirty="0" err="1">
+              <a:rPr lang="it-IT" sz="1200" dirty="0" err="1">
                 <a:solidFill>
                   <a:srgbClr val="07133D"/>
                 </a:solidFill>
@@ -9463,7 +11352,7 @@
               <a:t>protecting</a:t>
             </a:r>
             <a:r>
-              <a:rPr lang="it-IT" sz="1000" dirty="0">
+              <a:rPr lang="it-IT" sz="1200" dirty="0">
                 <a:solidFill>
                   <a:srgbClr val="07133D"/>
                 </a:solidFill>
@@ -9477,7 +11366,7 @@
               <a:buChar char="•"/>
             </a:pPr>
             <a:r>
-              <a:rPr lang="it-IT" sz="1000" dirty="0">
+              <a:rPr lang="it-IT" sz="1200" dirty="0">
                 <a:solidFill>
                   <a:srgbClr val="07133D"/>
                 </a:solidFill>
@@ -9485,7 +11374,7 @@
               <a:t>Scale workers on backlog; scale </a:t>
             </a:r>
             <a:r>
-              <a:rPr lang="it-IT" sz="1000" dirty="0" err="1">
+              <a:rPr lang="it-IT" sz="1200" dirty="0" err="1">
                 <a:solidFill>
                   <a:srgbClr val="07133D"/>
                 </a:solidFill>
@@ -9493,7 +11382,7 @@
               <a:t>nodes</a:t>
             </a:r>
             <a:r>
-              <a:rPr lang="it-IT" sz="1000" dirty="0">
+              <a:rPr lang="it-IT" sz="1200" dirty="0">
                 <a:solidFill>
                   <a:srgbClr val="07133D"/>
                 </a:solidFill>
@@ -9501,7 +11390,7 @@
               <a:t> via </a:t>
             </a:r>
             <a:r>
-              <a:rPr lang="it-IT" sz="1000" dirty="0" err="1">
+              <a:rPr lang="it-IT" sz="1200" dirty="0" err="1">
                 <a:solidFill>
                   <a:srgbClr val="07133D"/>
                 </a:solidFill>
@@ -9509,7 +11398,7 @@
               <a:t>Managed</a:t>
             </a:r>
             <a:r>
-              <a:rPr lang="it-IT" sz="1000" dirty="0">
+              <a:rPr lang="it-IT" sz="1200" dirty="0">
                 <a:solidFill>
                   <a:srgbClr val="07133D"/>
                 </a:solidFill>
@@ -9517,7 +11406,7 @@
               <a:t> </a:t>
             </a:r>
             <a:r>
-              <a:rPr lang="it-IT" sz="1000" dirty="0" err="1">
+              <a:rPr lang="it-IT" sz="1200" dirty="0" err="1">
                 <a:solidFill>
                   <a:srgbClr val="07133D"/>
                 </a:solidFill>
@@ -9525,7 +11414,7 @@
               <a:t>Node</a:t>
             </a:r>
             <a:r>
-              <a:rPr lang="it-IT" sz="1000" dirty="0">
+              <a:rPr lang="it-IT" sz="1200" dirty="0">
                 <a:solidFill>
                   <a:srgbClr val="07133D"/>
                 </a:solidFill>
@@ -9533,7 +11422,7 @@
               <a:t> Groups and Cluster </a:t>
             </a:r>
             <a:r>
-              <a:rPr lang="it-IT" sz="1000" dirty="0" err="1">
+              <a:rPr lang="it-IT" sz="1200" dirty="0" err="1">
                 <a:solidFill>
                   <a:srgbClr val="07133D"/>
                 </a:solidFill>
@@ -9541,7 +11430,7 @@
               <a:t>Autoscaler</a:t>
             </a:r>
             <a:r>
-              <a:rPr lang="it-IT" sz="1000" dirty="0">
+              <a:rPr lang="it-IT" sz="1200" dirty="0">
                 <a:solidFill>
                   <a:srgbClr val="07133D"/>
                 </a:solidFill>
@@ -9555,7 +11444,7 @@
               <a:buChar char="•"/>
             </a:pPr>
             <a:r>
-              <a:rPr lang="it-IT" sz="1000" dirty="0">
+              <a:rPr lang="it-IT" sz="1200" dirty="0">
                 <a:solidFill>
                   <a:srgbClr val="07133D"/>
                 </a:solidFill>
@@ -9563,7 +11452,7 @@
               <a:t>SQS </a:t>
             </a:r>
             <a:r>
-              <a:rPr lang="it-IT" sz="1000" dirty="0" err="1">
+              <a:rPr lang="it-IT" sz="1200" dirty="0" err="1">
                 <a:solidFill>
                   <a:srgbClr val="07133D"/>
                 </a:solidFill>
@@ -9571,7 +11460,7 @@
               <a:t>absorbs</a:t>
             </a:r>
             <a:r>
-              <a:rPr lang="it-IT" sz="1000" dirty="0">
+              <a:rPr lang="it-IT" sz="1200" dirty="0">
                 <a:solidFill>
                   <a:srgbClr val="07133D"/>
                 </a:solidFill>
@@ -9579,7 +11468,7 @@
               <a:t> spikes </a:t>
             </a:r>
             <a:r>
-              <a:rPr lang="it-IT" sz="1000" dirty="0" err="1">
+              <a:rPr lang="it-IT" sz="1200" dirty="0" err="1">
                 <a:solidFill>
                   <a:srgbClr val="07133D"/>
                 </a:solidFill>
@@ -9587,7 +11476,7 @@
               <a:t>while</a:t>
             </a:r>
             <a:r>
-              <a:rPr lang="it-IT" sz="1000" dirty="0">
+              <a:rPr lang="it-IT" sz="1200" dirty="0">
                 <a:solidFill>
                   <a:srgbClr val="07133D"/>
                 </a:solidFill>
@@ -9595,7 +11484,7 @@
               <a:t> </a:t>
             </a:r>
             <a:r>
-              <a:rPr lang="it-IT" sz="1000" dirty="0" err="1">
+              <a:rPr lang="it-IT" sz="1200" dirty="0" err="1">
                 <a:solidFill>
                   <a:srgbClr val="07133D"/>
                 </a:solidFill>
@@ -9603,7 +11492,7 @@
               <a:t>capacity</a:t>
             </a:r>
             <a:r>
-              <a:rPr lang="it-IT" sz="1000" dirty="0">
+              <a:rPr lang="it-IT" sz="1200" dirty="0">
                 <a:solidFill>
                   <a:srgbClr val="07133D"/>
                 </a:solidFill>
@@ -9611,7 +11500,7 @@
               <a:t> starts. HPA on app </a:t>
             </a:r>
             <a:r>
-              <a:rPr lang="it-IT" sz="1000" dirty="0" err="1">
+              <a:rPr lang="it-IT" sz="1200" dirty="0" err="1">
                 <a:solidFill>
                   <a:srgbClr val="07133D"/>
                 </a:solidFill>
@@ -9619,7 +11508,7 @@
               <a:t>signals</a:t>
             </a:r>
             <a:r>
-              <a:rPr lang="it-IT" sz="1000" dirty="0">
+              <a:rPr lang="it-IT" sz="1200" dirty="0">
                 <a:solidFill>
                   <a:srgbClr val="07133D"/>
                 </a:solidFill>
@@ -9627,7 +11516,7 @@
               <a:t> </a:t>
             </a:r>
             <a:r>
-              <a:rPr lang="it-IT" sz="1000" dirty="0" err="1">
+              <a:rPr lang="it-IT" sz="1200" dirty="0" err="1">
                 <a:solidFill>
                   <a:srgbClr val="07133D"/>
                 </a:solidFill>
@@ -9635,7 +11524,7 @@
               <a:t>needs</a:t>
             </a:r>
             <a:r>
-              <a:rPr lang="it-IT" sz="1000" dirty="0">
+              <a:rPr lang="it-IT" sz="1200" dirty="0">
                 <a:solidFill>
                   <a:srgbClr val="07133D"/>
                 </a:solidFill>
@@ -9643,7 +11532,7 @@
               <a:t> a </a:t>
             </a:r>
             <a:r>
-              <a:rPr lang="it-IT" sz="1000" dirty="0" err="1">
+              <a:rPr lang="it-IT" sz="1200" dirty="0" err="1">
                 <a:solidFill>
                   <a:srgbClr val="07133D"/>
                 </a:solidFill>
@@ -9651,7 +11540,7 @@
               <a:t>metrics</a:t>
             </a:r>
             <a:r>
-              <a:rPr lang="it-IT" sz="1000" dirty="0">
+              <a:rPr lang="it-IT" sz="1200" dirty="0">
                 <a:solidFill>
                   <a:srgbClr val="07133D"/>
                 </a:solidFill>
@@ -9659,7 +11548,7 @@
               <a:t> </a:t>
             </a:r>
             <a:r>
-              <a:rPr lang="it-IT" sz="1000" dirty="0" err="1">
+              <a:rPr lang="it-IT" sz="1200" dirty="0" err="1">
                 <a:solidFill>
                   <a:srgbClr val="07133D"/>
                 </a:solidFill>
@@ -9667,7 +11556,7 @@
               <a:t>adapter</a:t>
             </a:r>
             <a:r>
-              <a:rPr lang="it-IT" sz="1000" dirty="0">
+              <a:rPr lang="it-IT" sz="1200" dirty="0">
                 <a:solidFill>
                   <a:srgbClr val="07133D"/>
                 </a:solidFill>
@@ -9728,8 +11617,8 @@
         </p:nvSpPr>
         <p:spPr>
           <a:xfrm>
-            <a:off x="8017567" y="3797748"/>
-            <a:ext cx="3154680" cy="2121998"/>
+            <a:off x="8017567" y="3797747"/>
+            <a:ext cx="3154680" cy="2355384"/>
           </a:xfrm>
           <a:prstGeom prst="roundRect">
             <a:avLst>
@@ -9870,7 +11759,7 @@
         <p:spPr>
           <a:xfrm>
             <a:off x="8168244" y="4297478"/>
-            <a:ext cx="2825496" cy="1015663"/>
+            <a:ext cx="2825496" cy="1154162"/>
           </a:xfrm>
           <a:prstGeom prst="rect">
             <a:avLst/>
@@ -9888,7 +11777,7 @@
               <a:buChar char="•"/>
             </a:pPr>
             <a:r>
-              <a:rPr lang="it-IT" sz="1000" dirty="0" err="1">
+              <a:rPr lang="it-IT" sz="1100" dirty="0" err="1">
                 <a:solidFill>
                   <a:srgbClr val="07133D"/>
                 </a:solidFill>
@@ -9896,7 +11785,7 @@
               <a:t>Dedicated</a:t>
             </a:r>
             <a:r>
-              <a:rPr lang="it-IT" sz="1000" dirty="0">
+              <a:rPr lang="it-IT" sz="1100" dirty="0">
                 <a:solidFill>
                   <a:srgbClr val="07133D"/>
                 </a:solidFill>
@@ -9904,7 +11793,7 @@
               <a:t> CPU-</a:t>
             </a:r>
             <a:r>
-              <a:rPr lang="it-IT" sz="1000" dirty="0" err="1">
+              <a:rPr lang="it-IT" sz="1100" dirty="0" err="1">
                 <a:solidFill>
                   <a:srgbClr val="07133D"/>
                 </a:solidFill>
@@ -9912,38 +11801,22 @@
               <a:t>nodes</a:t>
             </a:r>
             <a:r>
-              <a:rPr lang="it-IT" sz="1000" dirty="0">
+              <a:rPr lang="it-IT" sz="1100" dirty="0">
                 <a:solidFill>
                   <a:srgbClr val="07133D"/>
                 </a:solidFill>
               </a:rPr>
-              <a:t> </a:t>
-            </a:r>
-            <a:r>
-              <a:rPr lang="it-IT" sz="1000" dirty="0" err="1">
+              <a:t> for CPU intensive </a:t>
+            </a:r>
+            <a:r>
+              <a:rPr lang="it-IT" sz="1100" dirty="0" err="1">
                 <a:solidFill>
                   <a:srgbClr val="07133D"/>
                 </a:solidFill>
               </a:rPr>
-              <a:t>fro</a:t>
-            </a:r>
-            <a:r>
-              <a:rPr lang="it-IT" sz="1000" dirty="0">
-                <a:solidFill>
-                  <a:srgbClr val="07133D"/>
-                </a:solidFill>
-              </a:rPr>
-              <a:t> CPU intensive </a:t>
-            </a:r>
-            <a:r>
-              <a:rPr lang="it-IT" sz="1000" dirty="0" err="1">
-                <a:solidFill>
-                  <a:srgbClr val="07133D"/>
-                </a:solidFill>
-              </a:rPr>
               <a:t>workloads</a:t>
             </a:r>
-            <a:endParaRPr lang="it-IT" sz="1000" dirty="0">
+            <a:endParaRPr lang="it-IT" sz="1100" dirty="0">
               <a:solidFill>
                 <a:srgbClr val="07133D"/>
               </a:solidFill>
@@ -9955,23 +11828,31 @@
               <a:buChar char="•"/>
             </a:pPr>
             <a:r>
-              <a:rPr lang="it-IT" sz="1000" dirty="0">
+              <a:rPr lang="it-IT" sz="1400" dirty="0">
                 <a:solidFill>
                   <a:srgbClr val="07133D"/>
                 </a:solidFill>
               </a:rPr>
-              <a:t>GPU devices for Meridian-</a:t>
-            </a:r>
-            <a:r>
-              <a:rPr lang="it-IT" sz="1000" dirty="0" err="1">
+              <a:t>GPU</a:t>
+            </a:r>
+            <a:r>
+              <a:rPr lang="it-IT" sz="1100" dirty="0">
                 <a:solidFill>
                   <a:srgbClr val="07133D"/>
                 </a:solidFill>
               </a:rPr>
+              <a:t> devices for Meridian-</a:t>
+            </a:r>
+            <a:r>
+              <a:rPr lang="it-IT" sz="1100" dirty="0" err="1">
+                <a:solidFill>
+                  <a:srgbClr val="07133D"/>
+                </a:solidFill>
+              </a:rPr>
               <a:t>managed</a:t>
             </a:r>
             <a:r>
-              <a:rPr lang="it-IT" sz="1000" dirty="0">
+              <a:rPr lang="it-IT" sz="1100" dirty="0">
                 <a:solidFill>
                   <a:srgbClr val="07133D"/>
                 </a:solidFill>
@@ -9979,7 +11860,7 @@
               <a:t> </a:t>
             </a:r>
             <a:r>
-              <a:rPr lang="it-IT" sz="1000" dirty="0" err="1">
+              <a:rPr lang="it-IT" sz="1100" dirty="0" err="1">
                 <a:solidFill>
                   <a:srgbClr val="07133D"/>
                 </a:solidFill>
@@ -9987,7 +11868,7 @@
               <a:t>inference</a:t>
             </a:r>
             <a:r>
-              <a:rPr lang="it-IT" sz="1000" dirty="0">
+              <a:rPr lang="it-IT" sz="1100" dirty="0">
                 <a:solidFill>
                   <a:srgbClr val="07133D"/>
                 </a:solidFill>
@@ -10001,7 +11882,7 @@
               <a:buChar char="•"/>
             </a:pPr>
             <a:r>
-              <a:rPr lang="it-IT" sz="1000" dirty="0">
+              <a:rPr lang="it-IT" sz="1100" dirty="0">
                 <a:solidFill>
                   <a:srgbClr val="07133D"/>
                 </a:solidFill>
@@ -10009,7 +11890,7 @@
               <a:t>Caching, database access </a:t>
             </a:r>
             <a:r>
-              <a:rPr lang="it-IT" sz="1000" dirty="0" err="1">
+              <a:rPr lang="it-IT" sz="1100" dirty="0" err="1">
                 <a:solidFill>
                   <a:srgbClr val="07133D"/>
                 </a:solidFill>
@@ -10017,7 +11898,7 @@
               <a:t>optimization</a:t>
             </a:r>
             <a:r>
-              <a:rPr lang="it-IT" sz="1000" dirty="0">
+              <a:rPr lang="it-IT" sz="1100" dirty="0">
                 <a:solidFill>
                   <a:srgbClr val="07133D"/>
                 </a:solidFill>
@@ -10025,7 +11906,7 @@
               <a:t> </a:t>
             </a:r>
             <a:r>
-              <a:rPr lang="it-IT" sz="1000" dirty="0" err="1">
+              <a:rPr lang="it-IT" sz="1100" dirty="0" err="1">
                 <a:solidFill>
                   <a:srgbClr val="07133D"/>
                 </a:solidFill>
@@ -10033,7 +11914,7 @@
               <a:t>etc</a:t>
             </a:r>
             <a:r>
-              <a:rPr lang="it-IT" sz="1000" dirty="0">
+              <a:rPr lang="it-IT" sz="1100" dirty="0">
                 <a:solidFill>
                   <a:srgbClr val="07133D"/>
                 </a:solidFill>
@@ -10118,12 +11999,20 @@
           <a:lstStyle/>
           <a:p>
             <a:r>
+              <a:rPr lang="it-IT" sz="1400" b="1" dirty="0" err="1">
+                <a:solidFill>
+                  <a:srgbClr val="07133D"/>
+                </a:solidFill>
+              </a:rPr>
+              <a:t>External</a:t>
+            </a:r>
+            <a:r>
               <a:rPr lang="it-IT" sz="1400" b="1" dirty="0">
                 <a:solidFill>
                   <a:srgbClr val="07133D"/>
                 </a:solidFill>
               </a:rPr>
-              <a:t>Limits</a:t>
+              <a:t> Limits</a:t>
             </a:r>
             <a:r>
               <a:rPr lang="it-IT" sz="1400" dirty="0">
@@ -10200,7 +12089,7 @@
 </p:sld>
 </file>
 
-<file path=ppt/slides/slide16.xml><?xml version="1.0" encoding="utf-8"?>
+<file path=ppt/slides/slide17.xml><?xml version="1.0" encoding="utf-8"?>
 <p:sld xmlns:a="http://schemas.openxmlformats.org/drawingml/2006/main" xmlns:r="http://schemas.openxmlformats.org/officeDocument/2006/relationships" xmlns:p="http://schemas.openxmlformats.org/presentationml/2006/main">
   <p:cSld name="Slide 8">
     <p:bg>
@@ -10415,8 +12304,8 @@
         </p:nvSpPr>
         <p:spPr>
           <a:xfrm>
-            <a:off x="636104" y="1353313"/>
-            <a:ext cx="2971800" cy="3959352"/>
+            <a:off x="647679" y="1746852"/>
+            <a:ext cx="2971800" cy="3520435"/>
           </a:xfrm>
           <a:prstGeom prst="roundRect">
             <a:avLst>
@@ -10455,8 +12344,8 @@
         </p:nvSpPr>
         <p:spPr>
           <a:xfrm>
-            <a:off x="3739499" y="1371203"/>
-            <a:ext cx="2971800" cy="3959352"/>
+            <a:off x="3751074" y="1764742"/>
+            <a:ext cx="2971800" cy="3502546"/>
           </a:xfrm>
           <a:prstGeom prst="roundRect">
             <a:avLst>
@@ -10495,7 +12384,7 @@
         </p:nvSpPr>
         <p:spPr>
           <a:xfrm>
-            <a:off x="782408" y="1517905"/>
+            <a:off x="793983" y="1911444"/>
             <a:ext cx="2688336" cy="164592"/>
           </a:xfrm>
           <a:prstGeom prst="rect">
@@ -10542,7 +12431,7 @@
         </p:nvSpPr>
         <p:spPr>
           <a:xfrm>
-            <a:off x="3882224" y="1517905"/>
+            <a:off x="3893799" y="1911444"/>
             <a:ext cx="2688336" cy="164592"/>
           </a:xfrm>
           <a:prstGeom prst="rect">
@@ -10589,7 +12478,7 @@
         </p:nvSpPr>
         <p:spPr>
           <a:xfrm>
-            <a:off x="936664" y="2121008"/>
+            <a:off x="948239" y="2514547"/>
             <a:ext cx="1408176" cy="224627"/>
           </a:xfrm>
           <a:prstGeom prst="rect">
@@ -10636,7 +12525,7 @@
         </p:nvSpPr>
         <p:spPr>
           <a:xfrm>
-            <a:off x="2400300" y="2084833"/>
+            <a:off x="2411875" y="2478372"/>
             <a:ext cx="1042416" cy="256032"/>
           </a:xfrm>
           <a:prstGeom prst="roundRect">
@@ -10676,7 +12565,7 @@
         </p:nvSpPr>
         <p:spPr>
           <a:xfrm>
-            <a:off x="2419184" y="2121014"/>
+            <a:off x="2430759" y="2514553"/>
             <a:ext cx="969264" cy="215877"/>
           </a:xfrm>
           <a:prstGeom prst="rect">
@@ -10723,7 +12612,7 @@
         </p:nvSpPr>
         <p:spPr>
           <a:xfrm>
-            <a:off x="928712" y="2532889"/>
+            <a:off x="940287" y="2926428"/>
             <a:ext cx="2331720" cy="0"/>
           </a:xfrm>
           <a:prstGeom prst="line">
@@ -10759,7 +12648,7 @@
         </p:nvSpPr>
         <p:spPr>
           <a:xfrm>
-            <a:off x="928712" y="3246121"/>
+            <a:off x="940287" y="3639660"/>
             <a:ext cx="2331720" cy="0"/>
           </a:xfrm>
           <a:prstGeom prst="line">
@@ -10795,7 +12684,7 @@
         </p:nvSpPr>
         <p:spPr>
           <a:xfrm>
-            <a:off x="928712" y="3502153"/>
+            <a:off x="940287" y="3895692"/>
             <a:ext cx="1408176" cy="347472"/>
           </a:xfrm>
           <a:prstGeom prst="rect">
@@ -10842,7 +12731,7 @@
         </p:nvSpPr>
         <p:spPr>
           <a:xfrm>
-            <a:off x="928712" y="3959353"/>
+            <a:off x="940287" y="4352892"/>
             <a:ext cx="2331720" cy="0"/>
           </a:xfrm>
           <a:prstGeom prst="line">
@@ -10878,7 +12767,7 @@
         </p:nvSpPr>
         <p:spPr>
           <a:xfrm>
-            <a:off x="928712" y="4215385"/>
+            <a:off x="940287" y="4608924"/>
             <a:ext cx="1408176" cy="347472"/>
           </a:xfrm>
           <a:prstGeom prst="rect">
@@ -10905,7 +12794,7 @@
                 <a:ea typeface="Aptos" pitchFamily="34" charset="-122"/>
                 <a:cs typeface="Aptos" pitchFamily="34" charset="-120"/>
               </a:rPr>
-              <a:t>NAT gateways and ALB hourly charges</a:t>
+              <a:t>Networking, ALB and security</a:t>
             </a:r>
             <a:endParaRPr lang="en-US" sz="1080" dirty="0"/>
           </a:p>
@@ -10925,7 +12814,7 @@
         </p:nvSpPr>
         <p:spPr>
           <a:xfrm>
-            <a:off x="4019384" y="2075689"/>
+            <a:off x="4030959" y="2469228"/>
             <a:ext cx="1444752" cy="384048"/>
           </a:xfrm>
           <a:prstGeom prst="rect">
@@ -10972,7 +12861,7 @@
         </p:nvSpPr>
         <p:spPr>
           <a:xfrm>
-            <a:off x="5500711" y="2084833"/>
+            <a:off x="5512286" y="2478372"/>
             <a:ext cx="1003455" cy="252052"/>
           </a:xfrm>
           <a:prstGeom prst="roundRect">
@@ -11012,7 +12901,7 @@
         </p:nvSpPr>
         <p:spPr>
           <a:xfrm>
-            <a:off x="5500711" y="2134334"/>
+            <a:off x="5512286" y="2527873"/>
             <a:ext cx="1003455" cy="310893"/>
           </a:xfrm>
           <a:prstGeom prst="rect">
@@ -11059,7 +12948,7 @@
         </p:nvSpPr>
         <p:spPr>
           <a:xfrm>
-            <a:off x="4019384" y="2532889"/>
+            <a:off x="4030959" y="2926428"/>
             <a:ext cx="2331720" cy="0"/>
           </a:xfrm>
           <a:prstGeom prst="line">
@@ -11095,7 +12984,7 @@
         </p:nvSpPr>
         <p:spPr>
           <a:xfrm>
-            <a:off x="4019384" y="2788921"/>
+            <a:off x="4030959" y="3182460"/>
             <a:ext cx="1444752" cy="384048"/>
           </a:xfrm>
           <a:prstGeom prst="rect">
@@ -11122,7 +13011,7 @@
                 <a:ea typeface="Aptos" pitchFamily="34" charset="-122"/>
                 <a:cs typeface="Aptos" pitchFamily="34" charset="-120"/>
               </a:rPr>
-              <a:t>AI inference and business-provider usage</a:t>
+              <a:t>AI inference and other provider usage</a:t>
             </a:r>
             <a:endParaRPr lang="en-US" sz="1020" dirty="0"/>
           </a:p>
@@ -11142,7 +13031,7 @@
         </p:nvSpPr>
         <p:spPr>
           <a:xfrm>
-            <a:off x="5537288" y="2789720"/>
+            <a:off x="5548863" y="3183259"/>
             <a:ext cx="932688" cy="256032"/>
           </a:xfrm>
           <a:prstGeom prst="roundRect">
@@ -11182,7 +13071,7 @@
         </p:nvSpPr>
         <p:spPr>
           <a:xfrm>
-            <a:off x="5565913" y="2840805"/>
+            <a:off x="5577488" y="3234344"/>
             <a:ext cx="859536" cy="91440"/>
           </a:xfrm>
           <a:prstGeom prst="rect">
@@ -11229,7 +13118,7 @@
         </p:nvSpPr>
         <p:spPr>
           <a:xfrm>
-            <a:off x="4019384" y="3246121"/>
+            <a:off x="4030959" y="3639660"/>
             <a:ext cx="2331720" cy="0"/>
           </a:xfrm>
           <a:prstGeom prst="line">
@@ -11265,8 +13154,8 @@
         </p:nvSpPr>
         <p:spPr>
           <a:xfrm>
-            <a:off x="4019384" y="3502153"/>
-            <a:ext cx="1444752" cy="384048"/>
+            <a:off x="4030959" y="3941964"/>
+            <a:ext cx="1444752" cy="181289"/>
           </a:xfrm>
           <a:prstGeom prst="rect">
             <a:avLst/>
@@ -11292,7 +13181,7 @@
                 <a:ea typeface="Aptos" pitchFamily="34" charset="-122"/>
                 <a:cs typeface="Aptos" pitchFamily="34" charset="-120"/>
               </a:rPr>
-              <a:t>Storage growth and data transfer</a:t>
+              <a:t>Storage growth and data</a:t>
             </a:r>
             <a:endParaRPr lang="en-US" sz="1020" dirty="0"/>
           </a:p>
@@ -11312,7 +13201,7 @@
         </p:nvSpPr>
         <p:spPr>
           <a:xfrm>
-            <a:off x="5500712" y="3511297"/>
+            <a:off x="5563722" y="3904836"/>
             <a:ext cx="932688" cy="256032"/>
           </a:xfrm>
           <a:prstGeom prst="roundRect">
@@ -11352,7 +13241,7 @@
         </p:nvSpPr>
         <p:spPr>
           <a:xfrm>
-            <a:off x="5537288" y="3559199"/>
+            <a:off x="5600298" y="3952738"/>
             <a:ext cx="859536" cy="287445"/>
           </a:xfrm>
           <a:prstGeom prst="rect">
@@ -11414,7 +13303,7 @@
         </p:nvSpPr>
         <p:spPr>
           <a:xfrm>
-            <a:off x="4019384" y="3959353"/>
+            <a:off x="4030959" y="4352892"/>
             <a:ext cx="2331720" cy="0"/>
           </a:xfrm>
           <a:prstGeom prst="line">
@@ -11450,7 +13339,7 @@
         </p:nvSpPr>
         <p:spPr>
           <a:xfrm>
-            <a:off x="4019384" y="4187953"/>
+            <a:off x="4030959" y="4600293"/>
             <a:ext cx="1444752" cy="509280"/>
           </a:xfrm>
           <a:prstGeom prst="rect">
@@ -11465,11 +13354,60 @@
           </a:bodyPr>
           <a:lstStyle/>
           <a:p>
+            <a:r>
+              <a:rPr lang="it-IT" sz="1050" dirty="0" err="1"/>
+              <a:t>Observability</a:t>
+            </a:r>
+            <a:r>
+              <a:rPr lang="it-IT" sz="1050" dirty="0"/>
+              <a:t>, workflows and </a:t>
+            </a:r>
+            <a:r>
+              <a:rPr lang="it-IT" sz="1050" dirty="0" err="1"/>
+              <a:t>managed</a:t>
+            </a:r>
+            <a:r>
+              <a:rPr lang="it-IT" sz="1050" dirty="0"/>
+              <a:t> services</a:t>
+            </a:r>
+            <a:endParaRPr lang="en-US" sz="1020" dirty="0"/>
+          </a:p>
+        </p:txBody>
+      </p:sp>
+      <p:sp>
+        <p:nvSpPr>
+          <p:cNvPr id="131" name="Text 19">
+            <a:extLst>
+              <a:ext uri="{FF2B5EF4-FFF2-40B4-BE49-F238E27FC236}">
+                <a16:creationId xmlns:a16="http://schemas.microsoft.com/office/drawing/2014/main" id="{737D7FD1-34DA-E7B2-41E4-70D04C44A10D}"/>
+              </a:ext>
+            </a:extLst>
+          </p:cNvPr>
+          <p:cNvSpPr/>
+          <p:nvPr/>
+        </p:nvSpPr>
+        <p:spPr>
+          <a:xfrm>
+            <a:off x="948239" y="3223008"/>
+            <a:ext cx="1408176" cy="224627"/>
+          </a:xfrm>
+          <a:prstGeom prst="rect">
+            <a:avLst/>
+          </a:prstGeom>
+          <a:noFill/>
+          <a:ln/>
+        </p:spPr>
+        <p:txBody>
+          <a:bodyPr wrap="square" lIns="254" tIns="254" rIns="254" bIns="254" rtlCol="0" anchor="t">
+            <a:normAutofit/>
+          </a:bodyPr>
+          <a:lstStyle/>
+          <a:p>
             <a:pPr marL="0" indent="0" algn="l">
               <a:buNone/>
             </a:pPr>
             <a:r>
-              <a:rPr lang="en-US" sz="1020" dirty="0">
+              <a:rPr lang="en-US" sz="1080" dirty="0">
                 <a:solidFill>
                   <a:srgbClr val="07133D"/>
                 </a:solidFill>
@@ -11477,53 +13415,6 @@
                 <a:ea typeface="Aptos" pitchFamily="34" charset="-122"/>
                 <a:cs typeface="Aptos" pitchFamily="34" charset="-120"/>
               </a:rPr>
-              <a:t>Requests, workflow transitions, logs and traces</a:t>
-            </a:r>
-            <a:endParaRPr lang="en-US" sz="1020" dirty="0"/>
-          </a:p>
-        </p:txBody>
-      </p:sp>
-      <p:sp>
-        <p:nvSpPr>
-          <p:cNvPr id="131" name="Text 19">
-            <a:extLst>
-              <a:ext uri="{FF2B5EF4-FFF2-40B4-BE49-F238E27FC236}">
-                <a16:creationId xmlns:a16="http://schemas.microsoft.com/office/drawing/2014/main" id="{737D7FD1-34DA-E7B2-41E4-70D04C44A10D}"/>
-              </a:ext>
-            </a:extLst>
-          </p:cNvPr>
-          <p:cNvSpPr/>
-          <p:nvPr/>
-        </p:nvSpPr>
-        <p:spPr>
-          <a:xfrm>
-            <a:off x="936664" y="2829469"/>
-            <a:ext cx="1408176" cy="224627"/>
-          </a:xfrm>
-          <a:prstGeom prst="rect">
-            <a:avLst/>
-          </a:prstGeom>
-          <a:noFill/>
-          <a:ln/>
-        </p:spPr>
-        <p:txBody>
-          <a:bodyPr wrap="square" lIns="254" tIns="254" rIns="254" bIns="254" rtlCol="0" anchor="t">
-            <a:normAutofit/>
-          </a:bodyPr>
-          <a:lstStyle/>
-          <a:p>
-            <a:pPr marL="0" indent="0" algn="l">
-              <a:buNone/>
-            </a:pPr>
-            <a:r>
-              <a:rPr lang="en-US" sz="1080" dirty="0">
-                <a:solidFill>
-                  <a:srgbClr val="07133D"/>
-                </a:solidFill>
-                <a:latin typeface="Aptos" pitchFamily="34" charset="0"/>
-                <a:ea typeface="Aptos" pitchFamily="34" charset="-122"/>
-                <a:cs typeface="Aptos" pitchFamily="34" charset="-120"/>
-              </a:rPr>
               <a:t>Initial worker nodes</a:t>
             </a:r>
             <a:endParaRPr lang="en-US" sz="1080" dirty="0"/>
@@ -11544,7 +13435,7 @@
         </p:nvSpPr>
         <p:spPr>
           <a:xfrm>
-            <a:off x="2382608" y="2793694"/>
+            <a:off x="2394183" y="3187233"/>
             <a:ext cx="1042416" cy="256032"/>
           </a:xfrm>
           <a:prstGeom prst="roundRect">
@@ -11584,7 +13475,7 @@
         </p:nvSpPr>
         <p:spPr>
           <a:xfrm>
-            <a:off x="2400300" y="2838219"/>
+            <a:off x="2411875" y="3231758"/>
             <a:ext cx="969264" cy="215877"/>
           </a:xfrm>
           <a:prstGeom prst="rect">
@@ -11631,7 +13522,7 @@
         </p:nvSpPr>
         <p:spPr>
           <a:xfrm>
-            <a:off x="2400300" y="3446890"/>
+            <a:off x="2411875" y="3840429"/>
             <a:ext cx="1042416" cy="256032"/>
           </a:xfrm>
           <a:prstGeom prst="roundRect">
@@ -11671,7 +13562,7 @@
         </p:nvSpPr>
         <p:spPr>
           <a:xfrm>
-            <a:off x="2417992" y="3491415"/>
+            <a:off x="2429567" y="3884954"/>
             <a:ext cx="969264" cy="215877"/>
           </a:xfrm>
           <a:prstGeom prst="rect">
@@ -11718,7 +13609,7 @@
         </p:nvSpPr>
         <p:spPr>
           <a:xfrm>
-            <a:off x="2400300" y="4249376"/>
+            <a:off x="2411875" y="4642915"/>
             <a:ext cx="1042416" cy="256032"/>
           </a:xfrm>
           <a:prstGeom prst="roundRect">
@@ -11758,7 +13649,7 @@
         </p:nvSpPr>
         <p:spPr>
           <a:xfrm>
-            <a:off x="2417992" y="4293901"/>
+            <a:off x="2429567" y="4687440"/>
             <a:ext cx="969264" cy="215877"/>
           </a:xfrm>
           <a:prstGeom prst="rect">
@@ -11805,7 +13696,7 @@
         </p:nvSpPr>
         <p:spPr>
           <a:xfrm>
-            <a:off x="5537288" y="4235264"/>
+            <a:off x="5571723" y="4628803"/>
             <a:ext cx="932688" cy="256032"/>
           </a:xfrm>
           <a:prstGeom prst="roundRect">
@@ -11845,7 +13736,7 @@
         </p:nvSpPr>
         <p:spPr>
           <a:xfrm>
-            <a:off x="5573864" y="4283166"/>
+            <a:off x="5608299" y="4676705"/>
             <a:ext cx="859536" cy="287445"/>
           </a:xfrm>
           <a:prstGeom prst="rect">
@@ -11870,7 +13761,7 @@
                 <a:ea typeface="Aptos" pitchFamily="34" charset="-122"/>
                 <a:cs typeface="Aptos" pitchFamily="34" charset="-120"/>
               </a:rPr>
-              <a:t>≈€30-95/</a:t>
+              <a:t>≈€50-140/</a:t>
             </a:r>
             <a:r>
               <a:rPr lang="en-US" sz="1100" b="1" dirty="0" err="1">
@@ -11907,7 +13798,7 @@
         </p:nvSpPr>
         <p:spPr>
           <a:xfrm>
-            <a:off x="7300756" y="1935745"/>
+            <a:off x="7312331" y="2178813"/>
             <a:ext cx="4069080" cy="2788920"/>
           </a:xfrm>
           <a:prstGeom prst="roundRect">
@@ -11947,7 +13838,7 @@
         </p:nvSpPr>
         <p:spPr>
           <a:xfrm>
-            <a:off x="7547644" y="2182633"/>
+            <a:off x="7559219" y="2425701"/>
             <a:ext cx="3566160" cy="219456"/>
           </a:xfrm>
           <a:prstGeom prst="rect">
@@ -11994,7 +13885,7 @@
         </p:nvSpPr>
         <p:spPr>
           <a:xfrm>
-            <a:off x="7483636" y="2402089"/>
+            <a:off x="7495211" y="2645157"/>
             <a:ext cx="3703320" cy="566928"/>
           </a:xfrm>
           <a:prstGeom prst="rect">
@@ -12021,7 +13912,7 @@
                 <a:ea typeface="Aptos" pitchFamily="34" charset="-122"/>
                 <a:cs typeface="Aptos" pitchFamily="34" charset="-120"/>
               </a:rPr>
-              <a:t>€600–700</a:t>
+              <a:t>€600–750</a:t>
             </a:r>
             <a:endParaRPr lang="en-US" sz="3600" dirty="0"/>
           </a:p>
@@ -12041,7 +13932,7 @@
         </p:nvSpPr>
         <p:spPr>
           <a:xfrm>
-            <a:off x="8434612" y="3087889"/>
+            <a:off x="8446187" y="3330957"/>
             <a:ext cx="1783080" cy="219456"/>
           </a:xfrm>
           <a:prstGeom prst="rect">
@@ -12088,7 +13979,7 @@
         </p:nvSpPr>
         <p:spPr>
           <a:xfrm>
-            <a:off x="7639084" y="3499369"/>
+            <a:off x="7650659" y="3742437"/>
             <a:ext cx="3383280" cy="0"/>
           </a:xfrm>
           <a:prstGeom prst="line">
@@ -12124,7 +14015,7 @@
         </p:nvSpPr>
         <p:spPr>
           <a:xfrm>
-            <a:off x="7703092" y="3673105"/>
+            <a:off x="7714667" y="3916173"/>
             <a:ext cx="3246120" cy="201168"/>
           </a:xfrm>
           <a:prstGeom prst="rect">
@@ -12171,7 +14062,7 @@
         </p:nvSpPr>
         <p:spPr>
           <a:xfrm>
-            <a:off x="7684804" y="3919993"/>
+            <a:off x="7696379" y="4163061"/>
             <a:ext cx="3273552" cy="292608"/>
           </a:xfrm>
           <a:prstGeom prst="rect">
@@ -12270,7 +14161,7 @@
 </p:sld>
 </file>
 
-<file path=ppt/slides/slide17.xml><?xml version="1.0" encoding="utf-8"?>
+<file path=ppt/slides/slide18.xml><?xml version="1.0" encoding="utf-8"?>
 <p:sld xmlns:a="http://schemas.openxmlformats.org/drawingml/2006/main" xmlns:r="http://schemas.openxmlformats.org/officeDocument/2006/relationships" xmlns:p="http://schemas.openxmlformats.org/presentationml/2006/main">
   <p:cSld name="Slide 9">
     <p:bg>
@@ -13316,7 +15207,7 @@
         </p:nvSpPr>
         <p:spPr>
           <a:xfrm>
-            <a:off x="749808" y="3781237"/>
+            <a:off x="752857" y="3707445"/>
             <a:ext cx="1783994" cy="181588"/>
           </a:xfrm>
           <a:prstGeom prst="rect">
@@ -13332,7 +15223,7 @@
           <a:p>
             <a:pPr algn="l"/>
             <a:r>
-              <a:rPr sz="1180" b="1">
+              <a:rPr sz="1180" b="1" dirty="0">
                 <a:solidFill>
                   <a:srgbClr val="07133D"/>
                 </a:solidFill>
@@ -13441,7 +15332,6 @@
             </a:endParaRPr>
           </a:p>
           <a:p>
-            <a:pPr algn="l"/>
             <a:r>
               <a:rPr sz="1060" b="0" dirty="0">
                 <a:solidFill>
@@ -13449,7 +15339,70 @@
                 </a:solidFill>
                 <a:latin typeface="Aptos"/>
               </a:rPr>
-              <a:t>Set up Terraform, security, CI</a:t>
+              <a:t>Set up </a:t>
+            </a:r>
+            <a:r>
+              <a:rPr lang="it-IT" sz="1060" b="0" dirty="0" err="1">
+                <a:solidFill>
+                  <a:srgbClr val="07133D"/>
+                </a:solidFill>
+                <a:latin typeface="Aptos"/>
+              </a:rPr>
+              <a:t>infrastructure</a:t>
+            </a:r>
+            <a:r>
+              <a:rPr lang="it-IT" sz="1060" b="0" dirty="0">
+                <a:solidFill>
+                  <a:srgbClr val="07133D"/>
+                </a:solidFill>
+                <a:latin typeface="Aptos"/>
+              </a:rPr>
+              <a:t> (e.g. </a:t>
+            </a:r>
+            <a:r>
+              <a:rPr lang="it-IT" sz="1060" b="0" dirty="0" err="1">
+                <a:solidFill>
+                  <a:srgbClr val="07133D"/>
+                </a:solidFill>
+                <a:latin typeface="Aptos"/>
+              </a:rPr>
+              <a:t>using</a:t>
+            </a:r>
+            <a:r>
+              <a:rPr lang="it-IT" sz="1060" b="0" dirty="0">
+                <a:solidFill>
+                  <a:srgbClr val="07133D"/>
+                </a:solidFill>
+                <a:latin typeface="Aptos"/>
+              </a:rPr>
+              <a:t> </a:t>
+            </a:r>
+            <a:r>
+              <a:rPr sz="1060" b="0" dirty="0">
+                <a:solidFill>
+                  <a:srgbClr val="07133D"/>
+                </a:solidFill>
+                <a:latin typeface="Aptos"/>
+              </a:rPr>
+              <a:t>Terraform</a:t>
+            </a:r>
+            <a:r>
+              <a:rPr lang="it-IT" sz="1060" b="0" dirty="0">
+                <a:solidFill>
+                  <a:srgbClr val="07133D"/>
+                </a:solidFill>
+                <a:latin typeface="Aptos"/>
+              </a:rPr>
+              <a:t>)</a:t>
+            </a:r>
+            <a:r>
+              <a:rPr sz="1060" b="0" dirty="0">
+                <a:solidFill>
+                  <a:srgbClr val="07133D"/>
+                </a:solidFill>
+                <a:latin typeface="Aptos"/>
+              </a:rPr>
+              <a:t>, security, CI</a:t>
             </a:r>
             <a:r>
               <a:rPr lang="it-IT" sz="1060" b="0" dirty="0">
@@ -14010,7 +15963,7 @@
         </p:nvSpPr>
         <p:spPr>
           <a:xfrm>
-            <a:off x="758952" y="5465846"/>
+            <a:off x="752857" y="5552279"/>
             <a:ext cx="1783994" cy="181588"/>
           </a:xfrm>
           <a:prstGeom prst="rect">
@@ -14103,7 +16056,7 @@
         </p:nvSpPr>
         <p:spPr>
           <a:xfrm>
-            <a:off x="2734968" y="5454197"/>
+            <a:off x="2734968" y="5559956"/>
             <a:ext cx="5098237" cy="163122"/>
           </a:xfrm>
           <a:prstGeom prst="rect">
@@ -14321,7 +16274,7 @@
 </p:sld>
 </file>
 
-<file path=ppt/slides/slide18.xml><?xml version="1.0" encoding="utf-8"?>
+<file path=ppt/slides/slide19.xml><?xml version="1.0" encoding="utf-8"?>
 <p:sld xmlns:a="http://schemas.openxmlformats.org/drawingml/2006/main" xmlns:r="http://schemas.openxmlformats.org/officeDocument/2006/relationships" xmlns:p="http://schemas.openxmlformats.org/presentationml/2006/main">
   <p:cSld name="Slide 10">
     <p:bg>
@@ -14420,7 +16373,7 @@
                 <a:ea typeface="Aptos Display" pitchFamily="34" charset="-122"/>
                 <a:cs typeface="Aptos Display" pitchFamily="34" charset="-120"/>
               </a:rPr>
-              <a:t>AI usage and decisive confirmations</a:t>
+              <a:t>AI usage</a:t>
             </a:r>
             <a:endParaRPr lang="en-US" sz="2750" dirty="0"/>
           </a:p>
@@ -14589,6 +16542,22 @@
               <a:rPr lang="it-IT" dirty="0"/>
               <a:t>, </a:t>
             </a:r>
+            <a:r>
+              <a:rPr lang="it-IT" dirty="0" err="1"/>
+              <a:t>tables</a:t>
+            </a:r>
+            <a:r>
+              <a:rPr lang="it-IT" dirty="0"/>
+              <a:t>, </a:t>
+            </a:r>
+            <a:r>
+              <a:rPr lang="it-IT" dirty="0" err="1"/>
+              <a:t>etc</a:t>
+            </a:r>
+            <a:r>
+              <a:rPr lang="it-IT" dirty="0"/>
+              <a:t>…</a:t>
+            </a:r>
           </a:p>
           <a:p>
             <a:pPr marL="742950" lvl="1" indent="-285750">
@@ -14617,7 +16586,15 @@
             </a:r>
             <a:r>
               <a:rPr lang="it-IT" dirty="0"/>
-              <a:t> design, </a:t>
+              <a:t> design </a:t>
+            </a:r>
+            <a:r>
+              <a:rPr lang="it-IT" dirty="0" err="1"/>
+              <a:t>discussion</a:t>
+            </a:r>
+            <a:r>
+              <a:rPr lang="it-IT" dirty="0"/>
+              <a:t>, </a:t>
             </a:r>
             <a:r>
               <a:rPr lang="it-IT" dirty="0" err="1"/>
@@ -14633,7 +16610,7 @@
             </a:r>
             <a:r>
               <a:rPr lang="it-IT" dirty="0"/>
-              <a:t>. Review of </a:t>
+              <a:t>. Critical review of </a:t>
             </a:r>
             <a:r>
               <a:rPr lang="it-IT" dirty="0" err="1"/>
@@ -15273,8 +17250,8 @@
         </p:nvSpPr>
         <p:spPr>
           <a:xfrm>
-            <a:off x="2814763" y="5405126"/>
-            <a:ext cx="2514600" cy="201168"/>
+            <a:off x="2778187" y="5325751"/>
+            <a:ext cx="2514600" cy="337306"/>
           </a:xfrm>
           <a:prstGeom prst="rect">
             <a:avLst/>
@@ -15284,7 +17261,7 @@
         </p:spPr>
         <p:txBody>
           <a:bodyPr wrap="square" lIns="254" tIns="254" rIns="254" bIns="254" rtlCol="0" anchor="t">
-            <a:normAutofit fontScale="77500" lnSpcReduction="20000"/>
+            <a:normAutofit/>
           </a:bodyPr>
           <a:lstStyle/>
           <a:p>
@@ -15489,11 +17466,11 @@
             </a:r>
             <a:r>
               <a:rPr lang="it-IT" sz="1400" dirty="0" err="1"/>
-              <a:t>alternativesm</a:t>
+              <a:t>alternatives</a:t>
             </a:r>
             <a:r>
               <a:rPr lang="it-IT" sz="1400" dirty="0"/>
-              <a:t> </a:t>
+              <a:t>, </a:t>
             </a:r>
             <a:r>
               <a:rPr lang="it-IT" sz="1400" dirty="0" err="1"/>
@@ -15584,7 +17561,1830 @@
 </p:sld>
 </file>
 
-<file path=ppt/slides/slide19.xml><?xml version="1.0" encoding="utf-8"?>
+<file path=ppt/slides/slide2.xml><?xml version="1.0" encoding="utf-8"?>
+<p:sld xmlns:a="http://schemas.openxmlformats.org/drawingml/2006/main" xmlns:r="http://schemas.openxmlformats.org/officeDocument/2006/relationships" xmlns:p="http://schemas.openxmlformats.org/presentationml/2006/main">
+  <p:cSld>
+    <p:spTree>
+      <p:nvGrpSpPr>
+        <p:cNvPr id="1" name="">
+          <a:extLst>
+            <a:ext uri="{FF2B5EF4-FFF2-40B4-BE49-F238E27FC236}">
+              <a16:creationId xmlns:a16="http://schemas.microsoft.com/office/drawing/2014/main" id="{0C25128D-8E86-B829-7F4D-2C76FDC9A088}"/>
+            </a:ext>
+          </a:extLst>
+        </p:cNvPr>
+        <p:cNvGrpSpPr/>
+        <p:nvPr/>
+      </p:nvGrpSpPr>
+      <p:grpSpPr>
+        <a:xfrm>
+          <a:off x="0" y="0"/>
+          <a:ext cx="0" cy="0"/>
+          <a:chOff x="0" y="0"/>
+          <a:chExt cx="0" cy="0"/>
+        </a:xfrm>
+      </p:grpSpPr>
+      <p:sp>
+        <p:nvSpPr>
+          <p:cNvPr id="2" name="Text 0">
+            <a:extLst>
+              <a:ext uri="{FF2B5EF4-FFF2-40B4-BE49-F238E27FC236}">
+                <a16:creationId xmlns:a16="http://schemas.microsoft.com/office/drawing/2014/main" id="{4811985E-482F-5A1E-CFB3-38FCB2691487}"/>
+              </a:ext>
+            </a:extLst>
+          </p:cNvPr>
+          <p:cNvSpPr/>
+          <p:nvPr/>
+        </p:nvSpPr>
+        <p:spPr>
+          <a:xfrm>
+            <a:off x="502920" y="219456"/>
+            <a:ext cx="2194560" cy="201168"/>
+          </a:xfrm>
+          <a:prstGeom prst="rect">
+            <a:avLst/>
+          </a:prstGeom>
+          <a:noFill/>
+          <a:ln/>
+        </p:spPr>
+        <p:txBody>
+          <a:bodyPr wrap="square" lIns="0" tIns="0" rIns="0" bIns="0" rtlCol="0" anchor="ctr"/>
+          <a:lstStyle/>
+          <a:p>
+            <a:pPr marL="0" indent="0">
+              <a:buNone/>
+            </a:pPr>
+            <a:r>
+              <a:rPr lang="en-US" sz="780" b="1" dirty="0">
+                <a:solidFill>
+                  <a:srgbClr val="0B63E5"/>
+                </a:solidFill>
+                <a:latin typeface="Aptos" pitchFamily="34" charset="0"/>
+                <a:ea typeface="Aptos" pitchFamily="34" charset="-122"/>
+                <a:cs typeface="Aptos" pitchFamily="34" charset="-120"/>
+              </a:rPr>
+              <a:t>MERIDIAN TELECOM</a:t>
+            </a:r>
+            <a:endParaRPr lang="en-US" sz="780" dirty="0"/>
+          </a:p>
+        </p:txBody>
+      </p:sp>
+      <p:sp>
+        <p:nvSpPr>
+          <p:cNvPr id="3" name="Text 1">
+            <a:extLst>
+              <a:ext uri="{FF2B5EF4-FFF2-40B4-BE49-F238E27FC236}">
+                <a16:creationId xmlns:a16="http://schemas.microsoft.com/office/drawing/2014/main" id="{7E63F7F2-395C-2202-AAED-796D46E2307A}"/>
+              </a:ext>
+            </a:extLst>
+          </p:cNvPr>
+          <p:cNvSpPr/>
+          <p:nvPr/>
+        </p:nvSpPr>
+        <p:spPr>
+          <a:xfrm>
+            <a:off x="502920" y="438912"/>
+            <a:ext cx="10972800" cy="438912"/>
+          </a:xfrm>
+          <a:prstGeom prst="rect">
+            <a:avLst/>
+          </a:prstGeom>
+          <a:noFill/>
+          <a:ln/>
+        </p:spPr>
+        <p:txBody>
+          <a:bodyPr wrap="square" lIns="0" tIns="0" rIns="0" bIns="0" rtlCol="0" anchor="ctr">
+            <a:normAutofit/>
+          </a:bodyPr>
+          <a:lstStyle/>
+          <a:p>
+            <a:pPr marL="0" indent="0">
+              <a:buNone/>
+            </a:pPr>
+            <a:r>
+              <a:rPr lang="en-US" sz="2750" b="1" dirty="0">
+                <a:solidFill>
+                  <a:srgbClr val="07133D"/>
+                </a:solidFill>
+                <a:latin typeface="Aptos Display" pitchFamily="34" charset="0"/>
+                <a:ea typeface="Aptos Display" pitchFamily="34" charset="-122"/>
+                <a:cs typeface="Aptos Display" pitchFamily="34" charset="-120"/>
+              </a:rPr>
+              <a:t>Requirements and Open Points </a:t>
+            </a:r>
+            <a:endParaRPr lang="en-US" sz="2750" dirty="0"/>
+          </a:p>
+        </p:txBody>
+      </p:sp>
+      <p:sp>
+        <p:nvSpPr>
+          <p:cNvPr id="5" name="Shape 3">
+            <a:extLst>
+              <a:ext uri="{FF2B5EF4-FFF2-40B4-BE49-F238E27FC236}">
+                <a16:creationId xmlns:a16="http://schemas.microsoft.com/office/drawing/2014/main" id="{970E0A8E-4D56-5084-82D4-6F905B56602B}"/>
+              </a:ext>
+            </a:extLst>
+          </p:cNvPr>
+          <p:cNvSpPr/>
+          <p:nvPr/>
+        </p:nvSpPr>
+        <p:spPr>
+          <a:xfrm>
+            <a:off x="502920" y="1115568"/>
+            <a:ext cx="11155680" cy="0"/>
+          </a:xfrm>
+          <a:prstGeom prst="line">
+            <a:avLst/>
+          </a:prstGeom>
+          <a:noFill/>
+          <a:ln w="12700">
+            <a:solidFill>
+              <a:srgbClr val="D6DEE9"/>
+            </a:solidFill>
+            <a:prstDash val="solid"/>
+          </a:ln>
+        </p:spPr>
+        <p:txBody>
+          <a:bodyPr/>
+          <a:lstStyle/>
+          <a:p>
+            <a:endParaRPr lang="it-IT"/>
+          </a:p>
+        </p:txBody>
+      </p:sp>
+      <p:sp>
+        <p:nvSpPr>
+          <p:cNvPr id="6" name="Shape 4">
+            <a:extLst>
+              <a:ext uri="{FF2B5EF4-FFF2-40B4-BE49-F238E27FC236}">
+                <a16:creationId xmlns:a16="http://schemas.microsoft.com/office/drawing/2014/main" id="{3148EE6F-2796-40B4-8859-3D177CF559C2}"/>
+              </a:ext>
+            </a:extLst>
+          </p:cNvPr>
+          <p:cNvSpPr/>
+          <p:nvPr/>
+        </p:nvSpPr>
+        <p:spPr>
+          <a:xfrm>
+            <a:off x="502920" y="6455664"/>
+            <a:ext cx="11155680" cy="0"/>
+          </a:xfrm>
+          <a:prstGeom prst="line">
+            <a:avLst/>
+          </a:prstGeom>
+          <a:noFill/>
+          <a:ln w="10160">
+            <a:solidFill>
+              <a:srgbClr val="E1E7F0"/>
+            </a:solidFill>
+            <a:prstDash val="solid"/>
+          </a:ln>
+        </p:spPr>
+        <p:txBody>
+          <a:bodyPr/>
+          <a:lstStyle/>
+          <a:p>
+            <a:endParaRPr lang="it-IT"/>
+          </a:p>
+        </p:txBody>
+      </p:sp>
+      <p:sp>
+        <p:nvSpPr>
+          <p:cNvPr id="7" name="Text 5">
+            <a:extLst>
+              <a:ext uri="{FF2B5EF4-FFF2-40B4-BE49-F238E27FC236}">
+                <a16:creationId xmlns:a16="http://schemas.microsoft.com/office/drawing/2014/main" id="{3974115F-23E9-C01C-B5FD-8464584041C9}"/>
+              </a:ext>
+            </a:extLst>
+          </p:cNvPr>
+          <p:cNvSpPr/>
+          <p:nvPr/>
+        </p:nvSpPr>
+        <p:spPr>
+          <a:xfrm>
+            <a:off x="502920" y="6519672"/>
+            <a:ext cx="2286000" cy="201168"/>
+          </a:xfrm>
+          <a:prstGeom prst="rect">
+            <a:avLst/>
+          </a:prstGeom>
+          <a:noFill/>
+          <a:ln/>
+        </p:spPr>
+        <p:txBody>
+          <a:bodyPr wrap="square" lIns="0" tIns="0" rIns="0" bIns="0" rtlCol="0" anchor="ctr"/>
+          <a:lstStyle/>
+          <a:p>
+            <a:pPr marL="0" indent="0">
+              <a:buNone/>
+            </a:pPr>
+            <a:r>
+              <a:rPr lang="en-US" sz="850" dirty="0">
+                <a:solidFill>
+                  <a:srgbClr val="7B8497"/>
+                </a:solidFill>
+              </a:rPr>
+              <a:t>1/10</a:t>
+            </a:r>
+            <a:endParaRPr lang="en-US" sz="850" dirty="0"/>
+          </a:p>
+        </p:txBody>
+      </p:sp>
+      <p:sp>
+        <p:nvSpPr>
+          <p:cNvPr id="11" name="Shape 9">
+            <a:extLst>
+              <a:ext uri="{FF2B5EF4-FFF2-40B4-BE49-F238E27FC236}">
+                <a16:creationId xmlns:a16="http://schemas.microsoft.com/office/drawing/2014/main" id="{31222964-3BF4-12A1-CE7A-9942C513F34C}"/>
+              </a:ext>
+            </a:extLst>
+          </p:cNvPr>
+          <p:cNvSpPr/>
+          <p:nvPr/>
+        </p:nvSpPr>
+        <p:spPr>
+          <a:xfrm>
+            <a:off x="1423194" y="4695119"/>
+            <a:ext cx="1253955" cy="520844"/>
+          </a:xfrm>
+          <a:prstGeom prst="roundRect">
+            <a:avLst>
+              <a:gd name="adj" fmla="val 10959"/>
+            </a:avLst>
+          </a:prstGeom>
+          <a:solidFill>
+            <a:srgbClr val="EAF5FF"/>
+          </a:solidFill>
+          <a:ln w="13970">
+            <a:solidFill>
+              <a:srgbClr val="0B63E5"/>
+            </a:solidFill>
+            <a:prstDash val="solid"/>
+          </a:ln>
+        </p:spPr>
+        <p:txBody>
+          <a:bodyPr/>
+          <a:lstStyle/>
+          <a:p>
+            <a:endParaRPr lang="it-IT"/>
+          </a:p>
+        </p:txBody>
+      </p:sp>
+      <p:sp>
+        <p:nvSpPr>
+          <p:cNvPr id="12" name="Text 10">
+            <a:extLst>
+              <a:ext uri="{FF2B5EF4-FFF2-40B4-BE49-F238E27FC236}">
+                <a16:creationId xmlns:a16="http://schemas.microsoft.com/office/drawing/2014/main" id="{C4F91B79-EB12-419B-8725-F7B2C4BED056}"/>
+              </a:ext>
+            </a:extLst>
+          </p:cNvPr>
+          <p:cNvSpPr/>
+          <p:nvPr/>
+        </p:nvSpPr>
+        <p:spPr>
+          <a:xfrm>
+            <a:off x="1423194" y="4837149"/>
+            <a:ext cx="1253955" cy="211093"/>
+          </a:xfrm>
+          <a:prstGeom prst="rect">
+            <a:avLst/>
+          </a:prstGeom>
+          <a:noFill/>
+          <a:ln/>
+        </p:spPr>
+        <p:txBody>
+          <a:bodyPr wrap="square" lIns="0" tIns="0" rIns="0" bIns="0" rtlCol="0" anchor="ctr">
+            <a:normAutofit/>
+          </a:bodyPr>
+          <a:lstStyle/>
+          <a:p>
+            <a:pPr marL="0" indent="0" algn="ctr">
+              <a:buNone/>
+            </a:pPr>
+            <a:r>
+              <a:rPr lang="en-US" sz="1220" b="1" dirty="0">
+                <a:solidFill>
+                  <a:srgbClr val="07133D"/>
+                </a:solidFill>
+              </a:rPr>
+              <a:t>Chat/Offer</a:t>
+            </a:r>
+            <a:endParaRPr lang="en-US" sz="1220" dirty="0"/>
+          </a:p>
+        </p:txBody>
+      </p:sp>
+      <p:sp>
+        <p:nvSpPr>
+          <p:cNvPr id="14" name="Shape 12">
+            <a:extLst>
+              <a:ext uri="{FF2B5EF4-FFF2-40B4-BE49-F238E27FC236}">
+                <a16:creationId xmlns:a16="http://schemas.microsoft.com/office/drawing/2014/main" id="{51ABE17C-1722-5C76-C196-72C0BA75FAB7}"/>
+              </a:ext>
+            </a:extLst>
+          </p:cNvPr>
+          <p:cNvSpPr/>
+          <p:nvPr/>
+        </p:nvSpPr>
+        <p:spPr>
+          <a:xfrm>
+            <a:off x="2838146" y="4938058"/>
+            <a:ext cx="400746" cy="0"/>
+          </a:xfrm>
+          <a:prstGeom prst="line">
+            <a:avLst/>
+          </a:prstGeom>
+          <a:noFill/>
+          <a:ln w="17780">
+            <a:solidFill>
+              <a:srgbClr val="0B63E5"/>
+            </a:solidFill>
+            <a:prstDash val="solid"/>
+            <a:tailEnd type="triangle"/>
+          </a:ln>
+        </p:spPr>
+        <p:txBody>
+          <a:bodyPr/>
+          <a:lstStyle/>
+          <a:p>
+            <a:endParaRPr lang="it-IT"/>
+          </a:p>
+        </p:txBody>
+      </p:sp>
+      <p:sp>
+        <p:nvSpPr>
+          <p:cNvPr id="51" name="Shape 9">
+            <a:extLst>
+              <a:ext uri="{FF2B5EF4-FFF2-40B4-BE49-F238E27FC236}">
+                <a16:creationId xmlns:a16="http://schemas.microsoft.com/office/drawing/2014/main" id="{40CDE9A9-3FB1-2611-8330-9C8119046709}"/>
+              </a:ext>
+            </a:extLst>
+          </p:cNvPr>
+          <p:cNvSpPr/>
+          <p:nvPr/>
+        </p:nvSpPr>
+        <p:spPr>
+          <a:xfrm>
+            <a:off x="3399889" y="4695119"/>
+            <a:ext cx="1253955" cy="520844"/>
+          </a:xfrm>
+          <a:prstGeom prst="roundRect">
+            <a:avLst>
+              <a:gd name="adj" fmla="val 10959"/>
+            </a:avLst>
+          </a:prstGeom>
+          <a:solidFill>
+            <a:srgbClr val="EAF5FF"/>
+          </a:solidFill>
+          <a:ln w="13970">
+            <a:solidFill>
+              <a:srgbClr val="0B63E5"/>
+            </a:solidFill>
+            <a:prstDash val="solid"/>
+          </a:ln>
+        </p:spPr>
+        <p:txBody>
+          <a:bodyPr/>
+          <a:lstStyle/>
+          <a:p>
+            <a:endParaRPr lang="it-IT"/>
+          </a:p>
+        </p:txBody>
+      </p:sp>
+      <p:sp>
+        <p:nvSpPr>
+          <p:cNvPr id="52" name="Text 10">
+            <a:extLst>
+              <a:ext uri="{FF2B5EF4-FFF2-40B4-BE49-F238E27FC236}">
+                <a16:creationId xmlns:a16="http://schemas.microsoft.com/office/drawing/2014/main" id="{4015736F-12D4-919C-1A07-9306F4C95025}"/>
+              </a:ext>
+            </a:extLst>
+          </p:cNvPr>
+          <p:cNvSpPr/>
+          <p:nvPr/>
+        </p:nvSpPr>
+        <p:spPr>
+          <a:xfrm>
+            <a:off x="3399889" y="4837149"/>
+            <a:ext cx="1253955" cy="211093"/>
+          </a:xfrm>
+          <a:prstGeom prst="rect">
+            <a:avLst/>
+          </a:prstGeom>
+          <a:noFill/>
+          <a:ln/>
+        </p:spPr>
+        <p:txBody>
+          <a:bodyPr wrap="square" lIns="0" tIns="0" rIns="0" bIns="0" rtlCol="0" anchor="ctr">
+            <a:normAutofit/>
+          </a:bodyPr>
+          <a:lstStyle/>
+          <a:p>
+            <a:pPr marL="0" indent="0" algn="ctr">
+              <a:buNone/>
+            </a:pPr>
+            <a:r>
+              <a:rPr lang="en-US" sz="1220" b="1" dirty="0">
+                <a:solidFill>
+                  <a:srgbClr val="07133D"/>
+                </a:solidFill>
+              </a:rPr>
+              <a:t>Identity Check</a:t>
+            </a:r>
+            <a:endParaRPr lang="en-US" sz="1220" dirty="0"/>
+          </a:p>
+        </p:txBody>
+      </p:sp>
+      <p:sp>
+        <p:nvSpPr>
+          <p:cNvPr id="53" name="Shape 12">
+            <a:extLst>
+              <a:ext uri="{FF2B5EF4-FFF2-40B4-BE49-F238E27FC236}">
+                <a16:creationId xmlns:a16="http://schemas.microsoft.com/office/drawing/2014/main" id="{887BE672-8707-F83B-CEB9-1792CA88A09D}"/>
+              </a:ext>
+            </a:extLst>
+          </p:cNvPr>
+          <p:cNvSpPr/>
+          <p:nvPr/>
+        </p:nvSpPr>
+        <p:spPr>
+          <a:xfrm>
+            <a:off x="4814841" y="4938058"/>
+            <a:ext cx="400746" cy="0"/>
+          </a:xfrm>
+          <a:prstGeom prst="line">
+            <a:avLst/>
+          </a:prstGeom>
+          <a:noFill/>
+          <a:ln w="17780">
+            <a:solidFill>
+              <a:srgbClr val="0B63E5"/>
+            </a:solidFill>
+            <a:prstDash val="solid"/>
+            <a:tailEnd type="triangle"/>
+          </a:ln>
+        </p:spPr>
+        <p:txBody>
+          <a:bodyPr/>
+          <a:lstStyle/>
+          <a:p>
+            <a:endParaRPr lang="it-IT"/>
+          </a:p>
+        </p:txBody>
+      </p:sp>
+      <p:sp>
+        <p:nvSpPr>
+          <p:cNvPr id="54" name="Shape 9">
+            <a:extLst>
+              <a:ext uri="{FF2B5EF4-FFF2-40B4-BE49-F238E27FC236}">
+                <a16:creationId xmlns:a16="http://schemas.microsoft.com/office/drawing/2014/main" id="{C2DE9764-BA3E-9901-357C-AE42A2FFD347}"/>
+              </a:ext>
+            </a:extLst>
+          </p:cNvPr>
+          <p:cNvSpPr/>
+          <p:nvPr/>
+        </p:nvSpPr>
+        <p:spPr>
+          <a:xfrm>
+            <a:off x="5376584" y="4695119"/>
+            <a:ext cx="1253955" cy="520844"/>
+          </a:xfrm>
+          <a:prstGeom prst="roundRect">
+            <a:avLst>
+              <a:gd name="adj" fmla="val 10959"/>
+            </a:avLst>
+          </a:prstGeom>
+          <a:solidFill>
+            <a:srgbClr val="EAF5FF"/>
+          </a:solidFill>
+          <a:ln w="13970">
+            <a:solidFill>
+              <a:srgbClr val="0B63E5"/>
+            </a:solidFill>
+            <a:prstDash val="solid"/>
+          </a:ln>
+        </p:spPr>
+        <p:txBody>
+          <a:bodyPr/>
+          <a:lstStyle/>
+          <a:p>
+            <a:endParaRPr lang="it-IT"/>
+          </a:p>
+        </p:txBody>
+      </p:sp>
+      <p:sp>
+        <p:nvSpPr>
+          <p:cNvPr id="55" name="Text 10">
+            <a:extLst>
+              <a:ext uri="{FF2B5EF4-FFF2-40B4-BE49-F238E27FC236}">
+                <a16:creationId xmlns:a16="http://schemas.microsoft.com/office/drawing/2014/main" id="{37688FCE-60D6-0730-9004-6DEEC12666BF}"/>
+              </a:ext>
+            </a:extLst>
+          </p:cNvPr>
+          <p:cNvSpPr/>
+          <p:nvPr/>
+        </p:nvSpPr>
+        <p:spPr>
+          <a:xfrm>
+            <a:off x="5376583" y="4846979"/>
+            <a:ext cx="1253955" cy="211093"/>
+          </a:xfrm>
+          <a:prstGeom prst="rect">
+            <a:avLst/>
+          </a:prstGeom>
+          <a:noFill/>
+          <a:ln/>
+        </p:spPr>
+        <p:txBody>
+          <a:bodyPr wrap="square" lIns="0" tIns="0" rIns="0" bIns="0" rtlCol="0" anchor="ctr">
+            <a:normAutofit/>
+          </a:bodyPr>
+          <a:lstStyle/>
+          <a:p>
+            <a:pPr marL="0" indent="0" algn="ctr">
+              <a:buNone/>
+            </a:pPr>
+            <a:r>
+              <a:rPr lang="en-US" sz="1220" b="1" dirty="0"/>
+              <a:t>Payment</a:t>
+            </a:r>
+          </a:p>
+        </p:txBody>
+      </p:sp>
+      <p:sp>
+        <p:nvSpPr>
+          <p:cNvPr id="56" name="Shape 12">
+            <a:extLst>
+              <a:ext uri="{FF2B5EF4-FFF2-40B4-BE49-F238E27FC236}">
+                <a16:creationId xmlns:a16="http://schemas.microsoft.com/office/drawing/2014/main" id="{5C2F9F08-7FD2-C003-9486-374E2FE74217}"/>
+              </a:ext>
+            </a:extLst>
+          </p:cNvPr>
+          <p:cNvSpPr/>
+          <p:nvPr/>
+        </p:nvSpPr>
+        <p:spPr>
+          <a:xfrm>
+            <a:off x="6791536" y="4953171"/>
+            <a:ext cx="400746" cy="0"/>
+          </a:xfrm>
+          <a:prstGeom prst="line">
+            <a:avLst/>
+          </a:prstGeom>
+          <a:noFill/>
+          <a:ln w="17780">
+            <a:solidFill>
+              <a:srgbClr val="0B63E5"/>
+            </a:solidFill>
+            <a:prstDash val="solid"/>
+            <a:tailEnd type="triangle"/>
+          </a:ln>
+        </p:spPr>
+        <p:txBody>
+          <a:bodyPr/>
+          <a:lstStyle/>
+          <a:p>
+            <a:endParaRPr lang="it-IT"/>
+          </a:p>
+        </p:txBody>
+      </p:sp>
+      <p:sp>
+        <p:nvSpPr>
+          <p:cNvPr id="57" name="Shape 9">
+            <a:extLst>
+              <a:ext uri="{FF2B5EF4-FFF2-40B4-BE49-F238E27FC236}">
+                <a16:creationId xmlns:a16="http://schemas.microsoft.com/office/drawing/2014/main" id="{58B3BEA7-CCF9-B501-3506-B36CAEFBE350}"/>
+              </a:ext>
+            </a:extLst>
+          </p:cNvPr>
+          <p:cNvSpPr/>
+          <p:nvPr/>
+        </p:nvSpPr>
+        <p:spPr>
+          <a:xfrm>
+            <a:off x="7353279" y="4710232"/>
+            <a:ext cx="1253955" cy="520844"/>
+          </a:xfrm>
+          <a:prstGeom prst="roundRect">
+            <a:avLst>
+              <a:gd name="adj" fmla="val 10959"/>
+            </a:avLst>
+          </a:prstGeom>
+          <a:solidFill>
+            <a:srgbClr val="EAF5FF"/>
+          </a:solidFill>
+          <a:ln w="13970">
+            <a:solidFill>
+              <a:srgbClr val="0B63E5"/>
+            </a:solidFill>
+            <a:prstDash val="solid"/>
+          </a:ln>
+        </p:spPr>
+        <p:txBody>
+          <a:bodyPr/>
+          <a:lstStyle/>
+          <a:p>
+            <a:endParaRPr lang="it-IT"/>
+          </a:p>
+        </p:txBody>
+      </p:sp>
+      <p:sp>
+        <p:nvSpPr>
+          <p:cNvPr id="58" name="Text 10">
+            <a:extLst>
+              <a:ext uri="{FF2B5EF4-FFF2-40B4-BE49-F238E27FC236}">
+                <a16:creationId xmlns:a16="http://schemas.microsoft.com/office/drawing/2014/main" id="{B77555F6-24E4-BBDF-B269-690F77448C15}"/>
+              </a:ext>
+            </a:extLst>
+          </p:cNvPr>
+          <p:cNvSpPr/>
+          <p:nvPr/>
+        </p:nvSpPr>
+        <p:spPr>
+          <a:xfrm>
+            <a:off x="7353278" y="4862092"/>
+            <a:ext cx="1253955" cy="211093"/>
+          </a:xfrm>
+          <a:prstGeom prst="rect">
+            <a:avLst/>
+          </a:prstGeom>
+          <a:noFill/>
+          <a:ln/>
+        </p:spPr>
+        <p:txBody>
+          <a:bodyPr wrap="square" lIns="0" tIns="0" rIns="0" bIns="0" rtlCol="0" anchor="ctr">
+            <a:normAutofit/>
+          </a:bodyPr>
+          <a:lstStyle/>
+          <a:p>
+            <a:pPr marL="0" indent="0" algn="ctr">
+              <a:buNone/>
+            </a:pPr>
+            <a:r>
+              <a:rPr lang="en-US" sz="1220" b="1" dirty="0"/>
+              <a:t>SIM Delivery</a:t>
+            </a:r>
+          </a:p>
+        </p:txBody>
+      </p:sp>
+      <p:sp>
+        <p:nvSpPr>
+          <p:cNvPr id="59" name="Shape 12">
+            <a:extLst>
+              <a:ext uri="{FF2B5EF4-FFF2-40B4-BE49-F238E27FC236}">
+                <a16:creationId xmlns:a16="http://schemas.microsoft.com/office/drawing/2014/main" id="{0E062302-948E-4018-42C4-A98D3DB62305}"/>
+              </a:ext>
+            </a:extLst>
+          </p:cNvPr>
+          <p:cNvSpPr/>
+          <p:nvPr/>
+        </p:nvSpPr>
+        <p:spPr>
+          <a:xfrm>
+            <a:off x="8768230" y="4968284"/>
+            <a:ext cx="400746" cy="0"/>
+          </a:xfrm>
+          <a:prstGeom prst="line">
+            <a:avLst/>
+          </a:prstGeom>
+          <a:noFill/>
+          <a:ln w="17780">
+            <a:solidFill>
+              <a:srgbClr val="0B63E5"/>
+            </a:solidFill>
+            <a:prstDash val="solid"/>
+            <a:tailEnd type="triangle"/>
+          </a:ln>
+        </p:spPr>
+        <p:txBody>
+          <a:bodyPr/>
+          <a:lstStyle/>
+          <a:p>
+            <a:endParaRPr lang="it-IT"/>
+          </a:p>
+        </p:txBody>
+      </p:sp>
+      <p:sp>
+        <p:nvSpPr>
+          <p:cNvPr id="60" name="Shape 9">
+            <a:extLst>
+              <a:ext uri="{FF2B5EF4-FFF2-40B4-BE49-F238E27FC236}">
+                <a16:creationId xmlns:a16="http://schemas.microsoft.com/office/drawing/2014/main" id="{A46EB4E7-51A2-347C-56D1-86DC2708399C}"/>
+              </a:ext>
+            </a:extLst>
+          </p:cNvPr>
+          <p:cNvSpPr/>
+          <p:nvPr/>
+        </p:nvSpPr>
+        <p:spPr>
+          <a:xfrm>
+            <a:off x="9329973" y="4725345"/>
+            <a:ext cx="1253955" cy="520844"/>
+          </a:xfrm>
+          <a:prstGeom prst="roundRect">
+            <a:avLst>
+              <a:gd name="adj" fmla="val 10959"/>
+            </a:avLst>
+          </a:prstGeom>
+          <a:solidFill>
+            <a:srgbClr val="EAF5FF"/>
+          </a:solidFill>
+          <a:ln w="13970">
+            <a:solidFill>
+              <a:srgbClr val="0B63E5"/>
+            </a:solidFill>
+            <a:prstDash val="solid"/>
+          </a:ln>
+        </p:spPr>
+        <p:txBody>
+          <a:bodyPr/>
+          <a:lstStyle/>
+          <a:p>
+            <a:endParaRPr lang="it-IT"/>
+          </a:p>
+        </p:txBody>
+      </p:sp>
+      <p:sp>
+        <p:nvSpPr>
+          <p:cNvPr id="61" name="Text 10">
+            <a:extLst>
+              <a:ext uri="{FF2B5EF4-FFF2-40B4-BE49-F238E27FC236}">
+                <a16:creationId xmlns:a16="http://schemas.microsoft.com/office/drawing/2014/main" id="{638F619D-9AE8-9853-0F6B-EF817153B048}"/>
+              </a:ext>
+            </a:extLst>
+          </p:cNvPr>
+          <p:cNvSpPr/>
+          <p:nvPr/>
+        </p:nvSpPr>
+        <p:spPr>
+          <a:xfrm>
+            <a:off x="9329972" y="4877205"/>
+            <a:ext cx="1253955" cy="211093"/>
+          </a:xfrm>
+          <a:prstGeom prst="rect">
+            <a:avLst/>
+          </a:prstGeom>
+          <a:noFill/>
+          <a:ln/>
+        </p:spPr>
+        <p:txBody>
+          <a:bodyPr wrap="square" lIns="0" tIns="0" rIns="0" bIns="0" rtlCol="0" anchor="ctr">
+            <a:normAutofit/>
+          </a:bodyPr>
+          <a:lstStyle/>
+          <a:p>
+            <a:pPr marL="0" indent="0" algn="ctr">
+              <a:buNone/>
+            </a:pPr>
+            <a:r>
+              <a:rPr lang="en-US" sz="1220" b="1" dirty="0"/>
+              <a:t>Activation</a:t>
+            </a:r>
+          </a:p>
+        </p:txBody>
+      </p:sp>
+      <p:sp>
+        <p:nvSpPr>
+          <p:cNvPr id="4" name="Shape 0">
+            <a:extLst>
+              <a:ext uri="{FF2B5EF4-FFF2-40B4-BE49-F238E27FC236}">
+                <a16:creationId xmlns:a16="http://schemas.microsoft.com/office/drawing/2014/main" id="{A3D944A2-9F79-217F-9F61-665CA8C98CA6}"/>
+              </a:ext>
+            </a:extLst>
+          </p:cNvPr>
+          <p:cNvSpPr/>
+          <p:nvPr/>
+        </p:nvSpPr>
+        <p:spPr>
+          <a:xfrm>
+            <a:off x="548640" y="1498349"/>
+            <a:ext cx="5554980" cy="438912"/>
+          </a:xfrm>
+          <a:prstGeom prst="rect">
+            <a:avLst/>
+          </a:prstGeom>
+          <a:solidFill>
+            <a:srgbClr val="07133D"/>
+          </a:solidFill>
+          <a:ln w="6350">
+            <a:solidFill>
+              <a:srgbClr val="FFFFFF"/>
+            </a:solidFill>
+            <a:prstDash val="solid"/>
+          </a:ln>
+        </p:spPr>
+        <p:txBody>
+          <a:bodyPr/>
+          <a:lstStyle/>
+          <a:p>
+            <a:endParaRPr lang="it-IT"/>
+          </a:p>
+        </p:txBody>
+      </p:sp>
+      <p:sp>
+        <p:nvSpPr>
+          <p:cNvPr id="8" name="Shape 1">
+            <a:extLst>
+              <a:ext uri="{FF2B5EF4-FFF2-40B4-BE49-F238E27FC236}">
+                <a16:creationId xmlns:a16="http://schemas.microsoft.com/office/drawing/2014/main" id="{7D363158-A784-94F9-CA35-95978AD392BE}"/>
+              </a:ext>
+            </a:extLst>
+          </p:cNvPr>
+          <p:cNvSpPr/>
+          <p:nvPr/>
+        </p:nvSpPr>
+        <p:spPr>
+          <a:xfrm>
+            <a:off x="6103620" y="1498349"/>
+            <a:ext cx="5554980" cy="438912"/>
+          </a:xfrm>
+          <a:prstGeom prst="rect">
+            <a:avLst/>
+          </a:prstGeom>
+          <a:solidFill>
+            <a:srgbClr val="07133D"/>
+          </a:solidFill>
+          <a:ln w="6350">
+            <a:solidFill>
+              <a:srgbClr val="FFFFFF"/>
+            </a:solidFill>
+            <a:prstDash val="solid"/>
+          </a:ln>
+        </p:spPr>
+        <p:txBody>
+          <a:bodyPr/>
+          <a:lstStyle/>
+          <a:p>
+            <a:endParaRPr lang="it-IT"/>
+          </a:p>
+        </p:txBody>
+      </p:sp>
+      <p:sp>
+        <p:nvSpPr>
+          <p:cNvPr id="9" name="Shape 2">
+            <a:extLst>
+              <a:ext uri="{FF2B5EF4-FFF2-40B4-BE49-F238E27FC236}">
+                <a16:creationId xmlns:a16="http://schemas.microsoft.com/office/drawing/2014/main" id="{42E1D3B9-C71C-1264-F7DE-5CC58CCD1371}"/>
+              </a:ext>
+            </a:extLst>
+          </p:cNvPr>
+          <p:cNvSpPr/>
+          <p:nvPr/>
+        </p:nvSpPr>
+        <p:spPr>
+          <a:xfrm>
+            <a:off x="548640" y="1937261"/>
+            <a:ext cx="5554980" cy="2057400"/>
+          </a:xfrm>
+          <a:prstGeom prst="rect">
+            <a:avLst/>
+          </a:prstGeom>
+          <a:solidFill>
+            <a:srgbClr val="F4F8FC"/>
+          </a:solidFill>
+          <a:ln w="11430">
+            <a:solidFill>
+              <a:srgbClr val="1F2D3D"/>
+            </a:solidFill>
+            <a:prstDash val="solid"/>
+          </a:ln>
+        </p:spPr>
+        <p:txBody>
+          <a:bodyPr/>
+          <a:lstStyle/>
+          <a:p>
+            <a:endParaRPr lang="it-IT" sz="1400">
+              <a:latin typeface="Aptos" panose="020B0004020202020204" pitchFamily="34" charset="0"/>
+            </a:endParaRPr>
+          </a:p>
+        </p:txBody>
+      </p:sp>
+      <p:sp>
+        <p:nvSpPr>
+          <p:cNvPr id="10" name="Shape 3">
+            <a:extLst>
+              <a:ext uri="{FF2B5EF4-FFF2-40B4-BE49-F238E27FC236}">
+                <a16:creationId xmlns:a16="http://schemas.microsoft.com/office/drawing/2014/main" id="{06D3D24E-C572-9C32-232D-882A10801ED2}"/>
+              </a:ext>
+            </a:extLst>
+          </p:cNvPr>
+          <p:cNvSpPr/>
+          <p:nvPr/>
+        </p:nvSpPr>
+        <p:spPr>
+          <a:xfrm>
+            <a:off x="6103620" y="1937261"/>
+            <a:ext cx="5554980" cy="2057400"/>
+          </a:xfrm>
+          <a:prstGeom prst="rect">
+            <a:avLst/>
+          </a:prstGeom>
+          <a:solidFill>
+            <a:srgbClr val="F4F8FC"/>
+          </a:solidFill>
+          <a:ln w="11430">
+            <a:solidFill>
+              <a:srgbClr val="1F2D3D"/>
+            </a:solidFill>
+            <a:prstDash val="solid"/>
+          </a:ln>
+        </p:spPr>
+        <p:txBody>
+          <a:bodyPr/>
+          <a:lstStyle/>
+          <a:p>
+            <a:endParaRPr lang="it-IT" sz="1400">
+              <a:latin typeface="Aptos" panose="020B0004020202020204" pitchFamily="34" charset="0"/>
+            </a:endParaRPr>
+          </a:p>
+        </p:txBody>
+      </p:sp>
+      <p:sp>
+        <p:nvSpPr>
+          <p:cNvPr id="13" name="Text 4">
+            <a:extLst>
+              <a:ext uri="{FF2B5EF4-FFF2-40B4-BE49-F238E27FC236}">
+                <a16:creationId xmlns:a16="http://schemas.microsoft.com/office/drawing/2014/main" id="{BC3756AB-C32A-7261-09E3-589215B13795}"/>
+              </a:ext>
+            </a:extLst>
+          </p:cNvPr>
+          <p:cNvSpPr/>
+          <p:nvPr/>
+        </p:nvSpPr>
+        <p:spPr>
+          <a:xfrm>
+            <a:off x="685800" y="1617221"/>
+            <a:ext cx="5280660" cy="201168"/>
+          </a:xfrm>
+          <a:prstGeom prst="rect">
+            <a:avLst/>
+          </a:prstGeom>
+          <a:noFill/>
+          <a:ln/>
+        </p:spPr>
+        <p:txBody>
+          <a:bodyPr wrap="square" lIns="0" tIns="0" rIns="0" bIns="0" rtlCol="0" anchor="t">
+            <a:noAutofit/>
+          </a:bodyPr>
+          <a:lstStyle/>
+          <a:p>
+            <a:pPr marL="0" indent="0" algn="l">
+              <a:buNone/>
+            </a:pPr>
+            <a:r>
+              <a:rPr lang="en-US" sz="1400" b="1" dirty="0">
+                <a:solidFill>
+                  <a:schemeClr val="bg1"/>
+                </a:solidFill>
+                <a:latin typeface="Aptos" panose="020B0004020202020204" pitchFamily="34" charset="0"/>
+                <a:ea typeface="Aptos" pitchFamily="34" charset="-122"/>
+                <a:cs typeface="Aptos" pitchFamily="34" charset="-120"/>
+              </a:rPr>
+              <a:t>Platform Goals</a:t>
+            </a:r>
+            <a:endParaRPr lang="en-US" sz="1400" dirty="0">
+              <a:solidFill>
+                <a:schemeClr val="bg1"/>
+              </a:solidFill>
+              <a:latin typeface="Aptos" panose="020B0004020202020204" pitchFamily="34" charset="0"/>
+            </a:endParaRPr>
+          </a:p>
+        </p:txBody>
+      </p:sp>
+      <p:sp>
+        <p:nvSpPr>
+          <p:cNvPr id="15" name="Text 5">
+            <a:extLst>
+              <a:ext uri="{FF2B5EF4-FFF2-40B4-BE49-F238E27FC236}">
+                <a16:creationId xmlns:a16="http://schemas.microsoft.com/office/drawing/2014/main" id="{45BD3569-1FC8-D9FC-D98A-D5E91FF8D6B6}"/>
+              </a:ext>
+            </a:extLst>
+          </p:cNvPr>
+          <p:cNvSpPr/>
+          <p:nvPr/>
+        </p:nvSpPr>
+        <p:spPr>
+          <a:xfrm>
+            <a:off x="6240780" y="1617221"/>
+            <a:ext cx="5280660" cy="201168"/>
+          </a:xfrm>
+          <a:prstGeom prst="rect">
+            <a:avLst/>
+          </a:prstGeom>
+          <a:noFill/>
+          <a:ln/>
+        </p:spPr>
+        <p:txBody>
+          <a:bodyPr wrap="square" lIns="0" tIns="0" rIns="0" bIns="0" rtlCol="0" anchor="t">
+            <a:noAutofit/>
+          </a:bodyPr>
+          <a:lstStyle/>
+          <a:p>
+            <a:pPr marL="0" indent="0" algn="l">
+              <a:buNone/>
+            </a:pPr>
+            <a:r>
+              <a:rPr lang="en-US" sz="1400" b="1" dirty="0">
+                <a:solidFill>
+                  <a:schemeClr val="bg1"/>
+                </a:solidFill>
+                <a:latin typeface="Aptos" panose="020B0004020202020204" pitchFamily="34" charset="0"/>
+                <a:ea typeface="Aptos" pitchFamily="34" charset="-122"/>
+                <a:cs typeface="Aptos" pitchFamily="34" charset="-120"/>
+              </a:rPr>
+              <a:t>Hard Constraints</a:t>
+            </a:r>
+            <a:endParaRPr lang="en-US" sz="1400" dirty="0">
+              <a:solidFill>
+                <a:schemeClr val="bg1"/>
+              </a:solidFill>
+              <a:latin typeface="Aptos" panose="020B0004020202020204" pitchFamily="34" charset="0"/>
+            </a:endParaRPr>
+          </a:p>
+        </p:txBody>
+      </p:sp>
+      <p:sp>
+        <p:nvSpPr>
+          <p:cNvPr id="16" name="Text 6">
+            <a:extLst>
+              <a:ext uri="{FF2B5EF4-FFF2-40B4-BE49-F238E27FC236}">
+                <a16:creationId xmlns:a16="http://schemas.microsoft.com/office/drawing/2014/main" id="{D85A9F17-2CDE-09F0-D9DC-42A07338978F}"/>
+              </a:ext>
+            </a:extLst>
+          </p:cNvPr>
+          <p:cNvSpPr/>
+          <p:nvPr/>
+        </p:nvSpPr>
+        <p:spPr>
+          <a:xfrm>
+            <a:off x="713232" y="2202437"/>
+            <a:ext cx="146304" cy="164592"/>
+          </a:xfrm>
+          <a:prstGeom prst="rect">
+            <a:avLst/>
+          </a:prstGeom>
+          <a:noFill/>
+          <a:ln/>
+        </p:spPr>
+        <p:txBody>
+          <a:bodyPr wrap="square" lIns="0" tIns="0" rIns="0" bIns="0" rtlCol="0" anchor="t">
+            <a:noAutofit/>
+          </a:bodyPr>
+          <a:lstStyle/>
+          <a:p>
+            <a:pPr marL="0" indent="0" algn="l">
+              <a:buNone/>
+            </a:pPr>
+            <a:r>
+              <a:rPr lang="en-US" sz="1400" b="1" dirty="0">
+                <a:solidFill>
+                  <a:srgbClr val="16834A"/>
+                </a:solidFill>
+                <a:latin typeface="Aptos" panose="020B0004020202020204" pitchFamily="34" charset="0"/>
+                <a:ea typeface="Aptos" pitchFamily="34" charset="-122"/>
+                <a:cs typeface="Aptos" pitchFamily="34" charset="-120"/>
+              </a:rPr>
+              <a:t>✓</a:t>
+            </a:r>
+            <a:endParaRPr lang="en-US" sz="1400" dirty="0">
+              <a:latin typeface="Aptos" panose="020B0004020202020204" pitchFamily="34" charset="0"/>
+            </a:endParaRPr>
+          </a:p>
+        </p:txBody>
+      </p:sp>
+      <p:sp>
+        <p:nvSpPr>
+          <p:cNvPr id="17" name="Text 7">
+            <a:extLst>
+              <a:ext uri="{FF2B5EF4-FFF2-40B4-BE49-F238E27FC236}">
+                <a16:creationId xmlns:a16="http://schemas.microsoft.com/office/drawing/2014/main" id="{219F3124-7051-15A2-59F1-A7EA1C959349}"/>
+              </a:ext>
+            </a:extLst>
+          </p:cNvPr>
+          <p:cNvSpPr/>
+          <p:nvPr/>
+        </p:nvSpPr>
+        <p:spPr>
+          <a:xfrm>
+            <a:off x="941832" y="2193293"/>
+            <a:ext cx="4960620" cy="347472"/>
+          </a:xfrm>
+          <a:prstGeom prst="rect">
+            <a:avLst/>
+          </a:prstGeom>
+          <a:noFill/>
+          <a:ln/>
+        </p:spPr>
+        <p:txBody>
+          <a:bodyPr wrap="square" lIns="0" tIns="0" rIns="0" bIns="0" rtlCol="0" anchor="t">
+            <a:noAutofit/>
+          </a:bodyPr>
+          <a:lstStyle/>
+          <a:p>
+            <a:pPr marL="0" indent="0" algn="l">
+              <a:buNone/>
+            </a:pPr>
+            <a:r>
+              <a:rPr lang="en-US" sz="1400" dirty="0">
+                <a:solidFill>
+                  <a:srgbClr val="000000"/>
+                </a:solidFill>
+                <a:latin typeface="Aptos" panose="020B0004020202020204" pitchFamily="34" charset="0"/>
+                <a:ea typeface="Aptos" pitchFamily="34" charset="-122"/>
+                <a:cs typeface="Aptos" pitchFamily="34" charset="-120"/>
+              </a:rPr>
+              <a:t>Resume conversations without losing progress or repeating</a:t>
+            </a:r>
+            <a:endParaRPr lang="en-US" sz="1400" dirty="0">
+              <a:latin typeface="Aptos" panose="020B0004020202020204" pitchFamily="34" charset="0"/>
+            </a:endParaRPr>
+          </a:p>
+          <a:p>
+            <a:pPr marL="0" indent="0" algn="l">
+              <a:buNone/>
+            </a:pPr>
+            <a:r>
+              <a:rPr lang="en-US" sz="1400" dirty="0">
+                <a:solidFill>
+                  <a:srgbClr val="000000"/>
+                </a:solidFill>
+                <a:latin typeface="Aptos" panose="020B0004020202020204" pitchFamily="34" charset="0"/>
+                <a:ea typeface="Aptos" pitchFamily="34" charset="-122"/>
+                <a:cs typeface="Aptos" pitchFamily="34" charset="-120"/>
+              </a:rPr>
+              <a:t>actions.</a:t>
+            </a:r>
+            <a:endParaRPr lang="en-US" sz="1400" dirty="0">
+              <a:latin typeface="Aptos" panose="020B0004020202020204" pitchFamily="34" charset="0"/>
+            </a:endParaRPr>
+          </a:p>
+        </p:txBody>
+      </p:sp>
+      <p:sp>
+        <p:nvSpPr>
+          <p:cNvPr id="18" name="Text 8">
+            <a:extLst>
+              <a:ext uri="{FF2B5EF4-FFF2-40B4-BE49-F238E27FC236}">
+                <a16:creationId xmlns:a16="http://schemas.microsoft.com/office/drawing/2014/main" id="{DE5EDDD2-FDD0-9B22-BD94-EAEB71615DD6}"/>
+              </a:ext>
+            </a:extLst>
+          </p:cNvPr>
+          <p:cNvSpPr/>
+          <p:nvPr/>
+        </p:nvSpPr>
+        <p:spPr>
+          <a:xfrm>
+            <a:off x="713232" y="2861961"/>
+            <a:ext cx="146304" cy="164592"/>
+          </a:xfrm>
+          <a:prstGeom prst="rect">
+            <a:avLst/>
+          </a:prstGeom>
+          <a:noFill/>
+          <a:ln/>
+        </p:spPr>
+        <p:txBody>
+          <a:bodyPr wrap="square" lIns="0" tIns="0" rIns="0" bIns="0" rtlCol="0" anchor="t">
+            <a:noAutofit/>
+          </a:bodyPr>
+          <a:lstStyle/>
+          <a:p>
+            <a:pPr marL="0" indent="0" algn="l">
+              <a:buNone/>
+            </a:pPr>
+            <a:r>
+              <a:rPr lang="en-US" sz="1400" b="1" dirty="0">
+                <a:solidFill>
+                  <a:srgbClr val="16834A"/>
+                </a:solidFill>
+                <a:latin typeface="Aptos" panose="020B0004020202020204" pitchFamily="34" charset="0"/>
+                <a:ea typeface="Aptos" pitchFamily="34" charset="-122"/>
+                <a:cs typeface="Aptos" pitchFamily="34" charset="-120"/>
+              </a:rPr>
+              <a:t>✓</a:t>
+            </a:r>
+            <a:endParaRPr lang="en-US" sz="1400" dirty="0">
+              <a:latin typeface="Aptos" panose="020B0004020202020204" pitchFamily="34" charset="0"/>
+            </a:endParaRPr>
+          </a:p>
+        </p:txBody>
+      </p:sp>
+      <p:sp>
+        <p:nvSpPr>
+          <p:cNvPr id="19" name="Text 9">
+            <a:extLst>
+              <a:ext uri="{FF2B5EF4-FFF2-40B4-BE49-F238E27FC236}">
+                <a16:creationId xmlns:a16="http://schemas.microsoft.com/office/drawing/2014/main" id="{281DFB99-4FC4-9AE7-F663-A62375B0B828}"/>
+              </a:ext>
+            </a:extLst>
+          </p:cNvPr>
+          <p:cNvSpPr/>
+          <p:nvPr/>
+        </p:nvSpPr>
+        <p:spPr>
+          <a:xfrm>
+            <a:off x="941832" y="2852817"/>
+            <a:ext cx="4960620" cy="347472"/>
+          </a:xfrm>
+          <a:prstGeom prst="rect">
+            <a:avLst/>
+          </a:prstGeom>
+          <a:noFill/>
+          <a:ln/>
+        </p:spPr>
+        <p:txBody>
+          <a:bodyPr wrap="square" lIns="0" tIns="0" rIns="0" bIns="0" rtlCol="0" anchor="t">
+            <a:normAutofit/>
+          </a:bodyPr>
+          <a:lstStyle/>
+          <a:p>
+            <a:pPr marL="0" indent="0" algn="l">
+              <a:buNone/>
+            </a:pPr>
+            <a:r>
+              <a:rPr lang="en-US" sz="1400" dirty="0">
+                <a:solidFill>
+                  <a:srgbClr val="000000"/>
+                </a:solidFill>
+                <a:latin typeface="Aptos" panose="020B0004020202020204" pitchFamily="34" charset="0"/>
+                <a:ea typeface="Aptos" pitchFamily="34" charset="-122"/>
+                <a:cs typeface="Aptos" pitchFamily="34" charset="-120"/>
+              </a:rPr>
+              <a:t>Support missing document uploads and manual reviews.</a:t>
+            </a:r>
+            <a:endParaRPr lang="en-US" sz="1400" dirty="0">
+              <a:latin typeface="Aptos" panose="020B0004020202020204" pitchFamily="34" charset="0"/>
+            </a:endParaRPr>
+          </a:p>
+        </p:txBody>
+      </p:sp>
+      <p:sp>
+        <p:nvSpPr>
+          <p:cNvPr id="20" name="Text 10">
+            <a:extLst>
+              <a:ext uri="{FF2B5EF4-FFF2-40B4-BE49-F238E27FC236}">
+                <a16:creationId xmlns:a16="http://schemas.microsoft.com/office/drawing/2014/main" id="{10BD1232-2E23-669A-A7A9-62A400E8444E}"/>
+              </a:ext>
+            </a:extLst>
+          </p:cNvPr>
+          <p:cNvSpPr/>
+          <p:nvPr/>
+        </p:nvSpPr>
+        <p:spPr>
+          <a:xfrm>
+            <a:off x="713232" y="3336293"/>
+            <a:ext cx="146304" cy="164592"/>
+          </a:xfrm>
+          <a:prstGeom prst="rect">
+            <a:avLst/>
+          </a:prstGeom>
+          <a:noFill/>
+          <a:ln/>
+        </p:spPr>
+        <p:txBody>
+          <a:bodyPr wrap="square" lIns="0" tIns="0" rIns="0" bIns="0" rtlCol="0" anchor="t">
+            <a:noAutofit/>
+          </a:bodyPr>
+          <a:lstStyle/>
+          <a:p>
+            <a:pPr marL="0" indent="0" algn="l">
+              <a:buNone/>
+            </a:pPr>
+            <a:r>
+              <a:rPr lang="en-US" sz="1400" b="1" dirty="0">
+                <a:solidFill>
+                  <a:srgbClr val="16834A"/>
+                </a:solidFill>
+                <a:latin typeface="Aptos" panose="020B0004020202020204" pitchFamily="34" charset="0"/>
+                <a:ea typeface="Aptos" pitchFamily="34" charset="-122"/>
+                <a:cs typeface="Aptos" pitchFamily="34" charset="-120"/>
+              </a:rPr>
+              <a:t>✓</a:t>
+            </a:r>
+            <a:endParaRPr lang="en-US" sz="1400" dirty="0">
+              <a:latin typeface="Aptos" panose="020B0004020202020204" pitchFamily="34" charset="0"/>
+            </a:endParaRPr>
+          </a:p>
+        </p:txBody>
+      </p:sp>
+      <p:sp>
+        <p:nvSpPr>
+          <p:cNvPr id="21" name="Text 11">
+            <a:extLst>
+              <a:ext uri="{FF2B5EF4-FFF2-40B4-BE49-F238E27FC236}">
+                <a16:creationId xmlns:a16="http://schemas.microsoft.com/office/drawing/2014/main" id="{1395396B-D728-EFA1-D99D-94BCB1740013}"/>
+              </a:ext>
+            </a:extLst>
+          </p:cNvPr>
+          <p:cNvSpPr/>
+          <p:nvPr/>
+        </p:nvSpPr>
+        <p:spPr>
+          <a:xfrm>
+            <a:off x="941832" y="3327149"/>
+            <a:ext cx="4960620" cy="347472"/>
+          </a:xfrm>
+          <a:prstGeom prst="rect">
+            <a:avLst/>
+          </a:prstGeom>
+          <a:noFill/>
+          <a:ln/>
+        </p:spPr>
+        <p:txBody>
+          <a:bodyPr wrap="square" lIns="0" tIns="0" rIns="0" bIns="0" rtlCol="0" anchor="t">
+            <a:noAutofit/>
+          </a:bodyPr>
+          <a:lstStyle/>
+          <a:p>
+            <a:pPr marL="0" indent="0" algn="l">
+              <a:buNone/>
+            </a:pPr>
+            <a:r>
+              <a:rPr lang="en-US" sz="1400" dirty="0">
+                <a:solidFill>
+                  <a:srgbClr val="000000"/>
+                </a:solidFill>
+                <a:latin typeface="Aptos" panose="020B0004020202020204" pitchFamily="34" charset="0"/>
+                <a:ea typeface="Aptos" pitchFamily="34" charset="-122"/>
+                <a:cs typeface="Aptos" pitchFamily="34" charset="-120"/>
+              </a:rPr>
+              <a:t>Guarantee no duplicate charges, shipments, or premature</a:t>
+            </a:r>
+            <a:endParaRPr lang="en-US" sz="1400" dirty="0">
+              <a:latin typeface="Aptos" panose="020B0004020202020204" pitchFamily="34" charset="0"/>
+            </a:endParaRPr>
+          </a:p>
+          <a:p>
+            <a:pPr marL="0" indent="0" algn="l">
+              <a:buNone/>
+            </a:pPr>
+            <a:r>
+              <a:rPr lang="en-US" sz="1400" dirty="0">
+                <a:solidFill>
+                  <a:srgbClr val="000000"/>
+                </a:solidFill>
+                <a:latin typeface="Aptos" panose="020B0004020202020204" pitchFamily="34" charset="0"/>
+                <a:ea typeface="Aptos" pitchFamily="34" charset="-122"/>
+                <a:cs typeface="Aptos" pitchFamily="34" charset="-120"/>
+              </a:rPr>
+              <a:t>activations.</a:t>
+            </a:r>
+            <a:endParaRPr lang="en-US" sz="1400" dirty="0">
+              <a:latin typeface="Aptos" panose="020B0004020202020204" pitchFamily="34" charset="0"/>
+            </a:endParaRPr>
+          </a:p>
+        </p:txBody>
+      </p:sp>
+      <p:sp>
+        <p:nvSpPr>
+          <p:cNvPr id="22" name="Text 12">
+            <a:extLst>
+              <a:ext uri="{FF2B5EF4-FFF2-40B4-BE49-F238E27FC236}">
+                <a16:creationId xmlns:a16="http://schemas.microsoft.com/office/drawing/2014/main" id="{A2B4AE33-EE4D-7C45-3AAA-06FD20E20884}"/>
+              </a:ext>
+            </a:extLst>
+          </p:cNvPr>
+          <p:cNvSpPr/>
+          <p:nvPr/>
+        </p:nvSpPr>
+        <p:spPr>
+          <a:xfrm>
+            <a:off x="6332220" y="2184149"/>
+            <a:ext cx="109728" cy="164592"/>
+          </a:xfrm>
+          <a:prstGeom prst="rect">
+            <a:avLst/>
+          </a:prstGeom>
+          <a:noFill/>
+          <a:ln/>
+        </p:spPr>
+        <p:txBody>
+          <a:bodyPr wrap="square" lIns="0" tIns="0" rIns="0" bIns="0" rtlCol="0" anchor="t">
+            <a:noAutofit/>
+          </a:bodyPr>
+          <a:lstStyle/>
+          <a:p>
+            <a:pPr marL="0" indent="0" algn="l">
+              <a:buNone/>
+            </a:pPr>
+            <a:r>
+              <a:rPr lang="en-US" sz="1400" dirty="0">
+                <a:solidFill>
+                  <a:srgbClr val="000000"/>
+                </a:solidFill>
+                <a:latin typeface="Aptos" panose="020B0004020202020204" pitchFamily="34" charset="0"/>
+                <a:ea typeface="Aptos" pitchFamily="34" charset="-122"/>
+                <a:cs typeface="Aptos" pitchFamily="34" charset="-120"/>
+              </a:rPr>
+              <a:t>•</a:t>
+            </a:r>
+            <a:endParaRPr lang="en-US" sz="1400" dirty="0">
+              <a:latin typeface="Aptos" panose="020B0004020202020204" pitchFamily="34" charset="0"/>
+            </a:endParaRPr>
+          </a:p>
+        </p:txBody>
+      </p:sp>
+      <p:sp>
+        <p:nvSpPr>
+          <p:cNvPr id="23" name="Text 13">
+            <a:extLst>
+              <a:ext uri="{FF2B5EF4-FFF2-40B4-BE49-F238E27FC236}">
+                <a16:creationId xmlns:a16="http://schemas.microsoft.com/office/drawing/2014/main" id="{32B46CAF-C2A5-9B7B-D642-053D8E220F71}"/>
+              </a:ext>
+            </a:extLst>
+          </p:cNvPr>
+          <p:cNvSpPr/>
+          <p:nvPr/>
+        </p:nvSpPr>
+        <p:spPr>
+          <a:xfrm>
+            <a:off x="6533388" y="2184149"/>
+            <a:ext cx="4869180" cy="201168"/>
+          </a:xfrm>
+          <a:prstGeom prst="rect">
+            <a:avLst/>
+          </a:prstGeom>
+          <a:noFill/>
+          <a:ln/>
+        </p:spPr>
+        <p:txBody>
+          <a:bodyPr wrap="square" lIns="0" tIns="0" rIns="0" bIns="0" rtlCol="0" anchor="ctr">
+            <a:noAutofit/>
+          </a:bodyPr>
+          <a:lstStyle/>
+          <a:p>
+            <a:pPr marL="0" indent="0">
+              <a:buNone/>
+            </a:pPr>
+            <a:r>
+              <a:rPr lang="en-US" sz="1400" b="1" dirty="0">
+                <a:solidFill>
+                  <a:srgbClr val="000000"/>
+                </a:solidFill>
+                <a:latin typeface="Aptos" panose="020B0004020202020204" pitchFamily="34" charset="0"/>
+                <a:ea typeface="Aptos" pitchFamily="34" charset="-122"/>
+                <a:cs typeface="Aptos" pitchFamily="34" charset="-120"/>
+              </a:rPr>
+              <a:t>Team:</a:t>
+            </a:r>
+            <a:r>
+              <a:rPr lang="en-US" sz="1400" dirty="0">
+                <a:solidFill>
+                  <a:srgbClr val="000000"/>
+                </a:solidFill>
+                <a:latin typeface="Aptos" panose="020B0004020202020204" pitchFamily="34" charset="0"/>
+                <a:ea typeface="Aptos" pitchFamily="34" charset="-122"/>
+                <a:cs typeface="Aptos" pitchFamily="34" charset="-120"/>
+              </a:rPr>
+              <a:t> 2 Platform Engineers (AWS/Managed Kubernetes).</a:t>
+            </a:r>
+            <a:endParaRPr lang="en-US" sz="1400" dirty="0">
+              <a:latin typeface="Aptos" panose="020B0004020202020204" pitchFamily="34" charset="0"/>
+            </a:endParaRPr>
+          </a:p>
+        </p:txBody>
+      </p:sp>
+      <p:sp>
+        <p:nvSpPr>
+          <p:cNvPr id="24" name="Text 14">
+            <a:extLst>
+              <a:ext uri="{FF2B5EF4-FFF2-40B4-BE49-F238E27FC236}">
+                <a16:creationId xmlns:a16="http://schemas.microsoft.com/office/drawing/2014/main" id="{485F5021-53E8-2A2A-8D18-E16FCC47245E}"/>
+              </a:ext>
+            </a:extLst>
+          </p:cNvPr>
+          <p:cNvSpPr/>
+          <p:nvPr/>
+        </p:nvSpPr>
+        <p:spPr>
+          <a:xfrm>
+            <a:off x="6332220" y="2577341"/>
+            <a:ext cx="109728" cy="164592"/>
+          </a:xfrm>
+          <a:prstGeom prst="rect">
+            <a:avLst/>
+          </a:prstGeom>
+          <a:noFill/>
+          <a:ln/>
+        </p:spPr>
+        <p:txBody>
+          <a:bodyPr wrap="square" lIns="0" tIns="0" rIns="0" bIns="0" rtlCol="0" anchor="t">
+            <a:noAutofit/>
+          </a:bodyPr>
+          <a:lstStyle/>
+          <a:p>
+            <a:pPr marL="0" indent="0" algn="l">
+              <a:buNone/>
+            </a:pPr>
+            <a:r>
+              <a:rPr lang="en-US" sz="1400" dirty="0">
+                <a:solidFill>
+                  <a:srgbClr val="000000"/>
+                </a:solidFill>
+                <a:latin typeface="Aptos" panose="020B0004020202020204" pitchFamily="34" charset="0"/>
+                <a:ea typeface="Aptos" pitchFamily="34" charset="-122"/>
+                <a:cs typeface="Aptos" pitchFamily="34" charset="-120"/>
+              </a:rPr>
+              <a:t>•</a:t>
+            </a:r>
+            <a:endParaRPr lang="en-US" sz="1400" dirty="0">
+              <a:latin typeface="Aptos" panose="020B0004020202020204" pitchFamily="34" charset="0"/>
+            </a:endParaRPr>
+          </a:p>
+        </p:txBody>
+      </p:sp>
+      <p:sp>
+        <p:nvSpPr>
+          <p:cNvPr id="25" name="Text 15">
+            <a:extLst>
+              <a:ext uri="{FF2B5EF4-FFF2-40B4-BE49-F238E27FC236}">
+                <a16:creationId xmlns:a16="http://schemas.microsoft.com/office/drawing/2014/main" id="{D103A29F-7E66-A75E-E7B8-4558E7B115B7}"/>
+              </a:ext>
+            </a:extLst>
+          </p:cNvPr>
+          <p:cNvSpPr/>
+          <p:nvPr/>
+        </p:nvSpPr>
+        <p:spPr>
+          <a:xfrm>
+            <a:off x="6533388" y="2671631"/>
+            <a:ext cx="4869180" cy="201168"/>
+          </a:xfrm>
+          <a:prstGeom prst="rect">
+            <a:avLst/>
+          </a:prstGeom>
+          <a:noFill/>
+          <a:ln/>
+        </p:spPr>
+        <p:txBody>
+          <a:bodyPr wrap="square" lIns="0" tIns="0" rIns="0" bIns="0" rtlCol="0" anchor="ctr">
+            <a:noAutofit/>
+          </a:bodyPr>
+          <a:lstStyle/>
+          <a:p>
+            <a:pPr marL="0" indent="0">
+              <a:buNone/>
+            </a:pPr>
+            <a:r>
+              <a:rPr lang="en-US" sz="1400" b="1" dirty="0">
+                <a:solidFill>
+                  <a:srgbClr val="000000"/>
+                </a:solidFill>
+                <a:latin typeface="Aptos" panose="020B0004020202020204" pitchFamily="34" charset="0"/>
+                <a:ea typeface="Aptos" pitchFamily="34" charset="-122"/>
+                <a:cs typeface="Aptos" pitchFamily="34" charset="-120"/>
+              </a:rPr>
+              <a:t>Resilience:</a:t>
+            </a:r>
+            <a:r>
+              <a:rPr lang="en-US" sz="1400" dirty="0">
+                <a:solidFill>
+                  <a:srgbClr val="000000"/>
+                </a:solidFill>
+                <a:latin typeface="Aptos" panose="020B0004020202020204" pitchFamily="34" charset="0"/>
+                <a:ea typeface="Aptos" pitchFamily="34" charset="-122"/>
+                <a:cs typeface="Aptos" pitchFamily="34" charset="-120"/>
+              </a:rPr>
+              <a:t> 99.9% Availability · RPO &lt; 1 minute · RTO &lt; 10 minutes.</a:t>
+            </a:r>
+            <a:endParaRPr lang="en-US" sz="1400" dirty="0">
+              <a:latin typeface="Aptos" panose="020B0004020202020204" pitchFamily="34" charset="0"/>
+            </a:endParaRPr>
+          </a:p>
+        </p:txBody>
+      </p:sp>
+      <p:sp>
+        <p:nvSpPr>
+          <p:cNvPr id="26" name="Text 16">
+            <a:extLst>
+              <a:ext uri="{FF2B5EF4-FFF2-40B4-BE49-F238E27FC236}">
+                <a16:creationId xmlns:a16="http://schemas.microsoft.com/office/drawing/2014/main" id="{7D9D7E11-DD5D-A244-F0DF-1BEA4AF6E759}"/>
+              </a:ext>
+            </a:extLst>
+          </p:cNvPr>
+          <p:cNvSpPr/>
+          <p:nvPr/>
+        </p:nvSpPr>
+        <p:spPr>
+          <a:xfrm>
+            <a:off x="6332220" y="3058090"/>
+            <a:ext cx="109728" cy="164592"/>
+          </a:xfrm>
+          <a:prstGeom prst="rect">
+            <a:avLst/>
+          </a:prstGeom>
+          <a:noFill/>
+          <a:ln/>
+        </p:spPr>
+        <p:txBody>
+          <a:bodyPr wrap="square" lIns="0" tIns="0" rIns="0" bIns="0" rtlCol="0" anchor="t">
+            <a:noAutofit/>
+          </a:bodyPr>
+          <a:lstStyle/>
+          <a:p>
+            <a:pPr marL="0" indent="0" algn="l">
+              <a:buNone/>
+            </a:pPr>
+            <a:r>
+              <a:rPr lang="en-US" sz="1400" dirty="0">
+                <a:solidFill>
+                  <a:srgbClr val="000000"/>
+                </a:solidFill>
+                <a:latin typeface="Aptos" panose="020B0004020202020204" pitchFamily="34" charset="0"/>
+                <a:ea typeface="Aptos" pitchFamily="34" charset="-122"/>
+                <a:cs typeface="Aptos" pitchFamily="34" charset="-120"/>
+              </a:rPr>
+              <a:t>•</a:t>
+            </a:r>
+            <a:endParaRPr lang="en-US" sz="1400" dirty="0">
+              <a:latin typeface="Aptos" panose="020B0004020202020204" pitchFamily="34" charset="0"/>
+            </a:endParaRPr>
+          </a:p>
+        </p:txBody>
+      </p:sp>
+      <p:sp>
+        <p:nvSpPr>
+          <p:cNvPr id="27" name="Text 17">
+            <a:extLst>
+              <a:ext uri="{FF2B5EF4-FFF2-40B4-BE49-F238E27FC236}">
+                <a16:creationId xmlns:a16="http://schemas.microsoft.com/office/drawing/2014/main" id="{719A9995-BF66-A417-A71F-003E084E3DB0}"/>
+              </a:ext>
+            </a:extLst>
+          </p:cNvPr>
+          <p:cNvSpPr/>
+          <p:nvPr/>
+        </p:nvSpPr>
+        <p:spPr>
+          <a:xfrm>
+            <a:off x="6533388" y="3058090"/>
+            <a:ext cx="4869180" cy="201168"/>
+          </a:xfrm>
+          <a:prstGeom prst="rect">
+            <a:avLst/>
+          </a:prstGeom>
+          <a:noFill/>
+          <a:ln/>
+        </p:spPr>
+        <p:txBody>
+          <a:bodyPr wrap="square" lIns="0" tIns="0" rIns="0" bIns="0" rtlCol="0" anchor="ctr">
+            <a:noAutofit/>
+          </a:bodyPr>
+          <a:lstStyle/>
+          <a:p>
+            <a:pPr marL="0" indent="0">
+              <a:buNone/>
+            </a:pPr>
+            <a:r>
+              <a:rPr lang="en-US" sz="1400" b="1" dirty="0">
+                <a:solidFill>
+                  <a:srgbClr val="000000"/>
+                </a:solidFill>
+                <a:latin typeface="Aptos" panose="020B0004020202020204" pitchFamily="34" charset="0"/>
+                <a:ea typeface="Aptos" pitchFamily="34" charset="-122"/>
+                <a:cs typeface="Aptos" pitchFamily="34" charset="-120"/>
+              </a:rPr>
+              <a:t>Security:</a:t>
+            </a:r>
+            <a:r>
+              <a:rPr lang="en-US" sz="1400" dirty="0">
+                <a:solidFill>
+                  <a:srgbClr val="000000"/>
+                </a:solidFill>
+                <a:latin typeface="Aptos" panose="020B0004020202020204" pitchFamily="34" charset="0"/>
+                <a:ea typeface="Aptos" pitchFamily="34" charset="-122"/>
+                <a:cs typeface="Aptos" pitchFamily="34" charset="-120"/>
+              </a:rPr>
+              <a:t> Confidential data must remain in the selected region.</a:t>
+            </a:r>
+            <a:endParaRPr lang="en-US" sz="1400" dirty="0">
+              <a:latin typeface="Aptos" panose="020B0004020202020204" pitchFamily="34" charset="0"/>
+            </a:endParaRPr>
+          </a:p>
+        </p:txBody>
+      </p:sp>
+      <p:sp>
+        <p:nvSpPr>
+          <p:cNvPr id="28" name="Text 18">
+            <a:extLst>
+              <a:ext uri="{FF2B5EF4-FFF2-40B4-BE49-F238E27FC236}">
+                <a16:creationId xmlns:a16="http://schemas.microsoft.com/office/drawing/2014/main" id="{0CBE7BB7-3E4C-38F6-E10C-1AC21957C196}"/>
+              </a:ext>
+            </a:extLst>
+          </p:cNvPr>
+          <p:cNvSpPr/>
+          <p:nvPr/>
+        </p:nvSpPr>
+        <p:spPr>
+          <a:xfrm>
+            <a:off x="6332220" y="3363725"/>
+            <a:ext cx="109728" cy="164592"/>
+          </a:xfrm>
+          <a:prstGeom prst="rect">
+            <a:avLst/>
+          </a:prstGeom>
+          <a:noFill/>
+          <a:ln/>
+        </p:spPr>
+        <p:txBody>
+          <a:bodyPr wrap="square" lIns="0" tIns="0" rIns="0" bIns="0" rtlCol="0" anchor="t">
+            <a:noAutofit/>
+          </a:bodyPr>
+          <a:lstStyle/>
+          <a:p>
+            <a:pPr marL="0" indent="0" algn="l">
+              <a:buNone/>
+            </a:pPr>
+            <a:r>
+              <a:rPr lang="en-US" sz="1400" dirty="0">
+                <a:solidFill>
+                  <a:srgbClr val="000000"/>
+                </a:solidFill>
+                <a:latin typeface="Aptos" panose="020B0004020202020204" pitchFamily="34" charset="0"/>
+                <a:ea typeface="Aptos" pitchFamily="34" charset="-122"/>
+                <a:cs typeface="Aptos" pitchFamily="34" charset="-120"/>
+              </a:rPr>
+              <a:t>•</a:t>
+            </a:r>
+            <a:endParaRPr lang="en-US" sz="1400" dirty="0">
+              <a:latin typeface="Aptos" panose="020B0004020202020204" pitchFamily="34" charset="0"/>
+            </a:endParaRPr>
+          </a:p>
+        </p:txBody>
+      </p:sp>
+      <p:sp>
+        <p:nvSpPr>
+          <p:cNvPr id="29" name="Text 19">
+            <a:extLst>
+              <a:ext uri="{FF2B5EF4-FFF2-40B4-BE49-F238E27FC236}">
+                <a16:creationId xmlns:a16="http://schemas.microsoft.com/office/drawing/2014/main" id="{0CFD474E-2174-8C9B-9B23-FEB3C65FE757}"/>
+              </a:ext>
+            </a:extLst>
+          </p:cNvPr>
+          <p:cNvSpPr/>
+          <p:nvPr/>
+        </p:nvSpPr>
+        <p:spPr>
+          <a:xfrm>
+            <a:off x="6533388" y="3363725"/>
+            <a:ext cx="4869180" cy="384048"/>
+          </a:xfrm>
+          <a:prstGeom prst="rect">
+            <a:avLst/>
+          </a:prstGeom>
+          <a:noFill/>
+          <a:ln/>
+        </p:spPr>
+        <p:txBody>
+          <a:bodyPr wrap="square" lIns="0" tIns="0" rIns="0" bIns="0" rtlCol="0" anchor="ctr">
+            <a:noAutofit/>
+          </a:bodyPr>
+          <a:lstStyle/>
+          <a:p>
+            <a:pPr marL="0" indent="0">
+              <a:buNone/>
+            </a:pPr>
+            <a:r>
+              <a:rPr lang="en-US" sz="1400" b="1" dirty="0">
+                <a:solidFill>
+                  <a:srgbClr val="000000"/>
+                </a:solidFill>
+                <a:latin typeface="Aptos" panose="020B0004020202020204" pitchFamily="34" charset="0"/>
+                <a:ea typeface="Aptos" pitchFamily="34" charset="-122"/>
+                <a:cs typeface="Aptos" pitchFamily="34" charset="-120"/>
+              </a:rPr>
+              <a:t>Assumptions:</a:t>
+            </a:r>
+            <a:r>
+              <a:rPr lang="en-US" sz="1400" dirty="0">
+                <a:solidFill>
+                  <a:srgbClr val="000000"/>
+                </a:solidFill>
+                <a:latin typeface="Aptos" panose="020B0004020202020204" pitchFamily="34" charset="0"/>
+                <a:ea typeface="Aptos" pitchFamily="34" charset="-122"/>
+                <a:cs typeface="Aptos" pitchFamily="34" charset="-120"/>
+              </a:rPr>
+              <a:t> Single-AZ failure scope, provider guarantees, and regional model availability at launch.</a:t>
+            </a:r>
+            <a:endParaRPr lang="en-US" sz="1400" dirty="0">
+              <a:latin typeface="Aptos" panose="020B0004020202020204" pitchFamily="34" charset="0"/>
+            </a:endParaRPr>
+          </a:p>
+        </p:txBody>
+      </p:sp>
+    </p:spTree>
+    <p:extLst>
+      <p:ext uri="{BB962C8B-B14F-4D97-AF65-F5344CB8AC3E}">
+        <p14:creationId xmlns:p14="http://schemas.microsoft.com/office/powerpoint/2010/main" val="2156928992"/>
+      </p:ext>
+    </p:extLst>
+  </p:cSld>
+  <p:clrMapOvr>
+    <a:masterClrMapping/>
+  </p:clrMapOvr>
+</p:sld>
+</file>
+
+<file path=ppt/slides/slide20.xml><?xml version="1.0" encoding="utf-8"?>
 <p:sld xmlns:a="http://schemas.openxmlformats.org/drawingml/2006/main" xmlns:r="http://schemas.openxmlformats.org/officeDocument/2006/relationships" xmlns:p="http://schemas.openxmlformats.org/presentationml/2006/main">
   <p:cSld name="Slide 11">
     <p:bg>
@@ -16061,1879 +19861,6 @@
 </p:sld>
 </file>
 
-<file path=ppt/slides/slide2.xml><?xml version="1.0" encoding="utf-8"?>
-<p:sld xmlns:a="http://schemas.openxmlformats.org/drawingml/2006/main" xmlns:r="http://schemas.openxmlformats.org/officeDocument/2006/relationships" xmlns:p="http://schemas.openxmlformats.org/presentationml/2006/main">
-  <p:cSld>
-    <p:spTree>
-      <p:nvGrpSpPr>
-        <p:cNvPr id="1" name="">
-          <a:extLst>
-            <a:ext uri="{FF2B5EF4-FFF2-40B4-BE49-F238E27FC236}">
-              <a16:creationId xmlns:a16="http://schemas.microsoft.com/office/drawing/2014/main" id="{0C25128D-8E86-B829-7F4D-2C76FDC9A088}"/>
-            </a:ext>
-          </a:extLst>
-        </p:cNvPr>
-        <p:cNvGrpSpPr/>
-        <p:nvPr/>
-      </p:nvGrpSpPr>
-      <p:grpSpPr>
-        <a:xfrm>
-          <a:off x="0" y="0"/>
-          <a:ext cx="0" cy="0"/>
-          <a:chOff x="0" y="0"/>
-          <a:chExt cx="0" cy="0"/>
-        </a:xfrm>
-      </p:grpSpPr>
-      <p:sp>
-        <p:nvSpPr>
-          <p:cNvPr id="2" name="Text 0">
-            <a:extLst>
-              <a:ext uri="{FF2B5EF4-FFF2-40B4-BE49-F238E27FC236}">
-                <a16:creationId xmlns:a16="http://schemas.microsoft.com/office/drawing/2014/main" id="{4811985E-482F-5A1E-CFB3-38FCB2691487}"/>
-              </a:ext>
-            </a:extLst>
-          </p:cNvPr>
-          <p:cNvSpPr/>
-          <p:nvPr/>
-        </p:nvSpPr>
-        <p:spPr>
-          <a:xfrm>
-            <a:off x="502920" y="219456"/>
-            <a:ext cx="2194560" cy="201168"/>
-          </a:xfrm>
-          <a:prstGeom prst="rect">
-            <a:avLst/>
-          </a:prstGeom>
-          <a:noFill/>
-          <a:ln/>
-        </p:spPr>
-        <p:txBody>
-          <a:bodyPr wrap="square" lIns="0" tIns="0" rIns="0" bIns="0" rtlCol="0" anchor="ctr"/>
-          <a:lstStyle/>
-          <a:p>
-            <a:pPr marL="0" indent="0">
-              <a:buNone/>
-            </a:pPr>
-            <a:r>
-              <a:rPr lang="en-US" sz="780" b="1" dirty="0">
-                <a:solidFill>
-                  <a:srgbClr val="0B63E5"/>
-                </a:solidFill>
-                <a:latin typeface="Aptos" pitchFamily="34" charset="0"/>
-                <a:ea typeface="Aptos" pitchFamily="34" charset="-122"/>
-                <a:cs typeface="Aptos" pitchFamily="34" charset="-120"/>
-              </a:rPr>
-              <a:t>MERIDIAN TELECOM</a:t>
-            </a:r>
-            <a:endParaRPr lang="en-US" sz="780" dirty="0"/>
-          </a:p>
-        </p:txBody>
-      </p:sp>
-      <p:sp>
-        <p:nvSpPr>
-          <p:cNvPr id="3" name="Text 1">
-            <a:extLst>
-              <a:ext uri="{FF2B5EF4-FFF2-40B4-BE49-F238E27FC236}">
-                <a16:creationId xmlns:a16="http://schemas.microsoft.com/office/drawing/2014/main" id="{7E63F7F2-395C-2202-AAED-796D46E2307A}"/>
-              </a:ext>
-            </a:extLst>
-          </p:cNvPr>
-          <p:cNvSpPr/>
-          <p:nvPr/>
-        </p:nvSpPr>
-        <p:spPr>
-          <a:xfrm>
-            <a:off x="502920" y="438912"/>
-            <a:ext cx="10972800" cy="438912"/>
-          </a:xfrm>
-          <a:prstGeom prst="rect">
-            <a:avLst/>
-          </a:prstGeom>
-          <a:noFill/>
-          <a:ln/>
-        </p:spPr>
-        <p:txBody>
-          <a:bodyPr wrap="square" lIns="0" tIns="0" rIns="0" bIns="0" rtlCol="0" anchor="ctr">
-            <a:normAutofit/>
-          </a:bodyPr>
-          <a:lstStyle/>
-          <a:p>
-            <a:pPr marL="0" indent="0">
-              <a:buNone/>
-            </a:pPr>
-            <a:r>
-              <a:rPr lang="en-US" sz="2750" b="1" dirty="0">
-                <a:solidFill>
-                  <a:srgbClr val="07133D"/>
-                </a:solidFill>
-                <a:latin typeface="Aptos Display" pitchFamily="34" charset="0"/>
-                <a:ea typeface="Aptos Display" pitchFamily="34" charset="-122"/>
-                <a:cs typeface="Aptos Display" pitchFamily="34" charset="-120"/>
-              </a:rPr>
-              <a:t>Requirements and Open Points </a:t>
-            </a:r>
-            <a:endParaRPr lang="en-US" sz="2750" dirty="0"/>
-          </a:p>
-        </p:txBody>
-      </p:sp>
-      <p:sp>
-        <p:nvSpPr>
-          <p:cNvPr id="5" name="Shape 3">
-            <a:extLst>
-              <a:ext uri="{FF2B5EF4-FFF2-40B4-BE49-F238E27FC236}">
-                <a16:creationId xmlns:a16="http://schemas.microsoft.com/office/drawing/2014/main" id="{970E0A8E-4D56-5084-82D4-6F905B56602B}"/>
-              </a:ext>
-            </a:extLst>
-          </p:cNvPr>
-          <p:cNvSpPr/>
-          <p:nvPr/>
-        </p:nvSpPr>
-        <p:spPr>
-          <a:xfrm>
-            <a:off x="502920" y="1115568"/>
-            <a:ext cx="11155680" cy="0"/>
-          </a:xfrm>
-          <a:prstGeom prst="line">
-            <a:avLst/>
-          </a:prstGeom>
-          <a:noFill/>
-          <a:ln w="12700">
-            <a:solidFill>
-              <a:srgbClr val="D6DEE9"/>
-            </a:solidFill>
-            <a:prstDash val="solid"/>
-          </a:ln>
-        </p:spPr>
-        <p:txBody>
-          <a:bodyPr/>
-          <a:lstStyle/>
-          <a:p>
-            <a:endParaRPr lang="it-IT"/>
-          </a:p>
-        </p:txBody>
-      </p:sp>
-      <p:sp>
-        <p:nvSpPr>
-          <p:cNvPr id="6" name="Shape 4">
-            <a:extLst>
-              <a:ext uri="{FF2B5EF4-FFF2-40B4-BE49-F238E27FC236}">
-                <a16:creationId xmlns:a16="http://schemas.microsoft.com/office/drawing/2014/main" id="{3148EE6F-2796-40B4-8859-3D177CF559C2}"/>
-              </a:ext>
-            </a:extLst>
-          </p:cNvPr>
-          <p:cNvSpPr/>
-          <p:nvPr/>
-        </p:nvSpPr>
-        <p:spPr>
-          <a:xfrm>
-            <a:off x="502920" y="6455664"/>
-            <a:ext cx="11155680" cy="0"/>
-          </a:xfrm>
-          <a:prstGeom prst="line">
-            <a:avLst/>
-          </a:prstGeom>
-          <a:noFill/>
-          <a:ln w="10160">
-            <a:solidFill>
-              <a:srgbClr val="E1E7F0"/>
-            </a:solidFill>
-            <a:prstDash val="solid"/>
-          </a:ln>
-        </p:spPr>
-        <p:txBody>
-          <a:bodyPr/>
-          <a:lstStyle/>
-          <a:p>
-            <a:endParaRPr lang="it-IT"/>
-          </a:p>
-        </p:txBody>
-      </p:sp>
-      <p:sp>
-        <p:nvSpPr>
-          <p:cNvPr id="7" name="Text 5">
-            <a:extLst>
-              <a:ext uri="{FF2B5EF4-FFF2-40B4-BE49-F238E27FC236}">
-                <a16:creationId xmlns:a16="http://schemas.microsoft.com/office/drawing/2014/main" id="{3974115F-23E9-C01C-B5FD-8464584041C9}"/>
-              </a:ext>
-            </a:extLst>
-          </p:cNvPr>
-          <p:cNvSpPr/>
-          <p:nvPr/>
-        </p:nvSpPr>
-        <p:spPr>
-          <a:xfrm>
-            <a:off x="502920" y="6519672"/>
-            <a:ext cx="2286000" cy="201168"/>
-          </a:xfrm>
-          <a:prstGeom prst="rect">
-            <a:avLst/>
-          </a:prstGeom>
-          <a:noFill/>
-          <a:ln/>
-        </p:spPr>
-        <p:txBody>
-          <a:bodyPr wrap="square" lIns="0" tIns="0" rIns="0" bIns="0" rtlCol="0" anchor="ctr"/>
-          <a:lstStyle/>
-          <a:p>
-            <a:pPr marL="0" indent="0">
-              <a:buNone/>
-            </a:pPr>
-            <a:r>
-              <a:rPr lang="en-US" sz="850" dirty="0">
-                <a:solidFill>
-                  <a:srgbClr val="7B8497"/>
-                </a:solidFill>
-              </a:rPr>
-              <a:t>1/10</a:t>
-            </a:r>
-            <a:endParaRPr lang="en-US" sz="850" dirty="0"/>
-          </a:p>
-        </p:txBody>
-      </p:sp>
-      <p:sp>
-        <p:nvSpPr>
-          <p:cNvPr id="11" name="Shape 9">
-            <a:extLst>
-              <a:ext uri="{FF2B5EF4-FFF2-40B4-BE49-F238E27FC236}">
-                <a16:creationId xmlns:a16="http://schemas.microsoft.com/office/drawing/2014/main" id="{31222964-3BF4-12A1-CE7A-9942C513F34C}"/>
-              </a:ext>
-            </a:extLst>
-          </p:cNvPr>
-          <p:cNvSpPr/>
-          <p:nvPr/>
-        </p:nvSpPr>
-        <p:spPr>
-          <a:xfrm>
-            <a:off x="1423194" y="4695119"/>
-            <a:ext cx="1253955" cy="520844"/>
-          </a:xfrm>
-          <a:prstGeom prst="roundRect">
-            <a:avLst>
-              <a:gd name="adj" fmla="val 10959"/>
-            </a:avLst>
-          </a:prstGeom>
-          <a:solidFill>
-            <a:srgbClr val="EAF5FF"/>
-          </a:solidFill>
-          <a:ln w="13970">
-            <a:solidFill>
-              <a:srgbClr val="0B63E5"/>
-            </a:solidFill>
-            <a:prstDash val="solid"/>
-          </a:ln>
-        </p:spPr>
-        <p:txBody>
-          <a:bodyPr/>
-          <a:lstStyle/>
-          <a:p>
-            <a:endParaRPr lang="it-IT"/>
-          </a:p>
-        </p:txBody>
-      </p:sp>
-      <p:sp>
-        <p:nvSpPr>
-          <p:cNvPr id="12" name="Text 10">
-            <a:extLst>
-              <a:ext uri="{FF2B5EF4-FFF2-40B4-BE49-F238E27FC236}">
-                <a16:creationId xmlns:a16="http://schemas.microsoft.com/office/drawing/2014/main" id="{C4F91B79-EB12-419B-8725-F7B2C4BED056}"/>
-              </a:ext>
-            </a:extLst>
-          </p:cNvPr>
-          <p:cNvSpPr/>
-          <p:nvPr/>
-        </p:nvSpPr>
-        <p:spPr>
-          <a:xfrm>
-            <a:off x="1423194" y="4837149"/>
-            <a:ext cx="1253955" cy="211093"/>
-          </a:xfrm>
-          <a:prstGeom prst="rect">
-            <a:avLst/>
-          </a:prstGeom>
-          <a:noFill/>
-          <a:ln/>
-        </p:spPr>
-        <p:txBody>
-          <a:bodyPr wrap="square" lIns="0" tIns="0" rIns="0" bIns="0" rtlCol="0" anchor="ctr">
-            <a:normAutofit/>
-          </a:bodyPr>
-          <a:lstStyle/>
-          <a:p>
-            <a:pPr marL="0" indent="0" algn="ctr">
-              <a:buNone/>
-            </a:pPr>
-            <a:r>
-              <a:rPr lang="en-US" sz="1220" b="1" dirty="0">
-                <a:solidFill>
-                  <a:srgbClr val="07133D"/>
-                </a:solidFill>
-              </a:rPr>
-              <a:t>Chat/Offer</a:t>
-            </a:r>
-            <a:endParaRPr lang="en-US" sz="1220" dirty="0"/>
-          </a:p>
-        </p:txBody>
-      </p:sp>
-      <p:sp>
-        <p:nvSpPr>
-          <p:cNvPr id="14" name="Shape 12">
-            <a:extLst>
-              <a:ext uri="{FF2B5EF4-FFF2-40B4-BE49-F238E27FC236}">
-                <a16:creationId xmlns:a16="http://schemas.microsoft.com/office/drawing/2014/main" id="{51ABE17C-1722-5C76-C196-72C0BA75FAB7}"/>
-              </a:ext>
-            </a:extLst>
-          </p:cNvPr>
-          <p:cNvSpPr/>
-          <p:nvPr/>
-        </p:nvSpPr>
-        <p:spPr>
-          <a:xfrm>
-            <a:off x="2838146" y="4938058"/>
-            <a:ext cx="400746" cy="0"/>
-          </a:xfrm>
-          <a:prstGeom prst="line">
-            <a:avLst/>
-          </a:prstGeom>
-          <a:noFill/>
-          <a:ln w="17780">
-            <a:solidFill>
-              <a:srgbClr val="0B63E5"/>
-            </a:solidFill>
-            <a:prstDash val="solid"/>
-            <a:tailEnd type="triangle"/>
-          </a:ln>
-        </p:spPr>
-        <p:txBody>
-          <a:bodyPr/>
-          <a:lstStyle/>
-          <a:p>
-            <a:endParaRPr lang="it-IT"/>
-          </a:p>
-        </p:txBody>
-      </p:sp>
-      <p:sp>
-        <p:nvSpPr>
-          <p:cNvPr id="51" name="Shape 9">
-            <a:extLst>
-              <a:ext uri="{FF2B5EF4-FFF2-40B4-BE49-F238E27FC236}">
-                <a16:creationId xmlns:a16="http://schemas.microsoft.com/office/drawing/2014/main" id="{40CDE9A9-3FB1-2611-8330-9C8119046709}"/>
-              </a:ext>
-            </a:extLst>
-          </p:cNvPr>
-          <p:cNvSpPr/>
-          <p:nvPr/>
-        </p:nvSpPr>
-        <p:spPr>
-          <a:xfrm>
-            <a:off x="3399889" y="4695119"/>
-            <a:ext cx="1253955" cy="520844"/>
-          </a:xfrm>
-          <a:prstGeom prst="roundRect">
-            <a:avLst>
-              <a:gd name="adj" fmla="val 10959"/>
-            </a:avLst>
-          </a:prstGeom>
-          <a:solidFill>
-            <a:srgbClr val="EAF5FF"/>
-          </a:solidFill>
-          <a:ln w="13970">
-            <a:solidFill>
-              <a:srgbClr val="0B63E5"/>
-            </a:solidFill>
-            <a:prstDash val="solid"/>
-          </a:ln>
-        </p:spPr>
-        <p:txBody>
-          <a:bodyPr/>
-          <a:lstStyle/>
-          <a:p>
-            <a:endParaRPr lang="it-IT"/>
-          </a:p>
-        </p:txBody>
-      </p:sp>
-      <p:sp>
-        <p:nvSpPr>
-          <p:cNvPr id="52" name="Text 10">
-            <a:extLst>
-              <a:ext uri="{FF2B5EF4-FFF2-40B4-BE49-F238E27FC236}">
-                <a16:creationId xmlns:a16="http://schemas.microsoft.com/office/drawing/2014/main" id="{4015736F-12D4-919C-1A07-9306F4C95025}"/>
-              </a:ext>
-            </a:extLst>
-          </p:cNvPr>
-          <p:cNvSpPr/>
-          <p:nvPr/>
-        </p:nvSpPr>
-        <p:spPr>
-          <a:xfrm>
-            <a:off x="3399889" y="4837149"/>
-            <a:ext cx="1253955" cy="211093"/>
-          </a:xfrm>
-          <a:prstGeom prst="rect">
-            <a:avLst/>
-          </a:prstGeom>
-          <a:noFill/>
-          <a:ln/>
-        </p:spPr>
-        <p:txBody>
-          <a:bodyPr wrap="square" lIns="0" tIns="0" rIns="0" bIns="0" rtlCol="0" anchor="ctr">
-            <a:normAutofit/>
-          </a:bodyPr>
-          <a:lstStyle/>
-          <a:p>
-            <a:pPr marL="0" indent="0" algn="ctr">
-              <a:buNone/>
-            </a:pPr>
-            <a:r>
-              <a:rPr lang="en-US" sz="1220" b="1" dirty="0">
-                <a:solidFill>
-                  <a:srgbClr val="07133D"/>
-                </a:solidFill>
-              </a:rPr>
-              <a:t>Identity Check</a:t>
-            </a:r>
-            <a:endParaRPr lang="en-US" sz="1220" dirty="0"/>
-          </a:p>
-        </p:txBody>
-      </p:sp>
-      <p:sp>
-        <p:nvSpPr>
-          <p:cNvPr id="53" name="Shape 12">
-            <a:extLst>
-              <a:ext uri="{FF2B5EF4-FFF2-40B4-BE49-F238E27FC236}">
-                <a16:creationId xmlns:a16="http://schemas.microsoft.com/office/drawing/2014/main" id="{887BE672-8707-F83B-CEB9-1792CA88A09D}"/>
-              </a:ext>
-            </a:extLst>
-          </p:cNvPr>
-          <p:cNvSpPr/>
-          <p:nvPr/>
-        </p:nvSpPr>
-        <p:spPr>
-          <a:xfrm>
-            <a:off x="4814841" y="4938058"/>
-            <a:ext cx="400746" cy="0"/>
-          </a:xfrm>
-          <a:prstGeom prst="line">
-            <a:avLst/>
-          </a:prstGeom>
-          <a:noFill/>
-          <a:ln w="17780">
-            <a:solidFill>
-              <a:srgbClr val="0B63E5"/>
-            </a:solidFill>
-            <a:prstDash val="solid"/>
-            <a:tailEnd type="triangle"/>
-          </a:ln>
-        </p:spPr>
-        <p:txBody>
-          <a:bodyPr/>
-          <a:lstStyle/>
-          <a:p>
-            <a:endParaRPr lang="it-IT"/>
-          </a:p>
-        </p:txBody>
-      </p:sp>
-      <p:sp>
-        <p:nvSpPr>
-          <p:cNvPr id="54" name="Shape 9">
-            <a:extLst>
-              <a:ext uri="{FF2B5EF4-FFF2-40B4-BE49-F238E27FC236}">
-                <a16:creationId xmlns:a16="http://schemas.microsoft.com/office/drawing/2014/main" id="{C2DE9764-BA3E-9901-357C-AE42A2FFD347}"/>
-              </a:ext>
-            </a:extLst>
-          </p:cNvPr>
-          <p:cNvSpPr/>
-          <p:nvPr/>
-        </p:nvSpPr>
-        <p:spPr>
-          <a:xfrm>
-            <a:off x="5376584" y="4695119"/>
-            <a:ext cx="1253955" cy="520844"/>
-          </a:xfrm>
-          <a:prstGeom prst="roundRect">
-            <a:avLst>
-              <a:gd name="adj" fmla="val 10959"/>
-            </a:avLst>
-          </a:prstGeom>
-          <a:solidFill>
-            <a:srgbClr val="EAF5FF"/>
-          </a:solidFill>
-          <a:ln w="13970">
-            <a:solidFill>
-              <a:srgbClr val="0B63E5"/>
-            </a:solidFill>
-            <a:prstDash val="solid"/>
-          </a:ln>
-        </p:spPr>
-        <p:txBody>
-          <a:bodyPr/>
-          <a:lstStyle/>
-          <a:p>
-            <a:endParaRPr lang="it-IT"/>
-          </a:p>
-        </p:txBody>
-      </p:sp>
-      <p:sp>
-        <p:nvSpPr>
-          <p:cNvPr id="55" name="Text 10">
-            <a:extLst>
-              <a:ext uri="{FF2B5EF4-FFF2-40B4-BE49-F238E27FC236}">
-                <a16:creationId xmlns:a16="http://schemas.microsoft.com/office/drawing/2014/main" id="{37688FCE-60D6-0730-9004-6DEEC12666BF}"/>
-              </a:ext>
-            </a:extLst>
-          </p:cNvPr>
-          <p:cNvSpPr/>
-          <p:nvPr/>
-        </p:nvSpPr>
-        <p:spPr>
-          <a:xfrm>
-            <a:off x="5376583" y="4846979"/>
-            <a:ext cx="1253955" cy="211093"/>
-          </a:xfrm>
-          <a:prstGeom prst="rect">
-            <a:avLst/>
-          </a:prstGeom>
-          <a:noFill/>
-          <a:ln/>
-        </p:spPr>
-        <p:txBody>
-          <a:bodyPr wrap="square" lIns="0" tIns="0" rIns="0" bIns="0" rtlCol="0" anchor="ctr">
-            <a:normAutofit/>
-          </a:bodyPr>
-          <a:lstStyle/>
-          <a:p>
-            <a:pPr marL="0" indent="0" algn="ctr">
-              <a:buNone/>
-            </a:pPr>
-            <a:r>
-              <a:rPr lang="en-US" sz="1220" b="1" dirty="0"/>
-              <a:t>Payment</a:t>
-            </a:r>
-          </a:p>
-        </p:txBody>
-      </p:sp>
-      <p:sp>
-        <p:nvSpPr>
-          <p:cNvPr id="56" name="Shape 12">
-            <a:extLst>
-              <a:ext uri="{FF2B5EF4-FFF2-40B4-BE49-F238E27FC236}">
-                <a16:creationId xmlns:a16="http://schemas.microsoft.com/office/drawing/2014/main" id="{5C2F9F08-7FD2-C003-9486-374E2FE74217}"/>
-              </a:ext>
-            </a:extLst>
-          </p:cNvPr>
-          <p:cNvSpPr/>
-          <p:nvPr/>
-        </p:nvSpPr>
-        <p:spPr>
-          <a:xfrm>
-            <a:off x="6791536" y="4953171"/>
-            <a:ext cx="400746" cy="0"/>
-          </a:xfrm>
-          <a:prstGeom prst="line">
-            <a:avLst/>
-          </a:prstGeom>
-          <a:noFill/>
-          <a:ln w="17780">
-            <a:solidFill>
-              <a:srgbClr val="0B63E5"/>
-            </a:solidFill>
-            <a:prstDash val="solid"/>
-            <a:tailEnd type="triangle"/>
-          </a:ln>
-        </p:spPr>
-        <p:txBody>
-          <a:bodyPr/>
-          <a:lstStyle/>
-          <a:p>
-            <a:endParaRPr lang="it-IT"/>
-          </a:p>
-        </p:txBody>
-      </p:sp>
-      <p:sp>
-        <p:nvSpPr>
-          <p:cNvPr id="57" name="Shape 9">
-            <a:extLst>
-              <a:ext uri="{FF2B5EF4-FFF2-40B4-BE49-F238E27FC236}">
-                <a16:creationId xmlns:a16="http://schemas.microsoft.com/office/drawing/2014/main" id="{58B3BEA7-CCF9-B501-3506-B36CAEFBE350}"/>
-              </a:ext>
-            </a:extLst>
-          </p:cNvPr>
-          <p:cNvSpPr/>
-          <p:nvPr/>
-        </p:nvSpPr>
-        <p:spPr>
-          <a:xfrm>
-            <a:off x="7353279" y="4710232"/>
-            <a:ext cx="1253955" cy="520844"/>
-          </a:xfrm>
-          <a:prstGeom prst="roundRect">
-            <a:avLst>
-              <a:gd name="adj" fmla="val 10959"/>
-            </a:avLst>
-          </a:prstGeom>
-          <a:solidFill>
-            <a:srgbClr val="EAF5FF"/>
-          </a:solidFill>
-          <a:ln w="13970">
-            <a:solidFill>
-              <a:srgbClr val="0B63E5"/>
-            </a:solidFill>
-            <a:prstDash val="solid"/>
-          </a:ln>
-        </p:spPr>
-        <p:txBody>
-          <a:bodyPr/>
-          <a:lstStyle/>
-          <a:p>
-            <a:endParaRPr lang="it-IT"/>
-          </a:p>
-        </p:txBody>
-      </p:sp>
-      <p:sp>
-        <p:nvSpPr>
-          <p:cNvPr id="58" name="Text 10">
-            <a:extLst>
-              <a:ext uri="{FF2B5EF4-FFF2-40B4-BE49-F238E27FC236}">
-                <a16:creationId xmlns:a16="http://schemas.microsoft.com/office/drawing/2014/main" id="{B77555F6-24E4-BBDF-B269-690F77448C15}"/>
-              </a:ext>
-            </a:extLst>
-          </p:cNvPr>
-          <p:cNvSpPr/>
-          <p:nvPr/>
-        </p:nvSpPr>
-        <p:spPr>
-          <a:xfrm>
-            <a:off x="7353278" y="4862092"/>
-            <a:ext cx="1253955" cy="211093"/>
-          </a:xfrm>
-          <a:prstGeom prst="rect">
-            <a:avLst/>
-          </a:prstGeom>
-          <a:noFill/>
-          <a:ln/>
-        </p:spPr>
-        <p:txBody>
-          <a:bodyPr wrap="square" lIns="0" tIns="0" rIns="0" bIns="0" rtlCol="0" anchor="ctr">
-            <a:normAutofit/>
-          </a:bodyPr>
-          <a:lstStyle/>
-          <a:p>
-            <a:pPr marL="0" indent="0" algn="ctr">
-              <a:buNone/>
-            </a:pPr>
-            <a:r>
-              <a:rPr lang="en-US" sz="1220" b="1" dirty="0"/>
-              <a:t>SIM Delivery</a:t>
-            </a:r>
-          </a:p>
-        </p:txBody>
-      </p:sp>
-      <p:sp>
-        <p:nvSpPr>
-          <p:cNvPr id="59" name="Shape 12">
-            <a:extLst>
-              <a:ext uri="{FF2B5EF4-FFF2-40B4-BE49-F238E27FC236}">
-                <a16:creationId xmlns:a16="http://schemas.microsoft.com/office/drawing/2014/main" id="{0E062302-948E-4018-42C4-A98D3DB62305}"/>
-              </a:ext>
-            </a:extLst>
-          </p:cNvPr>
-          <p:cNvSpPr/>
-          <p:nvPr/>
-        </p:nvSpPr>
-        <p:spPr>
-          <a:xfrm>
-            <a:off x="8768230" y="4968284"/>
-            <a:ext cx="400746" cy="0"/>
-          </a:xfrm>
-          <a:prstGeom prst="line">
-            <a:avLst/>
-          </a:prstGeom>
-          <a:noFill/>
-          <a:ln w="17780">
-            <a:solidFill>
-              <a:srgbClr val="0B63E5"/>
-            </a:solidFill>
-            <a:prstDash val="solid"/>
-            <a:tailEnd type="triangle"/>
-          </a:ln>
-        </p:spPr>
-        <p:txBody>
-          <a:bodyPr/>
-          <a:lstStyle/>
-          <a:p>
-            <a:endParaRPr lang="it-IT"/>
-          </a:p>
-        </p:txBody>
-      </p:sp>
-      <p:sp>
-        <p:nvSpPr>
-          <p:cNvPr id="60" name="Shape 9">
-            <a:extLst>
-              <a:ext uri="{FF2B5EF4-FFF2-40B4-BE49-F238E27FC236}">
-                <a16:creationId xmlns:a16="http://schemas.microsoft.com/office/drawing/2014/main" id="{A46EB4E7-51A2-347C-56D1-86DC2708399C}"/>
-              </a:ext>
-            </a:extLst>
-          </p:cNvPr>
-          <p:cNvSpPr/>
-          <p:nvPr/>
-        </p:nvSpPr>
-        <p:spPr>
-          <a:xfrm>
-            <a:off x="9329973" y="4725345"/>
-            <a:ext cx="1253955" cy="520844"/>
-          </a:xfrm>
-          <a:prstGeom prst="roundRect">
-            <a:avLst>
-              <a:gd name="adj" fmla="val 10959"/>
-            </a:avLst>
-          </a:prstGeom>
-          <a:solidFill>
-            <a:srgbClr val="EAF5FF"/>
-          </a:solidFill>
-          <a:ln w="13970">
-            <a:solidFill>
-              <a:srgbClr val="0B63E5"/>
-            </a:solidFill>
-            <a:prstDash val="solid"/>
-          </a:ln>
-        </p:spPr>
-        <p:txBody>
-          <a:bodyPr/>
-          <a:lstStyle/>
-          <a:p>
-            <a:endParaRPr lang="it-IT"/>
-          </a:p>
-        </p:txBody>
-      </p:sp>
-      <p:sp>
-        <p:nvSpPr>
-          <p:cNvPr id="61" name="Text 10">
-            <a:extLst>
-              <a:ext uri="{FF2B5EF4-FFF2-40B4-BE49-F238E27FC236}">
-                <a16:creationId xmlns:a16="http://schemas.microsoft.com/office/drawing/2014/main" id="{638F619D-9AE8-9853-0F6B-EF817153B048}"/>
-              </a:ext>
-            </a:extLst>
-          </p:cNvPr>
-          <p:cNvSpPr/>
-          <p:nvPr/>
-        </p:nvSpPr>
-        <p:spPr>
-          <a:xfrm>
-            <a:off x="9329972" y="4877205"/>
-            <a:ext cx="1253955" cy="211093"/>
-          </a:xfrm>
-          <a:prstGeom prst="rect">
-            <a:avLst/>
-          </a:prstGeom>
-          <a:noFill/>
-          <a:ln/>
-        </p:spPr>
-        <p:txBody>
-          <a:bodyPr wrap="square" lIns="0" tIns="0" rIns="0" bIns="0" rtlCol="0" anchor="ctr">
-            <a:normAutofit/>
-          </a:bodyPr>
-          <a:lstStyle/>
-          <a:p>
-            <a:pPr marL="0" indent="0" algn="ctr">
-              <a:buNone/>
-            </a:pPr>
-            <a:r>
-              <a:rPr lang="en-US" sz="1220" b="1" dirty="0"/>
-              <a:t>Activation</a:t>
-            </a:r>
-          </a:p>
-        </p:txBody>
-      </p:sp>
-      <p:sp>
-        <p:nvSpPr>
-          <p:cNvPr id="4" name="Shape 0">
-            <a:extLst>
-              <a:ext uri="{FF2B5EF4-FFF2-40B4-BE49-F238E27FC236}">
-                <a16:creationId xmlns:a16="http://schemas.microsoft.com/office/drawing/2014/main" id="{A3D944A2-9F79-217F-9F61-665CA8C98CA6}"/>
-              </a:ext>
-            </a:extLst>
-          </p:cNvPr>
-          <p:cNvSpPr/>
-          <p:nvPr/>
-        </p:nvSpPr>
-        <p:spPr>
-          <a:xfrm>
-            <a:off x="548640" y="1498349"/>
-            <a:ext cx="5554980" cy="438912"/>
-          </a:xfrm>
-          <a:prstGeom prst="rect">
-            <a:avLst/>
-          </a:prstGeom>
-          <a:solidFill>
-            <a:srgbClr val="07133D"/>
-          </a:solidFill>
-          <a:ln w="6350">
-            <a:solidFill>
-              <a:srgbClr val="FFFFFF"/>
-            </a:solidFill>
-            <a:prstDash val="solid"/>
-          </a:ln>
-        </p:spPr>
-        <p:txBody>
-          <a:bodyPr/>
-          <a:lstStyle/>
-          <a:p>
-            <a:endParaRPr lang="it-IT"/>
-          </a:p>
-        </p:txBody>
-      </p:sp>
-      <p:sp>
-        <p:nvSpPr>
-          <p:cNvPr id="8" name="Shape 1">
-            <a:extLst>
-              <a:ext uri="{FF2B5EF4-FFF2-40B4-BE49-F238E27FC236}">
-                <a16:creationId xmlns:a16="http://schemas.microsoft.com/office/drawing/2014/main" id="{7D363158-A784-94F9-CA35-95978AD392BE}"/>
-              </a:ext>
-            </a:extLst>
-          </p:cNvPr>
-          <p:cNvSpPr/>
-          <p:nvPr/>
-        </p:nvSpPr>
-        <p:spPr>
-          <a:xfrm>
-            <a:off x="6103620" y="1498349"/>
-            <a:ext cx="5554980" cy="438912"/>
-          </a:xfrm>
-          <a:prstGeom prst="rect">
-            <a:avLst/>
-          </a:prstGeom>
-          <a:solidFill>
-            <a:srgbClr val="07133D"/>
-          </a:solidFill>
-          <a:ln w="6350">
-            <a:solidFill>
-              <a:srgbClr val="FFFFFF"/>
-            </a:solidFill>
-            <a:prstDash val="solid"/>
-          </a:ln>
-        </p:spPr>
-        <p:txBody>
-          <a:bodyPr/>
-          <a:lstStyle/>
-          <a:p>
-            <a:endParaRPr lang="it-IT"/>
-          </a:p>
-        </p:txBody>
-      </p:sp>
-      <p:sp>
-        <p:nvSpPr>
-          <p:cNvPr id="9" name="Shape 2">
-            <a:extLst>
-              <a:ext uri="{FF2B5EF4-FFF2-40B4-BE49-F238E27FC236}">
-                <a16:creationId xmlns:a16="http://schemas.microsoft.com/office/drawing/2014/main" id="{42E1D3B9-C71C-1264-F7DE-5CC58CCD1371}"/>
-              </a:ext>
-            </a:extLst>
-          </p:cNvPr>
-          <p:cNvSpPr/>
-          <p:nvPr/>
-        </p:nvSpPr>
-        <p:spPr>
-          <a:xfrm>
-            <a:off x="548640" y="1937261"/>
-            <a:ext cx="5554980" cy="2057400"/>
-          </a:xfrm>
-          <a:prstGeom prst="rect">
-            <a:avLst/>
-          </a:prstGeom>
-          <a:solidFill>
-            <a:srgbClr val="F4F8FC"/>
-          </a:solidFill>
-          <a:ln w="11430">
-            <a:solidFill>
-              <a:srgbClr val="1F2D3D"/>
-            </a:solidFill>
-            <a:prstDash val="solid"/>
-          </a:ln>
-        </p:spPr>
-        <p:txBody>
-          <a:bodyPr/>
-          <a:lstStyle/>
-          <a:p>
-            <a:endParaRPr lang="it-IT" sz="1400">
-              <a:latin typeface="Aptos" panose="020B0004020202020204" pitchFamily="34" charset="0"/>
-            </a:endParaRPr>
-          </a:p>
-        </p:txBody>
-      </p:sp>
-      <p:sp>
-        <p:nvSpPr>
-          <p:cNvPr id="10" name="Shape 3">
-            <a:extLst>
-              <a:ext uri="{FF2B5EF4-FFF2-40B4-BE49-F238E27FC236}">
-                <a16:creationId xmlns:a16="http://schemas.microsoft.com/office/drawing/2014/main" id="{06D3D24E-C572-9C32-232D-882A10801ED2}"/>
-              </a:ext>
-            </a:extLst>
-          </p:cNvPr>
-          <p:cNvSpPr/>
-          <p:nvPr/>
-        </p:nvSpPr>
-        <p:spPr>
-          <a:xfrm>
-            <a:off x="6103620" y="1937261"/>
-            <a:ext cx="5554980" cy="2057400"/>
-          </a:xfrm>
-          <a:prstGeom prst="rect">
-            <a:avLst/>
-          </a:prstGeom>
-          <a:solidFill>
-            <a:srgbClr val="F4F8FC"/>
-          </a:solidFill>
-          <a:ln w="11430">
-            <a:solidFill>
-              <a:srgbClr val="1F2D3D"/>
-            </a:solidFill>
-            <a:prstDash val="solid"/>
-          </a:ln>
-        </p:spPr>
-        <p:txBody>
-          <a:bodyPr/>
-          <a:lstStyle/>
-          <a:p>
-            <a:endParaRPr lang="it-IT" sz="1400">
-              <a:latin typeface="Aptos" panose="020B0004020202020204" pitchFamily="34" charset="0"/>
-            </a:endParaRPr>
-          </a:p>
-        </p:txBody>
-      </p:sp>
-      <p:sp>
-        <p:nvSpPr>
-          <p:cNvPr id="13" name="Text 4">
-            <a:extLst>
-              <a:ext uri="{FF2B5EF4-FFF2-40B4-BE49-F238E27FC236}">
-                <a16:creationId xmlns:a16="http://schemas.microsoft.com/office/drawing/2014/main" id="{BC3756AB-C32A-7261-09E3-589215B13795}"/>
-              </a:ext>
-            </a:extLst>
-          </p:cNvPr>
-          <p:cNvSpPr/>
-          <p:nvPr/>
-        </p:nvSpPr>
-        <p:spPr>
-          <a:xfrm>
-            <a:off x="685800" y="1617221"/>
-            <a:ext cx="5280660" cy="201168"/>
-          </a:xfrm>
-          <a:prstGeom prst="rect">
-            <a:avLst/>
-          </a:prstGeom>
-          <a:noFill/>
-          <a:ln/>
-        </p:spPr>
-        <p:txBody>
-          <a:bodyPr wrap="square" lIns="0" tIns="0" rIns="0" bIns="0" rtlCol="0" anchor="t">
-            <a:noAutofit/>
-          </a:bodyPr>
-          <a:lstStyle/>
-          <a:p>
-            <a:pPr marL="0" indent="0" algn="l">
-              <a:buNone/>
-            </a:pPr>
-            <a:r>
-              <a:rPr lang="en-US" sz="1400" b="1" dirty="0">
-                <a:solidFill>
-                  <a:schemeClr val="bg1"/>
-                </a:solidFill>
-                <a:latin typeface="Aptos" panose="020B0004020202020204" pitchFamily="34" charset="0"/>
-                <a:ea typeface="Aptos" pitchFamily="34" charset="-122"/>
-                <a:cs typeface="Aptos" pitchFamily="34" charset="-120"/>
-              </a:rPr>
-              <a:t>Platform Goals</a:t>
-            </a:r>
-            <a:endParaRPr lang="en-US" sz="1400" dirty="0">
-              <a:solidFill>
-                <a:schemeClr val="bg1"/>
-              </a:solidFill>
-              <a:latin typeface="Aptos" panose="020B0004020202020204" pitchFamily="34" charset="0"/>
-            </a:endParaRPr>
-          </a:p>
-        </p:txBody>
-      </p:sp>
-      <p:sp>
-        <p:nvSpPr>
-          <p:cNvPr id="15" name="Text 5">
-            <a:extLst>
-              <a:ext uri="{FF2B5EF4-FFF2-40B4-BE49-F238E27FC236}">
-                <a16:creationId xmlns:a16="http://schemas.microsoft.com/office/drawing/2014/main" id="{45BD3569-1FC8-D9FC-D98A-D5E91FF8D6B6}"/>
-              </a:ext>
-            </a:extLst>
-          </p:cNvPr>
-          <p:cNvSpPr/>
-          <p:nvPr/>
-        </p:nvSpPr>
-        <p:spPr>
-          <a:xfrm>
-            <a:off x="6240780" y="1617221"/>
-            <a:ext cx="5280660" cy="201168"/>
-          </a:xfrm>
-          <a:prstGeom prst="rect">
-            <a:avLst/>
-          </a:prstGeom>
-          <a:noFill/>
-          <a:ln/>
-        </p:spPr>
-        <p:txBody>
-          <a:bodyPr wrap="square" lIns="0" tIns="0" rIns="0" bIns="0" rtlCol="0" anchor="t">
-            <a:noAutofit/>
-          </a:bodyPr>
-          <a:lstStyle/>
-          <a:p>
-            <a:pPr marL="0" indent="0" algn="l">
-              <a:buNone/>
-            </a:pPr>
-            <a:r>
-              <a:rPr lang="en-US" sz="1400" b="1" dirty="0">
-                <a:solidFill>
-                  <a:schemeClr val="bg1"/>
-                </a:solidFill>
-                <a:latin typeface="Aptos" panose="020B0004020202020204" pitchFamily="34" charset="0"/>
-                <a:ea typeface="Aptos" pitchFamily="34" charset="-122"/>
-                <a:cs typeface="Aptos" pitchFamily="34" charset="-120"/>
-              </a:rPr>
-              <a:t>Hard Constraints</a:t>
-            </a:r>
-            <a:endParaRPr lang="en-US" sz="1400" dirty="0">
-              <a:solidFill>
-                <a:schemeClr val="bg1"/>
-              </a:solidFill>
-              <a:latin typeface="Aptos" panose="020B0004020202020204" pitchFamily="34" charset="0"/>
-            </a:endParaRPr>
-          </a:p>
-        </p:txBody>
-      </p:sp>
-      <p:sp>
-        <p:nvSpPr>
-          <p:cNvPr id="16" name="Text 6">
-            <a:extLst>
-              <a:ext uri="{FF2B5EF4-FFF2-40B4-BE49-F238E27FC236}">
-                <a16:creationId xmlns:a16="http://schemas.microsoft.com/office/drawing/2014/main" id="{D85A9F17-2CDE-09F0-D9DC-42A07338978F}"/>
-              </a:ext>
-            </a:extLst>
-          </p:cNvPr>
-          <p:cNvSpPr/>
-          <p:nvPr/>
-        </p:nvSpPr>
-        <p:spPr>
-          <a:xfrm>
-            <a:off x="713232" y="2202437"/>
-            <a:ext cx="146304" cy="164592"/>
-          </a:xfrm>
-          <a:prstGeom prst="rect">
-            <a:avLst/>
-          </a:prstGeom>
-          <a:noFill/>
-          <a:ln/>
-        </p:spPr>
-        <p:txBody>
-          <a:bodyPr wrap="square" lIns="0" tIns="0" rIns="0" bIns="0" rtlCol="0" anchor="t">
-            <a:noAutofit/>
-          </a:bodyPr>
-          <a:lstStyle/>
-          <a:p>
-            <a:pPr marL="0" indent="0" algn="l">
-              <a:buNone/>
-            </a:pPr>
-            <a:r>
-              <a:rPr lang="en-US" sz="1400" b="1" dirty="0">
-                <a:solidFill>
-                  <a:srgbClr val="16834A"/>
-                </a:solidFill>
-                <a:latin typeface="Aptos" panose="020B0004020202020204" pitchFamily="34" charset="0"/>
-                <a:ea typeface="Aptos" pitchFamily="34" charset="-122"/>
-                <a:cs typeface="Aptos" pitchFamily="34" charset="-120"/>
-              </a:rPr>
-              <a:t>✓</a:t>
-            </a:r>
-            <a:endParaRPr lang="en-US" sz="1400" dirty="0">
-              <a:latin typeface="Aptos" panose="020B0004020202020204" pitchFamily="34" charset="0"/>
-            </a:endParaRPr>
-          </a:p>
-        </p:txBody>
-      </p:sp>
-      <p:sp>
-        <p:nvSpPr>
-          <p:cNvPr id="17" name="Text 7">
-            <a:extLst>
-              <a:ext uri="{FF2B5EF4-FFF2-40B4-BE49-F238E27FC236}">
-                <a16:creationId xmlns:a16="http://schemas.microsoft.com/office/drawing/2014/main" id="{219F3124-7051-15A2-59F1-A7EA1C959349}"/>
-              </a:ext>
-            </a:extLst>
-          </p:cNvPr>
-          <p:cNvSpPr/>
-          <p:nvPr/>
-        </p:nvSpPr>
-        <p:spPr>
-          <a:xfrm>
-            <a:off x="941832" y="2193293"/>
-            <a:ext cx="4960620" cy="347472"/>
-          </a:xfrm>
-          <a:prstGeom prst="rect">
-            <a:avLst/>
-          </a:prstGeom>
-          <a:noFill/>
-          <a:ln/>
-        </p:spPr>
-        <p:txBody>
-          <a:bodyPr wrap="square" lIns="0" tIns="0" rIns="0" bIns="0" rtlCol="0" anchor="t">
-            <a:noAutofit/>
-          </a:bodyPr>
-          <a:lstStyle/>
-          <a:p>
-            <a:pPr marL="0" indent="0" algn="l">
-              <a:buNone/>
-            </a:pPr>
-            <a:r>
-              <a:rPr lang="en-US" sz="1400" dirty="0">
-                <a:solidFill>
-                  <a:srgbClr val="000000"/>
-                </a:solidFill>
-                <a:latin typeface="Aptos" panose="020B0004020202020204" pitchFamily="34" charset="0"/>
-                <a:ea typeface="Aptos" pitchFamily="34" charset="-122"/>
-                <a:cs typeface="Aptos" pitchFamily="34" charset="-120"/>
-              </a:rPr>
-              <a:t>Resume conversations without losing progress or repeating</a:t>
-            </a:r>
-            <a:endParaRPr lang="en-US" sz="1400" dirty="0">
-              <a:latin typeface="Aptos" panose="020B0004020202020204" pitchFamily="34" charset="0"/>
-            </a:endParaRPr>
-          </a:p>
-          <a:p>
-            <a:pPr marL="0" indent="0" algn="l">
-              <a:buNone/>
-            </a:pPr>
-            <a:r>
-              <a:rPr lang="en-US" sz="1400" dirty="0">
-                <a:solidFill>
-                  <a:srgbClr val="000000"/>
-                </a:solidFill>
-                <a:latin typeface="Aptos" panose="020B0004020202020204" pitchFamily="34" charset="0"/>
-                <a:ea typeface="Aptos" pitchFamily="34" charset="-122"/>
-                <a:cs typeface="Aptos" pitchFamily="34" charset="-120"/>
-              </a:rPr>
-              <a:t>actions.</a:t>
-            </a:r>
-            <a:endParaRPr lang="en-US" sz="1400" dirty="0">
-              <a:latin typeface="Aptos" panose="020B0004020202020204" pitchFamily="34" charset="0"/>
-            </a:endParaRPr>
-          </a:p>
-        </p:txBody>
-      </p:sp>
-      <p:sp>
-        <p:nvSpPr>
-          <p:cNvPr id="18" name="Text 8">
-            <a:extLst>
-              <a:ext uri="{FF2B5EF4-FFF2-40B4-BE49-F238E27FC236}">
-                <a16:creationId xmlns:a16="http://schemas.microsoft.com/office/drawing/2014/main" id="{DE5EDDD2-FDD0-9B22-BD94-EAEB71615DD6}"/>
-              </a:ext>
-            </a:extLst>
-          </p:cNvPr>
-          <p:cNvSpPr/>
-          <p:nvPr/>
-        </p:nvSpPr>
-        <p:spPr>
-          <a:xfrm>
-            <a:off x="713232" y="2769365"/>
-            <a:ext cx="146304" cy="164592"/>
-          </a:xfrm>
-          <a:prstGeom prst="rect">
-            <a:avLst/>
-          </a:prstGeom>
-          <a:noFill/>
-          <a:ln/>
-        </p:spPr>
-        <p:txBody>
-          <a:bodyPr wrap="square" lIns="0" tIns="0" rIns="0" bIns="0" rtlCol="0" anchor="t">
-            <a:noAutofit/>
-          </a:bodyPr>
-          <a:lstStyle/>
-          <a:p>
-            <a:pPr marL="0" indent="0" algn="l">
-              <a:buNone/>
-            </a:pPr>
-            <a:r>
-              <a:rPr lang="en-US" sz="1400" b="1" dirty="0">
-                <a:solidFill>
-                  <a:srgbClr val="16834A"/>
-                </a:solidFill>
-                <a:latin typeface="Aptos" panose="020B0004020202020204" pitchFamily="34" charset="0"/>
-                <a:ea typeface="Aptos" pitchFamily="34" charset="-122"/>
-                <a:cs typeface="Aptos" pitchFamily="34" charset="-120"/>
-              </a:rPr>
-              <a:t>✓</a:t>
-            </a:r>
-            <a:endParaRPr lang="en-US" sz="1400" dirty="0">
-              <a:latin typeface="Aptos" panose="020B0004020202020204" pitchFamily="34" charset="0"/>
-            </a:endParaRPr>
-          </a:p>
-        </p:txBody>
-      </p:sp>
-      <p:sp>
-        <p:nvSpPr>
-          <p:cNvPr id="19" name="Text 9">
-            <a:extLst>
-              <a:ext uri="{FF2B5EF4-FFF2-40B4-BE49-F238E27FC236}">
-                <a16:creationId xmlns:a16="http://schemas.microsoft.com/office/drawing/2014/main" id="{281DFB99-4FC4-9AE7-F663-A62375B0B828}"/>
-              </a:ext>
-            </a:extLst>
-          </p:cNvPr>
-          <p:cNvSpPr/>
-          <p:nvPr/>
-        </p:nvSpPr>
-        <p:spPr>
-          <a:xfrm>
-            <a:off x="941832" y="2760221"/>
-            <a:ext cx="4960620" cy="347472"/>
-          </a:xfrm>
-          <a:prstGeom prst="rect">
-            <a:avLst/>
-          </a:prstGeom>
-          <a:noFill/>
-          <a:ln/>
-        </p:spPr>
-        <p:txBody>
-          <a:bodyPr wrap="square" lIns="0" tIns="0" rIns="0" bIns="0" rtlCol="0" anchor="t">
-            <a:normAutofit/>
-          </a:bodyPr>
-          <a:lstStyle/>
-          <a:p>
-            <a:pPr marL="0" indent="0" algn="l">
-              <a:buNone/>
-            </a:pPr>
-            <a:r>
-              <a:rPr lang="en-US" sz="1400" dirty="0">
-                <a:solidFill>
-                  <a:srgbClr val="000000"/>
-                </a:solidFill>
-                <a:latin typeface="Aptos" panose="020B0004020202020204" pitchFamily="34" charset="0"/>
-                <a:ea typeface="Aptos" pitchFamily="34" charset="-122"/>
-                <a:cs typeface="Aptos" pitchFamily="34" charset="-120"/>
-              </a:rPr>
-              <a:t>Support missing document uploads and manual reviews.</a:t>
-            </a:r>
-            <a:endParaRPr lang="en-US" sz="1400" dirty="0">
-              <a:latin typeface="Aptos" panose="020B0004020202020204" pitchFamily="34" charset="0"/>
-            </a:endParaRPr>
-          </a:p>
-        </p:txBody>
-      </p:sp>
-      <p:sp>
-        <p:nvSpPr>
-          <p:cNvPr id="20" name="Text 10">
-            <a:extLst>
-              <a:ext uri="{FF2B5EF4-FFF2-40B4-BE49-F238E27FC236}">
-                <a16:creationId xmlns:a16="http://schemas.microsoft.com/office/drawing/2014/main" id="{10BD1232-2E23-669A-A7A9-62A400E8444E}"/>
-              </a:ext>
-            </a:extLst>
-          </p:cNvPr>
-          <p:cNvSpPr/>
-          <p:nvPr/>
-        </p:nvSpPr>
-        <p:spPr>
-          <a:xfrm>
-            <a:off x="713232" y="3336293"/>
-            <a:ext cx="146304" cy="164592"/>
-          </a:xfrm>
-          <a:prstGeom prst="rect">
-            <a:avLst/>
-          </a:prstGeom>
-          <a:noFill/>
-          <a:ln/>
-        </p:spPr>
-        <p:txBody>
-          <a:bodyPr wrap="square" lIns="0" tIns="0" rIns="0" bIns="0" rtlCol="0" anchor="t">
-            <a:noAutofit/>
-          </a:bodyPr>
-          <a:lstStyle/>
-          <a:p>
-            <a:pPr marL="0" indent="0" algn="l">
-              <a:buNone/>
-            </a:pPr>
-            <a:r>
-              <a:rPr lang="en-US" sz="1400" b="1" dirty="0">
-                <a:solidFill>
-                  <a:srgbClr val="16834A"/>
-                </a:solidFill>
-                <a:latin typeface="Aptos" panose="020B0004020202020204" pitchFamily="34" charset="0"/>
-                <a:ea typeface="Aptos" pitchFamily="34" charset="-122"/>
-                <a:cs typeface="Aptos" pitchFamily="34" charset="-120"/>
-              </a:rPr>
-              <a:t>✓</a:t>
-            </a:r>
-            <a:endParaRPr lang="en-US" sz="1400" dirty="0">
-              <a:latin typeface="Aptos" panose="020B0004020202020204" pitchFamily="34" charset="0"/>
-            </a:endParaRPr>
-          </a:p>
-        </p:txBody>
-      </p:sp>
-      <p:sp>
-        <p:nvSpPr>
-          <p:cNvPr id="21" name="Text 11">
-            <a:extLst>
-              <a:ext uri="{FF2B5EF4-FFF2-40B4-BE49-F238E27FC236}">
-                <a16:creationId xmlns:a16="http://schemas.microsoft.com/office/drawing/2014/main" id="{1395396B-D728-EFA1-D99D-94BCB1740013}"/>
-              </a:ext>
-            </a:extLst>
-          </p:cNvPr>
-          <p:cNvSpPr/>
-          <p:nvPr/>
-        </p:nvSpPr>
-        <p:spPr>
-          <a:xfrm>
-            <a:off x="941832" y="3327149"/>
-            <a:ext cx="4960620" cy="347472"/>
-          </a:xfrm>
-          <a:prstGeom prst="rect">
-            <a:avLst/>
-          </a:prstGeom>
-          <a:noFill/>
-          <a:ln/>
-        </p:spPr>
-        <p:txBody>
-          <a:bodyPr wrap="square" lIns="0" tIns="0" rIns="0" bIns="0" rtlCol="0" anchor="t">
-            <a:noAutofit/>
-          </a:bodyPr>
-          <a:lstStyle/>
-          <a:p>
-            <a:pPr marL="0" indent="0" algn="l">
-              <a:buNone/>
-            </a:pPr>
-            <a:r>
-              <a:rPr lang="en-US" sz="1400" dirty="0">
-                <a:solidFill>
-                  <a:srgbClr val="000000"/>
-                </a:solidFill>
-                <a:latin typeface="Aptos" panose="020B0004020202020204" pitchFamily="34" charset="0"/>
-                <a:ea typeface="Aptos" pitchFamily="34" charset="-122"/>
-                <a:cs typeface="Aptos" pitchFamily="34" charset="-120"/>
-              </a:rPr>
-              <a:t>Guarantee no duplicate charges, shipments, or premature</a:t>
-            </a:r>
-            <a:endParaRPr lang="en-US" sz="1400" dirty="0">
-              <a:latin typeface="Aptos" panose="020B0004020202020204" pitchFamily="34" charset="0"/>
-            </a:endParaRPr>
-          </a:p>
-          <a:p>
-            <a:pPr marL="0" indent="0" algn="l">
-              <a:buNone/>
-            </a:pPr>
-            <a:r>
-              <a:rPr lang="en-US" sz="1400" dirty="0">
-                <a:solidFill>
-                  <a:srgbClr val="000000"/>
-                </a:solidFill>
-                <a:latin typeface="Aptos" panose="020B0004020202020204" pitchFamily="34" charset="0"/>
-                <a:ea typeface="Aptos" pitchFamily="34" charset="-122"/>
-                <a:cs typeface="Aptos" pitchFamily="34" charset="-120"/>
-              </a:rPr>
-              <a:t>activations.</a:t>
-            </a:r>
-            <a:endParaRPr lang="en-US" sz="1400" dirty="0">
-              <a:latin typeface="Aptos" panose="020B0004020202020204" pitchFamily="34" charset="0"/>
-            </a:endParaRPr>
-          </a:p>
-        </p:txBody>
-      </p:sp>
-      <p:sp>
-        <p:nvSpPr>
-          <p:cNvPr id="22" name="Text 12">
-            <a:extLst>
-              <a:ext uri="{FF2B5EF4-FFF2-40B4-BE49-F238E27FC236}">
-                <a16:creationId xmlns:a16="http://schemas.microsoft.com/office/drawing/2014/main" id="{A2B4AE33-EE4D-7C45-3AAA-06FD20E20884}"/>
-              </a:ext>
-            </a:extLst>
-          </p:cNvPr>
-          <p:cNvSpPr/>
-          <p:nvPr/>
-        </p:nvSpPr>
-        <p:spPr>
-          <a:xfrm>
-            <a:off x="6332220" y="2184149"/>
-            <a:ext cx="109728" cy="164592"/>
-          </a:xfrm>
-          <a:prstGeom prst="rect">
-            <a:avLst/>
-          </a:prstGeom>
-          <a:noFill/>
-          <a:ln/>
-        </p:spPr>
-        <p:txBody>
-          <a:bodyPr wrap="square" lIns="0" tIns="0" rIns="0" bIns="0" rtlCol="0" anchor="t">
-            <a:noAutofit/>
-          </a:bodyPr>
-          <a:lstStyle/>
-          <a:p>
-            <a:pPr marL="0" indent="0" algn="l">
-              <a:buNone/>
-            </a:pPr>
-            <a:r>
-              <a:rPr lang="en-US" sz="1400" dirty="0">
-                <a:solidFill>
-                  <a:srgbClr val="000000"/>
-                </a:solidFill>
-                <a:latin typeface="Aptos" panose="020B0004020202020204" pitchFamily="34" charset="0"/>
-                <a:ea typeface="Aptos" pitchFamily="34" charset="-122"/>
-                <a:cs typeface="Aptos" pitchFamily="34" charset="-120"/>
-              </a:rPr>
-              <a:t>•</a:t>
-            </a:r>
-            <a:endParaRPr lang="en-US" sz="1400" dirty="0">
-              <a:latin typeface="Aptos" panose="020B0004020202020204" pitchFamily="34" charset="0"/>
-            </a:endParaRPr>
-          </a:p>
-        </p:txBody>
-      </p:sp>
-      <p:sp>
-        <p:nvSpPr>
-          <p:cNvPr id="23" name="Text 13">
-            <a:extLst>
-              <a:ext uri="{FF2B5EF4-FFF2-40B4-BE49-F238E27FC236}">
-                <a16:creationId xmlns:a16="http://schemas.microsoft.com/office/drawing/2014/main" id="{32B46CAF-C2A5-9B7B-D642-053D8E220F71}"/>
-              </a:ext>
-            </a:extLst>
-          </p:cNvPr>
-          <p:cNvSpPr/>
-          <p:nvPr/>
-        </p:nvSpPr>
-        <p:spPr>
-          <a:xfrm>
-            <a:off x="6533388" y="2184149"/>
-            <a:ext cx="4869180" cy="201168"/>
-          </a:xfrm>
-          <a:prstGeom prst="rect">
-            <a:avLst/>
-          </a:prstGeom>
-          <a:noFill/>
-          <a:ln/>
-        </p:spPr>
-        <p:txBody>
-          <a:bodyPr wrap="square" lIns="0" tIns="0" rIns="0" bIns="0" rtlCol="0" anchor="ctr">
-            <a:noAutofit/>
-          </a:bodyPr>
-          <a:lstStyle/>
-          <a:p>
-            <a:pPr marL="0" indent="0">
-              <a:buNone/>
-            </a:pPr>
-            <a:r>
-              <a:rPr lang="en-US" sz="1400" b="1" dirty="0">
-                <a:solidFill>
-                  <a:srgbClr val="000000"/>
-                </a:solidFill>
-                <a:latin typeface="Aptos" panose="020B0004020202020204" pitchFamily="34" charset="0"/>
-                <a:ea typeface="Aptos" pitchFamily="34" charset="-122"/>
-                <a:cs typeface="Aptos" pitchFamily="34" charset="-120"/>
-              </a:rPr>
-              <a:t>Team:</a:t>
-            </a:r>
-            <a:r>
-              <a:rPr lang="en-US" sz="1400" dirty="0">
-                <a:solidFill>
-                  <a:srgbClr val="000000"/>
-                </a:solidFill>
-                <a:latin typeface="Aptos" panose="020B0004020202020204" pitchFamily="34" charset="0"/>
-                <a:ea typeface="Aptos" pitchFamily="34" charset="-122"/>
-                <a:cs typeface="Aptos" pitchFamily="34" charset="-120"/>
-              </a:rPr>
-              <a:t> 2 Platform Engineers (AWS/Managed Kubernetes).</a:t>
-            </a:r>
-            <a:endParaRPr lang="en-US" sz="1400" dirty="0">
-              <a:latin typeface="Aptos" panose="020B0004020202020204" pitchFamily="34" charset="0"/>
-            </a:endParaRPr>
-          </a:p>
-        </p:txBody>
-      </p:sp>
-      <p:sp>
-        <p:nvSpPr>
-          <p:cNvPr id="24" name="Text 14">
-            <a:extLst>
-              <a:ext uri="{FF2B5EF4-FFF2-40B4-BE49-F238E27FC236}">
-                <a16:creationId xmlns:a16="http://schemas.microsoft.com/office/drawing/2014/main" id="{485F5021-53E8-2A2A-8D18-E16FCC47245E}"/>
-              </a:ext>
-            </a:extLst>
-          </p:cNvPr>
-          <p:cNvSpPr/>
-          <p:nvPr/>
-        </p:nvSpPr>
-        <p:spPr>
-          <a:xfrm>
-            <a:off x="6332220" y="2577341"/>
-            <a:ext cx="109728" cy="164592"/>
-          </a:xfrm>
-          <a:prstGeom prst="rect">
-            <a:avLst/>
-          </a:prstGeom>
-          <a:noFill/>
-          <a:ln/>
-        </p:spPr>
-        <p:txBody>
-          <a:bodyPr wrap="square" lIns="0" tIns="0" rIns="0" bIns="0" rtlCol="0" anchor="t">
-            <a:noAutofit/>
-          </a:bodyPr>
-          <a:lstStyle/>
-          <a:p>
-            <a:pPr marL="0" indent="0" algn="l">
-              <a:buNone/>
-            </a:pPr>
-            <a:r>
-              <a:rPr lang="en-US" sz="1400" dirty="0">
-                <a:solidFill>
-                  <a:srgbClr val="000000"/>
-                </a:solidFill>
-                <a:latin typeface="Aptos" panose="020B0004020202020204" pitchFamily="34" charset="0"/>
-                <a:ea typeface="Aptos" pitchFamily="34" charset="-122"/>
-                <a:cs typeface="Aptos" pitchFamily="34" charset="-120"/>
-              </a:rPr>
-              <a:t>•</a:t>
-            </a:r>
-            <a:endParaRPr lang="en-US" sz="1400" dirty="0">
-              <a:latin typeface="Aptos" panose="020B0004020202020204" pitchFamily="34" charset="0"/>
-            </a:endParaRPr>
-          </a:p>
-        </p:txBody>
-      </p:sp>
-      <p:sp>
-        <p:nvSpPr>
-          <p:cNvPr id="25" name="Text 15">
-            <a:extLst>
-              <a:ext uri="{FF2B5EF4-FFF2-40B4-BE49-F238E27FC236}">
-                <a16:creationId xmlns:a16="http://schemas.microsoft.com/office/drawing/2014/main" id="{D103A29F-7E66-A75E-E7B8-4558E7B115B7}"/>
-              </a:ext>
-            </a:extLst>
-          </p:cNvPr>
-          <p:cNvSpPr/>
-          <p:nvPr/>
-        </p:nvSpPr>
-        <p:spPr>
-          <a:xfrm>
-            <a:off x="6533388" y="2671631"/>
-            <a:ext cx="4869180" cy="201168"/>
-          </a:xfrm>
-          <a:prstGeom prst="rect">
-            <a:avLst/>
-          </a:prstGeom>
-          <a:noFill/>
-          <a:ln/>
-        </p:spPr>
-        <p:txBody>
-          <a:bodyPr wrap="square" lIns="0" tIns="0" rIns="0" bIns="0" rtlCol="0" anchor="ctr">
-            <a:noAutofit/>
-          </a:bodyPr>
-          <a:lstStyle/>
-          <a:p>
-            <a:pPr marL="0" indent="0">
-              <a:buNone/>
-            </a:pPr>
-            <a:r>
-              <a:rPr lang="en-US" sz="1400" b="1" dirty="0">
-                <a:solidFill>
-                  <a:srgbClr val="000000"/>
-                </a:solidFill>
-                <a:latin typeface="Aptos" panose="020B0004020202020204" pitchFamily="34" charset="0"/>
-                <a:ea typeface="Aptos" pitchFamily="34" charset="-122"/>
-                <a:cs typeface="Aptos" pitchFamily="34" charset="-120"/>
-              </a:rPr>
-              <a:t>Resilience:</a:t>
-            </a:r>
-            <a:r>
-              <a:rPr lang="en-US" sz="1400" dirty="0">
-                <a:solidFill>
-                  <a:srgbClr val="000000"/>
-                </a:solidFill>
-                <a:latin typeface="Aptos" panose="020B0004020202020204" pitchFamily="34" charset="0"/>
-                <a:ea typeface="Aptos" pitchFamily="34" charset="-122"/>
-                <a:cs typeface="Aptos" pitchFamily="34" charset="-120"/>
-              </a:rPr>
-              <a:t> 99.9% Availability · RPO &lt; 1 minute · RTO &lt; 10 minutes.</a:t>
-            </a:r>
-            <a:endParaRPr lang="en-US" sz="1400" dirty="0">
-              <a:latin typeface="Aptos" panose="020B0004020202020204" pitchFamily="34" charset="0"/>
-            </a:endParaRPr>
-          </a:p>
-        </p:txBody>
-      </p:sp>
-      <p:sp>
-        <p:nvSpPr>
-          <p:cNvPr id="26" name="Text 16">
-            <a:extLst>
-              <a:ext uri="{FF2B5EF4-FFF2-40B4-BE49-F238E27FC236}">
-                <a16:creationId xmlns:a16="http://schemas.microsoft.com/office/drawing/2014/main" id="{7D9D7E11-DD5D-A244-F0DF-1BEA4AF6E759}"/>
-              </a:ext>
-            </a:extLst>
-          </p:cNvPr>
-          <p:cNvSpPr/>
-          <p:nvPr/>
-        </p:nvSpPr>
-        <p:spPr>
-          <a:xfrm>
-            <a:off x="6332220" y="3058090"/>
-            <a:ext cx="109728" cy="164592"/>
-          </a:xfrm>
-          <a:prstGeom prst="rect">
-            <a:avLst/>
-          </a:prstGeom>
-          <a:noFill/>
-          <a:ln/>
-        </p:spPr>
-        <p:txBody>
-          <a:bodyPr wrap="square" lIns="0" tIns="0" rIns="0" bIns="0" rtlCol="0" anchor="t">
-            <a:noAutofit/>
-          </a:bodyPr>
-          <a:lstStyle/>
-          <a:p>
-            <a:pPr marL="0" indent="0" algn="l">
-              <a:buNone/>
-            </a:pPr>
-            <a:r>
-              <a:rPr lang="en-US" sz="1400" dirty="0">
-                <a:solidFill>
-                  <a:srgbClr val="000000"/>
-                </a:solidFill>
-                <a:latin typeface="Aptos" panose="020B0004020202020204" pitchFamily="34" charset="0"/>
-                <a:ea typeface="Aptos" pitchFamily="34" charset="-122"/>
-                <a:cs typeface="Aptos" pitchFamily="34" charset="-120"/>
-              </a:rPr>
-              <a:t>•</a:t>
-            </a:r>
-            <a:endParaRPr lang="en-US" sz="1400" dirty="0">
-              <a:latin typeface="Aptos" panose="020B0004020202020204" pitchFamily="34" charset="0"/>
-            </a:endParaRPr>
-          </a:p>
-        </p:txBody>
-      </p:sp>
-      <p:sp>
-        <p:nvSpPr>
-          <p:cNvPr id="27" name="Text 17">
-            <a:extLst>
-              <a:ext uri="{FF2B5EF4-FFF2-40B4-BE49-F238E27FC236}">
-                <a16:creationId xmlns:a16="http://schemas.microsoft.com/office/drawing/2014/main" id="{719A9995-BF66-A417-A71F-003E084E3DB0}"/>
-              </a:ext>
-            </a:extLst>
-          </p:cNvPr>
-          <p:cNvSpPr/>
-          <p:nvPr/>
-        </p:nvSpPr>
-        <p:spPr>
-          <a:xfrm>
-            <a:off x="6533388" y="3058090"/>
-            <a:ext cx="4869180" cy="201168"/>
-          </a:xfrm>
-          <a:prstGeom prst="rect">
-            <a:avLst/>
-          </a:prstGeom>
-          <a:noFill/>
-          <a:ln/>
-        </p:spPr>
-        <p:txBody>
-          <a:bodyPr wrap="square" lIns="0" tIns="0" rIns="0" bIns="0" rtlCol="0" anchor="ctr">
-            <a:noAutofit/>
-          </a:bodyPr>
-          <a:lstStyle/>
-          <a:p>
-            <a:pPr marL="0" indent="0">
-              <a:buNone/>
-            </a:pPr>
-            <a:r>
-              <a:rPr lang="en-US" sz="1400" b="1" dirty="0">
-                <a:solidFill>
-                  <a:srgbClr val="000000"/>
-                </a:solidFill>
-                <a:latin typeface="Aptos" panose="020B0004020202020204" pitchFamily="34" charset="0"/>
-                <a:ea typeface="Aptos" pitchFamily="34" charset="-122"/>
-                <a:cs typeface="Aptos" pitchFamily="34" charset="-120"/>
-              </a:rPr>
-              <a:t>Security:</a:t>
-            </a:r>
-            <a:r>
-              <a:rPr lang="en-US" sz="1400" dirty="0">
-                <a:solidFill>
-                  <a:srgbClr val="000000"/>
-                </a:solidFill>
-                <a:latin typeface="Aptos" panose="020B0004020202020204" pitchFamily="34" charset="0"/>
-                <a:ea typeface="Aptos" pitchFamily="34" charset="-122"/>
-                <a:cs typeface="Aptos" pitchFamily="34" charset="-120"/>
-              </a:rPr>
-              <a:t> Confidential data must remain in the selected region.</a:t>
-            </a:r>
-            <a:endParaRPr lang="en-US" sz="1400" dirty="0">
-              <a:latin typeface="Aptos" panose="020B0004020202020204" pitchFamily="34" charset="0"/>
-            </a:endParaRPr>
-          </a:p>
-        </p:txBody>
-      </p:sp>
-      <p:sp>
-        <p:nvSpPr>
-          <p:cNvPr id="28" name="Text 18">
-            <a:extLst>
-              <a:ext uri="{FF2B5EF4-FFF2-40B4-BE49-F238E27FC236}">
-                <a16:creationId xmlns:a16="http://schemas.microsoft.com/office/drawing/2014/main" id="{0CBE7BB7-3E4C-38F6-E10C-1AC21957C196}"/>
-              </a:ext>
-            </a:extLst>
-          </p:cNvPr>
-          <p:cNvSpPr/>
-          <p:nvPr/>
-        </p:nvSpPr>
-        <p:spPr>
-          <a:xfrm>
-            <a:off x="6332220" y="3363725"/>
-            <a:ext cx="109728" cy="164592"/>
-          </a:xfrm>
-          <a:prstGeom prst="rect">
-            <a:avLst/>
-          </a:prstGeom>
-          <a:noFill/>
-          <a:ln/>
-        </p:spPr>
-        <p:txBody>
-          <a:bodyPr wrap="square" lIns="0" tIns="0" rIns="0" bIns="0" rtlCol="0" anchor="t">
-            <a:noAutofit/>
-          </a:bodyPr>
-          <a:lstStyle/>
-          <a:p>
-            <a:pPr marL="0" indent="0" algn="l">
-              <a:buNone/>
-            </a:pPr>
-            <a:r>
-              <a:rPr lang="en-US" sz="1400" dirty="0">
-                <a:solidFill>
-                  <a:srgbClr val="000000"/>
-                </a:solidFill>
-                <a:latin typeface="Aptos" panose="020B0004020202020204" pitchFamily="34" charset="0"/>
-                <a:ea typeface="Aptos" pitchFamily="34" charset="-122"/>
-                <a:cs typeface="Aptos" pitchFamily="34" charset="-120"/>
-              </a:rPr>
-              <a:t>•</a:t>
-            </a:r>
-            <a:endParaRPr lang="en-US" sz="1400" dirty="0">
-              <a:latin typeface="Aptos" panose="020B0004020202020204" pitchFamily="34" charset="0"/>
-            </a:endParaRPr>
-          </a:p>
-        </p:txBody>
-      </p:sp>
-      <p:sp>
-        <p:nvSpPr>
-          <p:cNvPr id="29" name="Text 19">
-            <a:extLst>
-              <a:ext uri="{FF2B5EF4-FFF2-40B4-BE49-F238E27FC236}">
-                <a16:creationId xmlns:a16="http://schemas.microsoft.com/office/drawing/2014/main" id="{0CFD474E-2174-8C9B-9B23-FEB3C65FE757}"/>
-              </a:ext>
-            </a:extLst>
-          </p:cNvPr>
-          <p:cNvSpPr/>
-          <p:nvPr/>
-        </p:nvSpPr>
-        <p:spPr>
-          <a:xfrm>
-            <a:off x="6533388" y="3363725"/>
-            <a:ext cx="4869180" cy="384048"/>
-          </a:xfrm>
-          <a:prstGeom prst="rect">
-            <a:avLst/>
-          </a:prstGeom>
-          <a:noFill/>
-          <a:ln/>
-        </p:spPr>
-        <p:txBody>
-          <a:bodyPr wrap="square" lIns="0" tIns="0" rIns="0" bIns="0" rtlCol="0" anchor="ctr">
-            <a:noAutofit/>
-          </a:bodyPr>
-          <a:lstStyle/>
-          <a:p>
-            <a:pPr marL="0" indent="0">
-              <a:buNone/>
-            </a:pPr>
-            <a:r>
-              <a:rPr lang="en-US" sz="1400" b="1" dirty="0">
-                <a:solidFill>
-                  <a:srgbClr val="000000"/>
-                </a:solidFill>
-                <a:latin typeface="Aptos" panose="020B0004020202020204" pitchFamily="34" charset="0"/>
-                <a:ea typeface="Aptos" pitchFamily="34" charset="-122"/>
-                <a:cs typeface="Aptos" pitchFamily="34" charset="-120"/>
-              </a:rPr>
-              <a:t>To Confirm (Assumptions):</a:t>
-            </a:r>
-            <a:r>
-              <a:rPr lang="en-US" sz="1400" dirty="0">
-                <a:solidFill>
-                  <a:srgbClr val="000000"/>
-                </a:solidFill>
-                <a:latin typeface="Aptos" panose="020B0004020202020204" pitchFamily="34" charset="0"/>
-                <a:ea typeface="Aptos" pitchFamily="34" charset="-122"/>
-                <a:cs typeface="Aptos" pitchFamily="34" charset="-120"/>
-              </a:rPr>
-              <a:t> Single-AZ failure scope, provider guarantees, and regional model availability at launch.</a:t>
-            </a:r>
-            <a:endParaRPr lang="en-US" sz="1400" dirty="0">
-              <a:latin typeface="Aptos" panose="020B0004020202020204" pitchFamily="34" charset="0"/>
-            </a:endParaRPr>
-          </a:p>
-        </p:txBody>
-      </p:sp>
-    </p:spTree>
-    <p:extLst>
-      <p:ext uri="{BB962C8B-B14F-4D97-AF65-F5344CB8AC3E}">
-        <p14:creationId xmlns:p14="http://schemas.microsoft.com/office/powerpoint/2010/main" val="2156928992"/>
-      </p:ext>
-    </p:extLst>
-  </p:cSld>
-  <p:clrMapOvr>
-    <a:masterClrMapping/>
-  </p:clrMapOvr>
-</p:sld>
-</file>
-
-<file path=ppt/slides/slide20.xml><?xml version="1.0" encoding="utf-8"?>
-<p:sld xmlns:a="http://schemas.openxmlformats.org/drawingml/2006/main" xmlns:r="http://schemas.openxmlformats.org/officeDocument/2006/relationships" xmlns:p="http://schemas.openxmlformats.org/presentationml/2006/main" show="0">
-  <p:cSld>
-    <p:spTree>
-      <p:nvGrpSpPr>
-        <p:cNvPr id="1" name=""/>
-        <p:cNvGrpSpPr/>
-        <p:nvPr/>
-      </p:nvGrpSpPr>
-      <p:grpSpPr>
-        <a:xfrm>
-          <a:off x="0" y="0"/>
-          <a:ext cx="0" cy="0"/>
-          <a:chOff x="0" y="0"/>
-          <a:chExt cx="0" cy="0"/>
-        </a:xfrm>
-      </p:grpSpPr>
-      <p:pic>
-        <p:nvPicPr>
-          <p:cNvPr id="2" name="Picture 2"/>
-          <p:cNvPicPr>
-            <a:picLocks noChangeAspect="1"/>
-          </p:cNvPicPr>
-          <p:nvPr/>
-        </p:nvPicPr>
-        <p:blipFill>
-          <a:blip r:embed="rId2"/>
-          <a:srcRect t="11551" b="2986"/>
-          <a:stretch>
-            <a:fillRect/>
-          </a:stretch>
-        </p:blipFill>
-        <p:spPr>
-          <a:xfrm>
-            <a:off x="0" y="421307"/>
-            <a:ext cx="12192000" cy="5812225"/>
-          </a:xfrm>
-          <a:prstGeom prst="rect">
-            <a:avLst/>
-          </a:prstGeom>
-        </p:spPr>
-      </p:pic>
-    </p:spTree>
-  </p:cSld>
-  <p:clrMapOvr>
-    <a:masterClrMapping/>
-  </p:clrMapOvr>
-</p:sld>
-</file>
-
 <file path=ppt/slides/slide21.xml><?xml version="1.0" encoding="utf-8"?>
 <p:sld xmlns:a="http://schemas.openxmlformats.org/drawingml/2006/main" xmlns:r="http://schemas.openxmlformats.org/officeDocument/2006/relationships" xmlns:p="http://schemas.openxmlformats.org/presentationml/2006/main" show="0">
   <p:cSld>
@@ -17961,14 +19888,15 @@
         </p:nvPicPr>
         <p:blipFill>
           <a:blip r:embed="rId2"/>
+          <a:srcRect t="11551" b="2986"/>
           <a:stretch>
             <a:fillRect/>
           </a:stretch>
         </p:blipFill>
         <p:spPr>
           <a:xfrm>
-            <a:off x="0" y="28575"/>
-            <a:ext cx="12192000" cy="6800850"/>
+            <a:off x="0" y="421307"/>
+            <a:ext cx="12192000" cy="5812225"/>
           </a:xfrm>
           <a:prstGeom prst="rect">
             <a:avLst/>
@@ -17984,6 +19912,55 @@
 </file>
 
 <file path=ppt/slides/slide22.xml><?xml version="1.0" encoding="utf-8"?>
+<p:sld xmlns:a="http://schemas.openxmlformats.org/drawingml/2006/main" xmlns:r="http://schemas.openxmlformats.org/officeDocument/2006/relationships" xmlns:p="http://schemas.openxmlformats.org/presentationml/2006/main" show="0">
+  <p:cSld>
+    <p:spTree>
+      <p:nvGrpSpPr>
+        <p:cNvPr id="1" name=""/>
+        <p:cNvGrpSpPr/>
+        <p:nvPr/>
+      </p:nvGrpSpPr>
+      <p:grpSpPr>
+        <a:xfrm>
+          <a:off x="0" y="0"/>
+          <a:ext cx="0" cy="0"/>
+          <a:chOff x="0" y="0"/>
+          <a:chExt cx="0" cy="0"/>
+        </a:xfrm>
+      </p:grpSpPr>
+      <p:pic>
+        <p:nvPicPr>
+          <p:cNvPr id="2" name="Picture 2"/>
+          <p:cNvPicPr>
+            <a:picLocks noChangeAspect="1"/>
+          </p:cNvPicPr>
+          <p:nvPr/>
+        </p:nvPicPr>
+        <p:blipFill>
+          <a:blip r:embed="rId2"/>
+          <a:stretch>
+            <a:fillRect/>
+          </a:stretch>
+        </p:blipFill>
+        <p:spPr>
+          <a:xfrm>
+            <a:off x="0" y="28575"/>
+            <a:ext cx="12192000" cy="6800850"/>
+          </a:xfrm>
+          <a:prstGeom prst="rect">
+            <a:avLst/>
+          </a:prstGeom>
+        </p:spPr>
+      </p:pic>
+    </p:spTree>
+  </p:cSld>
+  <p:clrMapOvr>
+    <a:masterClrMapping/>
+  </p:clrMapOvr>
+</p:sld>
+</file>
+
+<file path=ppt/slides/slide23.xml><?xml version="1.0" encoding="utf-8"?>
 <p:sld xmlns:a="http://schemas.openxmlformats.org/drawingml/2006/main" xmlns:r="http://schemas.openxmlformats.org/officeDocument/2006/relationships" xmlns:p="http://schemas.openxmlformats.org/presentationml/2006/main" show="0">
   <p:cSld name="Slide 12">
     <p:bg>
@@ -19032,7 +21009,7 @@
 </p:sld>
 </file>
 
-<file path=ppt/slides/slide23.xml><?xml version="1.0" encoding="utf-8"?>
+<file path=ppt/slides/slide24.xml><?xml version="1.0" encoding="utf-8"?>
 <p:sld xmlns:a="http://schemas.openxmlformats.org/drawingml/2006/main" xmlns:r="http://schemas.openxmlformats.org/officeDocument/2006/relationships" xmlns:p="http://schemas.openxmlformats.org/presentationml/2006/main" show="0">
   <p:cSld name="Slide 13">
     <p:bg>
@@ -20996,7 +22973,7 @@
 </p:sld>
 </file>
 
-<file path=ppt/slides/slide24.xml><?xml version="1.0" encoding="utf-8"?>
+<file path=ppt/slides/slide25.xml><?xml version="1.0" encoding="utf-8"?>
 <p:sld xmlns:a="http://schemas.openxmlformats.org/drawingml/2006/main" xmlns:r="http://schemas.openxmlformats.org/officeDocument/2006/relationships" xmlns:p="http://schemas.openxmlformats.org/presentationml/2006/main" show="0">
   <p:cSld name="Slide 14">
     <p:bg>
@@ -22666,7 +24643,7 @@
 </p:sld>
 </file>
 
-<file path=ppt/slides/slide25.xml><?xml version="1.0" encoding="utf-8"?>
+<file path=ppt/slides/slide26.xml><?xml version="1.0" encoding="utf-8"?>
 <p:sld xmlns:a="http://schemas.openxmlformats.org/drawingml/2006/main" xmlns:r="http://schemas.openxmlformats.org/officeDocument/2006/relationships" xmlns:p="http://schemas.openxmlformats.org/presentationml/2006/main" show="0">
   <p:cSld name="Slide 15">
     <p:bg>
@@ -25626,27 +27603,8 @@
                 <a:ea typeface="Aptos Display" pitchFamily="34" charset="-122"/>
                 <a:cs typeface="Aptos Display" pitchFamily="34" charset="-120"/>
               </a:rPr>
-              <a:t>High Level Architecture: Components and </a:t>
-            </a:r>
-            <a:r>
-              <a:rPr lang="en-US" sz="2750" b="1" dirty="0" err="1">
-                <a:solidFill>
-                  <a:srgbClr val="07133D"/>
-                </a:solidFill>
-                <a:latin typeface="Aptos Display" pitchFamily="34" charset="0"/>
-                <a:ea typeface="Aptos Display" pitchFamily="34" charset="-122"/>
-                <a:cs typeface="Aptos Display" pitchFamily="34" charset="-120"/>
-              </a:rPr>
-              <a:t>Responsabilities</a:t>
-            </a:r>
-            <a:endParaRPr lang="en-US" sz="2750" b="1" dirty="0">
-              <a:solidFill>
-                <a:srgbClr val="07133D"/>
-              </a:solidFill>
-              <a:latin typeface="Aptos Display" pitchFamily="34" charset="0"/>
-              <a:ea typeface="Aptos Display" pitchFamily="34" charset="-122"/>
-              <a:cs typeface="Aptos Display" pitchFamily="34" charset="-120"/>
-            </a:endParaRPr>
+              <a:t>High Level Architecture: Components and Responsibilities</a:t>
+            </a:r>
           </a:p>
         </p:txBody>
       </p:sp>
@@ -27441,7 +29399,7 @@
                 <a:ea typeface="Aptos Display" pitchFamily="34" charset="-122"/>
                 <a:cs typeface="Aptos Display" pitchFamily="34" charset="-120"/>
               </a:rPr>
-              <a:t>Choices and their trade-offs</a:t>
+              <a:t>Choices and trade-offs</a:t>
             </a:r>
             <a:endParaRPr lang="en-US" sz="2750" dirty="0"/>
           </a:p>
@@ -28812,7 +30770,7 @@
                 <a:ea typeface="Aptos" pitchFamily="34" charset="-122"/>
                 <a:cs typeface="Aptos" pitchFamily="34" charset="-120"/>
               </a:rPr>
-              <a:t>Processing work inside requests; orchestration for every independent job.</a:t>
+              <a:t>Processing work inside requests; Managed queue system (RabbitMQ, NATS, etc..).</a:t>
             </a:r>
             <a:endParaRPr lang="en-US" sz="1100" dirty="0"/>
           </a:p>
@@ -29357,7 +31315,7 @@
                 <a:ea typeface="Aptos Display" pitchFamily="34" charset="-122"/>
                 <a:cs typeface="Aptos Display" pitchFamily="34" charset="-120"/>
               </a:rPr>
-              <a:t>Choices and their trade-offs</a:t>
+              <a:t>Choices and trade-offs</a:t>
             </a:r>
             <a:endParaRPr lang="en-US" sz="2750" dirty="0"/>
           </a:p>

--- a/presentation/meridian_mattia_vincenzi.pptx
+++ b/presentation/meridian_mattia_vincenzi.pptx
@@ -5,7 +5,7 @@
     <p:sldMasterId id="2147483648" r:id="rId1"/>
   </p:sldMasterIdLst>
   <p:notesMasterIdLst>
-    <p:notesMasterId r:id="rId28"/>
+    <p:notesMasterId r:id="rId26"/>
   </p:notesMasterIdLst>
   <p:sldIdLst>
     <p:sldId id="271" r:id="rId2"/>
@@ -30,10 +30,8 @@
     <p:sldId id="266" r:id="rId21"/>
     <p:sldId id="284" r:id="rId22"/>
     <p:sldId id="285" r:id="rId23"/>
-    <p:sldId id="267" r:id="rId24"/>
-    <p:sldId id="268" r:id="rId25"/>
-    <p:sldId id="269" r:id="rId26"/>
-    <p:sldId id="270" r:id="rId27"/>
+    <p:sldId id="269" r:id="rId24"/>
+    <p:sldId id="270" r:id="rId25"/>
   </p:sldIdLst>
   <p:sldSz cx="12192000" cy="6858000"/>
   <p:notesSz cx="6858000" cy="12192000"/>
@@ -1535,7 +1533,7 @@
           <a:p>
             <a:r>
               <a:rPr lang="en-US" dirty="0"/>
-              <a:t>Use this slide only if asked for more detail on why the outbox is necessary and what it does not solve. It prevents loss of accepted work between a database commit and a remote call, but it does not guarantee exactly-once delivery. Stable operation identifiers, provider idempotency and reconciliation remain required.</a:t>
+              <a:t>This is the evidence matrix for launch readiness. Use it to make clear what is planned versus what has been demonstrated. The strongest validation priorities are journey continuity, safe external effects, deployment compatibility, recovery measurement, security and sustainable load.</a:t>
             </a:r>
           </a:p>
         </p:txBody>
@@ -1622,7 +1620,7 @@
           <a:p>
             <a:r>
               <a:rPr lang="en-US" dirty="0"/>
-              <a:t>Cost detail is taken from the documented estimate. Public AWS prices were checked on 18 September 2026, with Ireland eu-west-1, one production environment, on-demand Linux nodes, standard EKS/PostgreSQL support, 730 hours/month and no credits, commitments or free-tier deductions. Telemetry and other services remain allowances, not a validated bill.</a:t>
+              <a:t>Keep this slide available for discussion. It collects the material uncertainties that affect the design: recovery scope, residency, provider contracts, operational ownership and traffic/cost assumptions. Emphasize that these do not relax the requirements; they define what must be confirmed or demonstrated.</a:t>
             </a:r>
           </a:p>
         </p:txBody>
@@ -1645,180 +1643,6 @@
             <a:fld id="{F7021451-1387-4CA6-816F-3879F97B5CBC}" type="slidenum">
               <a:rPr lang="en-US"/>
               <a:t>24</a:t>
-            </a:fld>
-            <a:endParaRPr lang="en-US"/>
-          </a:p>
-        </p:txBody>
-      </p:sp>
-    </p:spTree>
-    <p:extLst>
-      <p:ext uri="{BB962C8B-B14F-4D97-AF65-F5344CB8AC3E}">
-        <p14:creationId xmlns:p14="http://schemas.microsoft.com/office/powerpoint/2010/main" val="1024086991"/>
-      </p:ext>
-    </p:extLst>
-  </p:cSld>
-  <p:clrMapOvr>
-    <a:masterClrMapping/>
-  </p:clrMapOvr>
-</p:notes>
-</file>
-
-<file path=ppt/notesSlides/notesSlide23.xml><?xml version="1.0" encoding="utf-8"?>
-<p:notes xmlns:a="http://schemas.openxmlformats.org/drawingml/2006/main" xmlns:r="http://schemas.openxmlformats.org/officeDocument/2006/relationships" xmlns:p="http://schemas.openxmlformats.org/presentationml/2006/main">
-  <p:cSld>
-    <p:spTree>
-      <p:nvGrpSpPr>
-        <p:cNvPr id="1" name=""/>
-        <p:cNvGrpSpPr/>
-        <p:nvPr/>
-      </p:nvGrpSpPr>
-      <p:grpSpPr>
-        <a:xfrm>
-          <a:off x="0" y="0"/>
-          <a:ext cx="0" cy="0"/>
-          <a:chOff x="0" y="0"/>
-          <a:chExt cx="0" cy="0"/>
-        </a:xfrm>
-      </p:grpSpPr>
-      <p:sp>
-        <p:nvSpPr>
-          <p:cNvPr id="2" name="Slide Image Placeholder 1"/>
-          <p:cNvSpPr>
-            <a:spLocks noGrp="1" noRot="1" noChangeAspect="1"/>
-          </p:cNvSpPr>
-          <p:nvPr>
-            <p:ph type="sldImg"/>
-          </p:nvPr>
-        </p:nvSpPr>
-        <p:spPr/>
-      </p:sp>
-      <p:sp>
-        <p:nvSpPr>
-          <p:cNvPr id="3" name="Notes Placeholder 2"/>
-          <p:cNvSpPr>
-            <a:spLocks noGrp="1"/>
-          </p:cNvSpPr>
-          <p:nvPr>
-            <p:ph type="body" idx="1"/>
-          </p:nvPr>
-        </p:nvSpPr>
-        <p:spPr/>
-        <p:txBody>
-          <a:bodyPr/>
-          <a:lstStyle/>
-          <a:p>
-            <a:r>
-              <a:rPr lang="en-US" dirty="0"/>
-              <a:t>This is the evidence matrix for launch readiness. Use it to make clear what is planned versus what has been demonstrated. The strongest validation priorities are journey continuity, safe external effects, deployment compatibility, recovery measurement, security and sustainable load.</a:t>
-            </a:r>
-          </a:p>
-        </p:txBody>
-      </p:sp>
-      <p:sp>
-        <p:nvSpPr>
-          <p:cNvPr id="4" name="Slide Number Placeholder 3"/>
-          <p:cNvSpPr>
-            <a:spLocks noGrp="1"/>
-          </p:cNvSpPr>
-          <p:nvPr>
-            <p:ph type="sldNum" sz="quarter" idx="10"/>
-          </p:nvPr>
-        </p:nvSpPr>
-        <p:spPr/>
-        <p:txBody>
-          <a:bodyPr/>
-          <a:lstStyle/>
-          <a:p>
-            <a:fld id="{F7021451-1387-4CA6-816F-3879F97B5CBC}" type="slidenum">
-              <a:rPr lang="en-US"/>
-              <a:t>25</a:t>
-            </a:fld>
-            <a:endParaRPr lang="en-US"/>
-          </a:p>
-        </p:txBody>
-      </p:sp>
-    </p:spTree>
-    <p:extLst>
-      <p:ext uri="{BB962C8B-B14F-4D97-AF65-F5344CB8AC3E}">
-        <p14:creationId xmlns:p14="http://schemas.microsoft.com/office/powerpoint/2010/main" val="1024086991"/>
-      </p:ext>
-    </p:extLst>
-  </p:cSld>
-  <p:clrMapOvr>
-    <a:masterClrMapping/>
-  </p:clrMapOvr>
-</p:notes>
-</file>
-
-<file path=ppt/notesSlides/notesSlide24.xml><?xml version="1.0" encoding="utf-8"?>
-<p:notes xmlns:a="http://schemas.openxmlformats.org/drawingml/2006/main" xmlns:r="http://schemas.openxmlformats.org/officeDocument/2006/relationships" xmlns:p="http://schemas.openxmlformats.org/presentationml/2006/main">
-  <p:cSld>
-    <p:spTree>
-      <p:nvGrpSpPr>
-        <p:cNvPr id="1" name=""/>
-        <p:cNvGrpSpPr/>
-        <p:nvPr/>
-      </p:nvGrpSpPr>
-      <p:grpSpPr>
-        <a:xfrm>
-          <a:off x="0" y="0"/>
-          <a:ext cx="0" cy="0"/>
-          <a:chOff x="0" y="0"/>
-          <a:chExt cx="0" cy="0"/>
-        </a:xfrm>
-      </p:grpSpPr>
-      <p:sp>
-        <p:nvSpPr>
-          <p:cNvPr id="2" name="Slide Image Placeholder 1"/>
-          <p:cNvSpPr>
-            <a:spLocks noGrp="1" noRot="1" noChangeAspect="1"/>
-          </p:cNvSpPr>
-          <p:nvPr>
-            <p:ph type="sldImg"/>
-          </p:nvPr>
-        </p:nvSpPr>
-        <p:spPr/>
-      </p:sp>
-      <p:sp>
-        <p:nvSpPr>
-          <p:cNvPr id="3" name="Notes Placeholder 2"/>
-          <p:cNvSpPr>
-            <a:spLocks noGrp="1"/>
-          </p:cNvSpPr>
-          <p:nvPr>
-            <p:ph type="body" idx="1"/>
-          </p:nvPr>
-        </p:nvSpPr>
-        <p:spPr/>
-        <p:txBody>
-          <a:bodyPr/>
-          <a:lstStyle/>
-          <a:p>
-            <a:r>
-              <a:rPr lang="en-US" dirty="0"/>
-              <a:t>Keep this slide available for discussion. It collects the material uncertainties that affect the design: recovery scope, residency, provider contracts, operational ownership and traffic/cost assumptions. Emphasize that these do not relax the requirements; they define what must be confirmed or demonstrated.</a:t>
-            </a:r>
-          </a:p>
-        </p:txBody>
-      </p:sp>
-      <p:sp>
-        <p:nvSpPr>
-          <p:cNvPr id="4" name="Slide Number Placeholder 3"/>
-          <p:cNvSpPr>
-            <a:spLocks noGrp="1"/>
-          </p:cNvSpPr>
-          <p:nvPr>
-            <p:ph type="sldNum" sz="quarter" idx="10"/>
-          </p:nvPr>
-        </p:nvSpPr>
-        <p:spPr/>
-        <p:txBody>
-          <a:bodyPr/>
-          <a:lstStyle/>
-          <a:p>
-            <a:fld id="{F7021451-1387-4CA6-816F-3879F97B5CBC}" type="slidenum">
-              <a:rPr lang="en-US"/>
-              <a:t>26</a:t>
             </a:fld>
             <a:endParaRPr lang="en-US"/>
           </a:p>
@@ -4006,7 +3830,7 @@
           <p:nvPr>
             <p:extLst>
               <p:ext uri="{D42A27DB-BD31-4B8C-83A1-F6EECF244321}">
-                <p14:modId xmlns:p14="http://schemas.microsoft.com/office/powerpoint/2010/main" val="18102636"/>
+                <p14:modId xmlns:p14="http://schemas.microsoft.com/office/powerpoint/2010/main" val="3329809459"/>
               </p:ext>
             </p:extLst>
           </p:nvPr>
@@ -4059,6 +3883,7 @@
                         </a:defRPr>
                       </a:pPr>
                       <a:r>
+                        <a:rPr sz="1400"/>
                         <a:t>Target</a:t>
                       </a:r>
                     </a:p>
@@ -4083,7 +3908,7 @@
                         </a:defRPr>
                       </a:pPr>
                       <a:r>
-                        <a:rPr dirty="0"/>
+                        <a:rPr sz="1400" dirty="0"/>
                         <a:t>Protection</a:t>
                       </a:r>
                     </a:p>
@@ -4108,6 +3933,7 @@
                         </a:defRPr>
                       </a:pPr>
                       <a:r>
+                        <a:rPr sz="1400"/>
                         <a:t>Required Validation</a:t>
                       </a:r>
                     </a:p>
@@ -4139,7 +3965,7 @@
                         </a:defRPr>
                       </a:pPr>
                       <a:r>
-                        <a:rPr dirty="0"/>
+                        <a:rPr sz="1400" dirty="0"/>
                         <a:t>99.9% Availability</a:t>
                       </a:r>
                     </a:p>
@@ -4164,7 +3990,7 @@
                         </a:defRPr>
                       </a:pPr>
                       <a:r>
-                        <a:rPr dirty="0"/>
+                        <a:rPr sz="1400" dirty="0"/>
                         <a:t>Replicas and node capacity distributed across two Availability Zones.</a:t>
                       </a:r>
                     </a:p>
@@ -4189,6 +4015,7 @@
                         </a:defRPr>
                       </a:pPr>
                       <a:r>
+                        <a:rPr sz="1400" dirty="0"/>
                         <a:t>Chat and status reads survive the loss of a single zone with temporary degradation in background processing.</a:t>
                       </a:r>
                     </a:p>
@@ -4220,6 +4047,7 @@
                         </a:defRPr>
                       </a:pPr>
                       <a:r>
+                        <a:rPr sz="1400" dirty="0"/>
                         <a:t>RPO &lt; 1 min, RTO &lt; 10 min</a:t>
                       </a:r>
                     </a:p>
@@ -4244,6 +4072,7 @@
                         </a:defRPr>
                       </a:pPr>
                       <a:r>
+                        <a:rPr sz="1400"/>
                         <a:t>RDS Multi-AZ failover and client reconnection.</a:t>
                       </a:r>
                     </a:p>
@@ -4268,6 +4097,7 @@
                         </a:defRPr>
                       </a:pPr>
                       <a:r>
+                        <a:rPr sz="1400"/>
                         <a:t>Measure the exact time required to restore usable conversations and pending work after a database primary failure.</a:t>
                       </a:r>
                     </a:p>
@@ -4299,7 +4129,7 @@
                         </a:defRPr>
                       </a:pPr>
                       <a:r>
-                        <a:rPr dirty="0"/>
+                        <a:rPr sz="1400" dirty="0"/>
                         <a:t>Seamless Deployments</a:t>
                       </a:r>
                     </a:p>
@@ -4324,7 +4154,7 @@
                         </a:defRPr>
                       </a:pPr>
                       <a:r>
-                        <a:rPr dirty="0"/>
+                        <a:rPr sz="1400" dirty="0"/>
                         <a:t>Versioned workflows; backward-compatible schemas and workers.</a:t>
                       </a:r>
                     </a:p>
@@ -4349,11 +4179,11 @@
                         </a:defRPr>
                       </a:pPr>
                       <a:r>
-                        <a:rPr lang="it-IT" dirty="0" err="1"/>
+                        <a:rPr lang="it-IT" sz="1400" dirty="0" err="1"/>
                         <a:t>W</a:t>
                       </a:r>
                       <a:r>
-                        <a:rPr dirty="0"/>
+                        <a:rPr sz="1400" dirty="0"/>
                         <a:t>eeks-long customer journeys successfully survive a rolling update or rollback.</a:t>
                       </a:r>
                     </a:p>
@@ -4538,8 +4368,8 @@
         </p:nvSpPr>
         <p:spPr>
           <a:xfrm>
-            <a:off x="606684" y="4873750"/>
-            <a:ext cx="10561320" cy="1193093"/>
+            <a:off x="2295205" y="4908475"/>
+            <a:ext cx="7689753" cy="1193093"/>
           </a:xfrm>
           <a:prstGeom prst="rect">
             <a:avLst/>
@@ -4590,7 +4420,7 @@
         </p:nvSpPr>
         <p:spPr>
           <a:xfrm>
-            <a:off x="798708" y="5020056"/>
+            <a:off x="2511762" y="4997254"/>
             <a:ext cx="985976" cy="230832"/>
           </a:xfrm>
           <a:prstGeom prst="rect">
@@ -4634,8 +4464,8 @@
         </p:nvSpPr>
         <p:spPr>
           <a:xfrm>
-            <a:off x="798708" y="5340096"/>
-            <a:ext cx="6970819" cy="604781"/>
+            <a:off x="2511762" y="5317294"/>
+            <a:ext cx="7408182" cy="646331"/>
           </a:xfrm>
           <a:prstGeom prst="rect">
             <a:avLst/>
@@ -4659,10 +4489,10 @@
               </a:defRPr>
             </a:pPr>
             <a:r>
-              <a:rPr dirty="0"/>
+              <a:rPr sz="1400" dirty="0"/>
               <a:t>Multi-AZ does not automatically prove targets. </a:t>
             </a:r>
-            <a:endParaRPr lang="it-IT" dirty="0"/>
+            <a:endParaRPr lang="it-IT" sz="1400" dirty="0"/>
           </a:p>
           <a:p>
             <a:pPr marL="742950" lvl="1" indent="-285750">
@@ -4676,39 +4506,39 @@
               </a:defRPr>
             </a:pPr>
             <a:r>
-              <a:rPr lang="it-IT" dirty="0"/>
+              <a:rPr lang="it-IT" sz="1400" dirty="0"/>
               <a:t>Recovery targets assume </a:t>
             </a:r>
             <a:r>
-              <a:rPr lang="it-IT" dirty="0" err="1"/>
+              <a:rPr lang="it-IT" sz="1400" dirty="0" err="1"/>
               <a:t>infrastructure</a:t>
             </a:r>
             <a:r>
-              <a:rPr lang="it-IT" dirty="0"/>
+              <a:rPr lang="it-IT" sz="1400" dirty="0"/>
               <a:t> </a:t>
             </a:r>
             <a:r>
-              <a:rPr lang="it-IT" dirty="0" err="1"/>
+              <a:rPr lang="it-IT" sz="1400" dirty="0" err="1"/>
               <a:t>failures</a:t>
             </a:r>
             <a:r>
-              <a:rPr lang="it-IT" dirty="0"/>
+              <a:rPr lang="it-IT" sz="1400" dirty="0"/>
               <a:t> </a:t>
             </a:r>
             <a:r>
-              <a:rPr lang="it-IT" dirty="0" err="1"/>
+              <a:rPr lang="it-IT" sz="1400" dirty="0" err="1"/>
               <a:t>within</a:t>
             </a:r>
             <a:r>
-              <a:rPr lang="it-IT" dirty="0"/>
+              <a:rPr lang="it-IT" sz="1400" dirty="0"/>
               <a:t> one </a:t>
             </a:r>
             <a:r>
-              <a:rPr lang="it-IT" dirty="0" err="1"/>
+              <a:rPr lang="it-IT" sz="1400" dirty="0" err="1"/>
               <a:t>region</a:t>
             </a:r>
             <a:r>
-              <a:rPr lang="it-IT" dirty="0"/>
+              <a:rPr lang="it-IT" sz="1400" dirty="0"/>
               <a:t>. </a:t>
             </a:r>
           </a:p>
@@ -4724,55 +4554,55 @@
               </a:defRPr>
             </a:pPr>
             <a:r>
-              <a:rPr lang="it-IT" dirty="0"/>
+              <a:rPr lang="it-IT" sz="1400" dirty="0"/>
               <a:t>Coverage for data </a:t>
             </a:r>
             <a:r>
-              <a:rPr lang="it-IT" dirty="0" err="1"/>
+              <a:rPr lang="it-IT" sz="1400" dirty="0" err="1"/>
               <a:t>corruption</a:t>
             </a:r>
             <a:r>
-              <a:rPr lang="it-IT" dirty="0"/>
+              <a:rPr lang="it-IT" sz="1400" dirty="0"/>
               <a:t> and </a:t>
             </a:r>
             <a:r>
-              <a:rPr lang="it-IT" dirty="0" err="1"/>
+              <a:rPr lang="it-IT" sz="1400" dirty="0" err="1"/>
               <a:t>regional</a:t>
             </a:r>
             <a:r>
-              <a:rPr lang="it-IT" dirty="0"/>
+              <a:rPr lang="it-IT" sz="1400" dirty="0"/>
               <a:t> </a:t>
             </a:r>
             <a:r>
-              <a:rPr lang="it-IT" dirty="0" err="1"/>
+              <a:rPr lang="it-IT" sz="1400" dirty="0" err="1"/>
               <a:t>outages</a:t>
             </a:r>
             <a:r>
-              <a:rPr lang="it-IT" dirty="0"/>
+              <a:rPr lang="it-IT" sz="1400" dirty="0"/>
               <a:t> </a:t>
             </a:r>
             <a:r>
-              <a:rPr lang="it-IT" dirty="0" err="1"/>
+              <a:rPr lang="it-IT" sz="1400" dirty="0" err="1"/>
               <a:t>remains</a:t>
             </a:r>
             <a:r>
-              <a:rPr lang="it-IT" dirty="0"/>
+              <a:rPr lang="it-IT" sz="1400" dirty="0"/>
               <a:t> to be </a:t>
             </a:r>
             <a:r>
-              <a:rPr lang="it-IT" dirty="0" err="1"/>
+              <a:rPr lang="it-IT" sz="1400" dirty="0" err="1"/>
               <a:t>agreed</a:t>
             </a:r>
             <a:r>
-              <a:rPr lang="it-IT" dirty="0"/>
+              <a:rPr lang="it-IT" sz="1400" dirty="0"/>
               <a:t> and </a:t>
             </a:r>
             <a:r>
-              <a:rPr lang="it-IT" dirty="0" err="1"/>
+              <a:rPr lang="it-IT" sz="1400" dirty="0" err="1"/>
               <a:t>validated</a:t>
             </a:r>
             <a:r>
-              <a:rPr lang="it-IT" dirty="0"/>
+              <a:rPr lang="it-IT" sz="1400" dirty="0"/>
               <a:t>.</a:t>
             </a:r>
           </a:p>
@@ -5108,7 +4938,7 @@
           <a:bodyPr/>
           <a:lstStyle/>
           <a:p>
-            <a:endParaRPr lang="it-IT"/>
+            <a:endParaRPr lang="it-IT" sz="1200"/>
           </a:p>
         </p:txBody>
       </p:sp>
@@ -5137,7 +4967,7 @@
         </p:spPr>
         <p:txBody>
           <a:bodyPr wrap="square" lIns="381" tIns="381" rIns="381" bIns="381" rtlCol="0" anchor="t">
-            <a:normAutofit/>
+            <a:noAutofit/>
           </a:bodyPr>
           <a:lstStyle/>
           <a:p>
@@ -5145,7 +4975,7 @@
               <a:buNone/>
             </a:pPr>
             <a:r>
-              <a:rPr lang="en-US" sz="1100" dirty="0">
+              <a:rPr lang="en-US" sz="1200" dirty="0">
                 <a:solidFill>
                   <a:srgbClr val="1D2433"/>
                 </a:solidFill>
@@ -5155,7 +4985,7 @@
               </a:rPr>
               <a:t>Authenticate customers, operators and provider callbacks.</a:t>
             </a:r>
-            <a:endParaRPr lang="en-US" sz="1100" dirty="0"/>
+            <a:endParaRPr lang="en-US" sz="1200" dirty="0"/>
           </a:p>
         </p:txBody>
       </p:sp>
@@ -5193,7 +5023,7 @@
           <a:bodyPr/>
           <a:lstStyle/>
           <a:p>
-            <a:endParaRPr lang="it-IT"/>
+            <a:endParaRPr lang="it-IT" sz="1200"/>
           </a:p>
         </p:txBody>
       </p:sp>
@@ -5230,7 +5060,7 @@
               <a:buNone/>
             </a:pPr>
             <a:r>
-              <a:rPr lang="en-US" sz="1100" dirty="0">
+              <a:rPr lang="en-US" sz="1200" dirty="0">
                 <a:solidFill>
                   <a:srgbClr val="1D2433"/>
                 </a:solidFill>
@@ -5240,7 +5070,7 @@
               </a:rPr>
               <a:t>Keep workloads and databases private; expose API via TLS/WAF/ALB.</a:t>
             </a:r>
-            <a:endParaRPr lang="en-US" sz="1100" dirty="0"/>
+            <a:endParaRPr lang="en-US" sz="1200" dirty="0"/>
           </a:p>
         </p:txBody>
       </p:sp>
@@ -5278,7 +5108,7 @@
           <a:bodyPr/>
           <a:lstStyle/>
           <a:p>
-            <a:endParaRPr lang="it-IT"/>
+            <a:endParaRPr lang="it-IT" sz="1200"/>
           </a:p>
         </p:txBody>
       </p:sp>
@@ -5315,7 +5145,7 @@
               <a:buNone/>
             </a:pPr>
             <a:r>
-              <a:rPr lang="en-US" sz="1100" dirty="0">
+              <a:rPr lang="en-US" sz="1200" dirty="0">
                 <a:solidFill>
                   <a:srgbClr val="1D2433"/>
                 </a:solidFill>
@@ -5325,7 +5155,7 @@
               </a:rPr>
               <a:t>Enforce journey ownership and least-privilege access for users and workloads.</a:t>
             </a:r>
-            <a:endParaRPr lang="en-US" sz="1100" dirty="0"/>
+            <a:endParaRPr lang="en-US" sz="1200" dirty="0"/>
           </a:p>
         </p:txBody>
       </p:sp>
@@ -5450,7 +5280,7 @@
           <a:bodyPr/>
           <a:lstStyle/>
           <a:p>
-            <a:endParaRPr lang="it-IT"/>
+            <a:endParaRPr lang="it-IT" sz="1200"/>
           </a:p>
         </p:txBody>
       </p:sp>
@@ -5487,7 +5317,7 @@
               <a:buNone/>
             </a:pPr>
             <a:r>
-              <a:rPr lang="en-US" sz="1100" dirty="0">
+              <a:rPr lang="en-US" sz="1200" dirty="0">
                 <a:solidFill>
                   <a:srgbClr val="1D2433"/>
                 </a:solidFill>
@@ -5497,7 +5327,7 @@
               </a:rPr>
               <a:t>Validate model-proposed actions in application code.</a:t>
             </a:r>
-            <a:endParaRPr lang="en-US" sz="1100" dirty="0"/>
+            <a:endParaRPr lang="en-US" sz="1200" dirty="0"/>
           </a:p>
         </p:txBody>
       </p:sp>
@@ -5535,7 +5365,7 @@
           <a:bodyPr/>
           <a:lstStyle/>
           <a:p>
-            <a:endParaRPr lang="it-IT"/>
+            <a:endParaRPr lang="it-IT" sz="1200"/>
           </a:p>
         </p:txBody>
       </p:sp>
@@ -5572,7 +5402,7 @@
               <a:buNone/>
             </a:pPr>
             <a:r>
-              <a:rPr lang="en-US" sz="1100" dirty="0">
+              <a:rPr lang="en-US" sz="1200" dirty="0">
                 <a:solidFill>
                   <a:srgbClr val="1D2433"/>
                 </a:solidFill>
@@ -5582,7 +5412,7 @@
               </a:rPr>
               <a:t>Treat external content as untrusted and bound AI usage.</a:t>
             </a:r>
-            <a:endParaRPr lang="en-US" sz="1100" dirty="0"/>
+            <a:endParaRPr lang="en-US" sz="1200" dirty="0"/>
           </a:p>
         </p:txBody>
       </p:sp>
@@ -5620,7 +5450,7 @@
           <a:bodyPr/>
           <a:lstStyle/>
           <a:p>
-            <a:endParaRPr lang="it-IT"/>
+            <a:endParaRPr lang="it-IT" sz="1200"/>
           </a:p>
         </p:txBody>
       </p:sp>
@@ -5657,7 +5487,7 @@
               <a:buNone/>
             </a:pPr>
             <a:r>
-              <a:rPr lang="en-US" sz="1100" dirty="0">
+              <a:rPr lang="en-US" sz="1200" dirty="0">
                 <a:solidFill>
                   <a:srgbClr val="1D2433"/>
                 </a:solidFill>
@@ -5667,7 +5497,7 @@
               </a:rPr>
               <a:t>Keep confidential data within approved regional paths.</a:t>
             </a:r>
-            <a:endParaRPr lang="en-US" sz="1100" dirty="0"/>
+            <a:endParaRPr lang="en-US" sz="1200" dirty="0"/>
           </a:p>
         </p:txBody>
       </p:sp>
@@ -5792,7 +5622,7 @@
           <a:bodyPr/>
           <a:lstStyle/>
           <a:p>
-            <a:endParaRPr lang="it-IT"/>
+            <a:endParaRPr lang="it-IT" sz="1200"/>
           </a:p>
         </p:txBody>
       </p:sp>
@@ -5829,7 +5659,7 @@
               <a:buNone/>
             </a:pPr>
             <a:r>
-              <a:rPr lang="en-US" sz="1100" dirty="0">
+              <a:rPr lang="en-US" sz="1200" dirty="0">
                 <a:solidFill>
                   <a:srgbClr val="1D2433"/>
                 </a:solidFill>
@@ -5839,7 +5669,7 @@
               </a:rPr>
               <a:t>Keep unsampled audit records of agent runs, approvals and external actions.</a:t>
             </a:r>
-            <a:endParaRPr lang="en-US" sz="1100" dirty="0"/>
+            <a:endParaRPr lang="en-US" sz="1200" dirty="0"/>
           </a:p>
         </p:txBody>
       </p:sp>
@@ -5877,7 +5707,7 @@
           <a:bodyPr/>
           <a:lstStyle/>
           <a:p>
-            <a:endParaRPr lang="it-IT"/>
+            <a:endParaRPr lang="it-IT" sz="1200"/>
           </a:p>
         </p:txBody>
       </p:sp>
@@ -5914,7 +5744,7 @@
               <a:buNone/>
             </a:pPr>
             <a:r>
-              <a:rPr lang="en-US" sz="1100" dirty="0">
+              <a:rPr lang="en-US" sz="1200" dirty="0">
                 <a:solidFill>
                   <a:srgbClr val="1D2433"/>
                 </a:solidFill>
@@ -5924,7 +5754,7 @@
               </a:rPr>
               <a:t>Correlate logs and traces by journey/operation ID.</a:t>
             </a:r>
-            <a:endParaRPr lang="en-US" sz="1100" dirty="0"/>
+            <a:endParaRPr lang="en-US" sz="1200" dirty="0"/>
           </a:p>
         </p:txBody>
       </p:sp>
@@ -5962,7 +5792,7 @@
           <a:bodyPr/>
           <a:lstStyle/>
           <a:p>
-            <a:endParaRPr lang="it-IT"/>
+            <a:endParaRPr lang="it-IT" sz="1200"/>
           </a:p>
         </p:txBody>
       </p:sp>
@@ -5991,7 +5821,7 @@
         </p:spPr>
         <p:txBody>
           <a:bodyPr wrap="square" lIns="381" tIns="381" rIns="381" bIns="381" rtlCol="0" anchor="t">
-            <a:normAutofit/>
+            <a:noAutofit/>
           </a:bodyPr>
           <a:lstStyle/>
           <a:p>
@@ -5999,7 +5829,7 @@
               <a:buNone/>
             </a:pPr>
             <a:r>
-              <a:rPr lang="en-US" sz="1100" dirty="0">
+              <a:rPr lang="en-US" sz="1200" dirty="0">
                 <a:solidFill>
                   <a:srgbClr val="1D2433"/>
                 </a:solidFill>
@@ -6009,7 +5839,7 @@
               </a:rPr>
               <a:t>Redact personal data and tokens; define retention and deletion.</a:t>
             </a:r>
-            <a:endParaRPr lang="en-US" sz="1100" dirty="0"/>
+            <a:endParaRPr lang="en-US" sz="1200" dirty="0"/>
           </a:p>
         </p:txBody>
       </p:sp>
@@ -6134,7 +5964,7 @@
           <a:bodyPr/>
           <a:lstStyle/>
           <a:p>
-            <a:endParaRPr lang="it-IT"/>
+            <a:endParaRPr lang="it-IT" sz="1200"/>
           </a:p>
         </p:txBody>
       </p:sp>
@@ -6171,7 +6001,7 @@
               <a:buNone/>
             </a:pPr>
             <a:r>
-              <a:rPr lang="en-US" sz="1100" b="1" dirty="0">
+              <a:rPr lang="en-US" sz="1200" b="1" dirty="0">
                 <a:solidFill>
                   <a:srgbClr val="1D2433"/>
                 </a:solidFill>
@@ -6182,7 +6012,7 @@
               <a:t>Service dashboard</a:t>
             </a:r>
             <a:r>
-              <a:rPr lang="en-US" sz="1100" dirty="0">
+              <a:rPr lang="en-US" sz="1200" dirty="0">
                 <a:solidFill>
                   <a:srgbClr val="1D2433"/>
                 </a:solidFill>
@@ -6192,7 +6022,7 @@
               </a:rPr>
               <a:t>: availability, latency, errors and infrastructure health.</a:t>
             </a:r>
-            <a:endParaRPr lang="en-US" sz="1100" dirty="0"/>
+            <a:endParaRPr lang="en-US" sz="1200" dirty="0"/>
           </a:p>
         </p:txBody>
       </p:sp>
@@ -6230,7 +6060,7 @@
           <a:bodyPr/>
           <a:lstStyle/>
           <a:p>
-            <a:endParaRPr lang="it-IT"/>
+            <a:endParaRPr lang="it-IT" sz="1200"/>
           </a:p>
         </p:txBody>
       </p:sp>
@@ -6267,7 +6097,7 @@
               <a:buNone/>
             </a:pPr>
             <a:r>
-              <a:rPr lang="en-US" sz="1100" b="1" dirty="0">
+              <a:rPr lang="en-US" sz="1200" b="1" dirty="0">
                 <a:solidFill>
                   <a:srgbClr val="1D2433"/>
                 </a:solidFill>
@@ -6278,7 +6108,7 @@
               <a:t>Journey dashboard</a:t>
             </a:r>
             <a:r>
-              <a:rPr lang="en-US" sz="1100" dirty="0">
+              <a:rPr lang="en-US" sz="1200" dirty="0">
                 <a:solidFill>
                   <a:srgbClr val="1D2433"/>
                 </a:solidFill>
@@ -6288,7 +6118,7 @@
               </a:rPr>
               <a:t>: queue/outbox age, stalled journeys, uncertain outcomes and provider throttling.</a:t>
             </a:r>
-            <a:endParaRPr lang="en-US" sz="1100" dirty="0"/>
+            <a:endParaRPr lang="en-US" sz="1200" dirty="0"/>
           </a:p>
         </p:txBody>
       </p:sp>
@@ -6651,10 +6481,214 @@
       </p:sp>
       <p:sp>
         <p:nvSpPr>
-          <p:cNvPr id="89" name="Shape 4">
-            <a:extLst>
-              <a:ext uri="{FF2B5EF4-FFF2-40B4-BE49-F238E27FC236}">
-                <a16:creationId xmlns:a16="http://schemas.microsoft.com/office/drawing/2014/main" id="{C56B75F5-2B5B-8C0A-E445-67AD091FF174}"/>
+          <p:cNvPr id="126" name="Shape 41">
+            <a:extLst>
+              <a:ext uri="{FF2B5EF4-FFF2-40B4-BE49-F238E27FC236}">
+                <a16:creationId xmlns:a16="http://schemas.microsoft.com/office/drawing/2014/main" id="{E50F11AA-0B39-DEB2-48E6-78BBF664FC15}"/>
+              </a:ext>
+            </a:extLst>
+          </p:cNvPr>
+          <p:cNvSpPr/>
+          <p:nvPr/>
+        </p:nvSpPr>
+        <p:spPr>
+          <a:xfrm>
+            <a:off x="502920" y="5247462"/>
+            <a:ext cx="11210544" cy="1009115"/>
+          </a:xfrm>
+          <a:prstGeom prst="roundRect">
+            <a:avLst>
+              <a:gd name="adj" fmla="val 9615"/>
+            </a:avLst>
+          </a:prstGeom>
+          <a:solidFill>
+            <a:srgbClr val="F8FAFC"/>
+          </a:solidFill>
+          <a:ln w="12700">
+            <a:solidFill>
+              <a:srgbClr val="D6DEE9"/>
+            </a:solidFill>
+            <a:prstDash val="solid"/>
+          </a:ln>
+        </p:spPr>
+        <p:txBody>
+          <a:bodyPr/>
+          <a:lstStyle/>
+          <a:p>
+            <a:endParaRPr lang="it-IT"/>
+          </a:p>
+        </p:txBody>
+      </p:sp>
+      <p:sp>
+        <p:nvSpPr>
+          <p:cNvPr id="127" name="Text 42">
+            <a:extLst>
+              <a:ext uri="{FF2B5EF4-FFF2-40B4-BE49-F238E27FC236}">
+                <a16:creationId xmlns:a16="http://schemas.microsoft.com/office/drawing/2014/main" id="{4E1353A1-7FAF-A338-0390-B7FD4ADBC24E}"/>
+              </a:ext>
+            </a:extLst>
+          </p:cNvPr>
+          <p:cNvSpPr/>
+          <p:nvPr/>
+        </p:nvSpPr>
+        <p:spPr>
+          <a:xfrm>
+            <a:off x="850392" y="5415968"/>
+            <a:ext cx="10707624" cy="338327"/>
+          </a:xfrm>
+          <a:prstGeom prst="rect">
+            <a:avLst/>
+          </a:prstGeom>
+          <a:noFill/>
+          <a:ln/>
+        </p:spPr>
+        <p:txBody>
+          <a:bodyPr wrap="square" lIns="0" tIns="0" rIns="0" bIns="0" rtlCol="0" anchor="t">
+            <a:normAutofit/>
+          </a:bodyPr>
+          <a:lstStyle/>
+          <a:p>
+            <a:pPr marL="0" indent="0" algn="l">
+              <a:buNone/>
+            </a:pPr>
+            <a:r>
+              <a:rPr lang="en-US" sz="1400" b="1" dirty="0">
+                <a:solidFill>
+                  <a:srgbClr val="07133D"/>
+                </a:solidFill>
+                <a:latin typeface="Aptos" pitchFamily="34" charset="0"/>
+                <a:ea typeface="Aptos" pitchFamily="34" charset="-122"/>
+                <a:cs typeface="Aptos" pitchFamily="34" charset="-120"/>
+              </a:rPr>
+              <a:t>Telemetry (</a:t>
+            </a:r>
+            <a:r>
+              <a:rPr lang="en-US" sz="1400" b="1" dirty="0" err="1">
+                <a:solidFill>
+                  <a:srgbClr val="07133D"/>
+                </a:solidFill>
+                <a:latin typeface="Aptos" pitchFamily="34" charset="0"/>
+                <a:ea typeface="Aptos" pitchFamily="34" charset="-122"/>
+                <a:cs typeface="Aptos" pitchFamily="34" charset="-120"/>
+              </a:rPr>
+              <a:t>OpenTelemetry</a:t>
+            </a:r>
+            <a:r>
+              <a:rPr lang="en-US" sz="1400" b="1" dirty="0">
+                <a:solidFill>
+                  <a:srgbClr val="07133D"/>
+                </a:solidFill>
+                <a:latin typeface="Aptos" pitchFamily="34" charset="0"/>
+                <a:ea typeface="Aptos" pitchFamily="34" charset="-122"/>
+                <a:cs typeface="Aptos" pitchFamily="34" charset="-120"/>
+              </a:rPr>
+              <a:t>): </a:t>
+            </a:r>
+            <a:r>
+              <a:rPr lang="en-US" sz="1400" dirty="0">
+                <a:solidFill>
+                  <a:srgbClr val="1D2433"/>
+                </a:solidFill>
+                <a:latin typeface="Aptos" pitchFamily="34" charset="0"/>
+                <a:ea typeface="Aptos" pitchFamily="34" charset="-122"/>
+                <a:cs typeface="Aptos" pitchFamily="34" charset="-120"/>
+              </a:rPr>
+              <a:t>application logs + service/infrastructure metrics + traces → regional monitoring, dashboards and alarms</a:t>
+            </a:r>
+            <a:endParaRPr lang="en-US" sz="1400" dirty="0"/>
+          </a:p>
+        </p:txBody>
+      </p:sp>
+      <p:sp>
+        <p:nvSpPr>
+          <p:cNvPr id="7" name="CasellaDiTesto 6">
+            <a:extLst>
+              <a:ext uri="{FF2B5EF4-FFF2-40B4-BE49-F238E27FC236}">
+                <a16:creationId xmlns:a16="http://schemas.microsoft.com/office/drawing/2014/main" id="{67915442-1F35-D21D-D449-FCF0DB1F2CA2}"/>
+              </a:ext>
+            </a:extLst>
+          </p:cNvPr>
+          <p:cNvSpPr txBox="1"/>
+          <p:nvPr/>
+        </p:nvSpPr>
+        <p:spPr>
+          <a:xfrm>
+            <a:off x="1504710" y="5753524"/>
+            <a:ext cx="9375492" cy="338554"/>
+          </a:xfrm>
+          <a:prstGeom prst="rect">
+            <a:avLst/>
+          </a:prstGeom>
+          <a:noFill/>
+        </p:spPr>
+        <p:txBody>
+          <a:bodyPr wrap="square" rtlCol="0">
+            <a:spAutoFit/>
+          </a:bodyPr>
+          <a:lstStyle/>
+          <a:p>
+            <a:r>
+              <a:rPr lang="it-IT" sz="1600" b="1" dirty="0">
+                <a:solidFill>
+                  <a:srgbClr val="C00000"/>
+                </a:solidFill>
+              </a:rPr>
+              <a:t>Amazon </a:t>
+            </a:r>
+            <a:r>
+              <a:rPr lang="it-IT" sz="1600" b="1" dirty="0" err="1">
+                <a:solidFill>
+                  <a:srgbClr val="C00000"/>
+                </a:solidFill>
+              </a:rPr>
+              <a:t>CloudWatch</a:t>
+            </a:r>
+            <a:r>
+              <a:rPr lang="it-IT" sz="1600" b="1" dirty="0"/>
+              <a:t> </a:t>
+            </a:r>
+            <a:r>
+              <a:rPr lang="it-IT" sz="1600" dirty="0"/>
+              <a:t>(AWS-</a:t>
+            </a:r>
+            <a:r>
+              <a:rPr lang="it-IT" sz="1600" dirty="0" err="1"/>
+              <a:t>managed</a:t>
+            </a:r>
+            <a:r>
+              <a:rPr lang="it-IT" sz="1600" dirty="0"/>
+              <a:t>) </a:t>
+            </a:r>
+            <a:r>
+              <a:rPr lang="it-IT" sz="1600" i="1" dirty="0"/>
+              <a:t>vs. Prometheus + </a:t>
+            </a:r>
+            <a:r>
+              <a:rPr lang="it-IT" sz="1600" i="1" dirty="0" err="1"/>
+              <a:t>Grafana</a:t>
+            </a:r>
+            <a:r>
+              <a:rPr lang="it-IT" sz="1600" i="1" dirty="0"/>
+              <a:t> + Loki + Tempo (self-</a:t>
+            </a:r>
+            <a:r>
+              <a:rPr lang="it-IT" sz="1600" i="1" dirty="0" err="1"/>
+              <a:t>managed</a:t>
+            </a:r>
+            <a:r>
+              <a:rPr lang="it-IT" sz="1600" i="1" dirty="0"/>
+              <a:t>)</a:t>
+            </a:r>
+            <a:endParaRPr lang="it-IT" sz="1600" dirty="0"/>
+          </a:p>
+        </p:txBody>
+      </p:sp>
+      <p:sp>
+        <p:nvSpPr>
+          <p:cNvPr id="8" name="Shape 4">
+            <a:extLst>
+              <a:ext uri="{FF2B5EF4-FFF2-40B4-BE49-F238E27FC236}">
+                <a16:creationId xmlns:a16="http://schemas.microsoft.com/office/drawing/2014/main" id="{1A15A96F-722C-F9F7-466C-8195B44CAC5C}"/>
               </a:ext>
             </a:extLst>
           </p:cNvPr>
@@ -6691,10 +6725,10 @@
       </p:sp>
       <p:sp>
         <p:nvSpPr>
-          <p:cNvPr id="91" name="Text 6">
-            <a:extLst>
-              <a:ext uri="{FF2B5EF4-FFF2-40B4-BE49-F238E27FC236}">
-                <a16:creationId xmlns:a16="http://schemas.microsoft.com/office/drawing/2014/main" id="{9F40D1C9-4EF4-4FC8-1791-185BE540D9A1}"/>
+          <p:cNvPr id="9" name="Text 6">
+            <a:extLst>
+              <a:ext uri="{FF2B5EF4-FFF2-40B4-BE49-F238E27FC236}">
+                <a16:creationId xmlns:a16="http://schemas.microsoft.com/office/drawing/2014/main" id="{4A7B8BE1-E72E-FF9E-8497-6B5C91174D83}"/>
               </a:ext>
             </a:extLst>
           </p:cNvPr>
@@ -6738,10 +6772,10 @@
       </p:sp>
       <p:sp>
         <p:nvSpPr>
-          <p:cNvPr id="92" name="Shape 7">
-            <a:extLst>
-              <a:ext uri="{FF2B5EF4-FFF2-40B4-BE49-F238E27FC236}">
-                <a16:creationId xmlns:a16="http://schemas.microsoft.com/office/drawing/2014/main" id="{E8D22EF9-D39F-2A41-6A36-E3BE3C8DCBC6}"/>
+          <p:cNvPr id="10" name="Shape 7">
+            <a:extLst>
+              <a:ext uri="{FF2B5EF4-FFF2-40B4-BE49-F238E27FC236}">
+                <a16:creationId xmlns:a16="http://schemas.microsoft.com/office/drawing/2014/main" id="{4880F28A-CCC2-95B5-E9F9-FD24D4F05F9E}"/>
               </a:ext>
             </a:extLst>
           </p:cNvPr>
@@ -6770,16 +6804,16 @@
           <a:bodyPr/>
           <a:lstStyle/>
           <a:p>
-            <a:endParaRPr lang="it-IT"/>
-          </a:p>
-        </p:txBody>
-      </p:sp>
-      <p:sp>
-        <p:nvSpPr>
-          <p:cNvPr id="93" name="Text 8">
-            <a:extLst>
-              <a:ext uri="{FF2B5EF4-FFF2-40B4-BE49-F238E27FC236}">
-                <a16:creationId xmlns:a16="http://schemas.microsoft.com/office/drawing/2014/main" id="{495505BB-ABD8-A76D-7EF4-2EE06044FC92}"/>
+            <a:endParaRPr lang="it-IT" sz="1200"/>
+          </a:p>
+        </p:txBody>
+      </p:sp>
+      <p:sp>
+        <p:nvSpPr>
+          <p:cNvPr id="11" name="Text 8">
+            <a:extLst>
+              <a:ext uri="{FF2B5EF4-FFF2-40B4-BE49-F238E27FC236}">
+                <a16:creationId xmlns:a16="http://schemas.microsoft.com/office/drawing/2014/main" id="{7DD76564-9967-EC18-4B0C-D63CBF10D787}"/>
               </a:ext>
             </a:extLst>
           </p:cNvPr>
@@ -6799,7 +6833,7 @@
         </p:spPr>
         <p:txBody>
           <a:bodyPr wrap="square" lIns="381" tIns="381" rIns="381" bIns="381" rtlCol="0" anchor="t">
-            <a:normAutofit/>
+            <a:noAutofit/>
           </a:bodyPr>
           <a:lstStyle/>
           <a:p>
@@ -6807,7 +6841,7 @@
               <a:buNone/>
             </a:pPr>
             <a:r>
-              <a:rPr lang="en-US" sz="1100" dirty="0">
+              <a:rPr lang="en-US" sz="1200" dirty="0">
                 <a:solidFill>
                   <a:srgbClr val="1D2433"/>
                 </a:solidFill>
@@ -6817,16 +6851,16 @@
               </a:rPr>
               <a:t>Authenticate customers, operators and provider callbacks.</a:t>
             </a:r>
-            <a:endParaRPr lang="en-US" sz="1100" dirty="0"/>
-          </a:p>
-        </p:txBody>
-      </p:sp>
-      <p:sp>
-        <p:nvSpPr>
-          <p:cNvPr id="94" name="Shape 9">
-            <a:extLst>
-              <a:ext uri="{FF2B5EF4-FFF2-40B4-BE49-F238E27FC236}">
-                <a16:creationId xmlns:a16="http://schemas.microsoft.com/office/drawing/2014/main" id="{EBEE4817-2184-6074-0A30-18DAE0C945D2}"/>
+            <a:endParaRPr lang="en-US" sz="1200" dirty="0"/>
+          </a:p>
+        </p:txBody>
+      </p:sp>
+      <p:sp>
+        <p:nvSpPr>
+          <p:cNvPr id="12" name="Shape 9">
+            <a:extLst>
+              <a:ext uri="{FF2B5EF4-FFF2-40B4-BE49-F238E27FC236}">
+                <a16:creationId xmlns:a16="http://schemas.microsoft.com/office/drawing/2014/main" id="{A210C159-30AB-B813-70CB-BF7CE40F016C}"/>
               </a:ext>
             </a:extLst>
           </p:cNvPr>
@@ -6855,16 +6889,16 @@
           <a:bodyPr/>
           <a:lstStyle/>
           <a:p>
-            <a:endParaRPr lang="it-IT"/>
-          </a:p>
-        </p:txBody>
-      </p:sp>
-      <p:sp>
-        <p:nvSpPr>
-          <p:cNvPr id="95" name="Text 10">
-            <a:extLst>
-              <a:ext uri="{FF2B5EF4-FFF2-40B4-BE49-F238E27FC236}">
-                <a16:creationId xmlns:a16="http://schemas.microsoft.com/office/drawing/2014/main" id="{AD0AF50B-CCB3-0FE0-DAAA-BF486A726CB9}"/>
+            <a:endParaRPr lang="it-IT" sz="1200"/>
+          </a:p>
+        </p:txBody>
+      </p:sp>
+      <p:sp>
+        <p:nvSpPr>
+          <p:cNvPr id="13" name="Text 10">
+            <a:extLst>
+              <a:ext uri="{FF2B5EF4-FFF2-40B4-BE49-F238E27FC236}">
+                <a16:creationId xmlns:a16="http://schemas.microsoft.com/office/drawing/2014/main" id="{4FC4AA7A-C139-CB75-6611-068E8BBC7123}"/>
               </a:ext>
             </a:extLst>
           </p:cNvPr>
@@ -6892,7 +6926,7 @@
               <a:buNone/>
             </a:pPr>
             <a:r>
-              <a:rPr lang="en-US" sz="1100" dirty="0">
+              <a:rPr lang="en-US" sz="1200" dirty="0">
                 <a:solidFill>
                   <a:srgbClr val="1D2433"/>
                 </a:solidFill>
@@ -6902,16 +6936,16 @@
               </a:rPr>
               <a:t>Keep workloads and databases private; expose API via TLS/WAF/ALB.</a:t>
             </a:r>
-            <a:endParaRPr lang="en-US" sz="1100" dirty="0"/>
-          </a:p>
-        </p:txBody>
-      </p:sp>
-      <p:sp>
-        <p:nvSpPr>
-          <p:cNvPr id="96" name="Shape 11">
-            <a:extLst>
-              <a:ext uri="{FF2B5EF4-FFF2-40B4-BE49-F238E27FC236}">
-                <a16:creationId xmlns:a16="http://schemas.microsoft.com/office/drawing/2014/main" id="{ACD78C64-E447-F622-FCB8-8211FB6628CC}"/>
+            <a:endParaRPr lang="en-US" sz="1200" dirty="0"/>
+          </a:p>
+        </p:txBody>
+      </p:sp>
+      <p:sp>
+        <p:nvSpPr>
+          <p:cNvPr id="14" name="Shape 11">
+            <a:extLst>
+              <a:ext uri="{FF2B5EF4-FFF2-40B4-BE49-F238E27FC236}">
+                <a16:creationId xmlns:a16="http://schemas.microsoft.com/office/drawing/2014/main" id="{0D0981FD-E66E-DEE3-84C4-6B92B0258386}"/>
               </a:ext>
             </a:extLst>
           </p:cNvPr>
@@ -6940,16 +6974,16 @@
           <a:bodyPr/>
           <a:lstStyle/>
           <a:p>
-            <a:endParaRPr lang="it-IT"/>
-          </a:p>
-        </p:txBody>
-      </p:sp>
-      <p:sp>
-        <p:nvSpPr>
-          <p:cNvPr id="97" name="Text 12">
-            <a:extLst>
-              <a:ext uri="{FF2B5EF4-FFF2-40B4-BE49-F238E27FC236}">
-                <a16:creationId xmlns:a16="http://schemas.microsoft.com/office/drawing/2014/main" id="{F7A98E20-F4A4-096F-31A3-DC7A0A4FB1A5}"/>
+            <a:endParaRPr lang="it-IT" sz="1200"/>
+          </a:p>
+        </p:txBody>
+      </p:sp>
+      <p:sp>
+        <p:nvSpPr>
+          <p:cNvPr id="15" name="Text 12">
+            <a:extLst>
+              <a:ext uri="{FF2B5EF4-FFF2-40B4-BE49-F238E27FC236}">
+                <a16:creationId xmlns:a16="http://schemas.microsoft.com/office/drawing/2014/main" id="{B16CDF48-431A-A00B-D07F-49B41EF6BD19}"/>
               </a:ext>
             </a:extLst>
           </p:cNvPr>
@@ -6977,7 +7011,7 @@
               <a:buNone/>
             </a:pPr>
             <a:r>
-              <a:rPr lang="en-US" sz="1100" dirty="0">
+              <a:rPr lang="en-US" sz="1200" dirty="0">
                 <a:solidFill>
                   <a:srgbClr val="1D2433"/>
                 </a:solidFill>
@@ -6987,16 +7021,16 @@
               </a:rPr>
               <a:t>Enforce journey ownership and least-privilege access for users and workloads.</a:t>
             </a:r>
-            <a:endParaRPr lang="en-US" sz="1100" dirty="0"/>
-          </a:p>
-        </p:txBody>
-      </p:sp>
-      <p:sp>
-        <p:nvSpPr>
-          <p:cNvPr id="98" name="Shape 13">
-            <a:extLst>
-              <a:ext uri="{FF2B5EF4-FFF2-40B4-BE49-F238E27FC236}">
-                <a16:creationId xmlns:a16="http://schemas.microsoft.com/office/drawing/2014/main" id="{FF754E36-0CB7-2E87-90F5-898D193C7997}"/>
+            <a:endParaRPr lang="en-US" sz="1200" dirty="0"/>
+          </a:p>
+        </p:txBody>
+      </p:sp>
+      <p:sp>
+        <p:nvSpPr>
+          <p:cNvPr id="16" name="Shape 13">
+            <a:extLst>
+              <a:ext uri="{FF2B5EF4-FFF2-40B4-BE49-F238E27FC236}">
+                <a16:creationId xmlns:a16="http://schemas.microsoft.com/office/drawing/2014/main" id="{83E830EF-EAD8-7C44-6E86-3038502CCA2A}"/>
               </a:ext>
             </a:extLst>
           </p:cNvPr>
@@ -7033,10 +7067,10 @@
       </p:sp>
       <p:sp>
         <p:nvSpPr>
-          <p:cNvPr id="100" name="Text 15">
-            <a:extLst>
-              <a:ext uri="{FF2B5EF4-FFF2-40B4-BE49-F238E27FC236}">
-                <a16:creationId xmlns:a16="http://schemas.microsoft.com/office/drawing/2014/main" id="{A79906E9-1533-6B35-C9A3-8CC0589F851A}"/>
+          <p:cNvPr id="17" name="Text 15">
+            <a:extLst>
+              <a:ext uri="{FF2B5EF4-FFF2-40B4-BE49-F238E27FC236}">
+                <a16:creationId xmlns:a16="http://schemas.microsoft.com/office/drawing/2014/main" id="{AD82B9B1-E5D8-DDC1-CF3B-7D12C92C8F83}"/>
               </a:ext>
             </a:extLst>
           </p:cNvPr>
@@ -7080,10 +7114,10 @@
       </p:sp>
       <p:sp>
         <p:nvSpPr>
-          <p:cNvPr id="101" name="Shape 16">
-            <a:extLst>
-              <a:ext uri="{FF2B5EF4-FFF2-40B4-BE49-F238E27FC236}">
-                <a16:creationId xmlns:a16="http://schemas.microsoft.com/office/drawing/2014/main" id="{E6813A6D-CD49-252C-C0C3-254E359C86C7}"/>
+          <p:cNvPr id="18" name="Shape 16">
+            <a:extLst>
+              <a:ext uri="{FF2B5EF4-FFF2-40B4-BE49-F238E27FC236}">
+                <a16:creationId xmlns:a16="http://schemas.microsoft.com/office/drawing/2014/main" id="{229C68D6-0748-75F1-16CB-E41CD82198CF}"/>
               </a:ext>
             </a:extLst>
           </p:cNvPr>
@@ -7112,16 +7146,16 @@
           <a:bodyPr/>
           <a:lstStyle/>
           <a:p>
-            <a:endParaRPr lang="it-IT"/>
-          </a:p>
-        </p:txBody>
-      </p:sp>
-      <p:sp>
-        <p:nvSpPr>
-          <p:cNvPr id="102" name="Text 17">
-            <a:extLst>
-              <a:ext uri="{FF2B5EF4-FFF2-40B4-BE49-F238E27FC236}">
-                <a16:creationId xmlns:a16="http://schemas.microsoft.com/office/drawing/2014/main" id="{A4E66C4E-606C-E036-74F2-FC36B8DF2C1E}"/>
+            <a:endParaRPr lang="it-IT" sz="1200"/>
+          </a:p>
+        </p:txBody>
+      </p:sp>
+      <p:sp>
+        <p:nvSpPr>
+          <p:cNvPr id="19" name="Text 17">
+            <a:extLst>
+              <a:ext uri="{FF2B5EF4-FFF2-40B4-BE49-F238E27FC236}">
+                <a16:creationId xmlns:a16="http://schemas.microsoft.com/office/drawing/2014/main" id="{058F6BC9-C39E-DC4A-0A7C-A11BAA7C16C8}"/>
               </a:ext>
             </a:extLst>
           </p:cNvPr>
@@ -7149,7 +7183,7 @@
               <a:buNone/>
             </a:pPr>
             <a:r>
-              <a:rPr lang="en-US" sz="1100" dirty="0">
+              <a:rPr lang="en-US" sz="1200" dirty="0">
                 <a:solidFill>
                   <a:srgbClr val="1D2433"/>
                 </a:solidFill>
@@ -7159,16 +7193,16 @@
               </a:rPr>
               <a:t>Validate model-proposed actions in application code.</a:t>
             </a:r>
-            <a:endParaRPr lang="en-US" sz="1100" dirty="0"/>
-          </a:p>
-        </p:txBody>
-      </p:sp>
-      <p:sp>
-        <p:nvSpPr>
-          <p:cNvPr id="103" name="Shape 18">
-            <a:extLst>
-              <a:ext uri="{FF2B5EF4-FFF2-40B4-BE49-F238E27FC236}">
-                <a16:creationId xmlns:a16="http://schemas.microsoft.com/office/drawing/2014/main" id="{6A042B2A-9437-79F5-07CD-0C8FF1529EB0}"/>
+            <a:endParaRPr lang="en-US" sz="1200" dirty="0"/>
+          </a:p>
+        </p:txBody>
+      </p:sp>
+      <p:sp>
+        <p:nvSpPr>
+          <p:cNvPr id="20" name="Shape 18">
+            <a:extLst>
+              <a:ext uri="{FF2B5EF4-FFF2-40B4-BE49-F238E27FC236}">
+                <a16:creationId xmlns:a16="http://schemas.microsoft.com/office/drawing/2014/main" id="{0C7A57BF-398A-D637-FC7D-23F216DF30C3}"/>
               </a:ext>
             </a:extLst>
           </p:cNvPr>
@@ -7197,16 +7231,16 @@
           <a:bodyPr/>
           <a:lstStyle/>
           <a:p>
-            <a:endParaRPr lang="it-IT"/>
-          </a:p>
-        </p:txBody>
-      </p:sp>
-      <p:sp>
-        <p:nvSpPr>
-          <p:cNvPr id="104" name="Text 19">
-            <a:extLst>
-              <a:ext uri="{FF2B5EF4-FFF2-40B4-BE49-F238E27FC236}">
-                <a16:creationId xmlns:a16="http://schemas.microsoft.com/office/drawing/2014/main" id="{57DEAED3-00AA-B4D5-621F-F8F82AAB5202}"/>
+            <a:endParaRPr lang="it-IT" sz="1200"/>
+          </a:p>
+        </p:txBody>
+      </p:sp>
+      <p:sp>
+        <p:nvSpPr>
+          <p:cNvPr id="21" name="Text 19">
+            <a:extLst>
+              <a:ext uri="{FF2B5EF4-FFF2-40B4-BE49-F238E27FC236}">
+                <a16:creationId xmlns:a16="http://schemas.microsoft.com/office/drawing/2014/main" id="{702552C3-395C-9F46-25A6-8B1FE64DDE34}"/>
               </a:ext>
             </a:extLst>
           </p:cNvPr>
@@ -7234,7 +7268,7 @@
               <a:buNone/>
             </a:pPr>
             <a:r>
-              <a:rPr lang="en-US" sz="1100" dirty="0">
+              <a:rPr lang="en-US" sz="1200" dirty="0">
                 <a:solidFill>
                   <a:srgbClr val="1D2433"/>
                 </a:solidFill>
@@ -7244,16 +7278,16 @@
               </a:rPr>
               <a:t>Treat external content as untrusted and bound AI usage.</a:t>
             </a:r>
-            <a:endParaRPr lang="en-US" sz="1100" dirty="0"/>
-          </a:p>
-        </p:txBody>
-      </p:sp>
-      <p:sp>
-        <p:nvSpPr>
-          <p:cNvPr id="105" name="Shape 20">
-            <a:extLst>
-              <a:ext uri="{FF2B5EF4-FFF2-40B4-BE49-F238E27FC236}">
-                <a16:creationId xmlns:a16="http://schemas.microsoft.com/office/drawing/2014/main" id="{5E86188E-3E9B-BE89-2591-28984809A157}"/>
+            <a:endParaRPr lang="en-US" sz="1200" dirty="0"/>
+          </a:p>
+        </p:txBody>
+      </p:sp>
+      <p:sp>
+        <p:nvSpPr>
+          <p:cNvPr id="22" name="Shape 20">
+            <a:extLst>
+              <a:ext uri="{FF2B5EF4-FFF2-40B4-BE49-F238E27FC236}">
+                <a16:creationId xmlns:a16="http://schemas.microsoft.com/office/drawing/2014/main" id="{0BD4A35F-B004-603C-1C10-C5A77DA00DDC}"/>
               </a:ext>
             </a:extLst>
           </p:cNvPr>
@@ -7282,16 +7316,16 @@
           <a:bodyPr/>
           <a:lstStyle/>
           <a:p>
-            <a:endParaRPr lang="it-IT"/>
-          </a:p>
-        </p:txBody>
-      </p:sp>
-      <p:sp>
-        <p:nvSpPr>
-          <p:cNvPr id="106" name="Text 21">
-            <a:extLst>
-              <a:ext uri="{FF2B5EF4-FFF2-40B4-BE49-F238E27FC236}">
-                <a16:creationId xmlns:a16="http://schemas.microsoft.com/office/drawing/2014/main" id="{C0931886-0C9C-7CB3-4D0D-DD8640092635}"/>
+            <a:endParaRPr lang="it-IT" sz="1200"/>
+          </a:p>
+        </p:txBody>
+      </p:sp>
+      <p:sp>
+        <p:nvSpPr>
+          <p:cNvPr id="23" name="Text 21">
+            <a:extLst>
+              <a:ext uri="{FF2B5EF4-FFF2-40B4-BE49-F238E27FC236}">
+                <a16:creationId xmlns:a16="http://schemas.microsoft.com/office/drawing/2014/main" id="{AE42CF2A-0D7E-9B05-C4C0-F27B5F10121B}"/>
               </a:ext>
             </a:extLst>
           </p:cNvPr>
@@ -7319,7 +7353,7 @@
               <a:buNone/>
             </a:pPr>
             <a:r>
-              <a:rPr lang="en-US" sz="1100" dirty="0">
+              <a:rPr lang="en-US" sz="1200" dirty="0">
                 <a:solidFill>
                   <a:srgbClr val="1D2433"/>
                 </a:solidFill>
@@ -7329,16 +7363,16 @@
               </a:rPr>
               <a:t>Keep confidential data within approved regional paths.</a:t>
             </a:r>
-            <a:endParaRPr lang="en-US" sz="1100" dirty="0"/>
-          </a:p>
-        </p:txBody>
-      </p:sp>
-      <p:sp>
-        <p:nvSpPr>
-          <p:cNvPr id="107" name="Shape 22">
-            <a:extLst>
-              <a:ext uri="{FF2B5EF4-FFF2-40B4-BE49-F238E27FC236}">
-                <a16:creationId xmlns:a16="http://schemas.microsoft.com/office/drawing/2014/main" id="{1A5CFA70-B746-E2D7-BAD5-254BE1357895}"/>
+            <a:endParaRPr lang="en-US" sz="1200" dirty="0"/>
+          </a:p>
+        </p:txBody>
+      </p:sp>
+      <p:sp>
+        <p:nvSpPr>
+          <p:cNvPr id="24" name="Shape 22">
+            <a:extLst>
+              <a:ext uri="{FF2B5EF4-FFF2-40B4-BE49-F238E27FC236}">
+                <a16:creationId xmlns:a16="http://schemas.microsoft.com/office/drawing/2014/main" id="{DC70C6BD-8A33-5229-33A7-C51F0E437BAA}"/>
               </a:ext>
             </a:extLst>
           </p:cNvPr>
@@ -7375,10 +7409,10 @@
       </p:sp>
       <p:sp>
         <p:nvSpPr>
-          <p:cNvPr id="109" name="Text 24">
-            <a:extLst>
-              <a:ext uri="{FF2B5EF4-FFF2-40B4-BE49-F238E27FC236}">
-                <a16:creationId xmlns:a16="http://schemas.microsoft.com/office/drawing/2014/main" id="{7F66D223-FF3D-D7F6-BD5A-9DD602E12495}"/>
+          <p:cNvPr id="25" name="Text 24">
+            <a:extLst>
+              <a:ext uri="{FF2B5EF4-FFF2-40B4-BE49-F238E27FC236}">
+                <a16:creationId xmlns:a16="http://schemas.microsoft.com/office/drawing/2014/main" id="{2DC1B498-D3C9-94C9-2B9B-C962EA28039A}"/>
               </a:ext>
             </a:extLst>
           </p:cNvPr>
@@ -7422,10 +7456,10 @@
       </p:sp>
       <p:sp>
         <p:nvSpPr>
-          <p:cNvPr id="110" name="Shape 25">
-            <a:extLst>
-              <a:ext uri="{FF2B5EF4-FFF2-40B4-BE49-F238E27FC236}">
-                <a16:creationId xmlns:a16="http://schemas.microsoft.com/office/drawing/2014/main" id="{9CBB125C-0136-89FD-2A1F-5755CB7A87A6}"/>
+          <p:cNvPr id="26" name="Shape 25">
+            <a:extLst>
+              <a:ext uri="{FF2B5EF4-FFF2-40B4-BE49-F238E27FC236}">
+                <a16:creationId xmlns:a16="http://schemas.microsoft.com/office/drawing/2014/main" id="{7D16D9B0-5CDA-5218-6E82-E7F3CA0A9F39}"/>
               </a:ext>
             </a:extLst>
           </p:cNvPr>
@@ -7454,16 +7488,16 @@
           <a:bodyPr/>
           <a:lstStyle/>
           <a:p>
-            <a:endParaRPr lang="it-IT"/>
-          </a:p>
-        </p:txBody>
-      </p:sp>
-      <p:sp>
-        <p:nvSpPr>
-          <p:cNvPr id="111" name="Text 26">
-            <a:extLst>
-              <a:ext uri="{FF2B5EF4-FFF2-40B4-BE49-F238E27FC236}">
-                <a16:creationId xmlns:a16="http://schemas.microsoft.com/office/drawing/2014/main" id="{AA1102BA-EA87-C1D5-CCF9-143376508A06}"/>
+            <a:endParaRPr lang="it-IT" sz="1200"/>
+          </a:p>
+        </p:txBody>
+      </p:sp>
+      <p:sp>
+        <p:nvSpPr>
+          <p:cNvPr id="27" name="Text 26">
+            <a:extLst>
+              <a:ext uri="{FF2B5EF4-FFF2-40B4-BE49-F238E27FC236}">
+                <a16:creationId xmlns:a16="http://schemas.microsoft.com/office/drawing/2014/main" id="{0041D15B-EAC4-C2E3-6D81-A8AD370D0162}"/>
               </a:ext>
             </a:extLst>
           </p:cNvPr>
@@ -7491,7 +7525,7 @@
               <a:buNone/>
             </a:pPr>
             <a:r>
-              <a:rPr lang="en-US" sz="1100" dirty="0">
+              <a:rPr lang="en-US" sz="1200" dirty="0">
                 <a:solidFill>
                   <a:srgbClr val="1D2433"/>
                 </a:solidFill>
@@ -7501,16 +7535,16 @@
               </a:rPr>
               <a:t>Keep unsampled audit records of agent runs, approvals and external actions.</a:t>
             </a:r>
-            <a:endParaRPr lang="en-US" sz="1100" dirty="0"/>
-          </a:p>
-        </p:txBody>
-      </p:sp>
-      <p:sp>
-        <p:nvSpPr>
-          <p:cNvPr id="112" name="Shape 27">
-            <a:extLst>
-              <a:ext uri="{FF2B5EF4-FFF2-40B4-BE49-F238E27FC236}">
-                <a16:creationId xmlns:a16="http://schemas.microsoft.com/office/drawing/2014/main" id="{50BB8808-D2C0-CE10-ACA4-C82D34245A5A}"/>
+            <a:endParaRPr lang="en-US" sz="1200" dirty="0"/>
+          </a:p>
+        </p:txBody>
+      </p:sp>
+      <p:sp>
+        <p:nvSpPr>
+          <p:cNvPr id="28" name="Shape 27">
+            <a:extLst>
+              <a:ext uri="{FF2B5EF4-FFF2-40B4-BE49-F238E27FC236}">
+                <a16:creationId xmlns:a16="http://schemas.microsoft.com/office/drawing/2014/main" id="{0CC3F3A9-B946-A9FF-80C0-A5BFEBF3516F}"/>
               </a:ext>
             </a:extLst>
           </p:cNvPr>
@@ -7539,16 +7573,16 @@
           <a:bodyPr/>
           <a:lstStyle/>
           <a:p>
-            <a:endParaRPr lang="it-IT"/>
-          </a:p>
-        </p:txBody>
-      </p:sp>
-      <p:sp>
-        <p:nvSpPr>
-          <p:cNvPr id="113" name="Text 28">
-            <a:extLst>
-              <a:ext uri="{FF2B5EF4-FFF2-40B4-BE49-F238E27FC236}">
-                <a16:creationId xmlns:a16="http://schemas.microsoft.com/office/drawing/2014/main" id="{36F38D36-F71E-142C-F104-28585CA97D65}"/>
+            <a:endParaRPr lang="it-IT" sz="1200"/>
+          </a:p>
+        </p:txBody>
+      </p:sp>
+      <p:sp>
+        <p:nvSpPr>
+          <p:cNvPr id="29" name="Text 28">
+            <a:extLst>
+              <a:ext uri="{FF2B5EF4-FFF2-40B4-BE49-F238E27FC236}">
+                <a16:creationId xmlns:a16="http://schemas.microsoft.com/office/drawing/2014/main" id="{6E09C10C-75F0-E9FC-01AA-E50E6A1C9AD7}"/>
               </a:ext>
             </a:extLst>
           </p:cNvPr>
@@ -7576,7 +7610,7 @@
               <a:buNone/>
             </a:pPr>
             <a:r>
-              <a:rPr lang="en-US" sz="1100" dirty="0">
+              <a:rPr lang="en-US" sz="1200" dirty="0">
                 <a:solidFill>
                   <a:srgbClr val="1D2433"/>
                 </a:solidFill>
@@ -7586,16 +7620,16 @@
               </a:rPr>
               <a:t>Correlate logs and traces by journey/operation ID.</a:t>
             </a:r>
-            <a:endParaRPr lang="en-US" sz="1100" dirty="0"/>
-          </a:p>
-        </p:txBody>
-      </p:sp>
-      <p:sp>
-        <p:nvSpPr>
-          <p:cNvPr id="114" name="Shape 29">
-            <a:extLst>
-              <a:ext uri="{FF2B5EF4-FFF2-40B4-BE49-F238E27FC236}">
-                <a16:creationId xmlns:a16="http://schemas.microsoft.com/office/drawing/2014/main" id="{A280E9E5-A22C-C631-80FB-92C0A215F7ED}"/>
+            <a:endParaRPr lang="en-US" sz="1200" dirty="0"/>
+          </a:p>
+        </p:txBody>
+      </p:sp>
+      <p:sp>
+        <p:nvSpPr>
+          <p:cNvPr id="30" name="Shape 29">
+            <a:extLst>
+              <a:ext uri="{FF2B5EF4-FFF2-40B4-BE49-F238E27FC236}">
+                <a16:creationId xmlns:a16="http://schemas.microsoft.com/office/drawing/2014/main" id="{5F05122A-E697-7C7C-9676-9998A300B112}"/>
               </a:ext>
             </a:extLst>
           </p:cNvPr>
@@ -7624,16 +7658,16 @@
           <a:bodyPr/>
           <a:lstStyle/>
           <a:p>
-            <a:endParaRPr lang="it-IT"/>
-          </a:p>
-        </p:txBody>
-      </p:sp>
-      <p:sp>
-        <p:nvSpPr>
-          <p:cNvPr id="115" name="Text 30">
-            <a:extLst>
-              <a:ext uri="{FF2B5EF4-FFF2-40B4-BE49-F238E27FC236}">
-                <a16:creationId xmlns:a16="http://schemas.microsoft.com/office/drawing/2014/main" id="{49D44F57-9AC4-DC2E-6639-FDE58D83A6DD}"/>
+            <a:endParaRPr lang="it-IT" sz="1200"/>
+          </a:p>
+        </p:txBody>
+      </p:sp>
+      <p:sp>
+        <p:nvSpPr>
+          <p:cNvPr id="31" name="Text 30">
+            <a:extLst>
+              <a:ext uri="{FF2B5EF4-FFF2-40B4-BE49-F238E27FC236}">
+                <a16:creationId xmlns:a16="http://schemas.microsoft.com/office/drawing/2014/main" id="{1FBB487B-70A9-9A63-B8A0-590304AC6005}"/>
               </a:ext>
             </a:extLst>
           </p:cNvPr>
@@ -7653,7 +7687,7 @@
         </p:spPr>
         <p:txBody>
           <a:bodyPr wrap="square" lIns="381" tIns="381" rIns="381" bIns="381" rtlCol="0" anchor="t">
-            <a:normAutofit/>
+            <a:noAutofit/>
           </a:bodyPr>
           <a:lstStyle/>
           <a:p>
@@ -7661,7 +7695,7 @@
               <a:buNone/>
             </a:pPr>
             <a:r>
-              <a:rPr lang="en-US" sz="1100" dirty="0">
+              <a:rPr lang="en-US" sz="1200" dirty="0">
                 <a:solidFill>
                   <a:srgbClr val="1D2433"/>
                 </a:solidFill>
@@ -7671,16 +7705,16 @@
               </a:rPr>
               <a:t>Redact personal data and tokens; define retention and deletion.</a:t>
             </a:r>
-            <a:endParaRPr lang="en-US" sz="1100" dirty="0"/>
-          </a:p>
-        </p:txBody>
-      </p:sp>
-      <p:sp>
-        <p:nvSpPr>
-          <p:cNvPr id="116" name="Shape 31">
-            <a:extLst>
-              <a:ext uri="{FF2B5EF4-FFF2-40B4-BE49-F238E27FC236}">
-                <a16:creationId xmlns:a16="http://schemas.microsoft.com/office/drawing/2014/main" id="{64059E2C-CDDD-EFF2-84EE-C632F0E95E68}"/>
+            <a:endParaRPr lang="en-US" sz="1200" dirty="0"/>
+          </a:p>
+        </p:txBody>
+      </p:sp>
+      <p:sp>
+        <p:nvSpPr>
+          <p:cNvPr id="32" name="Shape 31">
+            <a:extLst>
+              <a:ext uri="{FF2B5EF4-FFF2-40B4-BE49-F238E27FC236}">
+                <a16:creationId xmlns:a16="http://schemas.microsoft.com/office/drawing/2014/main" id="{720367AB-4AB4-E8DA-ABB3-D0FF5B0867FD}"/>
               </a:ext>
             </a:extLst>
           </p:cNvPr>
@@ -7717,10 +7751,10 @@
       </p:sp>
       <p:sp>
         <p:nvSpPr>
-          <p:cNvPr id="118" name="Text 33">
-            <a:extLst>
-              <a:ext uri="{FF2B5EF4-FFF2-40B4-BE49-F238E27FC236}">
-                <a16:creationId xmlns:a16="http://schemas.microsoft.com/office/drawing/2014/main" id="{E0A08966-A92A-BD30-01D6-42766E50A6AC}"/>
+          <p:cNvPr id="33" name="Text 33">
+            <a:extLst>
+              <a:ext uri="{FF2B5EF4-FFF2-40B4-BE49-F238E27FC236}">
+                <a16:creationId xmlns:a16="http://schemas.microsoft.com/office/drawing/2014/main" id="{9BF6CC91-EF81-D1B0-C1C2-A1AC03570B90}"/>
               </a:ext>
             </a:extLst>
           </p:cNvPr>
@@ -7764,10 +7798,10 @@
       </p:sp>
       <p:sp>
         <p:nvSpPr>
-          <p:cNvPr id="120" name="Shape 35">
-            <a:extLst>
-              <a:ext uri="{FF2B5EF4-FFF2-40B4-BE49-F238E27FC236}">
-                <a16:creationId xmlns:a16="http://schemas.microsoft.com/office/drawing/2014/main" id="{37E1C867-547C-158A-5EDE-04BE7F8F4223}"/>
+          <p:cNvPr id="34" name="Shape 35">
+            <a:extLst>
+              <a:ext uri="{FF2B5EF4-FFF2-40B4-BE49-F238E27FC236}">
+                <a16:creationId xmlns:a16="http://schemas.microsoft.com/office/drawing/2014/main" id="{7AB20828-DAA1-10F9-01C7-3885D9F802D1}"/>
               </a:ext>
             </a:extLst>
           </p:cNvPr>
@@ -7796,16 +7830,16 @@
           <a:bodyPr/>
           <a:lstStyle/>
           <a:p>
-            <a:endParaRPr lang="it-IT"/>
-          </a:p>
-        </p:txBody>
-      </p:sp>
-      <p:sp>
-        <p:nvSpPr>
-          <p:cNvPr id="121" name="Text 36">
-            <a:extLst>
-              <a:ext uri="{FF2B5EF4-FFF2-40B4-BE49-F238E27FC236}">
-                <a16:creationId xmlns:a16="http://schemas.microsoft.com/office/drawing/2014/main" id="{48868F49-A1EC-CBC4-A975-CC61EBE9A5A9}"/>
+            <a:endParaRPr lang="it-IT" sz="1200"/>
+          </a:p>
+        </p:txBody>
+      </p:sp>
+      <p:sp>
+        <p:nvSpPr>
+          <p:cNvPr id="35" name="Text 36">
+            <a:extLst>
+              <a:ext uri="{FF2B5EF4-FFF2-40B4-BE49-F238E27FC236}">
+                <a16:creationId xmlns:a16="http://schemas.microsoft.com/office/drawing/2014/main" id="{A01214FB-33C0-0814-3407-C7DA47D6EE2C}"/>
               </a:ext>
             </a:extLst>
           </p:cNvPr>
@@ -7833,7 +7867,7 @@
               <a:buNone/>
             </a:pPr>
             <a:r>
-              <a:rPr lang="en-US" sz="1100" b="1" dirty="0">
+              <a:rPr lang="en-US" sz="1200" b="1" dirty="0">
                 <a:solidFill>
                   <a:srgbClr val="1D2433"/>
                 </a:solidFill>
@@ -7844,7 +7878,7 @@
               <a:t>Service dashboard</a:t>
             </a:r>
             <a:r>
-              <a:rPr lang="en-US" sz="1100" dirty="0">
+              <a:rPr lang="en-US" sz="1200" dirty="0">
                 <a:solidFill>
                   <a:srgbClr val="1D2433"/>
                 </a:solidFill>
@@ -7854,16 +7888,16 @@
               </a:rPr>
               <a:t>: availability, latency, errors and infrastructure health.</a:t>
             </a:r>
-            <a:endParaRPr lang="en-US" sz="1100" dirty="0"/>
-          </a:p>
-        </p:txBody>
-      </p:sp>
-      <p:sp>
-        <p:nvSpPr>
-          <p:cNvPr id="122" name="Shape 37">
-            <a:extLst>
-              <a:ext uri="{FF2B5EF4-FFF2-40B4-BE49-F238E27FC236}">
-                <a16:creationId xmlns:a16="http://schemas.microsoft.com/office/drawing/2014/main" id="{624B0C2A-DC53-5F3A-0916-D559192BBE80}"/>
+            <a:endParaRPr lang="en-US" sz="1200" dirty="0"/>
+          </a:p>
+        </p:txBody>
+      </p:sp>
+      <p:sp>
+        <p:nvSpPr>
+          <p:cNvPr id="36" name="Shape 37">
+            <a:extLst>
+              <a:ext uri="{FF2B5EF4-FFF2-40B4-BE49-F238E27FC236}">
+                <a16:creationId xmlns:a16="http://schemas.microsoft.com/office/drawing/2014/main" id="{D69BFC31-B462-FE3D-1B74-BB7E545BD66C}"/>
               </a:ext>
             </a:extLst>
           </p:cNvPr>
@@ -7892,16 +7926,16 @@
           <a:bodyPr/>
           <a:lstStyle/>
           <a:p>
-            <a:endParaRPr lang="it-IT"/>
-          </a:p>
-        </p:txBody>
-      </p:sp>
-      <p:sp>
-        <p:nvSpPr>
-          <p:cNvPr id="123" name="Text 38">
-            <a:extLst>
-              <a:ext uri="{FF2B5EF4-FFF2-40B4-BE49-F238E27FC236}">
-                <a16:creationId xmlns:a16="http://schemas.microsoft.com/office/drawing/2014/main" id="{9F4638F7-372D-6B64-78DE-D1227EDE6C70}"/>
+            <a:endParaRPr lang="it-IT" sz="1200"/>
+          </a:p>
+        </p:txBody>
+      </p:sp>
+      <p:sp>
+        <p:nvSpPr>
+          <p:cNvPr id="37" name="Text 38">
+            <a:extLst>
+              <a:ext uri="{FF2B5EF4-FFF2-40B4-BE49-F238E27FC236}">
+                <a16:creationId xmlns:a16="http://schemas.microsoft.com/office/drawing/2014/main" id="{BE6C4CFE-C5F4-0B9F-B0EA-2B03AD9B3EB3}"/>
               </a:ext>
             </a:extLst>
           </p:cNvPr>
@@ -7929,7 +7963,7 @@
               <a:buNone/>
             </a:pPr>
             <a:r>
-              <a:rPr lang="en-US" sz="1100" b="1" dirty="0">
+              <a:rPr lang="en-US" sz="1200" b="1" dirty="0">
                 <a:solidFill>
                   <a:srgbClr val="1D2433"/>
                 </a:solidFill>
@@ -7940,7 +7974,7 @@
               <a:t>Journey dashboard</a:t>
             </a:r>
             <a:r>
-              <a:rPr lang="en-US" sz="1100" dirty="0">
+              <a:rPr lang="en-US" sz="1200" dirty="0">
                 <a:solidFill>
                   <a:srgbClr val="1D2433"/>
                 </a:solidFill>
@@ -7950,211 +7984,7 @@
               </a:rPr>
               <a:t>: queue/outbox age, stalled journeys, uncertain outcomes and provider throttling.</a:t>
             </a:r>
-            <a:endParaRPr lang="en-US" sz="1100" dirty="0"/>
-          </a:p>
-        </p:txBody>
-      </p:sp>
-      <p:sp>
-        <p:nvSpPr>
-          <p:cNvPr id="126" name="Shape 41">
-            <a:extLst>
-              <a:ext uri="{FF2B5EF4-FFF2-40B4-BE49-F238E27FC236}">
-                <a16:creationId xmlns:a16="http://schemas.microsoft.com/office/drawing/2014/main" id="{E50F11AA-0B39-DEB2-48E6-78BBF664FC15}"/>
-              </a:ext>
-            </a:extLst>
-          </p:cNvPr>
-          <p:cNvSpPr/>
-          <p:nvPr/>
-        </p:nvSpPr>
-        <p:spPr>
-          <a:xfrm>
-            <a:off x="502920" y="5247462"/>
-            <a:ext cx="11210544" cy="1009115"/>
-          </a:xfrm>
-          <a:prstGeom prst="roundRect">
-            <a:avLst>
-              <a:gd name="adj" fmla="val 9615"/>
-            </a:avLst>
-          </a:prstGeom>
-          <a:solidFill>
-            <a:srgbClr val="F8FAFC"/>
-          </a:solidFill>
-          <a:ln w="12700">
-            <a:solidFill>
-              <a:srgbClr val="D6DEE9"/>
-            </a:solidFill>
-            <a:prstDash val="solid"/>
-          </a:ln>
-        </p:spPr>
-        <p:txBody>
-          <a:bodyPr/>
-          <a:lstStyle/>
-          <a:p>
-            <a:endParaRPr lang="it-IT"/>
-          </a:p>
-        </p:txBody>
-      </p:sp>
-      <p:sp>
-        <p:nvSpPr>
-          <p:cNvPr id="127" name="Text 42">
-            <a:extLst>
-              <a:ext uri="{FF2B5EF4-FFF2-40B4-BE49-F238E27FC236}">
-                <a16:creationId xmlns:a16="http://schemas.microsoft.com/office/drawing/2014/main" id="{4E1353A1-7FAF-A338-0390-B7FD4ADBC24E}"/>
-              </a:ext>
-            </a:extLst>
-          </p:cNvPr>
-          <p:cNvSpPr/>
-          <p:nvPr/>
-        </p:nvSpPr>
-        <p:spPr>
-          <a:xfrm>
-            <a:off x="850392" y="5415968"/>
-            <a:ext cx="10707624" cy="338327"/>
-          </a:xfrm>
-          <a:prstGeom prst="rect">
-            <a:avLst/>
-          </a:prstGeom>
-          <a:noFill/>
-          <a:ln/>
-        </p:spPr>
-        <p:txBody>
-          <a:bodyPr wrap="square" lIns="0" tIns="0" rIns="0" bIns="0" rtlCol="0" anchor="t">
-            <a:normAutofit/>
-          </a:bodyPr>
-          <a:lstStyle/>
-          <a:p>
-            <a:pPr marL="0" indent="0" algn="l">
-              <a:buNone/>
-            </a:pPr>
-            <a:r>
-              <a:rPr lang="en-US" sz="1400" b="1" dirty="0">
-                <a:solidFill>
-                  <a:srgbClr val="07133D"/>
-                </a:solidFill>
-                <a:latin typeface="Aptos" pitchFamily="34" charset="0"/>
-                <a:ea typeface="Aptos" pitchFamily="34" charset="-122"/>
-                <a:cs typeface="Aptos" pitchFamily="34" charset="-120"/>
-              </a:rPr>
-              <a:t>Telemetry (</a:t>
-            </a:r>
-            <a:r>
-              <a:rPr lang="en-US" sz="1400" b="1" dirty="0" err="1">
-                <a:solidFill>
-                  <a:srgbClr val="07133D"/>
-                </a:solidFill>
-                <a:latin typeface="Aptos" pitchFamily="34" charset="0"/>
-                <a:ea typeface="Aptos" pitchFamily="34" charset="-122"/>
-                <a:cs typeface="Aptos" pitchFamily="34" charset="-120"/>
-              </a:rPr>
-              <a:t>OpenTelemetry</a:t>
-            </a:r>
-            <a:r>
-              <a:rPr lang="en-US" sz="1400" b="1" dirty="0">
-                <a:solidFill>
-                  <a:srgbClr val="07133D"/>
-                </a:solidFill>
-                <a:latin typeface="Aptos" pitchFamily="34" charset="0"/>
-                <a:ea typeface="Aptos" pitchFamily="34" charset="-122"/>
-                <a:cs typeface="Aptos" pitchFamily="34" charset="-120"/>
-              </a:rPr>
-              <a:t>): </a:t>
-            </a:r>
-            <a:r>
-              <a:rPr lang="en-US" sz="1400" dirty="0">
-                <a:solidFill>
-                  <a:srgbClr val="1D2433"/>
-                </a:solidFill>
-                <a:latin typeface="Aptos" pitchFamily="34" charset="0"/>
-                <a:ea typeface="Aptos" pitchFamily="34" charset="-122"/>
-                <a:cs typeface="Aptos" pitchFamily="34" charset="-120"/>
-              </a:rPr>
-              <a:t>application logs + service/infrastructure metrics + traces → regional monitoring, dashboards and alarms</a:t>
-            </a:r>
-            <a:endParaRPr lang="en-US" sz="1400" dirty="0"/>
-          </a:p>
-        </p:txBody>
-      </p:sp>
-      <p:sp>
-        <p:nvSpPr>
-          <p:cNvPr id="7" name="CasellaDiTesto 6">
-            <a:extLst>
-              <a:ext uri="{FF2B5EF4-FFF2-40B4-BE49-F238E27FC236}">
-                <a16:creationId xmlns:a16="http://schemas.microsoft.com/office/drawing/2014/main" id="{67915442-1F35-D21D-D449-FCF0DB1F2CA2}"/>
-              </a:ext>
-            </a:extLst>
-          </p:cNvPr>
-          <p:cNvSpPr txBox="1"/>
-          <p:nvPr/>
-        </p:nvSpPr>
-        <p:spPr>
-          <a:xfrm>
-            <a:off x="1504710" y="5753524"/>
-            <a:ext cx="9375492" cy="338554"/>
-          </a:xfrm>
-          <a:prstGeom prst="rect">
-            <a:avLst/>
-          </a:prstGeom>
-          <a:noFill/>
-        </p:spPr>
-        <p:txBody>
-          <a:bodyPr wrap="square" rtlCol="0">
-            <a:spAutoFit/>
-          </a:bodyPr>
-          <a:lstStyle/>
-          <a:p>
-            <a:r>
-              <a:rPr lang="it-IT" sz="1600" b="1" dirty="0">
-                <a:solidFill>
-                  <a:srgbClr val="C00000"/>
-                </a:solidFill>
-              </a:rPr>
-              <a:t>Amazon </a:t>
-            </a:r>
-            <a:r>
-              <a:rPr lang="it-IT" sz="1600" b="1" dirty="0" err="1">
-                <a:solidFill>
-                  <a:srgbClr val="C00000"/>
-                </a:solidFill>
-              </a:rPr>
-              <a:t>CloudWatch</a:t>
-            </a:r>
-            <a:r>
-              <a:rPr lang="it-IT" sz="1600" b="1" dirty="0"/>
-              <a:t> </a:t>
-            </a:r>
-            <a:r>
-              <a:rPr lang="it-IT" sz="1600" dirty="0"/>
-              <a:t>(AWS-</a:t>
-            </a:r>
-            <a:r>
-              <a:rPr lang="it-IT" sz="1600" dirty="0" err="1"/>
-              <a:t>managed</a:t>
-            </a:r>
-            <a:r>
-              <a:rPr lang="it-IT" sz="1600" dirty="0"/>
-              <a:t>) </a:t>
-            </a:r>
-            <a:r>
-              <a:rPr lang="it-IT" sz="1600" i="1" dirty="0"/>
-              <a:t>vs. Prometheus + </a:t>
-            </a:r>
-            <a:r>
-              <a:rPr lang="it-IT" sz="1600" i="1" dirty="0" err="1"/>
-              <a:t>Grafana</a:t>
-            </a:r>
-            <a:r>
-              <a:rPr lang="it-IT" sz="1600" i="1" dirty="0"/>
-              <a:t> + Loki + Tempo (self-</a:t>
-            </a:r>
-            <a:r>
-              <a:rPr lang="it-IT" sz="1600" i="1" dirty="0" err="1"/>
-              <a:t>managed</a:t>
-            </a:r>
-            <a:r>
-              <a:rPr lang="it-IT" sz="1600" i="1" dirty="0"/>
-              <a:t>)</a:t>
-            </a:r>
-            <a:endParaRPr lang="it-IT" sz="1600" dirty="0"/>
+            <a:endParaRPr lang="en-US" sz="1200" dirty="0"/>
           </a:p>
         </p:txBody>
       </p:sp>
@@ -11759,7 +11589,7 @@
         <p:spPr>
           <a:xfrm>
             <a:off x="8168244" y="4297478"/>
-            <a:ext cx="2825496" cy="1154162"/>
+            <a:ext cx="2825496" cy="1107996"/>
           </a:xfrm>
           <a:prstGeom prst="rect">
             <a:avLst/>
@@ -11828,20 +11658,12 @@
               <a:buChar char="•"/>
             </a:pPr>
             <a:r>
-              <a:rPr lang="it-IT" sz="1400" dirty="0">
+              <a:rPr lang="it-IT" sz="1100" dirty="0">
                 <a:solidFill>
                   <a:srgbClr val="07133D"/>
                 </a:solidFill>
               </a:rPr>
-              <a:t>GPU</a:t>
-            </a:r>
-            <a:r>
-              <a:rPr lang="it-IT" sz="1100" dirty="0">
-                <a:solidFill>
-                  <a:srgbClr val="07133D"/>
-                </a:solidFill>
-              </a:rPr>
-              <a:t> devices for Meridian-</a:t>
+              <a:t>GPU devices for Meridian-</a:t>
             </a:r>
             <a:r>
               <a:rPr lang="it-IT" sz="1100" dirty="0" err="1">
@@ -13181,7 +13003,7 @@
                 <a:ea typeface="Aptos" pitchFamily="34" charset="-122"/>
                 <a:cs typeface="Aptos" pitchFamily="34" charset="-120"/>
               </a:rPr>
-              <a:t>Storage growth and data</a:t>
+              <a:t>Observability</a:t>
             </a:r>
             <a:endParaRPr lang="en-US" sz="1020" dirty="0"/>
           </a:p>
@@ -13266,7 +13088,7 @@
                 <a:ea typeface="Aptos" pitchFamily="34" charset="-122"/>
                 <a:cs typeface="Aptos" pitchFamily="34" charset="-120"/>
               </a:rPr>
-              <a:t>≈€25-50/</a:t>
+              <a:t>≈€30-90/</a:t>
             </a:r>
             <a:r>
               <a:rPr lang="en-US" sz="1100" b="1" dirty="0" err="1">
@@ -13355,12 +13177,8 @@
           <a:lstStyle/>
           <a:p>
             <a:r>
-              <a:rPr lang="it-IT" sz="1050" dirty="0" err="1"/>
-              <a:t>Observability</a:t>
-            </a:r>
-            <a:r>
               <a:rPr lang="it-IT" sz="1050" dirty="0"/>
-              <a:t>, workflows and </a:t>
+              <a:t>Other </a:t>
             </a:r>
             <a:r>
               <a:rPr lang="it-IT" sz="1050" dirty="0" err="1"/>
@@ -13368,7 +13186,7 @@
             </a:r>
             <a:r>
               <a:rPr lang="it-IT" sz="1050" dirty="0"/>
-              <a:t> services</a:t>
+              <a:t> services, storage and workflows</a:t>
             </a:r>
             <a:endParaRPr lang="en-US" sz="1020" dirty="0"/>
           </a:p>
@@ -13753,7 +13571,7 @@
           <a:p>
             <a:pPr algn="ctr"/>
             <a:r>
-              <a:rPr lang="en-US" sz="1100" b="1" dirty="0">
+              <a:rPr lang="en-US" sz="1100" b="1">
                 <a:solidFill>
                   <a:srgbClr val="673AB7"/>
                 </a:solidFill>
@@ -13761,7 +13579,18 @@
                 <a:ea typeface="Aptos" pitchFamily="34" charset="-122"/>
                 <a:cs typeface="Aptos" pitchFamily="34" charset="-120"/>
               </a:rPr>
-              <a:t>≈€50-140/</a:t>
+              <a:t>≈€20-50</a:t>
+            </a:r>
+            <a:r>
+              <a:rPr lang="en-US" sz="1100" b="1" dirty="0">
+                <a:solidFill>
+                  <a:srgbClr val="673AB7"/>
+                </a:solidFill>
+                <a:latin typeface="Aptos" pitchFamily="34" charset="0"/>
+                <a:ea typeface="Aptos" pitchFamily="34" charset="-122"/>
+                <a:cs typeface="Aptos" pitchFamily="34" charset="-120"/>
+              </a:rPr>
+              <a:t>/</a:t>
             </a:r>
             <a:r>
               <a:rPr lang="en-US" sz="1100" b="1" dirty="0" err="1">
@@ -14626,14 +14455,29 @@
           <a:p>
             <a:pPr algn="ctr"/>
             <a:r>
-              <a:rPr sz="1150" b="1">
+              <a:rPr sz="1150" b="1" dirty="0">
                 <a:solidFill>
                   <a:srgbClr val="0B9F63"/>
                 </a:solidFill>
                 <a:latin typeface="Aptos"/>
               </a:rPr>
-              <a:t>Weeks 3–5</a:t>
-            </a:r>
+              <a:t>Weeks 3–</a:t>
+            </a:r>
+            <a:r>
+              <a:rPr lang="it-IT" sz="1150" b="1" dirty="0">
+                <a:solidFill>
+                  <a:srgbClr val="0B9F63"/>
+                </a:solidFill>
+                <a:latin typeface="Aptos"/>
+              </a:rPr>
+              <a:t>6</a:t>
+            </a:r>
+            <a:endParaRPr sz="1150" b="1" dirty="0">
+              <a:solidFill>
+                <a:srgbClr val="0B9F63"/>
+              </a:solidFill>
+              <a:latin typeface="Aptos"/>
+            </a:endParaRPr>
           </a:p>
         </p:txBody>
       </p:sp>
@@ -14760,14 +14604,29 @@
           <a:p>
             <a:pPr algn="ctr"/>
             <a:r>
-              <a:rPr sz="1150" b="1">
+              <a:rPr sz="1150" b="1" dirty="0">
                 <a:solidFill>
                   <a:srgbClr val="F28A00"/>
                 </a:solidFill>
                 <a:latin typeface="Aptos"/>
               </a:rPr>
-              <a:t>Weeks 6–8</a:t>
-            </a:r>
+              <a:t>Weeks </a:t>
+            </a:r>
+            <a:r>
+              <a:rPr lang="it-IT" sz="1150" b="1" dirty="0">
+                <a:solidFill>
+                  <a:srgbClr val="F28A00"/>
+                </a:solidFill>
+                <a:latin typeface="Aptos"/>
+              </a:rPr>
+              <a:t>7-12</a:t>
+            </a:r>
+            <a:endParaRPr sz="1150" b="1" dirty="0">
+              <a:solidFill>
+                <a:srgbClr val="F28A00"/>
+              </a:solidFill>
+              <a:latin typeface="Aptos"/>
+            </a:endParaRPr>
           </a:p>
         </p:txBody>
       </p:sp>
@@ -15207,8 +15066,8 @@
         </p:nvSpPr>
         <p:spPr>
           <a:xfrm>
-            <a:off x="752857" y="3707445"/>
-            <a:ext cx="1783994" cy="181588"/>
+            <a:off x="752857" y="3690945"/>
+            <a:ext cx="1783994" cy="215444"/>
           </a:xfrm>
           <a:prstGeom prst="rect">
             <a:avLst/>
@@ -15223,7 +15082,7 @@
           <a:p>
             <a:pPr algn="l"/>
             <a:r>
-              <a:rPr sz="1180" b="1" dirty="0">
+              <a:rPr sz="1400" b="1" dirty="0">
                 <a:solidFill>
                   <a:srgbClr val="07133D"/>
                 </a:solidFill>
@@ -15300,8 +15159,8 @@
         </p:nvSpPr>
         <p:spPr>
           <a:xfrm>
-            <a:off x="2734969" y="3595977"/>
-            <a:ext cx="5098237" cy="326243"/>
+            <a:off x="2722397" y="3549805"/>
+            <a:ext cx="5098237" cy="430887"/>
           </a:xfrm>
           <a:prstGeom prst="rect">
             <a:avLst/>
@@ -15314,114 +15173,114 @@
           </a:bodyPr>
           <a:lstStyle/>
           <a:p>
-            <a:pPr algn="l"/>
-            <a:r>
-              <a:rPr sz="1060" b="0" dirty="0">
-                <a:solidFill>
-                  <a:srgbClr val="07133D"/>
-                </a:solidFill>
-                <a:latin typeface="Aptos"/>
-              </a:rPr>
-              <a:t>Confirm recovery scope and provider guarantees. </a:t>
-            </a:r>
-            <a:endParaRPr lang="it-IT" sz="1060" b="0" dirty="0">
+            <a:r>
+              <a:rPr lang="it-IT" sz="1400" dirty="0" err="1">
+                <a:solidFill>
+                  <a:schemeClr val="bg2">
+                    <a:lumMod val="50000"/>
+                  </a:schemeClr>
+                </a:solidFill>
+              </a:rPr>
+              <a:t>Confirm</a:t>
+            </a:r>
+            <a:r>
+              <a:rPr lang="it-IT" sz="1400" dirty="0">
+                <a:solidFill>
+                  <a:schemeClr val="bg2">
+                    <a:lumMod val="50000"/>
+                  </a:schemeClr>
+                </a:solidFill>
+              </a:rPr>
+              <a:t> </a:t>
+            </a:r>
+            <a:r>
+              <a:rPr lang="it-IT" sz="1400" dirty="0" err="1">
+                <a:solidFill>
+                  <a:schemeClr val="bg2">
+                    <a:lumMod val="50000"/>
+                  </a:schemeClr>
+                </a:solidFill>
+              </a:rPr>
+              <a:t>region</a:t>
+            </a:r>
+            <a:r>
+              <a:rPr lang="it-IT" sz="1400" dirty="0">
+                <a:solidFill>
+                  <a:schemeClr val="bg2">
+                    <a:lumMod val="50000"/>
+                  </a:schemeClr>
+                </a:solidFill>
+              </a:rPr>
+              <a:t>, recovery scope and provider </a:t>
+            </a:r>
+            <a:r>
+              <a:rPr lang="it-IT" sz="1400" dirty="0" err="1">
+                <a:solidFill>
+                  <a:schemeClr val="bg2">
+                    <a:lumMod val="50000"/>
+                  </a:schemeClr>
+                </a:solidFill>
+              </a:rPr>
+              <a:t>guarantees</a:t>
+            </a:r>
+            <a:r>
+              <a:rPr lang="it-IT" sz="1400" dirty="0">
+                <a:solidFill>
+                  <a:schemeClr val="bg2">
+                    <a:lumMod val="50000"/>
+                  </a:schemeClr>
+                </a:solidFill>
+              </a:rPr>
+              <a:t>. </a:t>
+            </a:r>
+            <a:r>
+              <a:rPr lang="it-IT" sz="1400" dirty="0" err="1">
+                <a:solidFill>
+                  <a:schemeClr val="bg2">
+                    <a:lumMod val="50000"/>
+                  </a:schemeClr>
+                </a:solidFill>
+              </a:rPr>
+              <a:t>Provision</a:t>
+            </a:r>
+            <a:r>
+              <a:rPr lang="it-IT" sz="1400" dirty="0">
+                <a:solidFill>
+                  <a:schemeClr val="bg2">
+                    <a:lumMod val="50000"/>
+                  </a:schemeClr>
+                </a:solidFill>
+              </a:rPr>
+              <a:t> </a:t>
+            </a:r>
+            <a:r>
+              <a:rPr lang="it-IT" sz="1400" dirty="0" err="1">
+                <a:solidFill>
+                  <a:schemeClr val="bg2">
+                    <a:lumMod val="50000"/>
+                  </a:schemeClr>
+                </a:solidFill>
+              </a:rPr>
+              <a:t>infrastructure</a:t>
+            </a:r>
+            <a:r>
+              <a:rPr lang="it-IT" sz="1400" dirty="0">
+                <a:solidFill>
+                  <a:schemeClr val="bg2">
+                    <a:lumMod val="50000"/>
+                  </a:schemeClr>
+                </a:solidFill>
+              </a:rPr>
+              <a:t>, access controls, CI and monitoring.</a:t>
+            </a:r>
+            <a:endParaRPr sz="1400" b="0" dirty="0">
               <a:solidFill>
-                <a:srgbClr val="07133D"/>
+                <a:schemeClr val="bg2">
+                  <a:lumMod val="50000"/>
+                </a:schemeClr>
               </a:solidFill>
               <a:latin typeface="Aptos"/>
             </a:endParaRPr>
-          </a:p>
-          <a:p>
-            <a:r>
-              <a:rPr sz="1060" b="0" dirty="0">
-                <a:solidFill>
-                  <a:srgbClr val="07133D"/>
-                </a:solidFill>
-                <a:latin typeface="Aptos"/>
-              </a:rPr>
-              <a:t>Set up </a:t>
-            </a:r>
-            <a:r>
-              <a:rPr lang="it-IT" sz="1060" b="0" dirty="0" err="1">
-                <a:solidFill>
-                  <a:srgbClr val="07133D"/>
-                </a:solidFill>
-                <a:latin typeface="Aptos"/>
-              </a:rPr>
-              <a:t>infrastructure</a:t>
-            </a:r>
-            <a:r>
-              <a:rPr lang="it-IT" sz="1060" b="0" dirty="0">
-                <a:solidFill>
-                  <a:srgbClr val="07133D"/>
-                </a:solidFill>
-                <a:latin typeface="Aptos"/>
-              </a:rPr>
-              <a:t> (e.g. </a:t>
-            </a:r>
-            <a:r>
-              <a:rPr lang="it-IT" sz="1060" b="0" dirty="0" err="1">
-                <a:solidFill>
-                  <a:srgbClr val="07133D"/>
-                </a:solidFill>
-                <a:latin typeface="Aptos"/>
-              </a:rPr>
-              <a:t>using</a:t>
-            </a:r>
-            <a:r>
-              <a:rPr lang="it-IT" sz="1060" b="0" dirty="0">
-                <a:solidFill>
-                  <a:srgbClr val="07133D"/>
-                </a:solidFill>
-                <a:latin typeface="Aptos"/>
-              </a:rPr>
-              <a:t> </a:t>
-            </a:r>
-            <a:r>
-              <a:rPr sz="1060" b="0" dirty="0">
-                <a:solidFill>
-                  <a:srgbClr val="07133D"/>
-                </a:solidFill>
-                <a:latin typeface="Aptos"/>
-              </a:rPr>
-              <a:t>Terraform</a:t>
-            </a:r>
-            <a:r>
-              <a:rPr lang="it-IT" sz="1060" b="0" dirty="0">
-                <a:solidFill>
-                  <a:srgbClr val="07133D"/>
-                </a:solidFill>
-                <a:latin typeface="Aptos"/>
-              </a:rPr>
-              <a:t>)</a:t>
-            </a:r>
-            <a:r>
-              <a:rPr sz="1060" b="0" dirty="0">
-                <a:solidFill>
-                  <a:srgbClr val="07133D"/>
-                </a:solidFill>
-                <a:latin typeface="Aptos"/>
-              </a:rPr>
-              <a:t>, security, CI</a:t>
-            </a:r>
-            <a:r>
-              <a:rPr lang="it-IT" sz="1060" b="0" dirty="0">
-                <a:solidFill>
-                  <a:srgbClr val="07133D"/>
-                </a:solidFill>
-                <a:latin typeface="Aptos"/>
-              </a:rPr>
-              <a:t>, </a:t>
-            </a:r>
-            <a:r>
-              <a:rPr sz="1060" b="0" dirty="0">
-                <a:solidFill>
-                  <a:srgbClr val="07133D"/>
-                </a:solidFill>
-                <a:latin typeface="Aptos"/>
-              </a:rPr>
-              <a:t>telemetry.</a:t>
-            </a:r>
           </a:p>
         </p:txBody>
       </p:sp>
@@ -15491,8 +15350,8 @@
         </p:nvSpPr>
         <p:spPr>
           <a:xfrm>
-            <a:off x="8089239" y="3585442"/>
-            <a:ext cx="3349904" cy="320088"/>
+            <a:off x="8089237" y="3549806"/>
+            <a:ext cx="3349904" cy="430887"/>
           </a:xfrm>
           <a:prstGeom prst="rect">
             <a:avLst/>
@@ -15505,15 +15364,104 @@
           </a:bodyPr>
           <a:lstStyle/>
           <a:p>
-            <a:pPr algn="l"/>
-            <a:r>
-              <a:rPr sz="1040" b="0" dirty="0">
-                <a:solidFill>
-                  <a:srgbClr val="5B6475"/>
+            <a:r>
+              <a:rPr lang="it-IT" sz="1400" dirty="0">
+                <a:solidFill>
+                  <a:schemeClr val="bg2">
+                    <a:lumMod val="50000"/>
+                  </a:schemeClr>
                 </a:solidFill>
                 <a:latin typeface="Aptos"/>
               </a:rPr>
-              <a:t>Infrastructure ready for integration; critical assumptions reviewed.</a:t>
+              <a:t>Environment ready for </a:t>
+            </a:r>
+            <a:r>
+              <a:rPr lang="it-IT" sz="1400" dirty="0" err="1">
+                <a:solidFill>
+                  <a:schemeClr val="bg2">
+                    <a:lumMod val="50000"/>
+                  </a:schemeClr>
+                </a:solidFill>
+                <a:latin typeface="Aptos"/>
+              </a:rPr>
+              <a:t>integration</a:t>
+            </a:r>
+            <a:r>
+              <a:rPr lang="it-IT" sz="1400" dirty="0">
+                <a:solidFill>
+                  <a:schemeClr val="bg2">
+                    <a:lumMod val="50000"/>
+                  </a:schemeClr>
+                </a:solidFill>
+                <a:latin typeface="Aptos"/>
+              </a:rPr>
+              <a:t>; </a:t>
+            </a:r>
+            <a:r>
+              <a:rPr lang="it-IT" sz="1400" dirty="0" err="1">
+                <a:solidFill>
+                  <a:schemeClr val="bg2">
+                    <a:lumMod val="50000"/>
+                  </a:schemeClr>
+                </a:solidFill>
+                <a:latin typeface="Aptos"/>
+              </a:rPr>
+              <a:t>critical</a:t>
+            </a:r>
+            <a:r>
+              <a:rPr lang="it-IT" sz="1400" dirty="0">
+                <a:solidFill>
+                  <a:schemeClr val="bg2">
+                    <a:lumMod val="50000"/>
+                  </a:schemeClr>
+                </a:solidFill>
+                <a:latin typeface="Aptos"/>
+              </a:rPr>
+              <a:t> </a:t>
+            </a:r>
+            <a:r>
+              <a:rPr lang="it-IT" sz="1400" dirty="0" err="1">
+                <a:solidFill>
+                  <a:schemeClr val="bg2">
+                    <a:lumMod val="50000"/>
+                  </a:schemeClr>
+                </a:solidFill>
+                <a:latin typeface="Aptos"/>
+              </a:rPr>
+              <a:t>dependencies</a:t>
+            </a:r>
+            <a:r>
+              <a:rPr lang="it-IT" sz="1400" dirty="0">
+                <a:solidFill>
+                  <a:schemeClr val="bg2">
+                    <a:lumMod val="50000"/>
+                  </a:schemeClr>
+                </a:solidFill>
+                <a:latin typeface="Aptos"/>
+              </a:rPr>
+              <a:t> </a:t>
+            </a:r>
+            <a:r>
+              <a:rPr lang="it-IT" sz="1400" dirty="0" err="1">
+                <a:solidFill>
+                  <a:schemeClr val="bg2">
+                    <a:lumMod val="50000"/>
+                  </a:schemeClr>
+                </a:solidFill>
+                <a:latin typeface="Aptos"/>
+              </a:rPr>
+              <a:t>confirmed</a:t>
+            </a:r>
+            <a:r>
+              <a:rPr lang="it-IT" sz="1400" dirty="0">
+                <a:solidFill>
+                  <a:schemeClr val="bg2">
+                    <a:lumMod val="50000"/>
+                  </a:schemeClr>
+                </a:solidFill>
+                <a:latin typeface="Aptos"/>
+              </a:rPr>
+              <a:t>.</a:t>
             </a:r>
           </a:p>
         </p:txBody>
@@ -15634,8 +15582,8 @@
         </p:nvSpPr>
         <p:spPr>
           <a:xfrm>
-            <a:off x="758952" y="4621845"/>
-            <a:ext cx="1783994" cy="181588"/>
+            <a:off x="758952" y="4604917"/>
+            <a:ext cx="1783994" cy="215444"/>
           </a:xfrm>
           <a:prstGeom prst="rect">
             <a:avLst/>
@@ -15650,7 +15598,7 @@
           <a:p>
             <a:pPr algn="l"/>
             <a:r>
-              <a:rPr sz="1180" b="1" dirty="0">
+              <a:rPr sz="1400" b="1" dirty="0">
                 <a:solidFill>
                   <a:srgbClr val="07133D"/>
                 </a:solidFill>
@@ -15727,8 +15675,8 @@
         </p:nvSpPr>
         <p:spPr>
           <a:xfrm>
-            <a:off x="2734968" y="4525724"/>
-            <a:ext cx="5098237" cy="326243"/>
+            <a:off x="2771546" y="4374615"/>
+            <a:ext cx="5098237" cy="646331"/>
           </a:xfrm>
           <a:prstGeom prst="rect">
             <a:avLst/>
@@ -15741,16 +15689,183 @@
           </a:bodyPr>
           <a:lstStyle/>
           <a:p>
-            <a:pPr algn="l"/>
-            <a:r>
-              <a:rPr sz="1060" b="0" dirty="0">
-                <a:solidFill>
-                  <a:srgbClr val="07133D"/>
-                </a:solidFill>
-                <a:latin typeface="Aptos"/>
-              </a:rPr>
-              <a:t>Integrate the customer journey, reconciliation, notifications and manual review. Start failure testing.</a:t>
-            </a:r>
+            <a:r>
+              <a:rPr lang="it-IT" sz="1400" dirty="0">
+                <a:solidFill>
+                  <a:schemeClr val="bg2">
+                    <a:lumMod val="50000"/>
+                  </a:schemeClr>
+                </a:solidFill>
+              </a:rPr>
+              <a:t>Integrate the end-to-end </a:t>
+            </a:r>
+            <a:r>
+              <a:rPr lang="it-IT" sz="1400" dirty="0" err="1">
+                <a:solidFill>
+                  <a:schemeClr val="bg2">
+                    <a:lumMod val="50000"/>
+                  </a:schemeClr>
+                </a:solidFill>
+              </a:rPr>
+              <a:t>journey</a:t>
+            </a:r>
+            <a:r>
+              <a:rPr lang="it-IT" sz="1400" dirty="0">
+                <a:solidFill>
+                  <a:schemeClr val="bg2">
+                    <a:lumMod val="50000"/>
+                  </a:schemeClr>
+                </a:solidFill>
+              </a:rPr>
+              <a:t> with AI </a:t>
+            </a:r>
+            <a:r>
+              <a:rPr lang="it-IT" sz="1400" dirty="0" err="1">
+                <a:solidFill>
+                  <a:schemeClr val="bg2">
+                    <a:lumMod val="50000"/>
+                  </a:schemeClr>
+                </a:solidFill>
+              </a:rPr>
+              <a:t>Engineers</a:t>
+            </a:r>
+            <a:r>
+              <a:rPr lang="it-IT" sz="1400" dirty="0">
+                <a:solidFill>
+                  <a:schemeClr val="bg2">
+                    <a:lumMod val="50000"/>
+                  </a:schemeClr>
+                </a:solidFill>
+              </a:rPr>
+              <a:t>, </a:t>
+            </a:r>
+            <a:r>
+              <a:rPr lang="it-IT" sz="1400" dirty="0" err="1">
+                <a:solidFill>
+                  <a:schemeClr val="bg2">
+                    <a:lumMod val="50000"/>
+                  </a:schemeClr>
+                </a:solidFill>
+              </a:rPr>
+              <a:t>including</a:t>
+            </a:r>
+            <a:r>
+              <a:rPr lang="it-IT" sz="1400" dirty="0">
+                <a:solidFill>
+                  <a:schemeClr val="bg2">
+                    <a:lumMod val="50000"/>
+                  </a:schemeClr>
+                </a:solidFill>
+              </a:rPr>
+              <a:t> </a:t>
+            </a:r>
+            <a:r>
+              <a:rPr lang="it-IT" sz="1400" dirty="0" err="1">
+                <a:solidFill>
+                  <a:schemeClr val="bg2">
+                    <a:lumMod val="50000"/>
+                  </a:schemeClr>
+                </a:solidFill>
+              </a:rPr>
+              <a:t>reconciliation</a:t>
+            </a:r>
+            <a:r>
+              <a:rPr lang="it-IT" sz="1400" dirty="0">
+                <a:solidFill>
+                  <a:schemeClr val="bg2">
+                    <a:lumMod val="50000"/>
+                  </a:schemeClr>
+                </a:solidFill>
+              </a:rPr>
+              <a:t>, </a:t>
+            </a:r>
+            <a:r>
+              <a:rPr lang="it-IT" sz="1400" dirty="0" err="1">
+                <a:solidFill>
+                  <a:schemeClr val="bg2">
+                    <a:lumMod val="50000"/>
+                  </a:schemeClr>
+                </a:solidFill>
+              </a:rPr>
+              <a:t>notifications</a:t>
+            </a:r>
+            <a:r>
+              <a:rPr lang="it-IT" sz="1400" dirty="0">
+                <a:solidFill>
+                  <a:schemeClr val="bg2">
+                    <a:lumMod val="50000"/>
+                  </a:schemeClr>
+                </a:solidFill>
+              </a:rPr>
+              <a:t> and </a:t>
+            </a:r>
+            <a:r>
+              <a:rPr lang="it-IT" sz="1400" dirty="0" err="1">
+                <a:solidFill>
+                  <a:schemeClr val="bg2">
+                    <a:lumMod val="50000"/>
+                  </a:schemeClr>
+                </a:solidFill>
+              </a:rPr>
+              <a:t>manual</a:t>
+            </a:r>
+            <a:r>
+              <a:rPr lang="it-IT" sz="1400" dirty="0">
+                <a:solidFill>
+                  <a:schemeClr val="bg2">
+                    <a:lumMod val="50000"/>
+                  </a:schemeClr>
+                </a:solidFill>
+              </a:rPr>
+              <a:t>-review </a:t>
+            </a:r>
+            <a:r>
+              <a:rPr lang="it-IT" sz="1400" dirty="0" err="1">
+                <a:solidFill>
+                  <a:schemeClr val="bg2">
+                    <a:lumMod val="50000"/>
+                  </a:schemeClr>
+                </a:solidFill>
+              </a:rPr>
+              <a:t>handoff</a:t>
+            </a:r>
+            <a:r>
+              <a:rPr lang="it-IT" sz="1400" dirty="0">
+                <a:solidFill>
+                  <a:schemeClr val="bg2">
+                    <a:lumMod val="50000"/>
+                  </a:schemeClr>
+                </a:solidFill>
+              </a:rPr>
+              <a:t>. Start </a:t>
+            </a:r>
+            <a:r>
+              <a:rPr lang="it-IT" sz="1400" dirty="0" err="1">
+                <a:solidFill>
+                  <a:schemeClr val="bg2">
+                    <a:lumMod val="50000"/>
+                  </a:schemeClr>
+                </a:solidFill>
+              </a:rPr>
+              <a:t>failure</a:t>
+            </a:r>
+            <a:r>
+              <a:rPr lang="it-IT" sz="1400" dirty="0">
+                <a:solidFill>
+                  <a:schemeClr val="bg2">
+                    <a:lumMod val="50000"/>
+                  </a:schemeClr>
+                </a:solidFill>
+              </a:rPr>
+              <a:t> testing.</a:t>
+            </a:r>
+            <a:endParaRPr sz="1400" dirty="0">
+              <a:solidFill>
+                <a:schemeClr val="bg2">
+                  <a:lumMod val="50000"/>
+                </a:schemeClr>
+              </a:solidFill>
+            </a:endParaRPr>
           </a:p>
         </p:txBody>
       </p:sp>
@@ -15820,8 +15935,8 @@
         </p:nvSpPr>
         <p:spPr>
           <a:xfrm>
-            <a:off x="8089237" y="4507593"/>
-            <a:ext cx="3349904" cy="320088"/>
+            <a:off x="8089237" y="4371046"/>
+            <a:ext cx="3349904" cy="646331"/>
           </a:xfrm>
           <a:prstGeom prst="rect">
             <a:avLst/>
@@ -15834,16 +15949,116 @@
           </a:bodyPr>
           <a:lstStyle/>
           <a:p>
-            <a:pPr algn="l"/>
-            <a:r>
-              <a:rPr sz="1040" b="0" dirty="0">
+            <a:r>
+              <a:rPr lang="it-IT" sz="1400" dirty="0">
                 <a:solidFill>
                   <a:srgbClr val="5B6475"/>
                 </a:solidFill>
-                <a:latin typeface="Aptos"/>
-              </a:rPr>
-              <a:t>Customers can resume their journey; uncertain outcomes reach review.</a:t>
-            </a:r>
+              </a:rPr>
+              <a:t>Sandbox </a:t>
+            </a:r>
+            <a:r>
+              <a:rPr lang="it-IT" sz="1400" dirty="0" err="1">
+                <a:solidFill>
+                  <a:srgbClr val="5B6475"/>
+                </a:solidFill>
+              </a:rPr>
+              <a:t>journey</a:t>
+            </a:r>
+            <a:r>
+              <a:rPr lang="it-IT" sz="1400" dirty="0">
+                <a:solidFill>
+                  <a:srgbClr val="5B6475"/>
+                </a:solidFill>
+              </a:rPr>
+              <a:t> </a:t>
+            </a:r>
+            <a:r>
+              <a:rPr lang="it-IT" sz="1400" dirty="0" err="1">
+                <a:solidFill>
+                  <a:srgbClr val="5B6475"/>
+                </a:solidFill>
+              </a:rPr>
+              <a:t>demonstrated</a:t>
+            </a:r>
+            <a:r>
+              <a:rPr lang="it-IT" sz="1400" dirty="0">
+                <a:solidFill>
+                  <a:srgbClr val="5B6475"/>
+                </a:solidFill>
+              </a:rPr>
+              <a:t>, </a:t>
+            </a:r>
+            <a:r>
+              <a:rPr lang="it-IT" sz="1400" dirty="0" err="1">
+                <a:solidFill>
+                  <a:srgbClr val="5B6475"/>
+                </a:solidFill>
+              </a:rPr>
+              <a:t>including</a:t>
+            </a:r>
+            <a:r>
+              <a:rPr lang="it-IT" sz="1400" dirty="0">
+                <a:solidFill>
+                  <a:srgbClr val="5B6475"/>
+                </a:solidFill>
+              </a:rPr>
+              <a:t> </a:t>
+            </a:r>
+            <a:r>
+              <a:rPr lang="it-IT" sz="1400" dirty="0" err="1">
+                <a:solidFill>
+                  <a:srgbClr val="5B6475"/>
+                </a:solidFill>
+              </a:rPr>
+              <a:t>resume</a:t>
+            </a:r>
+            <a:r>
+              <a:rPr lang="it-IT" sz="1400" dirty="0">
+                <a:solidFill>
+                  <a:srgbClr val="5B6475"/>
+                </a:solidFill>
+              </a:rPr>
+              <a:t> and safe </a:t>
+            </a:r>
+            <a:r>
+              <a:rPr lang="it-IT" sz="1400" dirty="0" err="1">
+                <a:solidFill>
+                  <a:srgbClr val="5B6475"/>
+                </a:solidFill>
+              </a:rPr>
+              <a:t>handling</a:t>
+            </a:r>
+            <a:r>
+              <a:rPr lang="it-IT" sz="1400" dirty="0">
+                <a:solidFill>
+                  <a:srgbClr val="5B6475"/>
+                </a:solidFill>
+              </a:rPr>
+              <a:t> of </a:t>
+            </a:r>
+            <a:r>
+              <a:rPr lang="it-IT" sz="1400" dirty="0" err="1">
+                <a:solidFill>
+                  <a:srgbClr val="5B6475"/>
+                </a:solidFill>
+              </a:rPr>
+              <a:t>retries</a:t>
+            </a:r>
+            <a:r>
+              <a:rPr lang="it-IT" sz="1400" dirty="0">
+                <a:solidFill>
+                  <a:srgbClr val="5B6475"/>
+                </a:solidFill>
+              </a:rPr>
+              <a:t> and duplicate events.</a:t>
+            </a:r>
+            <a:endParaRPr sz="1400" b="0" dirty="0">
+              <a:solidFill>
+                <a:srgbClr val="5B6475"/>
+              </a:solidFill>
+              <a:latin typeface="Aptos"/>
+            </a:endParaRPr>
           </a:p>
         </p:txBody>
       </p:sp>
@@ -15963,8 +16178,8 @@
         </p:nvSpPr>
         <p:spPr>
           <a:xfrm>
-            <a:off x="752857" y="5552279"/>
-            <a:ext cx="1783994" cy="181588"/>
+            <a:off x="752857" y="5502321"/>
+            <a:ext cx="1783994" cy="215444"/>
           </a:xfrm>
           <a:prstGeom prst="rect">
             <a:avLst/>
@@ -15979,7 +16194,7 @@
           <a:p>
             <a:pPr algn="l"/>
             <a:r>
-              <a:rPr sz="1180" b="1" dirty="0">
+              <a:rPr sz="1400" b="1" dirty="0">
                 <a:solidFill>
                   <a:srgbClr val="07133D"/>
                 </a:solidFill>
@@ -16056,8 +16271,8 @@
         </p:nvSpPr>
         <p:spPr>
           <a:xfrm>
-            <a:off x="2734968" y="5559956"/>
-            <a:ext cx="5098237" cy="163122"/>
+            <a:off x="2734968" y="5384467"/>
+            <a:ext cx="5098237" cy="646331"/>
           </a:xfrm>
           <a:prstGeom prst="rect">
             <a:avLst/>
@@ -16070,16 +16285,143 @@
           </a:bodyPr>
           <a:lstStyle/>
           <a:p>
-            <a:pPr algn="l"/>
-            <a:r>
-              <a:rPr sz="1060" b="0" dirty="0">
-                <a:solidFill>
-                  <a:srgbClr val="07133D"/>
-                </a:solidFill>
-                <a:latin typeface="Aptos"/>
-              </a:rPr>
-              <a:t>Test load, recovery and deployment compatibility. </a:t>
-            </a:r>
+            <a:r>
+              <a:rPr lang="it-IT" sz="1400" dirty="0">
+                <a:solidFill>
+                  <a:schemeClr val="bg2">
+                    <a:lumMod val="50000"/>
+                  </a:schemeClr>
+                </a:solidFill>
+              </a:rPr>
+              <a:t>Validate load, recovery targets and deployment </a:t>
+            </a:r>
+            <a:r>
+              <a:rPr lang="it-IT" sz="1400" dirty="0" err="1">
+                <a:solidFill>
+                  <a:schemeClr val="bg2">
+                    <a:lumMod val="50000"/>
+                  </a:schemeClr>
+                </a:solidFill>
+              </a:rPr>
+              <a:t>compatibility</a:t>
+            </a:r>
+            <a:r>
+              <a:rPr lang="it-IT" sz="1400" dirty="0">
+                <a:solidFill>
+                  <a:schemeClr val="bg2">
+                    <a:lumMod val="50000"/>
+                  </a:schemeClr>
+                </a:solidFill>
+              </a:rPr>
+              <a:t>. Fix </a:t>
+            </a:r>
+            <a:r>
+              <a:rPr lang="it-IT" sz="1400" dirty="0" err="1">
+                <a:solidFill>
+                  <a:schemeClr val="bg2">
+                    <a:lumMod val="50000"/>
+                  </a:schemeClr>
+                </a:solidFill>
+              </a:rPr>
+              <a:t>issues</a:t>
+            </a:r>
+            <a:r>
+              <a:rPr lang="it-IT" sz="1400" dirty="0">
+                <a:solidFill>
+                  <a:schemeClr val="bg2">
+                    <a:lumMod val="50000"/>
+                  </a:schemeClr>
+                </a:solidFill>
+              </a:rPr>
+              <a:t> and </a:t>
+            </a:r>
+            <a:r>
+              <a:rPr lang="it-IT" sz="1400" dirty="0" err="1">
+                <a:solidFill>
+                  <a:schemeClr val="bg2">
+                    <a:lumMod val="50000"/>
+                  </a:schemeClr>
+                </a:solidFill>
+              </a:rPr>
+              <a:t>repeated</a:t>
+            </a:r>
+            <a:r>
+              <a:rPr lang="it-IT" sz="1400" dirty="0">
+                <a:solidFill>
+                  <a:schemeClr val="bg2">
+                    <a:lumMod val="50000"/>
+                  </a:schemeClr>
+                </a:solidFill>
+              </a:rPr>
+              <a:t> checks. </a:t>
+            </a:r>
+            <a:r>
+              <a:rPr lang="it-IT" sz="1400" dirty="0" err="1">
+                <a:solidFill>
+                  <a:schemeClr val="bg2">
+                    <a:lumMod val="50000"/>
+                  </a:schemeClr>
+                </a:solidFill>
+              </a:rPr>
+              <a:t>Finalize</a:t>
+            </a:r>
+            <a:r>
+              <a:rPr lang="it-IT" sz="1400" dirty="0">
+                <a:solidFill>
+                  <a:schemeClr val="bg2">
+                    <a:lumMod val="50000"/>
+                  </a:schemeClr>
+                </a:solidFill>
+              </a:rPr>
+              <a:t> test </a:t>
+            </a:r>
+            <a:r>
+              <a:rPr lang="it-IT" sz="1400" dirty="0" err="1">
+                <a:solidFill>
+                  <a:schemeClr val="bg2">
+                    <a:lumMod val="50000"/>
+                  </a:schemeClr>
+                </a:solidFill>
+              </a:rPr>
+              <a:t>runbooks</a:t>
+            </a:r>
+            <a:r>
+              <a:rPr lang="it-IT" sz="1400" dirty="0">
+                <a:solidFill>
+                  <a:schemeClr val="bg2">
+                    <a:lumMod val="50000"/>
+                  </a:schemeClr>
+                </a:solidFill>
+              </a:rPr>
+              <a:t> and </a:t>
+            </a:r>
+            <a:r>
+              <a:rPr lang="it-IT" sz="1400" dirty="0" err="1">
+                <a:solidFill>
+                  <a:schemeClr val="bg2">
+                    <a:lumMod val="50000"/>
+                  </a:schemeClr>
+                </a:solidFill>
+              </a:rPr>
+              <a:t>incident</a:t>
+            </a:r>
+            <a:r>
+              <a:rPr lang="it-IT" sz="1400" dirty="0">
+                <a:solidFill>
+                  <a:schemeClr val="bg2">
+                    <a:lumMod val="50000"/>
+                  </a:schemeClr>
+                </a:solidFill>
+              </a:rPr>
+              <a:t> ownership. </a:t>
+            </a:r>
+            <a:endParaRPr sz="1400" dirty="0">
+              <a:solidFill>
+                <a:schemeClr val="bg2">
+                  <a:lumMod val="50000"/>
+                </a:schemeClr>
+              </a:solidFill>
+            </a:endParaRPr>
           </a:p>
         </p:txBody>
       </p:sp>
@@ -16149,8 +16491,8 @@
         </p:nvSpPr>
         <p:spPr>
           <a:xfrm>
-            <a:off x="8089237" y="5431536"/>
-            <a:ext cx="3349904" cy="320088"/>
+            <a:off x="8089237" y="5274768"/>
+            <a:ext cx="3349904" cy="646331"/>
           </a:xfrm>
           <a:prstGeom prst="rect">
             <a:avLst/>
@@ -16163,16 +16505,108 @@
           </a:bodyPr>
           <a:lstStyle/>
           <a:p>
-            <a:pPr algn="l"/>
-            <a:r>
-              <a:rPr sz="1040" b="0" dirty="0">
+            <a:r>
+              <a:rPr lang="it-IT" sz="1400" dirty="0" err="1">
                 <a:solidFill>
                   <a:srgbClr val="5B6475"/>
                 </a:solidFill>
-                <a:latin typeface="Aptos"/>
-              </a:rPr>
-              <a:t>Evidence to assess launch readiness, with operational ownership agreed.</a:t>
-            </a:r>
+              </a:rPr>
+              <a:t>Launch</a:t>
+            </a:r>
+            <a:r>
+              <a:rPr lang="it-IT" sz="1400" dirty="0">
+                <a:solidFill>
+                  <a:srgbClr val="5B6475"/>
+                </a:solidFill>
+              </a:rPr>
+              <a:t> </a:t>
+            </a:r>
+            <a:r>
+              <a:rPr lang="it-IT" sz="1400" dirty="0" err="1">
+                <a:solidFill>
+                  <a:srgbClr val="5B6475"/>
+                </a:solidFill>
+              </a:rPr>
+              <a:t>approved</a:t>
+            </a:r>
+            <a:r>
+              <a:rPr lang="it-IT" sz="1400" dirty="0">
+                <a:solidFill>
+                  <a:srgbClr val="5B6475"/>
+                </a:solidFill>
+              </a:rPr>
+              <a:t>, </a:t>
+            </a:r>
+            <a:r>
+              <a:rPr lang="it-IT" sz="1400" dirty="0" err="1">
+                <a:solidFill>
+                  <a:srgbClr val="5B6475"/>
+                </a:solidFill>
+              </a:rPr>
+              <a:t>residency</a:t>
+            </a:r>
+            <a:r>
+              <a:rPr lang="it-IT" sz="1400" dirty="0">
+                <a:solidFill>
+                  <a:srgbClr val="5B6475"/>
+                </a:solidFill>
+              </a:rPr>
+              <a:t> and recovery checks pass. Solution </a:t>
+            </a:r>
+            <a:r>
+              <a:rPr lang="it-IT" sz="1400" dirty="0" err="1">
+                <a:solidFill>
+                  <a:srgbClr val="5B6475"/>
+                </a:solidFill>
+              </a:rPr>
+              <a:t>monitored</a:t>
+            </a:r>
+            <a:r>
+              <a:rPr lang="it-IT" sz="1400" dirty="0">
+                <a:solidFill>
+                  <a:srgbClr val="5B6475"/>
+                </a:solidFill>
+              </a:rPr>
+              <a:t>  with </a:t>
+            </a:r>
+            <a:r>
+              <a:rPr lang="it-IT" sz="1400" dirty="0" err="1">
+                <a:solidFill>
+                  <a:srgbClr val="5B6475"/>
+                </a:solidFill>
+              </a:rPr>
+              <a:t>rollback</a:t>
+            </a:r>
+            <a:r>
+              <a:rPr lang="it-IT" sz="1400" dirty="0">
+                <a:solidFill>
+                  <a:srgbClr val="5B6475"/>
+                </a:solidFill>
+              </a:rPr>
+              <a:t> </a:t>
+            </a:r>
+            <a:r>
+              <a:rPr lang="it-IT" sz="1400" dirty="0" err="1">
+                <a:solidFill>
+                  <a:srgbClr val="5B6475"/>
+                </a:solidFill>
+              </a:rPr>
+              <a:t>procedures</a:t>
+            </a:r>
+            <a:r>
+              <a:rPr lang="it-IT" sz="1400" dirty="0">
+                <a:solidFill>
+                  <a:srgbClr val="5B6475"/>
+                </a:solidFill>
+              </a:rPr>
+              <a:t> ready.</a:t>
+            </a:r>
+            <a:endParaRPr sz="1400" b="0" dirty="0">
+              <a:solidFill>
+                <a:srgbClr val="5B6475"/>
+              </a:solidFill>
+              <a:latin typeface="Aptos"/>
+            </a:endParaRPr>
           </a:p>
         </p:txBody>
       </p:sp>
@@ -16266,6 +16700,141 @@
           </a:prstGeom>
         </p:spPr>
       </p:pic>
+      <p:sp>
+        <p:nvSpPr>
+          <p:cNvPr id="8" name="CasellaDiTesto 7">
+            <a:extLst>
+              <a:ext uri="{FF2B5EF4-FFF2-40B4-BE49-F238E27FC236}">
+                <a16:creationId xmlns:a16="http://schemas.microsoft.com/office/drawing/2014/main" id="{6DDEE821-A084-13BC-A8B4-4DAB7BBF2EE3}"/>
+              </a:ext>
+            </a:extLst>
+          </p:cNvPr>
+          <p:cNvSpPr txBox="1"/>
+          <p:nvPr/>
+        </p:nvSpPr>
+        <p:spPr>
+          <a:xfrm>
+            <a:off x="395073" y="1151290"/>
+            <a:ext cx="10484406" cy="307777"/>
+          </a:xfrm>
+          <a:prstGeom prst="rect">
+            <a:avLst/>
+          </a:prstGeom>
+          <a:noFill/>
+        </p:spPr>
+        <p:txBody>
+          <a:bodyPr wrap="square">
+            <a:spAutoFit/>
+          </a:bodyPr>
+          <a:lstStyle/>
+          <a:p>
+            <a:pPr marL="0" marR="0">
+              <a:buNone/>
+            </a:pPr>
+            <a:r>
+              <a:rPr lang="it-IT" sz="1400" i="1" dirty="0"/>
+              <a:t>* </a:t>
+            </a:r>
+            <a:r>
+              <a:rPr lang="it-IT" sz="1400" i="1" dirty="0">
+                <a:solidFill>
+                  <a:schemeClr val="tx1"/>
+                </a:solidFill>
+                <a:effectLst/>
+                <a:latin typeface="+mn-lt"/>
+              </a:rPr>
+              <a:t>Indicative timeline for </a:t>
+            </a:r>
+            <a:r>
+              <a:rPr lang="it-IT" sz="1400" i="1" dirty="0" err="1">
+                <a:solidFill>
+                  <a:schemeClr val="tx1"/>
+                </a:solidFill>
+                <a:effectLst/>
+                <a:latin typeface="+mn-lt"/>
+              </a:rPr>
+              <a:t>two</a:t>
+            </a:r>
+            <a:r>
+              <a:rPr lang="it-IT" sz="1400" i="1" dirty="0">
+                <a:solidFill>
+                  <a:schemeClr val="tx1"/>
+                </a:solidFill>
+                <a:effectLst/>
+                <a:latin typeface="+mn-lt"/>
+              </a:rPr>
+              <a:t> Platform </a:t>
+            </a:r>
+            <a:r>
+              <a:rPr lang="it-IT" sz="1400" i="1" dirty="0" err="1">
+                <a:solidFill>
+                  <a:schemeClr val="tx1"/>
+                </a:solidFill>
+                <a:effectLst/>
+                <a:latin typeface="+mn-lt"/>
+              </a:rPr>
+              <a:t>Engineers</a:t>
+            </a:r>
+            <a:r>
+              <a:rPr lang="it-IT" sz="1400" i="1" dirty="0">
+                <a:solidFill>
+                  <a:schemeClr val="tx1"/>
+                </a:solidFill>
+                <a:effectLst/>
+                <a:latin typeface="+mn-lt"/>
+              </a:rPr>
+              <a:t>, </a:t>
+            </a:r>
+            <a:r>
+              <a:rPr lang="it-IT" sz="1400" i="1" dirty="0" err="1">
+                <a:solidFill>
+                  <a:schemeClr val="tx1"/>
+                </a:solidFill>
+                <a:effectLst/>
+                <a:latin typeface="+mn-lt"/>
+              </a:rPr>
+              <a:t>parallel</a:t>
+            </a:r>
+            <a:r>
+              <a:rPr lang="it-IT" sz="1400" i="1" dirty="0">
+                <a:solidFill>
+                  <a:schemeClr val="tx1"/>
+                </a:solidFill>
+                <a:effectLst/>
+                <a:latin typeface="+mn-lt"/>
+              </a:rPr>
+              <a:t> AI-team delivery and provider sandboxes </a:t>
+            </a:r>
+            <a:r>
+              <a:rPr lang="it-IT" sz="1400" i="1" dirty="0" err="1">
+                <a:solidFill>
+                  <a:schemeClr val="tx1"/>
+                </a:solidFill>
+                <a:effectLst/>
+                <a:latin typeface="+mn-lt"/>
+              </a:rPr>
+              <a:t>available</a:t>
+            </a:r>
+            <a:r>
+              <a:rPr lang="it-IT" sz="1400" i="1" dirty="0">
+                <a:solidFill>
+                  <a:schemeClr val="tx1"/>
+                </a:solidFill>
+                <a:effectLst/>
+                <a:latin typeface="+mn-lt"/>
+              </a:rPr>
+              <a:t>.</a:t>
+            </a:r>
+            <a:endParaRPr lang="it-IT" sz="700" i="1" dirty="0">
+              <a:solidFill>
+                <a:srgbClr val="149902"/>
+              </a:solidFill>
+              <a:effectLst/>
+              <a:latin typeface="Menlo" panose="020B0609030804020204" pitchFamily="49" charset="0"/>
+            </a:endParaRPr>
+          </a:p>
+        </p:txBody>
+      </p:sp>
     </p:spTree>
   </p:cSld>
   <p:clrMapOvr>
@@ -16864,7 +17433,7 @@
         </p:nvSpPr>
         <p:spPr>
           <a:xfrm>
-            <a:off x="2814763" y="3745793"/>
+            <a:off x="2814763" y="3569820"/>
             <a:ext cx="3856383" cy="561152"/>
           </a:xfrm>
           <a:prstGeom prst="rect">
@@ -16875,12 +17444,12 @@
         </p:spPr>
         <p:txBody>
           <a:bodyPr wrap="square" lIns="254" tIns="254" rIns="254" bIns="254" rtlCol="0" anchor="t">
-            <a:normAutofit/>
+            <a:noAutofit/>
           </a:bodyPr>
           <a:lstStyle/>
           <a:p>
             <a:r>
-              <a:rPr lang="en-US" sz="1020" dirty="0">
+              <a:rPr lang="en-US" sz="1200" dirty="0">
                 <a:solidFill>
                   <a:srgbClr val="D8E1EC"/>
                 </a:solidFill>
@@ -16893,7 +17462,7 @@
           </a:p>
           <a:p>
             <a:r>
-              <a:rPr lang="en-US" sz="1020" dirty="0">
+              <a:rPr lang="en-US" sz="1200" dirty="0">
                 <a:solidFill>
                   <a:srgbClr val="D8E1EC"/>
                 </a:solidFill>
@@ -16904,7 +17473,7 @@
               <a:t> “Treat </a:t>
             </a:r>
             <a:r>
-              <a:rPr lang="en-US" sz="1020" dirty="0" err="1">
+              <a:rPr lang="en-US" sz="1200" dirty="0" err="1">
                 <a:solidFill>
                   <a:srgbClr val="D8E1EC"/>
                 </a:solidFill>
@@ -16915,7 +17484,7 @@
               <a:t>assignment.md</a:t>
             </a:r>
             <a:r>
-              <a:rPr lang="en-US" sz="1020" dirty="0">
+              <a:rPr lang="en-US" sz="1200" dirty="0">
                 <a:solidFill>
                   <a:srgbClr val="D8E1EC"/>
                 </a:solidFill>
@@ -16925,7 +17494,7 @@
               </a:rPr>
               <a:t> as the source of truth”, “Prefer the simplest credible solution for a two-engineer team”, “Ask for decisions”</a:t>
             </a:r>
-            <a:endParaRPr lang="en-US" sz="1020" dirty="0"/>
+            <a:endParaRPr lang="en-US" sz="1200" dirty="0"/>
           </a:p>
         </p:txBody>
       </p:sp>
@@ -17073,7 +17642,7 @@
         </p:nvSpPr>
         <p:spPr>
           <a:xfrm>
-            <a:off x="2814763" y="4655318"/>
+            <a:off x="2814763" y="4608458"/>
             <a:ext cx="2514600" cy="201168"/>
           </a:xfrm>
           <a:prstGeom prst="rect">
@@ -17084,7 +17653,7 @@
         </p:spPr>
         <p:txBody>
           <a:bodyPr wrap="square" lIns="254" tIns="254" rIns="254" bIns="254" rtlCol="0" anchor="t">
-            <a:normAutofit/>
+            <a:noAutofit/>
           </a:bodyPr>
           <a:lstStyle/>
           <a:p>
@@ -17092,7 +17661,7 @@
               <a:buNone/>
             </a:pPr>
             <a:r>
-              <a:rPr lang="en-US" sz="1020" dirty="0">
+              <a:rPr lang="en-US" sz="1200" dirty="0">
                 <a:solidFill>
                   <a:srgbClr val="D8E1EC"/>
                 </a:solidFill>
@@ -17102,7 +17671,7 @@
               </a:rPr>
               <a:t>Authoritative requirements; unchanged</a:t>
             </a:r>
-            <a:endParaRPr lang="en-US" sz="1020" dirty="0"/>
+            <a:endParaRPr lang="en-US" sz="1200" dirty="0"/>
           </a:p>
         </p:txBody>
       </p:sp>
@@ -17261,7 +17830,7 @@
         </p:spPr>
         <p:txBody>
           <a:bodyPr wrap="square" lIns="254" tIns="254" rIns="254" bIns="254" rtlCol="0" anchor="t">
-            <a:normAutofit/>
+            <a:noAutofit/>
           </a:bodyPr>
           <a:lstStyle/>
           <a:p>
@@ -17269,7 +17838,7 @@
               <a:buNone/>
             </a:pPr>
             <a:r>
-              <a:rPr lang="en-US" sz="1020" dirty="0">
+              <a:rPr lang="en-US" sz="1200" dirty="0">
                 <a:solidFill>
                   <a:srgbClr val="D8E1EC"/>
                 </a:solidFill>
@@ -17279,7 +17848,7 @@
               </a:rPr>
               <a:t>Proposal, assumptions, decisions and validation gaps</a:t>
             </a:r>
-            <a:endParaRPr lang="en-US" sz="1020" dirty="0"/>
+            <a:endParaRPr lang="en-US" sz="1200" dirty="0"/>
           </a:p>
         </p:txBody>
       </p:sp>
@@ -18434,7 +19003,7 @@
         <p:spPr>
           <a:xfrm>
             <a:off x="548640" y="1937261"/>
-            <a:ext cx="5554980" cy="2057400"/>
+            <a:ext cx="5554980" cy="2346378"/>
           </a:xfrm>
           <a:prstGeom prst="rect">
             <a:avLst/>
@@ -18474,7 +19043,7 @@
         <p:spPr>
           <a:xfrm>
             <a:off x="6103620" y="1937261"/>
-            <a:ext cx="5554980" cy="2057400"/>
+            <a:ext cx="5554980" cy="2346378"/>
           </a:xfrm>
           <a:prstGeom prst="rect">
             <a:avLst/>
@@ -19325,7 +19894,7 @@
         </p:nvSpPr>
         <p:spPr>
           <a:xfrm>
-            <a:off x="6533388" y="3363725"/>
+            <a:off x="6533388" y="3607360"/>
             <a:ext cx="4869180" cy="384048"/>
           </a:xfrm>
           <a:prstGeom prst="rect">
@@ -19340,9 +19909,6 @@
           </a:bodyPr>
           <a:lstStyle/>
           <a:p>
-            <a:pPr marL="0" indent="0">
-              <a:buNone/>
-            </a:pPr>
             <a:r>
               <a:rPr lang="en-US" sz="1400" b="1" dirty="0">
                 <a:solidFill>
@@ -19363,8 +19929,10 @@
                 <a:ea typeface="Aptos" pitchFamily="34" charset="-122"/>
                 <a:cs typeface="Aptos" pitchFamily="34" charset="-120"/>
               </a:rPr>
-              <a:t> Single-AZ failure scope, provider guarantees, and regional model availability at launch.</a:t>
-            </a:r>
+              <a:t> Single-AZ failure scope, provider guarantees, and regional model availability at launch; Customer notification channel and provider (email/SMS/push) to be agreed.</a:t>
+            </a:r>
+          </a:p>
+          <a:p>
             <a:endParaRPr lang="en-US" sz="1400" dirty="0">
               <a:latin typeface="Aptos" panose="020B0004020202020204" pitchFamily="34" charset="0"/>
             </a:endParaRPr>
@@ -19962,3019 +20530,6 @@
 
 <file path=ppt/slides/slide23.xml><?xml version="1.0" encoding="utf-8"?>
 <p:sld xmlns:a="http://schemas.openxmlformats.org/drawingml/2006/main" xmlns:r="http://schemas.openxmlformats.org/officeDocument/2006/relationships" xmlns:p="http://schemas.openxmlformats.org/presentationml/2006/main" show="0">
-  <p:cSld name="Slide 12">
-    <p:bg>
-      <p:bgPr>
-        <a:solidFill>
-          <a:srgbClr val="FFFFFF"/>
-        </a:solidFill>
-        <a:effectLst/>
-      </p:bgPr>
-    </p:bg>
-    <p:spTree>
-      <p:nvGrpSpPr>
-        <p:cNvPr id="1" name=""/>
-        <p:cNvGrpSpPr/>
-        <p:nvPr/>
-      </p:nvGrpSpPr>
-      <p:grpSpPr>
-        <a:xfrm>
-          <a:off x="0" y="0"/>
-          <a:ext cx="0" cy="0"/>
-          <a:chOff x="0" y="0"/>
-          <a:chExt cx="0" cy="0"/>
-        </a:xfrm>
-      </p:grpSpPr>
-      <p:sp>
-        <p:nvSpPr>
-          <p:cNvPr id="2" name="Text 0"/>
-          <p:cNvSpPr/>
-          <p:nvPr/>
-        </p:nvSpPr>
-        <p:spPr>
-          <a:xfrm>
-            <a:off x="502920" y="219456"/>
-            <a:ext cx="2194560" cy="201168"/>
-          </a:xfrm>
-          <a:prstGeom prst="rect">
-            <a:avLst/>
-          </a:prstGeom>
-          <a:noFill/>
-          <a:ln/>
-        </p:spPr>
-        <p:txBody>
-          <a:bodyPr wrap="square" lIns="0" tIns="0" rIns="0" bIns="0" rtlCol="0" anchor="ctr"/>
-          <a:lstStyle/>
-          <a:p>
-            <a:pPr marL="0" indent="0">
-              <a:buNone/>
-            </a:pPr>
-            <a:r>
-              <a:rPr lang="en-US" sz="780" b="1" dirty="0">
-                <a:solidFill>
-                  <a:srgbClr val="F28A00"/>
-                </a:solidFill>
-                <a:latin typeface="Aptos" pitchFamily="34" charset="0"/>
-                <a:ea typeface="Aptos" pitchFamily="34" charset="-122"/>
-                <a:cs typeface="Aptos" pitchFamily="34" charset="-120"/>
-              </a:rPr>
-              <a:t>BACKUP</a:t>
-            </a:r>
-            <a:endParaRPr lang="en-US" sz="780" dirty="0"/>
-          </a:p>
-        </p:txBody>
-      </p:sp>
-      <p:sp>
-        <p:nvSpPr>
-          <p:cNvPr id="3" name="Text 1"/>
-          <p:cNvSpPr/>
-          <p:nvPr/>
-        </p:nvSpPr>
-        <p:spPr>
-          <a:xfrm>
-            <a:off x="502920" y="438912"/>
-            <a:ext cx="10972800" cy="438912"/>
-          </a:xfrm>
-          <a:prstGeom prst="rect">
-            <a:avLst/>
-          </a:prstGeom>
-          <a:noFill/>
-          <a:ln/>
-        </p:spPr>
-        <p:txBody>
-          <a:bodyPr wrap="square" lIns="0" tIns="0" rIns="0" bIns="0" rtlCol="0" anchor="ctr">
-            <a:normAutofit/>
-          </a:bodyPr>
-          <a:lstStyle/>
-          <a:p>
-            <a:pPr marL="0" indent="0">
-              <a:buNone/>
-            </a:pPr>
-            <a:r>
-              <a:rPr lang="en-US" sz="2750" b="1" dirty="0">
-                <a:solidFill>
-                  <a:srgbClr val="07133D"/>
-                </a:solidFill>
-                <a:latin typeface="Aptos Display" pitchFamily="34" charset="0"/>
-                <a:ea typeface="Aptos Display" pitchFamily="34" charset="-122"/>
-                <a:cs typeface="Aptos Display" pitchFamily="34" charset="-120"/>
-              </a:rPr>
-              <a:t>State, outbox and orchestration alternatives</a:t>
-            </a:r>
-            <a:endParaRPr lang="en-US" sz="2750" dirty="0"/>
-          </a:p>
-        </p:txBody>
-      </p:sp>
-      <p:sp>
-        <p:nvSpPr>
-          <p:cNvPr id="4" name="Text 2"/>
-          <p:cNvSpPr/>
-          <p:nvPr/>
-        </p:nvSpPr>
-        <p:spPr>
-          <a:xfrm>
-            <a:off x="530352" y="896112"/>
-            <a:ext cx="10789920" cy="210312"/>
-          </a:xfrm>
-          <a:prstGeom prst="rect">
-            <a:avLst/>
-          </a:prstGeom>
-          <a:noFill/>
-          <a:ln/>
-        </p:spPr>
-        <p:txBody>
-          <a:bodyPr wrap="square" lIns="0" tIns="0" rIns="0" bIns="0" rtlCol="0" anchor="ctr"/>
-          <a:lstStyle/>
-          <a:p>
-            <a:pPr marL="0" indent="0">
-              <a:buNone/>
-            </a:pPr>
-            <a:r>
-              <a:rPr lang="en-US" sz="1050" dirty="0">
-                <a:solidFill>
-                  <a:srgbClr val="5B6475"/>
-                </a:solidFill>
-              </a:rPr>
-              <a:t>Backup B — deeper discussion</a:t>
-            </a:r>
-            <a:endParaRPr lang="en-US" sz="1050" dirty="0"/>
-          </a:p>
-        </p:txBody>
-      </p:sp>
-      <p:sp>
-        <p:nvSpPr>
-          <p:cNvPr id="5" name="Shape 3"/>
-          <p:cNvSpPr/>
-          <p:nvPr/>
-        </p:nvSpPr>
-        <p:spPr>
-          <a:xfrm>
-            <a:off x="502920" y="1115568"/>
-            <a:ext cx="11155680" cy="0"/>
-          </a:xfrm>
-          <a:prstGeom prst="line">
-            <a:avLst/>
-          </a:prstGeom>
-          <a:noFill/>
-          <a:ln w="12700">
-            <a:solidFill>
-              <a:srgbClr val="D6DEE9"/>
-            </a:solidFill>
-            <a:prstDash val="solid"/>
-          </a:ln>
-        </p:spPr>
-        <p:txBody>
-          <a:bodyPr/>
-          <a:lstStyle/>
-          <a:p>
-            <a:endParaRPr lang="it-IT"/>
-          </a:p>
-        </p:txBody>
-      </p:sp>
-      <p:sp>
-        <p:nvSpPr>
-          <p:cNvPr id="6" name="Shape 4"/>
-          <p:cNvSpPr/>
-          <p:nvPr/>
-        </p:nvSpPr>
-        <p:spPr>
-          <a:xfrm>
-            <a:off x="502920" y="6455664"/>
-            <a:ext cx="11155680" cy="0"/>
-          </a:xfrm>
-          <a:prstGeom prst="line">
-            <a:avLst/>
-          </a:prstGeom>
-          <a:noFill/>
-          <a:ln w="10160">
-            <a:solidFill>
-              <a:srgbClr val="E1E7F0"/>
-            </a:solidFill>
-            <a:prstDash val="solid"/>
-          </a:ln>
-        </p:spPr>
-        <p:txBody>
-          <a:bodyPr/>
-          <a:lstStyle/>
-          <a:p>
-            <a:endParaRPr lang="it-IT"/>
-          </a:p>
-        </p:txBody>
-      </p:sp>
-      <p:sp>
-        <p:nvSpPr>
-          <p:cNvPr id="7" name="Text 5"/>
-          <p:cNvSpPr/>
-          <p:nvPr/>
-        </p:nvSpPr>
-        <p:spPr>
-          <a:xfrm>
-            <a:off x="502920" y="6519672"/>
-            <a:ext cx="2286000" cy="201168"/>
-          </a:xfrm>
-          <a:prstGeom prst="rect">
-            <a:avLst/>
-          </a:prstGeom>
-          <a:noFill/>
-          <a:ln/>
-        </p:spPr>
-        <p:txBody>
-          <a:bodyPr wrap="square" lIns="0" tIns="0" rIns="0" bIns="0" rtlCol="0" anchor="ctr"/>
-          <a:lstStyle/>
-          <a:p>
-            <a:pPr marL="0" indent="0">
-              <a:buNone/>
-            </a:pPr>
-            <a:r>
-              <a:rPr lang="en-US" sz="850" dirty="0">
-                <a:solidFill>
-                  <a:srgbClr val="7B8497"/>
-                </a:solidFill>
-              </a:rPr>
-              <a:t>Backup B</a:t>
-            </a:r>
-            <a:endParaRPr lang="en-US" sz="850" dirty="0"/>
-          </a:p>
-        </p:txBody>
-      </p:sp>
-      <p:sp>
-        <p:nvSpPr>
-          <p:cNvPr id="8" name="Text 6"/>
-          <p:cNvSpPr/>
-          <p:nvPr/>
-        </p:nvSpPr>
-        <p:spPr>
-          <a:xfrm>
-            <a:off x="7818120" y="6519672"/>
-            <a:ext cx="3840480" cy="201168"/>
-          </a:xfrm>
-          <a:prstGeom prst="rect">
-            <a:avLst/>
-          </a:prstGeom>
-          <a:noFill/>
-          <a:ln/>
-        </p:spPr>
-        <p:txBody>
-          <a:bodyPr wrap="square" lIns="0" tIns="0" rIns="0" bIns="0" rtlCol="0" anchor="ctr"/>
-          <a:lstStyle/>
-          <a:p>
-            <a:pPr marL="0" indent="0" algn="r">
-              <a:buNone/>
-            </a:pPr>
-            <a:r>
-              <a:rPr lang="en-US" sz="850" dirty="0">
-                <a:solidFill>
-                  <a:srgbClr val="7B8497"/>
-                </a:solidFill>
-              </a:rPr>
-              <a:t>Durable journeys. Connected experiences.</a:t>
-            </a:r>
-            <a:endParaRPr lang="en-US" sz="850" dirty="0"/>
-          </a:p>
-        </p:txBody>
-      </p:sp>
-      <p:sp>
-        <p:nvSpPr>
-          <p:cNvPr id="9" name="Shape 7"/>
-          <p:cNvSpPr/>
-          <p:nvPr/>
-        </p:nvSpPr>
-        <p:spPr>
-          <a:xfrm>
-            <a:off x="777240" y="1417320"/>
-            <a:ext cx="2971800" cy="3456432"/>
-          </a:xfrm>
-          <a:prstGeom prst="roundRect">
-            <a:avLst>
-              <a:gd name="adj" fmla="val 2462"/>
-            </a:avLst>
-          </a:prstGeom>
-          <a:solidFill>
-            <a:srgbClr val="EAF5FF"/>
-          </a:solidFill>
-          <a:ln w="13970">
-            <a:solidFill>
-              <a:srgbClr val="0B63E5"/>
-            </a:solidFill>
-            <a:prstDash val="solid"/>
-          </a:ln>
-        </p:spPr>
-        <p:txBody>
-          <a:bodyPr/>
-          <a:lstStyle/>
-          <a:p>
-            <a:endParaRPr lang="it-IT"/>
-          </a:p>
-        </p:txBody>
-      </p:sp>
-      <p:sp>
-        <p:nvSpPr>
-          <p:cNvPr id="10" name="Text 8"/>
-          <p:cNvSpPr/>
-          <p:nvPr/>
-        </p:nvSpPr>
-        <p:spPr>
-          <a:xfrm>
-            <a:off x="886968" y="1508760"/>
-            <a:ext cx="2752344" cy="228600"/>
-          </a:xfrm>
-          <a:prstGeom prst="rect">
-            <a:avLst/>
-          </a:prstGeom>
-          <a:noFill/>
-          <a:ln/>
-        </p:spPr>
-        <p:txBody>
-          <a:bodyPr wrap="square" lIns="0" tIns="0" rIns="0" bIns="0" rtlCol="0" anchor="ctr">
-            <a:normAutofit/>
-          </a:bodyPr>
-          <a:lstStyle/>
-          <a:p>
-            <a:pPr marL="0" indent="0" algn="ctr">
-              <a:buNone/>
-            </a:pPr>
-            <a:r>
-              <a:rPr lang="en-US" sz="1400" b="1" dirty="0">
-                <a:solidFill>
-                  <a:srgbClr val="07133D"/>
-                </a:solidFill>
-              </a:rPr>
-              <a:t>State ownership</a:t>
-            </a:r>
-            <a:endParaRPr lang="en-US" sz="1400" dirty="0"/>
-          </a:p>
-        </p:txBody>
-      </p:sp>
-      <p:sp>
-        <p:nvSpPr>
-          <p:cNvPr id="11" name="Text 9"/>
-          <p:cNvSpPr/>
-          <p:nvPr/>
-        </p:nvSpPr>
-        <p:spPr>
-          <a:xfrm>
-            <a:off x="905256" y="1801368"/>
-            <a:ext cx="2715768" cy="2980944"/>
-          </a:xfrm>
-          <a:prstGeom prst="rect">
-            <a:avLst/>
-          </a:prstGeom>
-          <a:noFill/>
-          <a:ln/>
-        </p:spPr>
-        <p:txBody>
-          <a:bodyPr wrap="square" lIns="254" tIns="254" rIns="254" bIns="254" rtlCol="0" anchor="ctr">
-            <a:normAutofit/>
-          </a:bodyPr>
-          <a:lstStyle/>
-          <a:p>
-            <a:pPr marL="0" indent="0" algn="l">
-              <a:buNone/>
-            </a:pPr>
-            <a:r>
-              <a:rPr lang="en-US" sz="1040" dirty="0">
-                <a:solidFill>
-                  <a:srgbClr val="5B6475"/>
-                </a:solidFill>
-              </a:rPr>
-              <a:t>Step Functions owns execution position, waits and timers. PostgreSQL owns conversation, business facts, operation records and status summary. Providers provide evidence of external effects.</a:t>
-            </a:r>
-            <a:endParaRPr lang="en-US" sz="1040" dirty="0"/>
-          </a:p>
-        </p:txBody>
-      </p:sp>
-      <p:sp>
-        <p:nvSpPr>
-          <p:cNvPr id="12" name="Shape 10"/>
-          <p:cNvSpPr/>
-          <p:nvPr/>
-        </p:nvSpPr>
-        <p:spPr>
-          <a:xfrm>
-            <a:off x="4279392" y="1417320"/>
-            <a:ext cx="2971800" cy="3456432"/>
-          </a:xfrm>
-          <a:prstGeom prst="roundRect">
-            <a:avLst>
-              <a:gd name="adj" fmla="val 2462"/>
-            </a:avLst>
-          </a:prstGeom>
-          <a:solidFill>
-            <a:srgbClr val="E8F7EE"/>
-          </a:solidFill>
-          <a:ln w="13970">
-            <a:solidFill>
-              <a:srgbClr val="0B9F63"/>
-            </a:solidFill>
-            <a:prstDash val="solid"/>
-          </a:ln>
-        </p:spPr>
-        <p:txBody>
-          <a:bodyPr/>
-          <a:lstStyle/>
-          <a:p>
-            <a:endParaRPr lang="it-IT"/>
-          </a:p>
-        </p:txBody>
-      </p:sp>
-      <p:sp>
-        <p:nvSpPr>
-          <p:cNvPr id="13" name="Text 11"/>
-          <p:cNvSpPr/>
-          <p:nvPr/>
-        </p:nvSpPr>
-        <p:spPr>
-          <a:xfrm>
-            <a:off x="4389120" y="1508760"/>
-            <a:ext cx="2752344" cy="228600"/>
-          </a:xfrm>
-          <a:prstGeom prst="rect">
-            <a:avLst/>
-          </a:prstGeom>
-          <a:noFill/>
-          <a:ln/>
-        </p:spPr>
-        <p:txBody>
-          <a:bodyPr wrap="square" lIns="0" tIns="0" rIns="0" bIns="0" rtlCol="0" anchor="ctr">
-            <a:normAutofit/>
-          </a:bodyPr>
-          <a:lstStyle/>
-          <a:p>
-            <a:pPr marL="0" indent="0" algn="ctr">
-              <a:buNone/>
-            </a:pPr>
-            <a:r>
-              <a:rPr lang="en-US" sz="1400" b="1" dirty="0">
-                <a:solidFill>
-                  <a:srgbClr val="07133D"/>
-                </a:solidFill>
-              </a:rPr>
-              <a:t>Transactional outbox</a:t>
-            </a:r>
-            <a:endParaRPr lang="en-US" sz="1400" dirty="0"/>
-          </a:p>
-        </p:txBody>
-      </p:sp>
-      <p:sp>
-        <p:nvSpPr>
-          <p:cNvPr id="14" name="Text 12"/>
-          <p:cNvSpPr/>
-          <p:nvPr/>
-        </p:nvSpPr>
-        <p:spPr>
-          <a:xfrm>
-            <a:off x="4407408" y="1801368"/>
-            <a:ext cx="2715768" cy="2980944"/>
-          </a:xfrm>
-          <a:prstGeom prst="rect">
-            <a:avLst/>
-          </a:prstGeom>
-          <a:noFill/>
-          <a:ln/>
-        </p:spPr>
-        <p:txBody>
-          <a:bodyPr wrap="square" lIns="254" tIns="254" rIns="254" bIns="254" rtlCol="0" anchor="ctr">
-            <a:normAutofit/>
-          </a:bodyPr>
-          <a:lstStyle/>
-          <a:p>
-            <a:pPr marL="0" indent="0" algn="l">
-              <a:buNone/>
-            </a:pPr>
-            <a:r>
-              <a:rPr lang="en-US" sz="1040" dirty="0">
-                <a:solidFill>
-                  <a:srgbClr val="5B6475"/>
-                </a:solidFill>
-              </a:rPr>
-              <a:t>API writes accepted work and outgoing request in one transaction. Dispatcher delivers starts, callbacks, jobs and notifications. Duplicate delivery remains possible, so stable IDs and idempotency are required.</a:t>
-            </a:r>
-            <a:endParaRPr lang="en-US" sz="1040" dirty="0"/>
-          </a:p>
-        </p:txBody>
-      </p:sp>
-      <p:sp>
-        <p:nvSpPr>
-          <p:cNvPr id="15" name="Shape 13"/>
-          <p:cNvSpPr/>
-          <p:nvPr/>
-        </p:nvSpPr>
-        <p:spPr>
-          <a:xfrm>
-            <a:off x="7772400" y="1417320"/>
-            <a:ext cx="2971800" cy="3456432"/>
-          </a:xfrm>
-          <a:prstGeom prst="roundRect">
-            <a:avLst>
-              <a:gd name="adj" fmla="val 2462"/>
-            </a:avLst>
-          </a:prstGeom>
-          <a:solidFill>
-            <a:srgbClr val="FFF4E4"/>
-          </a:solidFill>
-          <a:ln w="13970">
-            <a:solidFill>
-              <a:srgbClr val="F28A00"/>
-            </a:solidFill>
-            <a:prstDash val="solid"/>
-          </a:ln>
-        </p:spPr>
-        <p:txBody>
-          <a:bodyPr/>
-          <a:lstStyle/>
-          <a:p>
-            <a:endParaRPr lang="it-IT"/>
-          </a:p>
-        </p:txBody>
-      </p:sp>
-      <p:sp>
-        <p:nvSpPr>
-          <p:cNvPr id="16" name="Text 14"/>
-          <p:cNvSpPr/>
-          <p:nvPr/>
-        </p:nvSpPr>
-        <p:spPr>
-          <a:xfrm>
-            <a:off x="7882128" y="1508760"/>
-            <a:ext cx="2752344" cy="228600"/>
-          </a:xfrm>
-          <a:prstGeom prst="rect">
-            <a:avLst/>
-          </a:prstGeom>
-          <a:noFill/>
-          <a:ln/>
-        </p:spPr>
-        <p:txBody>
-          <a:bodyPr wrap="square" lIns="0" tIns="0" rIns="0" bIns="0" rtlCol="0" anchor="ctr">
-            <a:normAutofit/>
-          </a:bodyPr>
-          <a:lstStyle/>
-          <a:p>
-            <a:pPr marL="0" indent="0" algn="ctr">
-              <a:buNone/>
-            </a:pPr>
-            <a:r>
-              <a:rPr lang="en-US" sz="1400" b="1" dirty="0">
-                <a:solidFill>
-                  <a:srgbClr val="07133D"/>
-                </a:solidFill>
-              </a:rPr>
-              <a:t>When to revisit</a:t>
-            </a:r>
-            <a:endParaRPr lang="en-US" sz="1400" dirty="0"/>
-          </a:p>
-        </p:txBody>
-      </p:sp>
-      <p:sp>
-        <p:nvSpPr>
-          <p:cNvPr id="17" name="Text 15"/>
-          <p:cNvSpPr/>
-          <p:nvPr/>
-        </p:nvSpPr>
-        <p:spPr>
-          <a:xfrm>
-            <a:off x="7900416" y="1801368"/>
-            <a:ext cx="2715768" cy="2980944"/>
-          </a:xfrm>
-          <a:prstGeom prst="rect">
-            <a:avLst/>
-          </a:prstGeom>
-          <a:noFill/>
-          <a:ln/>
-        </p:spPr>
-        <p:txBody>
-          <a:bodyPr wrap="square" lIns="254" tIns="254" rIns="254" bIns="254" rtlCol="0" anchor="ctr">
-            <a:normAutofit/>
-          </a:bodyPr>
-          <a:lstStyle/>
-          <a:p>
-            <a:pPr marL="0" indent="0" algn="l">
-              <a:buNone/>
-            </a:pPr>
-            <a:r>
-              <a:rPr lang="en-US" sz="1040" dirty="0">
-                <a:solidFill>
-                  <a:srgbClr val="5B6475"/>
-                </a:solidFill>
-              </a:rPr>
-              <a:t>Custom workflow if AWS lock-in or cost dominates. Temporal if stronger workflow programming needs outweigh operation cost. Separate queues/pools if measured priority or contention requires it.</a:t>
-            </a:r>
-            <a:endParaRPr lang="en-US" sz="1040" dirty="0"/>
-          </a:p>
-        </p:txBody>
-      </p:sp>
-      <p:sp>
-        <p:nvSpPr>
-          <p:cNvPr id="18" name="Shape 16"/>
-          <p:cNvSpPr/>
-          <p:nvPr/>
-        </p:nvSpPr>
-        <p:spPr>
-          <a:xfrm>
-            <a:off x="1051560" y="5193792"/>
-            <a:ext cx="3373222" cy="347472"/>
-          </a:xfrm>
-          <a:prstGeom prst="rect">
-            <a:avLst/>
-          </a:prstGeom>
-          <a:solidFill>
-            <a:srgbClr val="07133D"/>
-          </a:solidFill>
-          <a:ln w="6350">
-            <a:solidFill>
-              <a:srgbClr val="FFFFFF"/>
-            </a:solidFill>
-            <a:prstDash val="solid"/>
-          </a:ln>
-        </p:spPr>
-        <p:txBody>
-          <a:bodyPr/>
-          <a:lstStyle/>
-          <a:p>
-            <a:endParaRPr lang="it-IT"/>
-          </a:p>
-        </p:txBody>
-      </p:sp>
-      <p:sp>
-        <p:nvSpPr>
-          <p:cNvPr id="19" name="Text 17"/>
-          <p:cNvSpPr/>
-          <p:nvPr/>
-        </p:nvSpPr>
-        <p:spPr>
-          <a:xfrm>
-            <a:off x="1115568" y="5280660"/>
-            <a:ext cx="3245206" cy="246888"/>
-          </a:xfrm>
-          <a:prstGeom prst="rect">
-            <a:avLst/>
-          </a:prstGeom>
-          <a:noFill/>
-          <a:ln/>
-        </p:spPr>
-        <p:txBody>
-          <a:bodyPr wrap="square" lIns="254" tIns="254" rIns="254" bIns="254" rtlCol="0" anchor="ctr">
-            <a:normAutofit/>
-          </a:bodyPr>
-          <a:lstStyle/>
-          <a:p>
-            <a:pPr marL="0" indent="0" algn="l">
-              <a:buNone/>
-            </a:pPr>
-            <a:r>
-              <a:rPr lang="en-US" sz="1000" b="1" dirty="0">
-                <a:solidFill>
-                  <a:srgbClr val="FFFFFF"/>
-                </a:solidFill>
-                <a:latin typeface="Aptos" pitchFamily="34" charset="0"/>
-                <a:ea typeface="Aptos" pitchFamily="34" charset="-122"/>
-                <a:cs typeface="Aptos" pitchFamily="34" charset="-120"/>
-              </a:rPr>
-              <a:t>Risk</a:t>
-            </a:r>
-            <a:endParaRPr lang="en-US" sz="1000" dirty="0"/>
-          </a:p>
-        </p:txBody>
-      </p:sp>
-      <p:sp>
-        <p:nvSpPr>
-          <p:cNvPr id="20" name="Shape 18"/>
-          <p:cNvSpPr/>
-          <p:nvPr/>
-        </p:nvSpPr>
-        <p:spPr>
-          <a:xfrm>
-            <a:off x="4424782" y="5193792"/>
-            <a:ext cx="6548018" cy="347472"/>
-          </a:xfrm>
-          <a:prstGeom prst="rect">
-            <a:avLst/>
-          </a:prstGeom>
-          <a:solidFill>
-            <a:srgbClr val="07133D"/>
-          </a:solidFill>
-          <a:ln w="6350">
-            <a:solidFill>
-              <a:srgbClr val="FFFFFF"/>
-            </a:solidFill>
-            <a:prstDash val="solid"/>
-          </a:ln>
-        </p:spPr>
-        <p:txBody>
-          <a:bodyPr/>
-          <a:lstStyle/>
-          <a:p>
-            <a:endParaRPr lang="it-IT"/>
-          </a:p>
-        </p:txBody>
-      </p:sp>
-      <p:sp>
-        <p:nvSpPr>
-          <p:cNvPr id="21" name="Text 19"/>
-          <p:cNvSpPr/>
-          <p:nvPr/>
-        </p:nvSpPr>
-        <p:spPr>
-          <a:xfrm>
-            <a:off x="4488790" y="5280660"/>
-            <a:ext cx="6420002" cy="246888"/>
-          </a:xfrm>
-          <a:prstGeom prst="rect">
-            <a:avLst/>
-          </a:prstGeom>
-          <a:noFill/>
-          <a:ln/>
-        </p:spPr>
-        <p:txBody>
-          <a:bodyPr wrap="square" lIns="254" tIns="254" rIns="254" bIns="254" rtlCol="0" anchor="ctr">
-            <a:normAutofit/>
-          </a:bodyPr>
-          <a:lstStyle/>
-          <a:p>
-            <a:pPr marL="0" indent="0" algn="l">
-              <a:buNone/>
-            </a:pPr>
-            <a:r>
-              <a:rPr lang="en-US" sz="1000" b="1" dirty="0">
-                <a:solidFill>
-                  <a:srgbClr val="FFFFFF"/>
-                </a:solidFill>
-                <a:latin typeface="Aptos" pitchFamily="34" charset="0"/>
-                <a:ea typeface="Aptos" pitchFamily="34" charset="-122"/>
-                <a:cs typeface="Aptos" pitchFamily="34" charset="-120"/>
-              </a:rPr>
-              <a:t>Mitigation</a:t>
-            </a:r>
-            <a:endParaRPr lang="en-US" sz="1000" dirty="0"/>
-          </a:p>
-        </p:txBody>
-      </p:sp>
-      <p:sp>
-        <p:nvSpPr>
-          <p:cNvPr id="22" name="Shape 20"/>
-          <p:cNvSpPr/>
-          <p:nvPr/>
-        </p:nvSpPr>
-        <p:spPr>
-          <a:xfrm>
-            <a:off x="1051560" y="5541264"/>
-            <a:ext cx="3373222" cy="260604"/>
-          </a:xfrm>
-          <a:prstGeom prst="rect">
-            <a:avLst/>
-          </a:prstGeom>
-          <a:solidFill>
-            <a:srgbClr val="FFFFFF"/>
-          </a:solidFill>
-          <a:ln w="6350">
-            <a:solidFill>
-              <a:srgbClr val="D9E1EC"/>
-            </a:solidFill>
-            <a:prstDash val="solid"/>
-          </a:ln>
-        </p:spPr>
-        <p:txBody>
-          <a:bodyPr/>
-          <a:lstStyle/>
-          <a:p>
-            <a:endParaRPr lang="it-IT"/>
-          </a:p>
-        </p:txBody>
-      </p:sp>
-      <p:sp>
-        <p:nvSpPr>
-          <p:cNvPr id="23" name="Text 21"/>
-          <p:cNvSpPr/>
-          <p:nvPr/>
-        </p:nvSpPr>
-        <p:spPr>
-          <a:xfrm>
-            <a:off x="1115568" y="5596128"/>
-            <a:ext cx="3245206" cy="169164"/>
-          </a:xfrm>
-          <a:prstGeom prst="rect">
-            <a:avLst/>
-          </a:prstGeom>
-          <a:noFill/>
-          <a:ln/>
-        </p:spPr>
-        <p:txBody>
-          <a:bodyPr wrap="square" lIns="254" tIns="254" rIns="254" bIns="254" rtlCol="0" anchor="ctr">
-            <a:normAutofit/>
-          </a:bodyPr>
-          <a:lstStyle/>
-          <a:p>
-            <a:pPr marL="0" indent="0" algn="l">
-              <a:buNone/>
-            </a:pPr>
-            <a:r>
-              <a:rPr lang="en-US" sz="940" b="1" dirty="0">
-                <a:solidFill>
-                  <a:srgbClr val="07133D"/>
-                </a:solidFill>
-                <a:latin typeface="Aptos" pitchFamily="34" charset="0"/>
-                <a:ea typeface="Aptos" pitchFamily="34" charset="-122"/>
-                <a:cs typeface="Aptos" pitchFamily="34" charset="-120"/>
-              </a:rPr>
-              <a:t>API crash after accepting work</a:t>
-            </a:r>
-            <a:endParaRPr lang="en-US" sz="940" dirty="0"/>
-          </a:p>
-        </p:txBody>
-      </p:sp>
-      <p:sp>
-        <p:nvSpPr>
-          <p:cNvPr id="24" name="Shape 22"/>
-          <p:cNvSpPr/>
-          <p:nvPr/>
-        </p:nvSpPr>
-        <p:spPr>
-          <a:xfrm>
-            <a:off x="4424782" y="5541264"/>
-            <a:ext cx="6548018" cy="260604"/>
-          </a:xfrm>
-          <a:prstGeom prst="rect">
-            <a:avLst/>
-          </a:prstGeom>
-          <a:solidFill>
-            <a:srgbClr val="FFFFFF"/>
-          </a:solidFill>
-          <a:ln w="6350">
-            <a:solidFill>
-              <a:srgbClr val="D9E1EC"/>
-            </a:solidFill>
-            <a:prstDash val="solid"/>
-          </a:ln>
-        </p:spPr>
-        <p:txBody>
-          <a:bodyPr/>
-          <a:lstStyle/>
-          <a:p>
-            <a:endParaRPr lang="it-IT"/>
-          </a:p>
-        </p:txBody>
-      </p:sp>
-      <p:sp>
-        <p:nvSpPr>
-          <p:cNvPr id="25" name="Text 23"/>
-          <p:cNvSpPr/>
-          <p:nvPr/>
-        </p:nvSpPr>
-        <p:spPr>
-          <a:xfrm>
-            <a:off x="4488790" y="5596128"/>
-            <a:ext cx="6420002" cy="169164"/>
-          </a:xfrm>
-          <a:prstGeom prst="rect">
-            <a:avLst/>
-          </a:prstGeom>
-          <a:noFill/>
-          <a:ln/>
-        </p:spPr>
-        <p:txBody>
-          <a:bodyPr wrap="square" lIns="254" tIns="254" rIns="254" bIns="254" rtlCol="0" anchor="ctr">
-            <a:normAutofit/>
-          </a:bodyPr>
-          <a:lstStyle/>
-          <a:p>
-            <a:pPr marL="0" indent="0" algn="l">
-              <a:buNone/>
-            </a:pPr>
-            <a:r>
-              <a:rPr lang="en-US" sz="940" dirty="0">
-                <a:solidFill>
-                  <a:srgbClr val="5B6475"/>
-                </a:solidFill>
-                <a:latin typeface="Aptos" pitchFamily="34" charset="0"/>
-                <a:ea typeface="Aptos" pitchFamily="34" charset="-122"/>
-                <a:cs typeface="Aptos" pitchFamily="34" charset="-120"/>
-              </a:rPr>
-              <a:t>Outbox entry remains and dispatcher starts delivery.</a:t>
-            </a:r>
-            <a:endParaRPr lang="en-US" sz="940" dirty="0"/>
-          </a:p>
-        </p:txBody>
-      </p:sp>
-      <p:sp>
-        <p:nvSpPr>
-          <p:cNvPr id="26" name="Shape 24"/>
-          <p:cNvSpPr/>
-          <p:nvPr/>
-        </p:nvSpPr>
-        <p:spPr>
-          <a:xfrm>
-            <a:off x="1051560" y="5801868"/>
-            <a:ext cx="3373222" cy="260604"/>
-          </a:xfrm>
-          <a:prstGeom prst="rect">
-            <a:avLst/>
-          </a:prstGeom>
-          <a:solidFill>
-            <a:srgbClr val="F8FAFC"/>
-          </a:solidFill>
-          <a:ln w="6350">
-            <a:solidFill>
-              <a:srgbClr val="D9E1EC"/>
-            </a:solidFill>
-            <a:prstDash val="solid"/>
-          </a:ln>
-        </p:spPr>
-        <p:txBody>
-          <a:bodyPr/>
-          <a:lstStyle/>
-          <a:p>
-            <a:endParaRPr lang="it-IT"/>
-          </a:p>
-        </p:txBody>
-      </p:sp>
-      <p:sp>
-        <p:nvSpPr>
-          <p:cNvPr id="27" name="Text 25"/>
-          <p:cNvSpPr/>
-          <p:nvPr/>
-        </p:nvSpPr>
-        <p:spPr>
-          <a:xfrm>
-            <a:off x="1115568" y="5856732"/>
-            <a:ext cx="3245206" cy="169164"/>
-          </a:xfrm>
-          <a:prstGeom prst="rect">
-            <a:avLst/>
-          </a:prstGeom>
-          <a:noFill/>
-          <a:ln/>
-        </p:spPr>
-        <p:txBody>
-          <a:bodyPr wrap="square" lIns="254" tIns="254" rIns="254" bIns="254" rtlCol="0" anchor="ctr">
-            <a:normAutofit/>
-          </a:bodyPr>
-          <a:lstStyle/>
-          <a:p>
-            <a:pPr marL="0" indent="0" algn="l">
-              <a:buNone/>
-            </a:pPr>
-            <a:r>
-              <a:rPr lang="en-US" sz="940" b="1" dirty="0">
-                <a:solidFill>
-                  <a:srgbClr val="07133D"/>
-                </a:solidFill>
-                <a:latin typeface="Aptos" pitchFamily="34" charset="0"/>
-                <a:ea typeface="Aptos" pitchFamily="34" charset="-122"/>
-                <a:cs typeface="Aptos" pitchFamily="34" charset="-120"/>
-              </a:rPr>
-              <a:t>Dispatcher crash after remote send</a:t>
-            </a:r>
-            <a:endParaRPr lang="en-US" sz="940" dirty="0"/>
-          </a:p>
-        </p:txBody>
-      </p:sp>
-      <p:sp>
-        <p:nvSpPr>
-          <p:cNvPr id="28" name="Shape 26"/>
-          <p:cNvSpPr/>
-          <p:nvPr/>
-        </p:nvSpPr>
-        <p:spPr>
-          <a:xfrm>
-            <a:off x="4424782" y="5801868"/>
-            <a:ext cx="6548018" cy="260604"/>
-          </a:xfrm>
-          <a:prstGeom prst="rect">
-            <a:avLst/>
-          </a:prstGeom>
-          <a:solidFill>
-            <a:srgbClr val="F8FAFC"/>
-          </a:solidFill>
-          <a:ln w="6350">
-            <a:solidFill>
-              <a:srgbClr val="D9E1EC"/>
-            </a:solidFill>
-            <a:prstDash val="solid"/>
-          </a:ln>
-        </p:spPr>
-        <p:txBody>
-          <a:bodyPr/>
-          <a:lstStyle/>
-          <a:p>
-            <a:endParaRPr lang="it-IT"/>
-          </a:p>
-        </p:txBody>
-      </p:sp>
-      <p:sp>
-        <p:nvSpPr>
-          <p:cNvPr id="29" name="Text 27"/>
-          <p:cNvSpPr/>
-          <p:nvPr/>
-        </p:nvSpPr>
-        <p:spPr>
-          <a:xfrm>
-            <a:off x="4488790" y="5856732"/>
-            <a:ext cx="6420002" cy="169164"/>
-          </a:xfrm>
-          <a:prstGeom prst="rect">
-            <a:avLst/>
-          </a:prstGeom>
-          <a:noFill/>
-          <a:ln/>
-        </p:spPr>
-        <p:txBody>
-          <a:bodyPr wrap="square" lIns="254" tIns="254" rIns="254" bIns="254" rtlCol="0" anchor="ctr">
-            <a:normAutofit/>
-          </a:bodyPr>
-          <a:lstStyle/>
-          <a:p>
-            <a:pPr marL="0" indent="0" algn="l">
-              <a:buNone/>
-            </a:pPr>
-            <a:r>
-              <a:rPr lang="en-US" sz="940" dirty="0">
-                <a:solidFill>
-                  <a:srgbClr val="5B6475"/>
-                </a:solidFill>
-                <a:latin typeface="Aptos" pitchFamily="34" charset="0"/>
-                <a:ea typeface="Aptos" pitchFamily="34" charset="-122"/>
-                <a:cs typeface="Aptos" pitchFamily="34" charset="-120"/>
-              </a:rPr>
-              <a:t>Stable execution IDs and reconciliation prevent duplicate workflow effect.</a:t>
-            </a:r>
-            <a:endParaRPr lang="en-US" sz="940" dirty="0"/>
-          </a:p>
-        </p:txBody>
-      </p:sp>
-    </p:spTree>
-  </p:cSld>
-  <p:clrMapOvr>
-    <a:masterClrMapping/>
-  </p:clrMapOvr>
-</p:sld>
-</file>
-
-<file path=ppt/slides/slide24.xml><?xml version="1.0" encoding="utf-8"?>
-<p:sld xmlns:a="http://schemas.openxmlformats.org/drawingml/2006/main" xmlns:r="http://schemas.openxmlformats.org/officeDocument/2006/relationships" xmlns:p="http://schemas.openxmlformats.org/presentationml/2006/main" show="0">
-  <p:cSld name="Slide 13">
-    <p:bg>
-      <p:bgPr>
-        <a:solidFill>
-          <a:srgbClr val="FFFFFF"/>
-        </a:solidFill>
-        <a:effectLst/>
-      </p:bgPr>
-    </p:bg>
-    <p:spTree>
-      <p:nvGrpSpPr>
-        <p:cNvPr id="1" name=""/>
-        <p:cNvGrpSpPr/>
-        <p:nvPr/>
-      </p:nvGrpSpPr>
-      <p:grpSpPr>
-        <a:xfrm>
-          <a:off x="0" y="0"/>
-          <a:ext cx="0" cy="0"/>
-          <a:chOff x="0" y="0"/>
-          <a:chExt cx="0" cy="0"/>
-        </a:xfrm>
-      </p:grpSpPr>
-      <p:sp>
-        <p:nvSpPr>
-          <p:cNvPr id="2" name="Text 0"/>
-          <p:cNvSpPr/>
-          <p:nvPr/>
-        </p:nvSpPr>
-        <p:spPr>
-          <a:xfrm>
-            <a:off x="502920" y="219456"/>
-            <a:ext cx="2194560" cy="201168"/>
-          </a:xfrm>
-          <a:prstGeom prst="rect">
-            <a:avLst/>
-          </a:prstGeom>
-          <a:noFill/>
-          <a:ln/>
-        </p:spPr>
-        <p:txBody>
-          <a:bodyPr wrap="square" lIns="0" tIns="0" rIns="0" bIns="0" rtlCol="0" anchor="ctr"/>
-          <a:lstStyle/>
-          <a:p>
-            <a:pPr marL="0" indent="0">
-              <a:buNone/>
-            </a:pPr>
-            <a:r>
-              <a:rPr lang="en-US" sz="780" b="1" dirty="0">
-                <a:solidFill>
-                  <a:srgbClr val="F28A00"/>
-                </a:solidFill>
-                <a:latin typeface="Aptos" pitchFamily="34" charset="0"/>
-                <a:ea typeface="Aptos" pitchFamily="34" charset="-122"/>
-                <a:cs typeface="Aptos" pitchFamily="34" charset="-120"/>
-              </a:rPr>
-              <a:t>BACKUP</a:t>
-            </a:r>
-            <a:endParaRPr lang="en-US" sz="780" dirty="0"/>
-          </a:p>
-        </p:txBody>
-      </p:sp>
-      <p:sp>
-        <p:nvSpPr>
-          <p:cNvPr id="3" name="Text 1"/>
-          <p:cNvSpPr/>
-          <p:nvPr/>
-        </p:nvSpPr>
-        <p:spPr>
-          <a:xfrm>
-            <a:off x="502920" y="438912"/>
-            <a:ext cx="10972800" cy="438912"/>
-          </a:xfrm>
-          <a:prstGeom prst="rect">
-            <a:avLst/>
-          </a:prstGeom>
-          <a:noFill/>
-          <a:ln/>
-        </p:spPr>
-        <p:txBody>
-          <a:bodyPr wrap="square" lIns="0" tIns="0" rIns="0" bIns="0" rtlCol="0" anchor="ctr">
-            <a:normAutofit/>
-          </a:bodyPr>
-          <a:lstStyle/>
-          <a:p>
-            <a:pPr marL="0" indent="0">
-              <a:buNone/>
-            </a:pPr>
-            <a:r>
-              <a:rPr lang="en-US" sz="2750" b="1" dirty="0">
-                <a:solidFill>
-                  <a:srgbClr val="07133D"/>
-                </a:solidFill>
-                <a:latin typeface="Aptos Display" pitchFamily="34" charset="0"/>
-                <a:ea typeface="Aptos Display" pitchFamily="34" charset="-122"/>
-                <a:cs typeface="Aptos Display" pitchFamily="34" charset="-120"/>
-              </a:rPr>
-              <a:t>Cost detail and exclusions</a:t>
-            </a:r>
-            <a:endParaRPr lang="en-US" sz="2750" dirty="0"/>
-          </a:p>
-        </p:txBody>
-      </p:sp>
-      <p:sp>
-        <p:nvSpPr>
-          <p:cNvPr id="4" name="Text 2"/>
-          <p:cNvSpPr/>
-          <p:nvPr/>
-        </p:nvSpPr>
-        <p:spPr>
-          <a:xfrm>
-            <a:off x="530352" y="896112"/>
-            <a:ext cx="10789920" cy="210312"/>
-          </a:xfrm>
-          <a:prstGeom prst="rect">
-            <a:avLst/>
-          </a:prstGeom>
-          <a:noFill/>
-          <a:ln/>
-        </p:spPr>
-        <p:txBody>
-          <a:bodyPr wrap="square" lIns="0" tIns="0" rIns="0" bIns="0" rtlCol="0" anchor="ctr"/>
-          <a:lstStyle/>
-          <a:p>
-            <a:pPr marL="0" indent="0">
-              <a:buNone/>
-            </a:pPr>
-            <a:r>
-              <a:rPr lang="en-US" sz="1050" dirty="0">
-                <a:solidFill>
-                  <a:srgbClr val="5B6475"/>
-                </a:solidFill>
-              </a:rPr>
-              <a:t>Backup C — calculation from solution.md</a:t>
-            </a:r>
-            <a:endParaRPr lang="en-US" sz="1050" dirty="0"/>
-          </a:p>
-        </p:txBody>
-      </p:sp>
-      <p:sp>
-        <p:nvSpPr>
-          <p:cNvPr id="5" name="Shape 3"/>
-          <p:cNvSpPr/>
-          <p:nvPr/>
-        </p:nvSpPr>
-        <p:spPr>
-          <a:xfrm>
-            <a:off x="502920" y="1115568"/>
-            <a:ext cx="11155680" cy="0"/>
-          </a:xfrm>
-          <a:prstGeom prst="line">
-            <a:avLst/>
-          </a:prstGeom>
-          <a:noFill/>
-          <a:ln w="12700">
-            <a:solidFill>
-              <a:srgbClr val="D6DEE9"/>
-            </a:solidFill>
-            <a:prstDash val="solid"/>
-          </a:ln>
-        </p:spPr>
-        <p:txBody>
-          <a:bodyPr/>
-          <a:lstStyle/>
-          <a:p>
-            <a:endParaRPr lang="it-IT"/>
-          </a:p>
-        </p:txBody>
-      </p:sp>
-      <p:sp>
-        <p:nvSpPr>
-          <p:cNvPr id="6" name="Shape 4"/>
-          <p:cNvSpPr/>
-          <p:nvPr/>
-        </p:nvSpPr>
-        <p:spPr>
-          <a:xfrm>
-            <a:off x="502920" y="6455664"/>
-            <a:ext cx="11155680" cy="0"/>
-          </a:xfrm>
-          <a:prstGeom prst="line">
-            <a:avLst/>
-          </a:prstGeom>
-          <a:noFill/>
-          <a:ln w="10160">
-            <a:solidFill>
-              <a:srgbClr val="E1E7F0"/>
-            </a:solidFill>
-            <a:prstDash val="solid"/>
-          </a:ln>
-        </p:spPr>
-        <p:txBody>
-          <a:bodyPr/>
-          <a:lstStyle/>
-          <a:p>
-            <a:endParaRPr lang="it-IT"/>
-          </a:p>
-        </p:txBody>
-      </p:sp>
-      <p:sp>
-        <p:nvSpPr>
-          <p:cNvPr id="7" name="Text 5"/>
-          <p:cNvSpPr/>
-          <p:nvPr/>
-        </p:nvSpPr>
-        <p:spPr>
-          <a:xfrm>
-            <a:off x="502920" y="6519672"/>
-            <a:ext cx="2286000" cy="201168"/>
-          </a:xfrm>
-          <a:prstGeom prst="rect">
-            <a:avLst/>
-          </a:prstGeom>
-          <a:noFill/>
-          <a:ln/>
-        </p:spPr>
-        <p:txBody>
-          <a:bodyPr wrap="square" lIns="0" tIns="0" rIns="0" bIns="0" rtlCol="0" anchor="ctr"/>
-          <a:lstStyle/>
-          <a:p>
-            <a:pPr marL="0" indent="0">
-              <a:buNone/>
-            </a:pPr>
-            <a:r>
-              <a:rPr lang="en-US" sz="850" dirty="0">
-                <a:solidFill>
-                  <a:srgbClr val="7B8497"/>
-                </a:solidFill>
-              </a:rPr>
-              <a:t>Backup C</a:t>
-            </a:r>
-            <a:endParaRPr lang="en-US" sz="850" dirty="0"/>
-          </a:p>
-        </p:txBody>
-      </p:sp>
-      <p:sp>
-        <p:nvSpPr>
-          <p:cNvPr id="8" name="Text 6"/>
-          <p:cNvSpPr/>
-          <p:nvPr/>
-        </p:nvSpPr>
-        <p:spPr>
-          <a:xfrm>
-            <a:off x="7818120" y="6519672"/>
-            <a:ext cx="3840480" cy="201168"/>
-          </a:xfrm>
-          <a:prstGeom prst="rect">
-            <a:avLst/>
-          </a:prstGeom>
-          <a:noFill/>
-          <a:ln/>
-        </p:spPr>
-        <p:txBody>
-          <a:bodyPr wrap="square" lIns="0" tIns="0" rIns="0" bIns="0" rtlCol="0" anchor="ctr"/>
-          <a:lstStyle/>
-          <a:p>
-            <a:pPr marL="0" indent="0" algn="r">
-              <a:buNone/>
-            </a:pPr>
-            <a:r>
-              <a:rPr lang="en-US" sz="850" dirty="0">
-                <a:solidFill>
-                  <a:srgbClr val="7B8497"/>
-                </a:solidFill>
-              </a:rPr>
-              <a:t>Durable journeys. Connected experiences.</a:t>
-            </a:r>
-            <a:endParaRPr lang="en-US" sz="850" dirty="0"/>
-          </a:p>
-        </p:txBody>
-      </p:sp>
-      <p:sp>
-        <p:nvSpPr>
-          <p:cNvPr id="9" name="Shape 7"/>
-          <p:cNvSpPr/>
-          <p:nvPr/>
-        </p:nvSpPr>
-        <p:spPr>
-          <a:xfrm>
-            <a:off x="566928" y="1371600"/>
-            <a:ext cx="2655418" cy="347472"/>
-          </a:xfrm>
-          <a:prstGeom prst="rect">
-            <a:avLst/>
-          </a:prstGeom>
-          <a:solidFill>
-            <a:srgbClr val="07133D"/>
-          </a:solidFill>
-          <a:ln w="6350">
-            <a:solidFill>
-              <a:srgbClr val="FFFFFF"/>
-            </a:solidFill>
-            <a:prstDash val="solid"/>
-          </a:ln>
-        </p:spPr>
-        <p:txBody>
-          <a:bodyPr/>
-          <a:lstStyle/>
-          <a:p>
-            <a:endParaRPr lang="it-IT"/>
-          </a:p>
-        </p:txBody>
-      </p:sp>
-      <p:sp>
-        <p:nvSpPr>
-          <p:cNvPr id="10" name="Text 8"/>
-          <p:cNvSpPr/>
-          <p:nvPr/>
-        </p:nvSpPr>
-        <p:spPr>
-          <a:xfrm>
-            <a:off x="630936" y="1458468"/>
-            <a:ext cx="2527402" cy="246888"/>
-          </a:xfrm>
-          <a:prstGeom prst="rect">
-            <a:avLst/>
-          </a:prstGeom>
-          <a:noFill/>
-          <a:ln/>
-        </p:spPr>
-        <p:txBody>
-          <a:bodyPr wrap="square" lIns="254" tIns="254" rIns="254" bIns="254" rtlCol="0" anchor="ctr">
-            <a:normAutofit/>
-          </a:bodyPr>
-          <a:lstStyle/>
-          <a:p>
-            <a:pPr marL="0" indent="0" algn="l">
-              <a:buNone/>
-            </a:pPr>
-            <a:r>
-              <a:rPr lang="en-US" sz="950" b="1" dirty="0">
-                <a:solidFill>
-                  <a:srgbClr val="FFFFFF"/>
-                </a:solidFill>
-                <a:latin typeface="Aptos" pitchFamily="34" charset="0"/>
-                <a:ea typeface="Aptos" pitchFamily="34" charset="-122"/>
-                <a:cs typeface="Aptos" pitchFamily="34" charset="-120"/>
-              </a:rPr>
-              <a:t>Cost area</a:t>
-            </a:r>
-            <a:endParaRPr lang="en-US" sz="950" dirty="0"/>
-          </a:p>
-        </p:txBody>
-      </p:sp>
-      <p:sp>
-        <p:nvSpPr>
-          <p:cNvPr id="11" name="Shape 9"/>
-          <p:cNvSpPr/>
-          <p:nvPr/>
-        </p:nvSpPr>
-        <p:spPr>
-          <a:xfrm>
-            <a:off x="3222346" y="1371600"/>
-            <a:ext cx="6085332" cy="347472"/>
-          </a:xfrm>
-          <a:prstGeom prst="rect">
-            <a:avLst/>
-          </a:prstGeom>
-          <a:solidFill>
-            <a:srgbClr val="07133D"/>
-          </a:solidFill>
-          <a:ln w="6350">
-            <a:solidFill>
-              <a:srgbClr val="FFFFFF"/>
-            </a:solidFill>
-            <a:prstDash val="solid"/>
-          </a:ln>
-        </p:spPr>
-        <p:txBody>
-          <a:bodyPr/>
-          <a:lstStyle/>
-          <a:p>
-            <a:endParaRPr lang="it-IT"/>
-          </a:p>
-        </p:txBody>
-      </p:sp>
-      <p:sp>
-        <p:nvSpPr>
-          <p:cNvPr id="12" name="Text 10"/>
-          <p:cNvSpPr/>
-          <p:nvPr/>
-        </p:nvSpPr>
-        <p:spPr>
-          <a:xfrm>
-            <a:off x="3286354" y="1458468"/>
-            <a:ext cx="5957316" cy="246888"/>
-          </a:xfrm>
-          <a:prstGeom prst="rect">
-            <a:avLst/>
-          </a:prstGeom>
-          <a:noFill/>
-          <a:ln/>
-        </p:spPr>
-        <p:txBody>
-          <a:bodyPr wrap="square" lIns="254" tIns="254" rIns="254" bIns="254" rtlCol="0" anchor="ctr">
-            <a:normAutofit/>
-          </a:bodyPr>
-          <a:lstStyle/>
-          <a:p>
-            <a:pPr marL="0" indent="0" algn="l">
-              <a:buNone/>
-            </a:pPr>
-            <a:r>
-              <a:rPr lang="en-US" sz="950" b="1" dirty="0">
-                <a:solidFill>
-                  <a:srgbClr val="FFFFFF"/>
-                </a:solidFill>
-                <a:latin typeface="Aptos" pitchFamily="34" charset="0"/>
-                <a:ea typeface="Aptos" pitchFamily="34" charset="-122"/>
-                <a:cs typeface="Aptos" pitchFamily="34" charset="-120"/>
-              </a:rPr>
-              <a:t>Launch assumption</a:t>
-            </a:r>
-            <a:endParaRPr lang="en-US" sz="950" dirty="0"/>
-          </a:p>
-        </p:txBody>
-      </p:sp>
-      <p:sp>
-        <p:nvSpPr>
-          <p:cNvPr id="13" name="Shape 11"/>
-          <p:cNvSpPr/>
-          <p:nvPr/>
-        </p:nvSpPr>
-        <p:spPr>
-          <a:xfrm>
-            <a:off x="9307678" y="1371600"/>
-            <a:ext cx="2323490" cy="347472"/>
-          </a:xfrm>
-          <a:prstGeom prst="rect">
-            <a:avLst/>
-          </a:prstGeom>
-          <a:solidFill>
-            <a:srgbClr val="07133D"/>
-          </a:solidFill>
-          <a:ln w="6350">
-            <a:solidFill>
-              <a:srgbClr val="FFFFFF"/>
-            </a:solidFill>
-            <a:prstDash val="solid"/>
-          </a:ln>
-        </p:spPr>
-        <p:txBody>
-          <a:bodyPr/>
-          <a:lstStyle/>
-          <a:p>
-            <a:endParaRPr lang="it-IT"/>
-          </a:p>
-        </p:txBody>
-      </p:sp>
-      <p:sp>
-        <p:nvSpPr>
-          <p:cNvPr id="14" name="Text 12"/>
-          <p:cNvSpPr/>
-          <p:nvPr/>
-        </p:nvSpPr>
-        <p:spPr>
-          <a:xfrm>
-            <a:off x="9371686" y="1458468"/>
-            <a:ext cx="2195474" cy="246888"/>
-          </a:xfrm>
-          <a:prstGeom prst="rect">
-            <a:avLst/>
-          </a:prstGeom>
-          <a:noFill/>
-          <a:ln/>
-        </p:spPr>
-        <p:txBody>
-          <a:bodyPr wrap="square" lIns="254" tIns="254" rIns="254" bIns="254" rtlCol="0" anchor="ctr">
-            <a:normAutofit/>
-          </a:bodyPr>
-          <a:lstStyle/>
-          <a:p>
-            <a:pPr marL="0" indent="0" algn="l">
-              <a:buNone/>
-            </a:pPr>
-            <a:r>
-              <a:rPr lang="en-US" sz="950" b="1" dirty="0">
-                <a:solidFill>
-                  <a:srgbClr val="FFFFFF"/>
-                </a:solidFill>
-                <a:latin typeface="Aptos" pitchFamily="34" charset="0"/>
-                <a:ea typeface="Aptos" pitchFamily="34" charset="-122"/>
-                <a:cs typeface="Aptos" pitchFamily="34" charset="-120"/>
-              </a:rPr>
-              <a:t>Monthly EUR</a:t>
-            </a:r>
-            <a:endParaRPr lang="en-US" sz="950" dirty="0"/>
-          </a:p>
-        </p:txBody>
-      </p:sp>
-      <p:sp>
-        <p:nvSpPr>
-          <p:cNvPr id="15" name="Shape 13"/>
-          <p:cNvSpPr/>
-          <p:nvPr/>
-        </p:nvSpPr>
-        <p:spPr>
-          <a:xfrm>
-            <a:off x="566928" y="1719072"/>
-            <a:ext cx="2655418" cy="579120"/>
-          </a:xfrm>
-          <a:prstGeom prst="rect">
-            <a:avLst/>
-          </a:prstGeom>
-          <a:solidFill>
-            <a:srgbClr val="FFFFFF"/>
-          </a:solidFill>
-          <a:ln w="6350">
-            <a:solidFill>
-              <a:srgbClr val="D9E1EC"/>
-            </a:solidFill>
-            <a:prstDash val="solid"/>
-          </a:ln>
-        </p:spPr>
-        <p:txBody>
-          <a:bodyPr/>
-          <a:lstStyle/>
-          <a:p>
-            <a:endParaRPr lang="it-IT"/>
-          </a:p>
-        </p:txBody>
-      </p:sp>
-      <p:sp>
-        <p:nvSpPr>
-          <p:cNvPr id="16" name="Text 14"/>
-          <p:cNvSpPr/>
-          <p:nvPr/>
-        </p:nvSpPr>
-        <p:spPr>
-          <a:xfrm>
-            <a:off x="630936" y="1773936"/>
-            <a:ext cx="2527402" cy="487680"/>
-          </a:xfrm>
-          <a:prstGeom prst="rect">
-            <a:avLst/>
-          </a:prstGeom>
-          <a:noFill/>
-          <a:ln/>
-        </p:spPr>
-        <p:txBody>
-          <a:bodyPr wrap="square" lIns="254" tIns="254" rIns="254" bIns="254" rtlCol="0" anchor="ctr">
-            <a:normAutofit/>
-          </a:bodyPr>
-          <a:lstStyle/>
-          <a:p>
-            <a:pPr marL="0" indent="0" algn="l">
-              <a:buNone/>
-            </a:pPr>
-            <a:r>
-              <a:rPr lang="en-US" sz="830" b="1" dirty="0">
-                <a:solidFill>
-                  <a:srgbClr val="07133D"/>
-                </a:solidFill>
-                <a:latin typeface="Aptos" pitchFamily="34" charset="0"/>
-                <a:ea typeface="Aptos" pitchFamily="34" charset="-122"/>
-                <a:cs typeface="Aptos" pitchFamily="34" charset="-120"/>
-              </a:rPr>
-              <a:t>EKS control plane</a:t>
-            </a:r>
-            <a:endParaRPr lang="en-US" sz="830" dirty="0"/>
-          </a:p>
-        </p:txBody>
-      </p:sp>
-      <p:sp>
-        <p:nvSpPr>
-          <p:cNvPr id="17" name="Shape 15"/>
-          <p:cNvSpPr/>
-          <p:nvPr/>
-        </p:nvSpPr>
-        <p:spPr>
-          <a:xfrm>
-            <a:off x="3222346" y="1719072"/>
-            <a:ext cx="6085332" cy="579120"/>
-          </a:xfrm>
-          <a:prstGeom prst="rect">
-            <a:avLst/>
-          </a:prstGeom>
-          <a:solidFill>
-            <a:srgbClr val="FFFFFF"/>
-          </a:solidFill>
-          <a:ln w="6350">
-            <a:solidFill>
-              <a:srgbClr val="D9E1EC"/>
-            </a:solidFill>
-            <a:prstDash val="solid"/>
-          </a:ln>
-        </p:spPr>
-        <p:txBody>
-          <a:bodyPr/>
-          <a:lstStyle/>
-          <a:p>
-            <a:endParaRPr lang="it-IT"/>
-          </a:p>
-        </p:txBody>
-      </p:sp>
-      <p:sp>
-        <p:nvSpPr>
-          <p:cNvPr id="18" name="Text 16"/>
-          <p:cNvSpPr/>
-          <p:nvPr/>
-        </p:nvSpPr>
-        <p:spPr>
-          <a:xfrm>
-            <a:off x="3286354" y="1773936"/>
-            <a:ext cx="5957316" cy="487680"/>
-          </a:xfrm>
-          <a:prstGeom prst="rect">
-            <a:avLst/>
-          </a:prstGeom>
-          <a:noFill/>
-          <a:ln/>
-        </p:spPr>
-        <p:txBody>
-          <a:bodyPr wrap="square" lIns="254" tIns="254" rIns="254" bIns="254" rtlCol="0" anchor="ctr">
-            <a:normAutofit/>
-          </a:bodyPr>
-          <a:lstStyle/>
-          <a:p>
-            <a:pPr marL="0" indent="0" algn="l">
-              <a:buNone/>
-            </a:pPr>
-            <a:r>
-              <a:rPr lang="en-US" sz="830" dirty="0">
-                <a:solidFill>
-                  <a:srgbClr val="5B6475"/>
-                </a:solidFill>
-                <a:latin typeface="Aptos" pitchFamily="34" charset="0"/>
-                <a:ea typeface="Aptos" pitchFamily="34" charset="-122"/>
-                <a:cs typeface="Aptos" pitchFamily="34" charset="-120"/>
-              </a:rPr>
-              <a:t>$0.10/hour × 730</a:t>
-            </a:r>
-            <a:endParaRPr lang="en-US" sz="830" dirty="0"/>
-          </a:p>
-        </p:txBody>
-      </p:sp>
-      <p:sp>
-        <p:nvSpPr>
-          <p:cNvPr id="19" name="Shape 17"/>
-          <p:cNvSpPr/>
-          <p:nvPr/>
-        </p:nvSpPr>
-        <p:spPr>
-          <a:xfrm>
-            <a:off x="9307678" y="1719072"/>
-            <a:ext cx="2323490" cy="579120"/>
-          </a:xfrm>
-          <a:prstGeom prst="rect">
-            <a:avLst/>
-          </a:prstGeom>
-          <a:solidFill>
-            <a:srgbClr val="FFFFFF"/>
-          </a:solidFill>
-          <a:ln w="6350">
-            <a:solidFill>
-              <a:srgbClr val="D9E1EC"/>
-            </a:solidFill>
-            <a:prstDash val="solid"/>
-          </a:ln>
-        </p:spPr>
-        <p:txBody>
-          <a:bodyPr/>
-          <a:lstStyle/>
-          <a:p>
-            <a:endParaRPr lang="it-IT"/>
-          </a:p>
-        </p:txBody>
-      </p:sp>
-      <p:sp>
-        <p:nvSpPr>
-          <p:cNvPr id="20" name="Text 18"/>
-          <p:cNvSpPr/>
-          <p:nvPr/>
-        </p:nvSpPr>
-        <p:spPr>
-          <a:xfrm>
-            <a:off x="9371686" y="1773936"/>
-            <a:ext cx="2195474" cy="487680"/>
-          </a:xfrm>
-          <a:prstGeom prst="rect">
-            <a:avLst/>
-          </a:prstGeom>
-          <a:noFill/>
-          <a:ln/>
-        </p:spPr>
-        <p:txBody>
-          <a:bodyPr wrap="square" lIns="254" tIns="254" rIns="254" bIns="254" rtlCol="0" anchor="ctr">
-            <a:normAutofit/>
-          </a:bodyPr>
-          <a:lstStyle/>
-          <a:p>
-            <a:pPr marL="0" indent="0" algn="l">
-              <a:buNone/>
-            </a:pPr>
-            <a:r>
-              <a:rPr lang="en-US" sz="830" dirty="0">
-                <a:solidFill>
-                  <a:srgbClr val="5B6475"/>
-                </a:solidFill>
-                <a:latin typeface="Aptos" pitchFamily="34" charset="0"/>
-                <a:ea typeface="Aptos" pitchFamily="34" charset="-122"/>
-                <a:cs typeface="Aptos" pitchFamily="34" charset="-120"/>
-              </a:rPr>
-              <a:t>€64</a:t>
-            </a:r>
-            <a:endParaRPr lang="en-US" sz="830" dirty="0"/>
-          </a:p>
-        </p:txBody>
-      </p:sp>
-      <p:sp>
-        <p:nvSpPr>
-          <p:cNvPr id="21" name="Shape 19"/>
-          <p:cNvSpPr/>
-          <p:nvPr/>
-        </p:nvSpPr>
-        <p:spPr>
-          <a:xfrm>
-            <a:off x="566928" y="2298192"/>
-            <a:ext cx="2655418" cy="579120"/>
-          </a:xfrm>
-          <a:prstGeom prst="rect">
-            <a:avLst/>
-          </a:prstGeom>
-          <a:solidFill>
-            <a:srgbClr val="F8FAFC"/>
-          </a:solidFill>
-          <a:ln w="6350">
-            <a:solidFill>
-              <a:srgbClr val="D9E1EC"/>
-            </a:solidFill>
-            <a:prstDash val="solid"/>
-          </a:ln>
-        </p:spPr>
-        <p:txBody>
-          <a:bodyPr/>
-          <a:lstStyle/>
-          <a:p>
-            <a:endParaRPr lang="it-IT"/>
-          </a:p>
-        </p:txBody>
-      </p:sp>
-      <p:sp>
-        <p:nvSpPr>
-          <p:cNvPr id="22" name="Text 20"/>
-          <p:cNvSpPr/>
-          <p:nvPr/>
-        </p:nvSpPr>
-        <p:spPr>
-          <a:xfrm>
-            <a:off x="630936" y="2353056"/>
-            <a:ext cx="2527402" cy="487680"/>
-          </a:xfrm>
-          <a:prstGeom prst="rect">
-            <a:avLst/>
-          </a:prstGeom>
-          <a:noFill/>
-          <a:ln/>
-        </p:spPr>
-        <p:txBody>
-          <a:bodyPr wrap="square" lIns="254" tIns="254" rIns="254" bIns="254" rtlCol="0" anchor="ctr">
-            <a:normAutofit/>
-          </a:bodyPr>
-          <a:lstStyle/>
-          <a:p>
-            <a:pPr marL="0" indent="0" algn="l">
-              <a:buNone/>
-            </a:pPr>
-            <a:r>
-              <a:rPr lang="en-US" sz="830" b="1" dirty="0">
-                <a:solidFill>
-                  <a:srgbClr val="07133D"/>
-                </a:solidFill>
-                <a:latin typeface="Aptos" pitchFamily="34" charset="0"/>
-                <a:ea typeface="Aptos" pitchFamily="34" charset="-122"/>
-                <a:cs typeface="Aptos" pitchFamily="34" charset="-120"/>
-              </a:rPr>
-              <a:t>EKS nodes + disks</a:t>
-            </a:r>
-            <a:endParaRPr lang="en-US" sz="830" dirty="0"/>
-          </a:p>
-        </p:txBody>
-      </p:sp>
-      <p:sp>
-        <p:nvSpPr>
-          <p:cNvPr id="23" name="Shape 21"/>
-          <p:cNvSpPr/>
-          <p:nvPr/>
-        </p:nvSpPr>
-        <p:spPr>
-          <a:xfrm>
-            <a:off x="3222346" y="2298192"/>
-            <a:ext cx="6085332" cy="579120"/>
-          </a:xfrm>
-          <a:prstGeom prst="rect">
-            <a:avLst/>
-          </a:prstGeom>
-          <a:solidFill>
-            <a:srgbClr val="F8FAFC"/>
-          </a:solidFill>
-          <a:ln w="6350">
-            <a:solidFill>
-              <a:srgbClr val="D9E1EC"/>
-            </a:solidFill>
-            <a:prstDash val="solid"/>
-          </a:ln>
-        </p:spPr>
-        <p:txBody>
-          <a:bodyPr/>
-          <a:lstStyle/>
-          <a:p>
-            <a:endParaRPr lang="it-IT"/>
-          </a:p>
-        </p:txBody>
-      </p:sp>
-      <p:sp>
-        <p:nvSpPr>
-          <p:cNvPr id="24" name="Text 22"/>
-          <p:cNvSpPr/>
-          <p:nvPr/>
-        </p:nvSpPr>
-        <p:spPr>
-          <a:xfrm>
-            <a:off x="3286354" y="2353056"/>
-            <a:ext cx="5957316" cy="487680"/>
-          </a:xfrm>
-          <a:prstGeom prst="rect">
-            <a:avLst/>
-          </a:prstGeom>
-          <a:noFill/>
-          <a:ln/>
-        </p:spPr>
-        <p:txBody>
-          <a:bodyPr wrap="square" lIns="254" tIns="254" rIns="254" bIns="254" rtlCol="0" anchor="ctr">
-            <a:normAutofit/>
-          </a:bodyPr>
-          <a:lstStyle/>
-          <a:p>
-            <a:pPr marL="0" indent="0" algn="l">
-              <a:buNone/>
-            </a:pPr>
-            <a:r>
-              <a:rPr lang="en-US" sz="830" dirty="0">
-                <a:solidFill>
-                  <a:srgbClr val="5B6475"/>
-                </a:solidFill>
-                <a:latin typeface="Aptos" pitchFamily="34" charset="0"/>
-                <a:ea typeface="Aptos" pitchFamily="34" charset="-122"/>
-                <a:cs typeface="Aptos" pitchFamily="34" charset="-120"/>
-              </a:rPr>
-              <a:t>Two m6i.large, one per AZ; two 30 GB gp3 disks</a:t>
-            </a:r>
-            <a:endParaRPr lang="en-US" sz="830" dirty="0"/>
-          </a:p>
-        </p:txBody>
-      </p:sp>
-      <p:sp>
-        <p:nvSpPr>
-          <p:cNvPr id="25" name="Shape 23"/>
-          <p:cNvSpPr/>
-          <p:nvPr/>
-        </p:nvSpPr>
-        <p:spPr>
-          <a:xfrm>
-            <a:off x="9307678" y="2298192"/>
-            <a:ext cx="2323490" cy="579120"/>
-          </a:xfrm>
-          <a:prstGeom prst="rect">
-            <a:avLst/>
-          </a:prstGeom>
-          <a:solidFill>
-            <a:srgbClr val="F8FAFC"/>
-          </a:solidFill>
-          <a:ln w="6350">
-            <a:solidFill>
-              <a:srgbClr val="D9E1EC"/>
-            </a:solidFill>
-            <a:prstDash val="solid"/>
-          </a:ln>
-        </p:spPr>
-        <p:txBody>
-          <a:bodyPr/>
-          <a:lstStyle/>
-          <a:p>
-            <a:endParaRPr lang="it-IT"/>
-          </a:p>
-        </p:txBody>
-      </p:sp>
-      <p:sp>
-        <p:nvSpPr>
-          <p:cNvPr id="26" name="Text 24"/>
-          <p:cNvSpPr/>
-          <p:nvPr/>
-        </p:nvSpPr>
-        <p:spPr>
-          <a:xfrm>
-            <a:off x="9371686" y="2353056"/>
-            <a:ext cx="2195474" cy="487680"/>
-          </a:xfrm>
-          <a:prstGeom prst="rect">
-            <a:avLst/>
-          </a:prstGeom>
-          <a:noFill/>
-          <a:ln/>
-        </p:spPr>
-        <p:txBody>
-          <a:bodyPr wrap="square" lIns="254" tIns="254" rIns="254" bIns="254" rtlCol="0" anchor="ctr">
-            <a:normAutofit/>
-          </a:bodyPr>
-          <a:lstStyle/>
-          <a:p>
-            <a:pPr marL="0" indent="0" algn="l">
-              <a:buNone/>
-            </a:pPr>
-            <a:r>
-              <a:rPr lang="en-US" sz="830" dirty="0">
-                <a:solidFill>
-                  <a:srgbClr val="5B6475"/>
-                </a:solidFill>
-                <a:latin typeface="Aptos" pitchFamily="34" charset="0"/>
-                <a:ea typeface="Aptos" pitchFamily="34" charset="-122"/>
-                <a:cs typeface="Aptos" pitchFamily="34" charset="-120"/>
-              </a:rPr>
-              <a:t>€141</a:t>
-            </a:r>
-            <a:endParaRPr lang="en-US" sz="830" dirty="0"/>
-          </a:p>
-        </p:txBody>
-      </p:sp>
-      <p:sp>
-        <p:nvSpPr>
-          <p:cNvPr id="27" name="Shape 25"/>
-          <p:cNvSpPr/>
-          <p:nvPr/>
-        </p:nvSpPr>
-        <p:spPr>
-          <a:xfrm>
-            <a:off x="566928" y="2877312"/>
-            <a:ext cx="2655418" cy="579120"/>
-          </a:xfrm>
-          <a:prstGeom prst="rect">
-            <a:avLst/>
-          </a:prstGeom>
-          <a:solidFill>
-            <a:srgbClr val="FFFFFF"/>
-          </a:solidFill>
-          <a:ln w="6350">
-            <a:solidFill>
-              <a:srgbClr val="D9E1EC"/>
-            </a:solidFill>
-            <a:prstDash val="solid"/>
-          </a:ln>
-        </p:spPr>
-        <p:txBody>
-          <a:bodyPr/>
-          <a:lstStyle/>
-          <a:p>
-            <a:endParaRPr lang="it-IT"/>
-          </a:p>
-        </p:txBody>
-      </p:sp>
-      <p:sp>
-        <p:nvSpPr>
-          <p:cNvPr id="28" name="Text 26"/>
-          <p:cNvSpPr/>
-          <p:nvPr/>
-        </p:nvSpPr>
-        <p:spPr>
-          <a:xfrm>
-            <a:off x="630936" y="2932176"/>
-            <a:ext cx="2527402" cy="487680"/>
-          </a:xfrm>
-          <a:prstGeom prst="rect">
-            <a:avLst/>
-          </a:prstGeom>
-          <a:noFill/>
-          <a:ln/>
-        </p:spPr>
-        <p:txBody>
-          <a:bodyPr wrap="square" lIns="254" tIns="254" rIns="254" bIns="254" rtlCol="0" anchor="ctr">
-            <a:normAutofit/>
-          </a:bodyPr>
-          <a:lstStyle/>
-          <a:p>
-            <a:pPr marL="0" indent="0" algn="l">
-              <a:buNone/>
-            </a:pPr>
-            <a:r>
-              <a:rPr lang="en-US" sz="830" b="1" dirty="0">
-                <a:solidFill>
-                  <a:srgbClr val="07133D"/>
-                </a:solidFill>
-                <a:latin typeface="Aptos" pitchFamily="34" charset="0"/>
-                <a:ea typeface="Aptos" pitchFamily="34" charset="-122"/>
-                <a:cs typeface="Aptos" pitchFamily="34" charset="-120"/>
-              </a:rPr>
-              <a:t>RDS PostgreSQL</a:t>
-            </a:r>
-            <a:endParaRPr lang="en-US" sz="830" dirty="0"/>
-          </a:p>
-        </p:txBody>
-      </p:sp>
-      <p:sp>
-        <p:nvSpPr>
-          <p:cNvPr id="29" name="Shape 27"/>
-          <p:cNvSpPr/>
-          <p:nvPr/>
-        </p:nvSpPr>
-        <p:spPr>
-          <a:xfrm>
-            <a:off x="3222346" y="2877312"/>
-            <a:ext cx="6085332" cy="579120"/>
-          </a:xfrm>
-          <a:prstGeom prst="rect">
-            <a:avLst/>
-          </a:prstGeom>
-          <a:solidFill>
-            <a:srgbClr val="FFFFFF"/>
-          </a:solidFill>
-          <a:ln w="6350">
-            <a:solidFill>
-              <a:srgbClr val="D9E1EC"/>
-            </a:solidFill>
-            <a:prstDash val="solid"/>
-          </a:ln>
-        </p:spPr>
-        <p:txBody>
-          <a:bodyPr/>
-          <a:lstStyle/>
-          <a:p>
-            <a:endParaRPr lang="it-IT"/>
-          </a:p>
-        </p:txBody>
-      </p:sp>
-      <p:sp>
-        <p:nvSpPr>
-          <p:cNvPr id="30" name="Text 28"/>
-          <p:cNvSpPr/>
-          <p:nvPr/>
-        </p:nvSpPr>
-        <p:spPr>
-          <a:xfrm>
-            <a:off x="3286354" y="2932176"/>
-            <a:ext cx="5957316" cy="487680"/>
-          </a:xfrm>
-          <a:prstGeom prst="rect">
-            <a:avLst/>
-          </a:prstGeom>
-          <a:noFill/>
-          <a:ln/>
-        </p:spPr>
-        <p:txBody>
-          <a:bodyPr wrap="square" lIns="254" tIns="254" rIns="254" bIns="254" rtlCol="0" anchor="ctr">
-            <a:normAutofit/>
-          </a:bodyPr>
-          <a:lstStyle/>
-          <a:p>
-            <a:pPr marL="0" indent="0" algn="l">
-              <a:buNone/>
-            </a:pPr>
-            <a:r>
-              <a:rPr lang="en-US" sz="830" dirty="0">
-                <a:solidFill>
-                  <a:srgbClr val="5B6475"/>
-                </a:solidFill>
-                <a:latin typeface="Aptos" pitchFamily="34" charset="0"/>
-                <a:ea typeface="Aptos" pitchFamily="34" charset="-122"/>
-                <a:cs typeface="Aptos" pitchFamily="34" charset="-120"/>
-              </a:rPr>
-              <a:t>db.m6g.large Multi-AZ including one standby; 50 GB gp3</a:t>
-            </a:r>
-            <a:endParaRPr lang="en-US" sz="830" dirty="0"/>
-          </a:p>
-        </p:txBody>
-      </p:sp>
-      <p:sp>
-        <p:nvSpPr>
-          <p:cNvPr id="31" name="Shape 29"/>
-          <p:cNvSpPr/>
-          <p:nvPr/>
-        </p:nvSpPr>
-        <p:spPr>
-          <a:xfrm>
-            <a:off x="9307678" y="2877312"/>
-            <a:ext cx="2323490" cy="579120"/>
-          </a:xfrm>
-          <a:prstGeom prst="rect">
-            <a:avLst/>
-          </a:prstGeom>
-          <a:solidFill>
-            <a:srgbClr val="FFFFFF"/>
-          </a:solidFill>
-          <a:ln w="6350">
-            <a:solidFill>
-              <a:srgbClr val="D9E1EC"/>
-            </a:solidFill>
-            <a:prstDash val="solid"/>
-          </a:ln>
-        </p:spPr>
-        <p:txBody>
-          <a:bodyPr/>
-          <a:lstStyle/>
-          <a:p>
-            <a:endParaRPr lang="it-IT"/>
-          </a:p>
-        </p:txBody>
-      </p:sp>
-      <p:sp>
-        <p:nvSpPr>
-          <p:cNvPr id="32" name="Text 30"/>
-          <p:cNvSpPr/>
-          <p:nvPr/>
-        </p:nvSpPr>
-        <p:spPr>
-          <a:xfrm>
-            <a:off x="9371686" y="2932176"/>
-            <a:ext cx="2195474" cy="487680"/>
-          </a:xfrm>
-          <a:prstGeom prst="rect">
-            <a:avLst/>
-          </a:prstGeom>
-          <a:noFill/>
-          <a:ln/>
-        </p:spPr>
-        <p:txBody>
-          <a:bodyPr wrap="square" lIns="254" tIns="254" rIns="254" bIns="254" rtlCol="0" anchor="ctr">
-            <a:normAutofit/>
-          </a:bodyPr>
-          <a:lstStyle/>
-          <a:p>
-            <a:pPr marL="0" indent="0" algn="l">
-              <a:buNone/>
-            </a:pPr>
-            <a:r>
-              <a:rPr lang="en-US" sz="830" dirty="0">
-                <a:solidFill>
-                  <a:srgbClr val="5B6475"/>
-                </a:solidFill>
-                <a:latin typeface="Aptos" pitchFamily="34" charset="0"/>
-                <a:ea typeface="Aptos" pitchFamily="34" charset="-122"/>
-                <a:cs typeface="Aptos" pitchFamily="34" charset="-120"/>
-              </a:rPr>
-              <a:t>€235</a:t>
-            </a:r>
-            <a:endParaRPr lang="en-US" sz="830" dirty="0"/>
-          </a:p>
-        </p:txBody>
-      </p:sp>
-      <p:sp>
-        <p:nvSpPr>
-          <p:cNvPr id="33" name="Shape 31"/>
-          <p:cNvSpPr/>
-          <p:nvPr/>
-        </p:nvSpPr>
-        <p:spPr>
-          <a:xfrm>
-            <a:off x="566928" y="3456432"/>
-            <a:ext cx="2655418" cy="579120"/>
-          </a:xfrm>
-          <a:prstGeom prst="rect">
-            <a:avLst/>
-          </a:prstGeom>
-          <a:solidFill>
-            <a:srgbClr val="F8FAFC"/>
-          </a:solidFill>
-          <a:ln w="6350">
-            <a:solidFill>
-              <a:srgbClr val="D9E1EC"/>
-            </a:solidFill>
-            <a:prstDash val="solid"/>
-          </a:ln>
-        </p:spPr>
-        <p:txBody>
-          <a:bodyPr/>
-          <a:lstStyle/>
-          <a:p>
-            <a:endParaRPr lang="it-IT"/>
-          </a:p>
-        </p:txBody>
-      </p:sp>
-      <p:sp>
-        <p:nvSpPr>
-          <p:cNvPr id="34" name="Text 32"/>
-          <p:cNvSpPr/>
-          <p:nvPr/>
-        </p:nvSpPr>
-        <p:spPr>
-          <a:xfrm>
-            <a:off x="630936" y="3511296"/>
-            <a:ext cx="2527402" cy="487680"/>
-          </a:xfrm>
-          <a:prstGeom prst="rect">
-            <a:avLst/>
-          </a:prstGeom>
-          <a:noFill/>
-          <a:ln/>
-        </p:spPr>
-        <p:txBody>
-          <a:bodyPr wrap="square" lIns="254" tIns="254" rIns="254" bIns="254" rtlCol="0" anchor="ctr">
-            <a:normAutofit/>
-          </a:bodyPr>
-          <a:lstStyle/>
-          <a:p>
-            <a:pPr marL="0" indent="0" algn="l">
-              <a:buNone/>
-            </a:pPr>
-            <a:r>
-              <a:rPr lang="en-US" sz="830" b="1" dirty="0">
-                <a:solidFill>
-                  <a:srgbClr val="07133D"/>
-                </a:solidFill>
-                <a:latin typeface="Aptos" pitchFamily="34" charset="0"/>
-                <a:ea typeface="Aptos" pitchFamily="34" charset="-122"/>
-                <a:cs typeface="Aptos" pitchFamily="34" charset="-120"/>
-              </a:rPr>
-              <a:t>Ingress + network</a:t>
-            </a:r>
-            <a:endParaRPr lang="en-US" sz="830" dirty="0"/>
-          </a:p>
-        </p:txBody>
-      </p:sp>
-      <p:sp>
-        <p:nvSpPr>
-          <p:cNvPr id="35" name="Shape 33"/>
-          <p:cNvSpPr/>
-          <p:nvPr/>
-        </p:nvSpPr>
-        <p:spPr>
-          <a:xfrm>
-            <a:off x="3222346" y="3456432"/>
-            <a:ext cx="6085332" cy="579120"/>
-          </a:xfrm>
-          <a:prstGeom prst="rect">
-            <a:avLst/>
-          </a:prstGeom>
-          <a:solidFill>
-            <a:srgbClr val="F8FAFC"/>
-          </a:solidFill>
-          <a:ln w="6350">
-            <a:solidFill>
-              <a:srgbClr val="D9E1EC"/>
-            </a:solidFill>
-            <a:prstDash val="solid"/>
-          </a:ln>
-        </p:spPr>
-        <p:txBody>
-          <a:bodyPr/>
-          <a:lstStyle/>
-          <a:p>
-            <a:endParaRPr lang="it-IT"/>
-          </a:p>
-        </p:txBody>
-      </p:sp>
-      <p:sp>
-        <p:nvSpPr>
-          <p:cNvPr id="36" name="Text 34"/>
-          <p:cNvSpPr/>
-          <p:nvPr/>
-        </p:nvSpPr>
-        <p:spPr>
-          <a:xfrm>
-            <a:off x="3286354" y="3511296"/>
-            <a:ext cx="5957316" cy="487680"/>
-          </a:xfrm>
-          <a:prstGeom prst="rect">
-            <a:avLst/>
-          </a:prstGeom>
-          <a:noFill/>
-          <a:ln/>
-        </p:spPr>
-        <p:txBody>
-          <a:bodyPr wrap="square" lIns="254" tIns="254" rIns="254" bIns="254" rtlCol="0" anchor="ctr">
-            <a:normAutofit/>
-          </a:bodyPr>
-          <a:lstStyle/>
-          <a:p>
-            <a:pPr marL="0" indent="0" algn="l">
-              <a:buNone/>
-            </a:pPr>
-            <a:r>
-              <a:rPr lang="en-US" sz="830" dirty="0">
-                <a:solidFill>
-                  <a:srgbClr val="5B6475"/>
-                </a:solidFill>
-                <a:latin typeface="Aptos" pitchFamily="34" charset="0"/>
-                <a:ea typeface="Aptos" pitchFamily="34" charset="-122"/>
-                <a:cs typeface="Aptos" pitchFamily="34" charset="-120"/>
-              </a:rPr>
-              <a:t>Two NAT GWs, ALB, IPv4, basic WAF, modest transfer</a:t>
-            </a:r>
-            <a:endParaRPr lang="en-US" sz="830" dirty="0"/>
-          </a:p>
-        </p:txBody>
-      </p:sp>
-      <p:sp>
-        <p:nvSpPr>
-          <p:cNvPr id="37" name="Shape 35"/>
-          <p:cNvSpPr/>
-          <p:nvPr/>
-        </p:nvSpPr>
-        <p:spPr>
-          <a:xfrm>
-            <a:off x="9307678" y="3456432"/>
-            <a:ext cx="2323490" cy="579120"/>
-          </a:xfrm>
-          <a:prstGeom prst="rect">
-            <a:avLst/>
-          </a:prstGeom>
-          <a:solidFill>
-            <a:srgbClr val="F8FAFC"/>
-          </a:solidFill>
-          <a:ln w="6350">
-            <a:solidFill>
-              <a:srgbClr val="D9E1EC"/>
-            </a:solidFill>
-            <a:prstDash val="solid"/>
-          </a:ln>
-        </p:spPr>
-        <p:txBody>
-          <a:bodyPr/>
-          <a:lstStyle/>
-          <a:p>
-            <a:endParaRPr lang="it-IT"/>
-          </a:p>
-        </p:txBody>
-      </p:sp>
-      <p:sp>
-        <p:nvSpPr>
-          <p:cNvPr id="38" name="Text 36"/>
-          <p:cNvSpPr/>
-          <p:nvPr/>
-        </p:nvSpPr>
-        <p:spPr>
-          <a:xfrm>
-            <a:off x="9371686" y="3511296"/>
-            <a:ext cx="2195474" cy="487680"/>
-          </a:xfrm>
-          <a:prstGeom prst="rect">
-            <a:avLst/>
-          </a:prstGeom>
-          <a:noFill/>
-          <a:ln/>
-        </p:spPr>
-        <p:txBody>
-          <a:bodyPr wrap="square" lIns="254" tIns="254" rIns="254" bIns="254" rtlCol="0" anchor="ctr">
-            <a:normAutofit/>
-          </a:bodyPr>
-          <a:lstStyle/>
-          <a:p>
-            <a:pPr marL="0" indent="0" algn="l">
-              <a:buNone/>
-            </a:pPr>
-            <a:r>
-              <a:rPr lang="en-US" sz="830" dirty="0">
-                <a:solidFill>
-                  <a:srgbClr val="5B6475"/>
-                </a:solidFill>
-                <a:latin typeface="Aptos" pitchFamily="34" charset="0"/>
-                <a:ea typeface="Aptos" pitchFamily="34" charset="-122"/>
-                <a:cs typeface="Aptos" pitchFamily="34" charset="-120"/>
-              </a:rPr>
-              <a:t>€105–125</a:t>
-            </a:r>
-            <a:endParaRPr lang="en-US" sz="830" dirty="0"/>
-          </a:p>
-        </p:txBody>
-      </p:sp>
-      <p:sp>
-        <p:nvSpPr>
-          <p:cNvPr id="39" name="Shape 37"/>
-          <p:cNvSpPr/>
-          <p:nvPr/>
-        </p:nvSpPr>
-        <p:spPr>
-          <a:xfrm>
-            <a:off x="566928" y="4035552"/>
-            <a:ext cx="2655418" cy="579120"/>
-          </a:xfrm>
-          <a:prstGeom prst="rect">
-            <a:avLst/>
-          </a:prstGeom>
-          <a:solidFill>
-            <a:srgbClr val="FFFFFF"/>
-          </a:solidFill>
-          <a:ln w="6350">
-            <a:solidFill>
-              <a:srgbClr val="D9E1EC"/>
-            </a:solidFill>
-            <a:prstDash val="solid"/>
-          </a:ln>
-        </p:spPr>
-        <p:txBody>
-          <a:bodyPr/>
-          <a:lstStyle/>
-          <a:p>
-            <a:endParaRPr lang="it-IT"/>
-          </a:p>
-        </p:txBody>
-      </p:sp>
-      <p:sp>
-        <p:nvSpPr>
-          <p:cNvPr id="40" name="Text 38"/>
-          <p:cNvSpPr/>
-          <p:nvPr/>
-        </p:nvSpPr>
-        <p:spPr>
-          <a:xfrm>
-            <a:off x="630936" y="4090416"/>
-            <a:ext cx="2527402" cy="487680"/>
-          </a:xfrm>
-          <a:prstGeom prst="rect">
-            <a:avLst/>
-          </a:prstGeom>
-          <a:noFill/>
-          <a:ln/>
-        </p:spPr>
-        <p:txBody>
-          <a:bodyPr wrap="square" lIns="254" tIns="254" rIns="254" bIns="254" rtlCol="0" anchor="ctr">
-            <a:normAutofit/>
-          </a:bodyPr>
-          <a:lstStyle/>
-          <a:p>
-            <a:pPr marL="0" indent="0" algn="l">
-              <a:buNone/>
-            </a:pPr>
-            <a:r>
-              <a:rPr lang="en-US" sz="830" b="1" dirty="0">
-                <a:solidFill>
-                  <a:srgbClr val="07133D"/>
-                </a:solidFill>
-                <a:latin typeface="Aptos" pitchFamily="34" charset="0"/>
-                <a:ea typeface="Aptos" pitchFamily="34" charset="-122"/>
-                <a:cs typeface="Aptos" pitchFamily="34" charset="-120"/>
-              </a:rPr>
-              <a:t>Telemetry</a:t>
-            </a:r>
-            <a:endParaRPr lang="en-US" sz="830" dirty="0"/>
-          </a:p>
-        </p:txBody>
-      </p:sp>
-      <p:sp>
-        <p:nvSpPr>
-          <p:cNvPr id="41" name="Shape 39"/>
-          <p:cNvSpPr/>
-          <p:nvPr/>
-        </p:nvSpPr>
-        <p:spPr>
-          <a:xfrm>
-            <a:off x="3222346" y="4035552"/>
-            <a:ext cx="6085332" cy="579120"/>
-          </a:xfrm>
-          <a:prstGeom prst="rect">
-            <a:avLst/>
-          </a:prstGeom>
-          <a:solidFill>
-            <a:srgbClr val="FFFFFF"/>
-          </a:solidFill>
-          <a:ln w="6350">
-            <a:solidFill>
-              <a:srgbClr val="D9E1EC"/>
-            </a:solidFill>
-            <a:prstDash val="solid"/>
-          </a:ln>
-        </p:spPr>
-        <p:txBody>
-          <a:bodyPr/>
-          <a:lstStyle/>
-          <a:p>
-            <a:endParaRPr lang="it-IT"/>
-          </a:p>
-        </p:txBody>
-      </p:sp>
-      <p:sp>
-        <p:nvSpPr>
-          <p:cNvPr id="42" name="Text 40"/>
-          <p:cNvSpPr/>
-          <p:nvPr/>
-        </p:nvSpPr>
-        <p:spPr>
-          <a:xfrm>
-            <a:off x="3286354" y="4090416"/>
-            <a:ext cx="5957316" cy="487680"/>
-          </a:xfrm>
-          <a:prstGeom prst="rect">
-            <a:avLst/>
-          </a:prstGeom>
-          <a:noFill/>
-          <a:ln/>
-        </p:spPr>
-        <p:txBody>
-          <a:bodyPr wrap="square" lIns="254" tIns="254" rIns="254" bIns="254" rtlCol="0" anchor="ctr">
-            <a:normAutofit/>
-          </a:bodyPr>
-          <a:lstStyle/>
-          <a:p>
-            <a:pPr marL="0" indent="0" algn="l">
-              <a:buNone/>
-            </a:pPr>
-            <a:r>
-              <a:rPr lang="en-US" sz="830" dirty="0">
-                <a:solidFill>
-                  <a:srgbClr val="5B6475"/>
-                </a:solidFill>
-                <a:latin typeface="Aptos" pitchFamily="34" charset="0"/>
-                <a:ea typeface="Aptos" pitchFamily="34" charset="-122"/>
-                <a:cs typeface="Aptos" pitchFamily="34" charset="-120"/>
-              </a:rPr>
-              <a:t>10–30 GB logs, 50–200 metrics, alarms, limited traces</a:t>
-            </a:r>
-            <a:endParaRPr lang="en-US" sz="830" dirty="0"/>
-          </a:p>
-        </p:txBody>
-      </p:sp>
-      <p:sp>
-        <p:nvSpPr>
-          <p:cNvPr id="43" name="Shape 41"/>
-          <p:cNvSpPr/>
-          <p:nvPr/>
-        </p:nvSpPr>
-        <p:spPr>
-          <a:xfrm>
-            <a:off x="9307678" y="4035552"/>
-            <a:ext cx="2323490" cy="579120"/>
-          </a:xfrm>
-          <a:prstGeom prst="rect">
-            <a:avLst/>
-          </a:prstGeom>
-          <a:solidFill>
-            <a:srgbClr val="FFFFFF"/>
-          </a:solidFill>
-          <a:ln w="6350">
-            <a:solidFill>
-              <a:srgbClr val="D9E1EC"/>
-            </a:solidFill>
-            <a:prstDash val="solid"/>
-          </a:ln>
-        </p:spPr>
-        <p:txBody>
-          <a:bodyPr/>
-          <a:lstStyle/>
-          <a:p>
-            <a:endParaRPr lang="it-IT"/>
-          </a:p>
-        </p:txBody>
-      </p:sp>
-      <p:sp>
-        <p:nvSpPr>
-          <p:cNvPr id="44" name="Text 42"/>
-          <p:cNvSpPr/>
-          <p:nvPr/>
-        </p:nvSpPr>
-        <p:spPr>
-          <a:xfrm>
-            <a:off x="9371686" y="4090416"/>
-            <a:ext cx="2195474" cy="487680"/>
-          </a:xfrm>
-          <a:prstGeom prst="rect">
-            <a:avLst/>
-          </a:prstGeom>
-          <a:noFill/>
-          <a:ln/>
-        </p:spPr>
-        <p:txBody>
-          <a:bodyPr wrap="square" lIns="254" tIns="254" rIns="254" bIns="254" rtlCol="0" anchor="ctr">
-            <a:normAutofit/>
-          </a:bodyPr>
-          <a:lstStyle/>
-          <a:p>
-            <a:pPr marL="0" indent="0" algn="l">
-              <a:buNone/>
-            </a:pPr>
-            <a:r>
-              <a:rPr lang="en-US" sz="830" dirty="0">
-                <a:solidFill>
-                  <a:srgbClr val="5B6475"/>
-                </a:solidFill>
-                <a:latin typeface="Aptos" pitchFamily="34" charset="0"/>
-                <a:ea typeface="Aptos" pitchFamily="34" charset="-122"/>
-                <a:cs typeface="Aptos" pitchFamily="34" charset="-120"/>
-              </a:rPr>
-              <a:t>€30–90</a:t>
-            </a:r>
-            <a:endParaRPr lang="en-US" sz="830" dirty="0"/>
-          </a:p>
-        </p:txBody>
-      </p:sp>
-      <p:sp>
-        <p:nvSpPr>
-          <p:cNvPr id="45" name="Shape 43"/>
-          <p:cNvSpPr/>
-          <p:nvPr/>
-        </p:nvSpPr>
-        <p:spPr>
-          <a:xfrm>
-            <a:off x="566928" y="4614672"/>
-            <a:ext cx="2655418" cy="579120"/>
-          </a:xfrm>
-          <a:prstGeom prst="rect">
-            <a:avLst/>
-          </a:prstGeom>
-          <a:solidFill>
-            <a:srgbClr val="F8FAFC"/>
-          </a:solidFill>
-          <a:ln w="6350">
-            <a:solidFill>
-              <a:srgbClr val="D9E1EC"/>
-            </a:solidFill>
-            <a:prstDash val="solid"/>
-          </a:ln>
-        </p:spPr>
-        <p:txBody>
-          <a:bodyPr/>
-          <a:lstStyle/>
-          <a:p>
-            <a:endParaRPr lang="it-IT"/>
-          </a:p>
-        </p:txBody>
-      </p:sp>
-      <p:sp>
-        <p:nvSpPr>
-          <p:cNvPr id="46" name="Text 44"/>
-          <p:cNvSpPr/>
-          <p:nvPr/>
-        </p:nvSpPr>
-        <p:spPr>
-          <a:xfrm>
-            <a:off x="630936" y="4669536"/>
-            <a:ext cx="2527402" cy="487680"/>
-          </a:xfrm>
-          <a:prstGeom prst="rect">
-            <a:avLst/>
-          </a:prstGeom>
-          <a:noFill/>
-          <a:ln/>
-        </p:spPr>
-        <p:txBody>
-          <a:bodyPr wrap="square" lIns="254" tIns="254" rIns="254" bIns="254" rtlCol="0" anchor="ctr">
-            <a:normAutofit/>
-          </a:bodyPr>
-          <a:lstStyle/>
-          <a:p>
-            <a:pPr marL="0" indent="0" algn="l">
-              <a:buNone/>
-            </a:pPr>
-            <a:r>
-              <a:rPr lang="en-US" sz="830" b="1" dirty="0">
-                <a:solidFill>
-                  <a:srgbClr val="07133D"/>
-                </a:solidFill>
-                <a:latin typeface="Aptos" pitchFamily="34" charset="0"/>
-                <a:ea typeface="Aptos" pitchFamily="34" charset="-122"/>
-                <a:cs typeface="Aptos" pitchFamily="34" charset="-120"/>
-              </a:rPr>
-              <a:t>Step Functions + other</a:t>
-            </a:r>
-            <a:endParaRPr lang="en-US" sz="830" dirty="0"/>
-          </a:p>
-        </p:txBody>
-      </p:sp>
-      <p:sp>
-        <p:nvSpPr>
-          <p:cNvPr id="47" name="Shape 45"/>
-          <p:cNvSpPr/>
-          <p:nvPr/>
-        </p:nvSpPr>
-        <p:spPr>
-          <a:xfrm>
-            <a:off x="3222346" y="4614672"/>
-            <a:ext cx="6085332" cy="579120"/>
-          </a:xfrm>
-          <a:prstGeom prst="rect">
-            <a:avLst/>
-          </a:prstGeom>
-          <a:solidFill>
-            <a:srgbClr val="F8FAFC"/>
-          </a:solidFill>
-          <a:ln w="6350">
-            <a:solidFill>
-              <a:srgbClr val="D9E1EC"/>
-            </a:solidFill>
-            <a:prstDash val="solid"/>
-          </a:ln>
-        </p:spPr>
-        <p:txBody>
-          <a:bodyPr/>
-          <a:lstStyle/>
-          <a:p>
-            <a:endParaRPr lang="it-IT"/>
-          </a:p>
-        </p:txBody>
-      </p:sp>
-      <p:sp>
-        <p:nvSpPr>
-          <p:cNvPr id="48" name="Text 46"/>
-          <p:cNvSpPr/>
-          <p:nvPr/>
-        </p:nvSpPr>
-        <p:spPr>
-          <a:xfrm>
-            <a:off x="3286354" y="4669536"/>
-            <a:ext cx="5957316" cy="487680"/>
-          </a:xfrm>
-          <a:prstGeom prst="rect">
-            <a:avLst/>
-          </a:prstGeom>
-          <a:noFill/>
-          <a:ln/>
-        </p:spPr>
-        <p:txBody>
-          <a:bodyPr wrap="square" lIns="254" tIns="254" rIns="254" bIns="254" rtlCol="0" anchor="ctr">
-            <a:normAutofit/>
-          </a:bodyPr>
-          <a:lstStyle/>
-          <a:p>
-            <a:pPr marL="0" indent="0" algn="l">
-              <a:buNone/>
-            </a:pPr>
-            <a:r>
-              <a:rPr lang="en-US" sz="830" dirty="0">
-                <a:solidFill>
-                  <a:srgbClr val="5B6475"/>
-                </a:solidFill>
-                <a:latin typeface="Aptos" pitchFamily="34" charset="0"/>
-                <a:ea typeface="Aptos" pitchFamily="34" charset="-122"/>
-                <a:cs typeface="Aptos" pitchFamily="34" charset="-120"/>
-              </a:rPr>
-              <a:t>Illustrative transitions plus allowance for S3/SQS/ECR/KMS/DNS</a:t>
-            </a:r>
-            <a:endParaRPr lang="en-US" sz="830" dirty="0"/>
-          </a:p>
-        </p:txBody>
-      </p:sp>
-      <p:sp>
-        <p:nvSpPr>
-          <p:cNvPr id="49" name="Shape 47"/>
-          <p:cNvSpPr/>
-          <p:nvPr/>
-        </p:nvSpPr>
-        <p:spPr>
-          <a:xfrm>
-            <a:off x="9307678" y="4614672"/>
-            <a:ext cx="2323490" cy="579120"/>
-          </a:xfrm>
-          <a:prstGeom prst="rect">
-            <a:avLst/>
-          </a:prstGeom>
-          <a:solidFill>
-            <a:srgbClr val="F8FAFC"/>
-          </a:solidFill>
-          <a:ln w="6350">
-            <a:solidFill>
-              <a:srgbClr val="D9E1EC"/>
-            </a:solidFill>
-            <a:prstDash val="solid"/>
-          </a:ln>
-        </p:spPr>
-        <p:txBody>
-          <a:bodyPr/>
-          <a:lstStyle/>
-          <a:p>
-            <a:endParaRPr lang="it-IT"/>
-          </a:p>
-        </p:txBody>
-      </p:sp>
-      <p:sp>
-        <p:nvSpPr>
-          <p:cNvPr id="50" name="Text 48"/>
-          <p:cNvSpPr/>
-          <p:nvPr/>
-        </p:nvSpPr>
-        <p:spPr>
-          <a:xfrm>
-            <a:off x="9371686" y="4669536"/>
-            <a:ext cx="2195474" cy="487680"/>
-          </a:xfrm>
-          <a:prstGeom prst="rect">
-            <a:avLst/>
-          </a:prstGeom>
-          <a:noFill/>
-          <a:ln/>
-        </p:spPr>
-        <p:txBody>
-          <a:bodyPr wrap="square" lIns="254" tIns="254" rIns="254" bIns="254" rtlCol="0" anchor="ctr">
-            <a:normAutofit/>
-          </a:bodyPr>
-          <a:lstStyle/>
-          <a:p>
-            <a:pPr marL="0" indent="0" algn="l">
-              <a:buNone/>
-            </a:pPr>
-            <a:r>
-              <a:rPr lang="en-US" sz="830" dirty="0">
-                <a:solidFill>
-                  <a:srgbClr val="5B6475"/>
-                </a:solidFill>
-                <a:latin typeface="Aptos" pitchFamily="34" charset="0"/>
-                <a:ea typeface="Aptos" pitchFamily="34" charset="-122"/>
-                <a:cs typeface="Aptos" pitchFamily="34" charset="-120"/>
-              </a:rPr>
-              <a:t>€20–52</a:t>
-            </a:r>
-            <a:endParaRPr lang="en-US" sz="830" dirty="0"/>
-          </a:p>
-        </p:txBody>
-      </p:sp>
-      <p:sp>
-        <p:nvSpPr>
-          <p:cNvPr id="51" name="Shape 49"/>
-          <p:cNvSpPr/>
-          <p:nvPr/>
-        </p:nvSpPr>
-        <p:spPr>
-          <a:xfrm>
-            <a:off x="713232" y="5440680"/>
-            <a:ext cx="5166360" cy="502920"/>
-          </a:xfrm>
-          <a:prstGeom prst="roundRect">
-            <a:avLst>
-              <a:gd name="adj" fmla="val 14545"/>
-            </a:avLst>
-          </a:prstGeom>
-          <a:solidFill>
-            <a:srgbClr val="E8F7EE"/>
-          </a:solidFill>
-          <a:ln w="13970">
-            <a:solidFill>
-              <a:srgbClr val="0B9F63"/>
-            </a:solidFill>
-            <a:prstDash val="solid"/>
-          </a:ln>
-        </p:spPr>
-        <p:txBody>
-          <a:bodyPr/>
-          <a:lstStyle/>
-          <a:p>
-            <a:endParaRPr lang="it-IT"/>
-          </a:p>
-        </p:txBody>
-      </p:sp>
-      <p:sp>
-        <p:nvSpPr>
-          <p:cNvPr id="52" name="Text 50"/>
-          <p:cNvSpPr/>
-          <p:nvPr/>
-        </p:nvSpPr>
-        <p:spPr>
-          <a:xfrm>
-            <a:off x="832104" y="5532120"/>
-            <a:ext cx="4928616" cy="347472"/>
-          </a:xfrm>
-          <a:prstGeom prst="rect">
-            <a:avLst/>
-          </a:prstGeom>
-          <a:noFill/>
-          <a:ln/>
-        </p:spPr>
-        <p:txBody>
-          <a:bodyPr wrap="square" lIns="254" tIns="254" rIns="254" bIns="254" rtlCol="0" anchor="ctr">
-            <a:normAutofit/>
-          </a:bodyPr>
-          <a:lstStyle/>
-          <a:p>
-            <a:pPr marL="0" indent="0" algn="ctr">
-              <a:buNone/>
-            </a:pPr>
-            <a:r>
-              <a:rPr lang="en-US" sz="1050" dirty="0">
-                <a:solidFill>
-                  <a:srgbClr val="07133D"/>
-                </a:solidFill>
-                <a:latin typeface="Aptos" pitchFamily="34" charset="0"/>
-                <a:ea typeface="Aptos" pitchFamily="34" charset="-122"/>
-                <a:cs typeface="Aptos" pitchFamily="34" charset="-120"/>
-              </a:rPr>
-              <a:t>Rounded total: about €595–707/month; budget range: €700–850/month.</a:t>
-            </a:r>
-            <a:endParaRPr lang="en-US" sz="1050" dirty="0"/>
-          </a:p>
-        </p:txBody>
-      </p:sp>
-      <p:sp>
-        <p:nvSpPr>
-          <p:cNvPr id="53" name="Shape 51"/>
-          <p:cNvSpPr/>
-          <p:nvPr/>
-        </p:nvSpPr>
-        <p:spPr>
-          <a:xfrm>
-            <a:off x="6236208" y="5440680"/>
-            <a:ext cx="5010912" cy="502920"/>
-          </a:xfrm>
-          <a:prstGeom prst="roundRect">
-            <a:avLst>
-              <a:gd name="adj" fmla="val 14545"/>
-            </a:avLst>
-          </a:prstGeom>
-          <a:solidFill>
-            <a:srgbClr val="FFF4E4"/>
-          </a:solidFill>
-          <a:ln w="13970">
-            <a:solidFill>
-              <a:srgbClr val="F28A00"/>
-            </a:solidFill>
-            <a:prstDash val="solid"/>
-          </a:ln>
-        </p:spPr>
-        <p:txBody>
-          <a:bodyPr/>
-          <a:lstStyle/>
-          <a:p>
-            <a:endParaRPr lang="it-IT"/>
-          </a:p>
-        </p:txBody>
-      </p:sp>
-      <p:sp>
-        <p:nvSpPr>
-          <p:cNvPr id="54" name="Text 52"/>
-          <p:cNvSpPr/>
-          <p:nvPr/>
-        </p:nvSpPr>
-        <p:spPr>
-          <a:xfrm>
-            <a:off x="6355080" y="5532120"/>
-            <a:ext cx="4773168" cy="347472"/>
-          </a:xfrm>
-          <a:prstGeom prst="rect">
-            <a:avLst/>
-          </a:prstGeom>
-          <a:noFill/>
-          <a:ln/>
-        </p:spPr>
-        <p:txBody>
-          <a:bodyPr wrap="square" lIns="254" tIns="254" rIns="254" bIns="254" rtlCol="0" anchor="ctr">
-            <a:normAutofit/>
-          </a:bodyPr>
-          <a:lstStyle/>
-          <a:p>
-            <a:pPr marL="0" indent="0" algn="ctr">
-              <a:buNone/>
-            </a:pPr>
-            <a:r>
-              <a:rPr lang="en-US" sz="1050" dirty="0">
-                <a:solidFill>
-                  <a:srgbClr val="07133D"/>
-                </a:solidFill>
-                <a:latin typeface="Aptos" pitchFamily="34" charset="0"/>
-                <a:ea typeface="Aptos" pitchFamily="34" charset="-122"/>
-                <a:cs typeface="Aptos" pitchFamily="34" charset="-120"/>
-              </a:rPr>
-              <a:t>Excludes VAT, paid support, non-prod, CI, identity / notifications, AI and business-provider fees.</a:t>
-            </a:r>
-            <a:endParaRPr lang="en-US" sz="1050" dirty="0"/>
-          </a:p>
-        </p:txBody>
-      </p:sp>
-    </p:spTree>
-  </p:cSld>
-  <p:clrMapOvr>
-    <a:masterClrMapping/>
-  </p:clrMapOvr>
-</p:sld>
-</file>
-
-<file path=ppt/slides/slide25.xml><?xml version="1.0" encoding="utf-8"?>
-<p:sld xmlns:a="http://schemas.openxmlformats.org/drawingml/2006/main" xmlns:r="http://schemas.openxmlformats.org/officeDocument/2006/relationships" xmlns:p="http://schemas.openxmlformats.org/presentationml/2006/main" show="0">
   <p:cSld name="Slide 14">
     <p:bg>
       <p:bgPr>
@@ -24560,81 +22115,6 @@
           </a:p>
         </p:txBody>
       </p:sp>
-      <p:sp>
-        <p:nvSpPr>
-          <p:cNvPr id="45" name="Shape 43"/>
-          <p:cNvSpPr/>
-          <p:nvPr/>
-        </p:nvSpPr>
-        <p:spPr>
-          <a:xfrm>
-            <a:off x="914400" y="6053328"/>
-            <a:ext cx="10241280" cy="411480"/>
-          </a:xfrm>
-          <a:prstGeom prst="roundRect">
-            <a:avLst>
-              <a:gd name="adj" fmla="val 17778"/>
-            </a:avLst>
-          </a:prstGeom>
-          <a:solidFill>
-            <a:srgbClr val="FCE8E8"/>
-          </a:solidFill>
-          <a:ln w="13970">
-            <a:solidFill>
-              <a:srgbClr val="D64242"/>
-            </a:solidFill>
-            <a:prstDash val="solid"/>
-          </a:ln>
-        </p:spPr>
-        <p:txBody>
-          <a:bodyPr/>
-          <a:lstStyle/>
-          <a:p>
-            <a:endParaRPr lang="it-IT"/>
-          </a:p>
-        </p:txBody>
-      </p:sp>
-      <p:sp>
-        <p:nvSpPr>
-          <p:cNvPr id="46" name="Text 44"/>
-          <p:cNvSpPr/>
-          <p:nvPr/>
-        </p:nvSpPr>
-        <p:spPr>
-          <a:xfrm>
-            <a:off x="1033272" y="6144768"/>
-            <a:ext cx="10003536" cy="256032"/>
-          </a:xfrm>
-          <a:prstGeom prst="rect">
-            <a:avLst/>
-          </a:prstGeom>
-          <a:noFill/>
-          <a:ln/>
-        </p:spPr>
-        <p:txBody>
-          <a:bodyPr wrap="square" lIns="254" tIns="254" rIns="254" bIns="254" rtlCol="0" anchor="ctr">
-            <a:normAutofit/>
-          </a:bodyPr>
-          <a:lstStyle/>
-          <a:p>
-            <a:pPr marL="0" indent="0" algn="ctr">
-              <a:buNone/>
-            </a:pPr>
-            <a:r>
-              <a:rPr lang="en-US" sz="1050" dirty="0">
-                <a:solidFill>
-                  <a:srgbClr val="07133D"/>
-                </a:solidFill>
-                <a:latin typeface="Aptos" pitchFamily="34" charset="0"/>
-                <a:ea typeface="Aptos" pitchFamily="34" charset="-122"/>
-                <a:cs typeface="Aptos" pitchFamily="34" charset="-120"/>
-              </a:rPr>
-              <a:t>Planned tests, not results. Correctness, residency or recovery failures block launch.</a:t>
-            </a:r>
-            <a:endParaRPr lang="en-US" sz="1050" dirty="0"/>
-          </a:p>
-        </p:txBody>
-      </p:sp>
     </p:spTree>
   </p:cSld>
   <p:clrMapOvr>
@@ -24643,7 +22123,7 @@
 </p:sld>
 </file>
 
-<file path=ppt/slides/slide26.xml><?xml version="1.0" encoding="utf-8"?>
+<file path=ppt/slides/slide24.xml><?xml version="1.0" encoding="utf-8"?>
 <p:sld xmlns:a="http://schemas.openxmlformats.org/drawingml/2006/main" xmlns:r="http://schemas.openxmlformats.org/officeDocument/2006/relationships" xmlns:p="http://schemas.openxmlformats.org/presentationml/2006/main" show="0">
   <p:cSld name="Slide 15">
     <p:bg>
@@ -25463,47 +22943,6 @@
               <a:t>Traffic shape, job duration, model mix, latency expectations, quota increases and budget envelope.</a:t>
             </a:r>
             <a:endParaRPr lang="en-US" sz="920" dirty="0"/>
-          </a:p>
-        </p:txBody>
-      </p:sp>
-      <p:sp>
-        <p:nvSpPr>
-          <p:cNvPr id="24" name="Text 22"/>
-          <p:cNvSpPr/>
-          <p:nvPr/>
-        </p:nvSpPr>
-        <p:spPr>
-          <a:xfrm>
-            <a:off x="914400" y="5989320"/>
-            <a:ext cx="10287000" cy="310896"/>
-          </a:xfrm>
-          <a:prstGeom prst="rect">
-            <a:avLst/>
-          </a:prstGeom>
-          <a:noFill/>
-          <a:ln/>
-        </p:spPr>
-        <p:txBody>
-          <a:bodyPr wrap="square" lIns="254" tIns="254" rIns="254" bIns="254" rtlCol="0" anchor="t">
-            <a:normAutofit/>
-          </a:bodyPr>
-          <a:lstStyle/>
-          <a:p>
-            <a:pPr marL="0" indent="0" algn="ctr">
-              <a:buNone/>
-            </a:pPr>
-            <a:r>
-              <a:rPr lang="en-US" sz="1300" b="1" dirty="0">
-                <a:solidFill>
-                  <a:srgbClr val="07133D"/>
-                </a:solidFill>
-                <a:latin typeface="Aptos" pitchFamily="34" charset="0"/>
-                <a:ea typeface="Aptos" pitchFamily="34" charset="-122"/>
-                <a:cs typeface="Aptos" pitchFamily="34" charset="-120"/>
-              </a:rPr>
-              <a:t>These assumptions do not relax the assignment requirements; unresolved recovery, residency or provider guarantees can block launch.</a:t>
-            </a:r>
-            <a:endParaRPr lang="en-US" sz="1300" dirty="0"/>
           </a:p>
         </p:txBody>
       </p:sp>
@@ -26366,8 +23805,8 @@
         </p:nvSpPr>
         <p:spPr>
           <a:xfrm>
-            <a:off x="5015214" y="5643430"/>
-            <a:ext cx="5006820" cy="677108"/>
+            <a:off x="4778361" y="5609721"/>
+            <a:ext cx="5683607" cy="769441"/>
           </a:xfrm>
           <a:prstGeom prst="rect">
             <a:avLst/>
@@ -26381,27 +23820,27 @@
           <a:lstStyle/>
           <a:p>
             <a:r>
-              <a:rPr lang="it-IT" sz="1400" b="1" dirty="0"/>
+              <a:rPr lang="it-IT" sz="1600" b="1" dirty="0"/>
               <a:t>Wait State</a:t>
             </a:r>
             <a:r>
-              <a:rPr lang="it-IT" sz="1400" dirty="0"/>
+              <a:rPr lang="it-IT" sz="1600" dirty="0"/>
               <a:t>: The </a:t>
             </a:r>
             <a:r>
-              <a:rPr lang="en-GB" sz="1400" noProof="0" dirty="0"/>
+              <a:rPr lang="en-GB" sz="1600" noProof="0" dirty="0"/>
               <a:t>transition</a:t>
             </a:r>
             <a:r>
-              <a:rPr lang="it-IT" sz="1400" dirty="0"/>
+              <a:rPr lang="it-IT" sz="1600" dirty="0"/>
               <a:t> can be </a:t>
             </a:r>
             <a:r>
-              <a:rPr lang="it-IT" sz="1400" dirty="0" err="1"/>
+              <a:rPr lang="it-IT" sz="1600" dirty="0" err="1"/>
               <a:t>blocked</a:t>
             </a:r>
             <a:r>
-              <a:rPr lang="it-IT" sz="1400" dirty="0"/>
+              <a:rPr lang="it-IT" sz="1600" dirty="0"/>
               <a:t> for weeks </a:t>
             </a:r>
           </a:p>
@@ -26411,27 +23850,27 @@
               <a:buChar char="•"/>
             </a:pPr>
             <a:r>
-              <a:rPr lang="it-IT" sz="1200" dirty="0" err="1"/>
+              <a:rPr lang="it-IT" sz="1400" dirty="0" err="1"/>
               <a:t>Orchestration</a:t>
             </a:r>
             <a:r>
-              <a:rPr lang="it-IT" sz="1200" dirty="0"/>
+              <a:rPr lang="it-IT" sz="1400" dirty="0"/>
               <a:t> </a:t>
             </a:r>
             <a:r>
-              <a:rPr lang="it-IT" sz="1200" dirty="0" err="1"/>
+              <a:rPr lang="it-IT" sz="1400" dirty="0" err="1"/>
               <a:t>decoupled</a:t>
             </a:r>
             <a:r>
-              <a:rPr lang="it-IT" sz="1200" dirty="0"/>
+              <a:rPr lang="it-IT" sz="1400" dirty="0"/>
               <a:t> from </a:t>
             </a:r>
             <a:r>
-              <a:rPr lang="it-IT" sz="1200" dirty="0" err="1"/>
+              <a:rPr lang="it-IT" sz="1400" dirty="0" err="1"/>
               <a:t>active</a:t>
             </a:r>
             <a:r>
-              <a:rPr lang="it-IT" sz="1200" dirty="0"/>
+              <a:rPr lang="it-IT" sz="1400" dirty="0"/>
               <a:t> chat session</a:t>
             </a:r>
           </a:p>
@@ -26441,23 +23880,23 @@
               <a:buChar char="•"/>
             </a:pPr>
             <a:r>
-              <a:rPr lang="it-IT" sz="1200" dirty="0"/>
+              <a:rPr lang="it-IT" sz="1400" dirty="0"/>
               <a:t>Memory </a:t>
             </a:r>
             <a:r>
-              <a:rPr lang="it-IT" sz="1200" dirty="0" err="1"/>
+              <a:rPr lang="it-IT" sz="1400" dirty="0" err="1"/>
               <a:t>should</a:t>
             </a:r>
             <a:r>
-              <a:rPr lang="it-IT" sz="1200" dirty="0"/>
+              <a:rPr lang="it-IT" sz="1400" dirty="0"/>
               <a:t> be </a:t>
             </a:r>
             <a:r>
-              <a:rPr lang="it-IT" sz="1200" dirty="0" err="1"/>
+              <a:rPr lang="it-IT" sz="1400" dirty="0" err="1"/>
               <a:t>externalized</a:t>
             </a:r>
             <a:r>
-              <a:rPr lang="it-IT" sz="1200" dirty="0"/>
+              <a:rPr lang="it-IT" sz="1400" dirty="0"/>
               <a:t> from chatbot-app component</a:t>
             </a:r>
           </a:p>
@@ -26465,10 +23904,10 @@
       </p:sp>
       <p:sp>
         <p:nvSpPr>
-          <p:cNvPr id="4" name="Shape 0">
-            <a:extLst>
-              <a:ext uri="{FF2B5EF4-FFF2-40B4-BE49-F238E27FC236}">
-                <a16:creationId xmlns:a16="http://schemas.microsoft.com/office/drawing/2014/main" id="{D887FD83-4A41-295E-B7ED-7B1ED173E323}"/>
+          <p:cNvPr id="50" name="Shape 0">
+            <a:extLst>
+              <a:ext uri="{FF2B5EF4-FFF2-40B4-BE49-F238E27FC236}">
+                <a16:creationId xmlns:a16="http://schemas.microsoft.com/office/drawing/2014/main" id="{1B7DBE1D-CCF6-6ACF-D922-FD456344E90B}"/>
               </a:ext>
             </a:extLst>
           </p:cNvPr>
@@ -26497,16 +23936,16 @@
           <a:bodyPr/>
           <a:lstStyle/>
           <a:p>
-            <a:endParaRPr lang="it-IT" dirty="0"/>
-          </a:p>
-        </p:txBody>
-      </p:sp>
-      <p:sp>
-        <p:nvSpPr>
-          <p:cNvPr id="8" name="Shape 1">
-            <a:extLst>
-              <a:ext uri="{FF2B5EF4-FFF2-40B4-BE49-F238E27FC236}">
-                <a16:creationId xmlns:a16="http://schemas.microsoft.com/office/drawing/2014/main" id="{8984B2B0-458D-B56E-E577-D063037C82E7}"/>
+            <a:endParaRPr lang="it-IT"/>
+          </a:p>
+        </p:txBody>
+      </p:sp>
+      <p:sp>
+        <p:nvSpPr>
+          <p:cNvPr id="64" name="Shape 1">
+            <a:extLst>
+              <a:ext uri="{FF2B5EF4-FFF2-40B4-BE49-F238E27FC236}">
+                <a16:creationId xmlns:a16="http://schemas.microsoft.com/office/drawing/2014/main" id="{90A891B8-481C-6130-EFE1-5C62B555903C}"/>
               </a:ext>
             </a:extLst>
           </p:cNvPr>
@@ -26541,10 +23980,10 @@
       </p:sp>
       <p:sp>
         <p:nvSpPr>
-          <p:cNvPr id="9" name="Shape 2">
-            <a:extLst>
-              <a:ext uri="{FF2B5EF4-FFF2-40B4-BE49-F238E27FC236}">
-                <a16:creationId xmlns:a16="http://schemas.microsoft.com/office/drawing/2014/main" id="{B66AAA0D-A4F4-1FBA-F61F-849170D51A83}"/>
+          <p:cNvPr id="65" name="Shape 2">
+            <a:extLst>
+              <a:ext uri="{FF2B5EF4-FFF2-40B4-BE49-F238E27FC236}">
+                <a16:creationId xmlns:a16="http://schemas.microsoft.com/office/drawing/2014/main" id="{125A1726-06F1-FB7F-4510-A8398C126430}"/>
               </a:ext>
             </a:extLst>
           </p:cNvPr>
@@ -26554,7 +23993,7 @@
         <p:spPr>
           <a:xfrm>
             <a:off x="548640" y="1937261"/>
-            <a:ext cx="5554980" cy="2057400"/>
+            <a:ext cx="5554980" cy="2346378"/>
           </a:xfrm>
           <a:prstGeom prst="rect">
             <a:avLst/>
@@ -26581,10 +24020,10 @@
       </p:sp>
       <p:sp>
         <p:nvSpPr>
-          <p:cNvPr id="10" name="Shape 3">
-            <a:extLst>
-              <a:ext uri="{FF2B5EF4-FFF2-40B4-BE49-F238E27FC236}">
-                <a16:creationId xmlns:a16="http://schemas.microsoft.com/office/drawing/2014/main" id="{6CF7549D-195A-BE6B-8E4C-D2EA204AEF3E}"/>
+          <p:cNvPr id="66" name="Shape 3">
+            <a:extLst>
+              <a:ext uri="{FF2B5EF4-FFF2-40B4-BE49-F238E27FC236}">
+                <a16:creationId xmlns:a16="http://schemas.microsoft.com/office/drawing/2014/main" id="{B4971DAA-7BC8-703E-C7A1-B6095505CFF0}"/>
               </a:ext>
             </a:extLst>
           </p:cNvPr>
@@ -26594,7 +24033,7 @@
         <p:spPr>
           <a:xfrm>
             <a:off x="6103620" y="1937261"/>
-            <a:ext cx="5554980" cy="2057400"/>
+            <a:ext cx="5554980" cy="2346378"/>
           </a:xfrm>
           <a:prstGeom prst="rect">
             <a:avLst/>
@@ -26621,10 +24060,10 @@
       </p:sp>
       <p:sp>
         <p:nvSpPr>
-          <p:cNvPr id="13" name="Text 4">
-            <a:extLst>
-              <a:ext uri="{FF2B5EF4-FFF2-40B4-BE49-F238E27FC236}">
-                <a16:creationId xmlns:a16="http://schemas.microsoft.com/office/drawing/2014/main" id="{F3B63F24-762E-73D7-1395-F66BF026708E}"/>
+          <p:cNvPr id="67" name="Text 4">
+            <a:extLst>
+              <a:ext uri="{FF2B5EF4-FFF2-40B4-BE49-F238E27FC236}">
+                <a16:creationId xmlns:a16="http://schemas.microsoft.com/office/drawing/2014/main" id="{9637BA2D-AB06-6D83-6E0F-49F1D8AEB924}"/>
               </a:ext>
             </a:extLst>
           </p:cNvPr>
@@ -26673,10 +24112,10 @@
       </p:sp>
       <p:sp>
         <p:nvSpPr>
-          <p:cNvPr id="15" name="Text 5">
-            <a:extLst>
-              <a:ext uri="{FF2B5EF4-FFF2-40B4-BE49-F238E27FC236}">
-                <a16:creationId xmlns:a16="http://schemas.microsoft.com/office/drawing/2014/main" id="{1459177D-5E7E-4919-F58F-71633E950550}"/>
+          <p:cNvPr id="68" name="Text 5">
+            <a:extLst>
+              <a:ext uri="{FF2B5EF4-FFF2-40B4-BE49-F238E27FC236}">
+                <a16:creationId xmlns:a16="http://schemas.microsoft.com/office/drawing/2014/main" id="{F4481B4E-6B1E-DBC8-3ED6-4B62652A970B}"/>
               </a:ext>
             </a:extLst>
           </p:cNvPr>
@@ -26725,10 +24164,10 @@
       </p:sp>
       <p:sp>
         <p:nvSpPr>
-          <p:cNvPr id="16" name="Text 6">
-            <a:extLst>
-              <a:ext uri="{FF2B5EF4-FFF2-40B4-BE49-F238E27FC236}">
-                <a16:creationId xmlns:a16="http://schemas.microsoft.com/office/drawing/2014/main" id="{8A76B419-086D-67A4-62CC-35A1EA591519}"/>
+          <p:cNvPr id="69" name="Text 6">
+            <a:extLst>
+              <a:ext uri="{FF2B5EF4-FFF2-40B4-BE49-F238E27FC236}">
+                <a16:creationId xmlns:a16="http://schemas.microsoft.com/office/drawing/2014/main" id="{98F5531B-F0C5-CB02-AE4A-E65762551A3A}"/>
               </a:ext>
             </a:extLst>
           </p:cNvPr>
@@ -26774,10 +24213,10 @@
       </p:sp>
       <p:sp>
         <p:nvSpPr>
-          <p:cNvPr id="17" name="Text 7">
-            <a:extLst>
-              <a:ext uri="{FF2B5EF4-FFF2-40B4-BE49-F238E27FC236}">
-                <a16:creationId xmlns:a16="http://schemas.microsoft.com/office/drawing/2014/main" id="{B0E3CD11-04EB-D921-D3F3-3F2ADE520CD8}"/>
+          <p:cNvPr id="70" name="Text 7">
+            <a:extLst>
+              <a:ext uri="{FF2B5EF4-FFF2-40B4-BE49-F238E27FC236}">
+                <a16:creationId xmlns:a16="http://schemas.microsoft.com/office/drawing/2014/main" id="{E3E05480-5765-32A4-0800-141A2FCBCC55}"/>
               </a:ext>
             </a:extLst>
           </p:cNvPr>
@@ -26842,19 +24281,19 @@
       </p:sp>
       <p:sp>
         <p:nvSpPr>
-          <p:cNvPr id="18" name="Text 8">
-            <a:extLst>
-              <a:ext uri="{FF2B5EF4-FFF2-40B4-BE49-F238E27FC236}">
-                <a16:creationId xmlns:a16="http://schemas.microsoft.com/office/drawing/2014/main" id="{D3DD33A5-BD20-5047-10D3-FD3B6101136B}"/>
-              </a:ext>
-            </a:extLst>
-          </p:cNvPr>
-          <p:cNvSpPr/>
-          <p:nvPr/>
-        </p:nvSpPr>
-        <p:spPr>
-          <a:xfrm>
-            <a:off x="713232" y="2769365"/>
+          <p:cNvPr id="71" name="Text 8">
+            <a:extLst>
+              <a:ext uri="{FF2B5EF4-FFF2-40B4-BE49-F238E27FC236}">
+                <a16:creationId xmlns:a16="http://schemas.microsoft.com/office/drawing/2014/main" id="{C2487CA5-C668-73B7-7B4C-4A46E30A9A51}"/>
+              </a:ext>
+            </a:extLst>
+          </p:cNvPr>
+          <p:cNvSpPr/>
+          <p:nvPr/>
+        </p:nvSpPr>
+        <p:spPr>
+          <a:xfrm>
+            <a:off x="713232" y="2861961"/>
             <a:ext cx="146304" cy="164592"/>
           </a:xfrm>
           <a:prstGeom prst="rect">
@@ -26891,19 +24330,19 @@
       </p:sp>
       <p:sp>
         <p:nvSpPr>
-          <p:cNvPr id="19" name="Text 9">
-            <a:extLst>
-              <a:ext uri="{FF2B5EF4-FFF2-40B4-BE49-F238E27FC236}">
-                <a16:creationId xmlns:a16="http://schemas.microsoft.com/office/drawing/2014/main" id="{DE768DFA-869E-2E5B-F080-941D75BAC1A2}"/>
-              </a:ext>
-            </a:extLst>
-          </p:cNvPr>
-          <p:cNvSpPr/>
-          <p:nvPr/>
-        </p:nvSpPr>
-        <p:spPr>
-          <a:xfrm>
-            <a:off x="941832" y="2760221"/>
+          <p:cNvPr id="72" name="Text 9">
+            <a:extLst>
+              <a:ext uri="{FF2B5EF4-FFF2-40B4-BE49-F238E27FC236}">
+                <a16:creationId xmlns:a16="http://schemas.microsoft.com/office/drawing/2014/main" id="{43490C1A-AA2D-7132-FD1B-6CD533D67903}"/>
+              </a:ext>
+            </a:extLst>
+          </p:cNvPr>
+          <p:cNvSpPr/>
+          <p:nvPr/>
+        </p:nvSpPr>
+        <p:spPr>
+          <a:xfrm>
+            <a:off x="941832" y="2852817"/>
             <a:ext cx="4960620" cy="347472"/>
           </a:xfrm>
           <a:prstGeom prst="rect">
@@ -26940,10 +24379,10 @@
       </p:sp>
       <p:sp>
         <p:nvSpPr>
-          <p:cNvPr id="20" name="Text 10">
-            <a:extLst>
-              <a:ext uri="{FF2B5EF4-FFF2-40B4-BE49-F238E27FC236}">
-                <a16:creationId xmlns:a16="http://schemas.microsoft.com/office/drawing/2014/main" id="{F3E1CB56-ED7A-AAB8-C7F8-3B88852EF856}"/>
+          <p:cNvPr id="73" name="Text 10">
+            <a:extLst>
+              <a:ext uri="{FF2B5EF4-FFF2-40B4-BE49-F238E27FC236}">
+                <a16:creationId xmlns:a16="http://schemas.microsoft.com/office/drawing/2014/main" id="{41812A0F-463E-C17D-610C-C285C6B6A6B6}"/>
               </a:ext>
             </a:extLst>
           </p:cNvPr>
@@ -26989,10 +24428,10 @@
       </p:sp>
       <p:sp>
         <p:nvSpPr>
-          <p:cNvPr id="21" name="Text 11">
-            <a:extLst>
-              <a:ext uri="{FF2B5EF4-FFF2-40B4-BE49-F238E27FC236}">
-                <a16:creationId xmlns:a16="http://schemas.microsoft.com/office/drawing/2014/main" id="{C834B63E-6CE3-0559-DAD3-9C157C9843D8}"/>
+          <p:cNvPr id="74" name="Text 11">
+            <a:extLst>
+              <a:ext uri="{FF2B5EF4-FFF2-40B4-BE49-F238E27FC236}">
+                <a16:creationId xmlns:a16="http://schemas.microsoft.com/office/drawing/2014/main" id="{1A353622-DD54-3BC9-F6D2-5ED7EEEB90CF}"/>
               </a:ext>
             </a:extLst>
           </p:cNvPr>
@@ -27057,10 +24496,10 @@
       </p:sp>
       <p:sp>
         <p:nvSpPr>
-          <p:cNvPr id="22" name="Text 12">
-            <a:extLst>
-              <a:ext uri="{FF2B5EF4-FFF2-40B4-BE49-F238E27FC236}">
-                <a16:creationId xmlns:a16="http://schemas.microsoft.com/office/drawing/2014/main" id="{3C084EC3-1BB3-2C04-7C15-BBDC9A9DB4C6}"/>
+          <p:cNvPr id="75" name="Text 12">
+            <a:extLst>
+              <a:ext uri="{FF2B5EF4-FFF2-40B4-BE49-F238E27FC236}">
+                <a16:creationId xmlns:a16="http://schemas.microsoft.com/office/drawing/2014/main" id="{7F4B6438-BEAC-A81E-1532-0C3BDC44BA72}"/>
               </a:ext>
             </a:extLst>
           </p:cNvPr>
@@ -27106,10 +24545,10 @@
       </p:sp>
       <p:sp>
         <p:nvSpPr>
-          <p:cNvPr id="23" name="Text 13">
-            <a:extLst>
-              <a:ext uri="{FF2B5EF4-FFF2-40B4-BE49-F238E27FC236}">
-                <a16:creationId xmlns:a16="http://schemas.microsoft.com/office/drawing/2014/main" id="{B009AA71-E817-3018-EE6B-3E66FF66F4B6}"/>
+          <p:cNvPr id="76" name="Text 13">
+            <a:extLst>
+              <a:ext uri="{FF2B5EF4-FFF2-40B4-BE49-F238E27FC236}">
+                <a16:creationId xmlns:a16="http://schemas.microsoft.com/office/drawing/2014/main" id="{2783E873-A23C-C07C-87A0-2492645DEC47}"/>
               </a:ext>
             </a:extLst>
           </p:cNvPr>
@@ -27166,10 +24605,10 @@
       </p:sp>
       <p:sp>
         <p:nvSpPr>
-          <p:cNvPr id="24" name="Text 14">
-            <a:extLst>
-              <a:ext uri="{FF2B5EF4-FFF2-40B4-BE49-F238E27FC236}">
-                <a16:creationId xmlns:a16="http://schemas.microsoft.com/office/drawing/2014/main" id="{78D3B71D-58A0-7148-07DC-CD4A356FBADC}"/>
+          <p:cNvPr id="77" name="Text 14">
+            <a:extLst>
+              <a:ext uri="{FF2B5EF4-FFF2-40B4-BE49-F238E27FC236}">
+                <a16:creationId xmlns:a16="http://schemas.microsoft.com/office/drawing/2014/main" id="{C8462FA3-7683-D7EF-E3C3-DA2248E80496}"/>
               </a:ext>
             </a:extLst>
           </p:cNvPr>
@@ -27215,10 +24654,10 @@
       </p:sp>
       <p:sp>
         <p:nvSpPr>
-          <p:cNvPr id="25" name="Text 15">
-            <a:extLst>
-              <a:ext uri="{FF2B5EF4-FFF2-40B4-BE49-F238E27FC236}">
-                <a16:creationId xmlns:a16="http://schemas.microsoft.com/office/drawing/2014/main" id="{E34F7EDE-C16C-64AF-0739-036A6189DB69}"/>
+          <p:cNvPr id="78" name="Text 15">
+            <a:extLst>
+              <a:ext uri="{FF2B5EF4-FFF2-40B4-BE49-F238E27FC236}">
+                <a16:creationId xmlns:a16="http://schemas.microsoft.com/office/drawing/2014/main" id="{52E3B5E9-D359-9EDA-DB1A-F294193E9C13}"/>
               </a:ext>
             </a:extLst>
           </p:cNvPr>
@@ -27275,10 +24714,10 @@
       </p:sp>
       <p:sp>
         <p:nvSpPr>
-          <p:cNvPr id="26" name="Text 16">
-            <a:extLst>
-              <a:ext uri="{FF2B5EF4-FFF2-40B4-BE49-F238E27FC236}">
-                <a16:creationId xmlns:a16="http://schemas.microsoft.com/office/drawing/2014/main" id="{55FD5ED4-7B2E-8C72-1AED-0FA021A5CDF0}"/>
+          <p:cNvPr id="79" name="Text 16">
+            <a:extLst>
+              <a:ext uri="{FF2B5EF4-FFF2-40B4-BE49-F238E27FC236}">
+                <a16:creationId xmlns:a16="http://schemas.microsoft.com/office/drawing/2014/main" id="{7C471FED-A516-3F39-3781-0277EF775617}"/>
               </a:ext>
             </a:extLst>
           </p:cNvPr>
@@ -27324,10 +24763,10 @@
       </p:sp>
       <p:sp>
         <p:nvSpPr>
-          <p:cNvPr id="27" name="Text 17">
-            <a:extLst>
-              <a:ext uri="{FF2B5EF4-FFF2-40B4-BE49-F238E27FC236}">
-                <a16:creationId xmlns:a16="http://schemas.microsoft.com/office/drawing/2014/main" id="{1496E4D3-5E2E-EE7D-4001-3CEC23602988}"/>
+          <p:cNvPr id="80" name="Text 17">
+            <a:extLst>
+              <a:ext uri="{FF2B5EF4-FFF2-40B4-BE49-F238E27FC236}">
+                <a16:creationId xmlns:a16="http://schemas.microsoft.com/office/drawing/2014/main" id="{C7E6C089-0786-3489-AC9D-F182254963E6}"/>
               </a:ext>
             </a:extLst>
           </p:cNvPr>
@@ -27384,10 +24823,10 @@
       </p:sp>
       <p:sp>
         <p:nvSpPr>
-          <p:cNvPr id="28" name="Text 18">
-            <a:extLst>
-              <a:ext uri="{FF2B5EF4-FFF2-40B4-BE49-F238E27FC236}">
-                <a16:creationId xmlns:a16="http://schemas.microsoft.com/office/drawing/2014/main" id="{253FEDD8-7751-BA7F-822A-8CD4497AA491}"/>
+          <p:cNvPr id="81" name="Text 18">
+            <a:extLst>
+              <a:ext uri="{FF2B5EF4-FFF2-40B4-BE49-F238E27FC236}">
+                <a16:creationId xmlns:a16="http://schemas.microsoft.com/office/drawing/2014/main" id="{5B7DD959-CBF8-6123-C75D-6FB168E405D8}"/>
               </a:ext>
             </a:extLst>
           </p:cNvPr>
@@ -27433,19 +24872,19 @@
       </p:sp>
       <p:sp>
         <p:nvSpPr>
-          <p:cNvPr id="29" name="Text 19">
-            <a:extLst>
-              <a:ext uri="{FF2B5EF4-FFF2-40B4-BE49-F238E27FC236}">
-                <a16:creationId xmlns:a16="http://schemas.microsoft.com/office/drawing/2014/main" id="{850B340C-E27C-5763-54C7-026C5AD0DCA6}"/>
-              </a:ext>
-            </a:extLst>
-          </p:cNvPr>
-          <p:cNvSpPr/>
-          <p:nvPr/>
-        </p:nvSpPr>
-        <p:spPr>
-          <a:xfrm>
-            <a:off x="6533388" y="3363725"/>
+          <p:cNvPr id="82" name="Text 19">
+            <a:extLst>
+              <a:ext uri="{FF2B5EF4-FFF2-40B4-BE49-F238E27FC236}">
+                <a16:creationId xmlns:a16="http://schemas.microsoft.com/office/drawing/2014/main" id="{4C08281B-61B3-19F0-4D9C-0472CE144162}"/>
+              </a:ext>
+            </a:extLst>
+          </p:cNvPr>
+          <p:cNvSpPr/>
+          <p:nvPr/>
+        </p:nvSpPr>
+        <p:spPr>
+          <a:xfrm>
+            <a:off x="6533388" y="3607360"/>
             <a:ext cx="4869180" cy="384048"/>
           </a:xfrm>
           <a:prstGeom prst="rect">
@@ -27460,9 +24899,6 @@
           </a:bodyPr>
           <a:lstStyle/>
           <a:p>
-            <a:pPr marL="0" indent="0">
-              <a:buNone/>
-            </a:pPr>
             <a:r>
               <a:rPr lang="en-US" sz="1400" b="1" dirty="0">
                 <a:solidFill>
@@ -27472,7 +24908,7 @@
                 <a:ea typeface="Aptos" pitchFamily="34" charset="-122"/>
                 <a:cs typeface="Aptos" pitchFamily="34" charset="-120"/>
               </a:rPr>
-              <a:t>To Confirm (Assumptions):</a:t>
+              <a:t>Assumptions:</a:t>
             </a:r>
             <a:r>
               <a:rPr lang="en-US" sz="1400" dirty="0">
@@ -27483,8 +24919,10 @@
                 <a:ea typeface="Aptos" pitchFamily="34" charset="-122"/>
                 <a:cs typeface="Aptos" pitchFamily="34" charset="-120"/>
               </a:rPr>
-              <a:t> Single-AZ failure scope, provider guarantees, and regional model availability at launch.</a:t>
-            </a:r>
+              <a:t> Single-AZ failure scope, provider guarantees, and regional model availability at launch; Customer notification channel and provider (email/SMS/push) to be agreed.</a:t>
+            </a:r>
+          </a:p>
+          <a:p>
             <a:endParaRPr lang="en-US" sz="1400" dirty="0">
               <a:latin typeface="Aptos" panose="020B0004020202020204" pitchFamily="34" charset="0"/>
             </a:endParaRPr>
@@ -27529,6 +24967,37 @@
           <a:chExt cx="0" cy="0"/>
         </a:xfrm>
       </p:grpSpPr>
+      <p:pic>
+        <p:nvPicPr>
+          <p:cNvPr id="8" name="Immagine 7">
+            <a:extLst>
+              <a:ext uri="{FF2B5EF4-FFF2-40B4-BE49-F238E27FC236}">
+                <a16:creationId xmlns:a16="http://schemas.microsoft.com/office/drawing/2014/main" id="{108B3FCA-01D3-10E0-A5B6-05878F9DB552}"/>
+              </a:ext>
+            </a:extLst>
+          </p:cNvPr>
+          <p:cNvPicPr>
+            <a:picLocks noChangeAspect="1"/>
+          </p:cNvPicPr>
+          <p:nvPr/>
+        </p:nvPicPr>
+        <p:blipFill>
+          <a:blip r:embed="rId3"/>
+          <a:srcRect t="14215" b="10322"/>
+          <a:stretch>
+            <a:fillRect/>
+          </a:stretch>
+        </p:blipFill>
+        <p:spPr>
+          <a:xfrm>
+            <a:off x="1239667" y="1646198"/>
+            <a:ext cx="9472596" cy="4023065"/>
+          </a:xfrm>
+          <a:prstGeom prst="rect">
+            <a:avLst/>
+          </a:prstGeom>
+        </p:spPr>
+      </p:pic>
       <p:sp>
         <p:nvSpPr>
           <p:cNvPr id="2" name="Text 0"/>
@@ -27704,37 +25173,6 @@
           </a:p>
         </p:txBody>
       </p:sp>
-      <p:pic>
-        <p:nvPicPr>
-          <p:cNvPr id="70" name="Immagine 69">
-            <a:extLst>
-              <a:ext uri="{FF2B5EF4-FFF2-40B4-BE49-F238E27FC236}">
-                <a16:creationId xmlns:a16="http://schemas.microsoft.com/office/drawing/2014/main" id="{7250F835-67B5-34F6-CB3F-7B1BB0DDBB7B}"/>
-              </a:ext>
-            </a:extLst>
-          </p:cNvPr>
-          <p:cNvPicPr>
-            <a:picLocks noChangeAspect="1"/>
-          </p:cNvPicPr>
-          <p:nvPr/>
-        </p:nvPicPr>
-        <p:blipFill>
-          <a:blip r:embed="rId3"/>
-          <a:srcRect t="14113" b="15541"/>
-          <a:stretch>
-            <a:fillRect/>
-          </a:stretch>
-        </p:blipFill>
-        <p:spPr>
-          <a:xfrm>
-            <a:off x="1148227" y="1623656"/>
-            <a:ext cx="9649644" cy="3820367"/>
-          </a:xfrm>
-          <a:prstGeom prst="rect">
-            <a:avLst/>
-          </a:prstGeom>
-        </p:spPr>
-      </p:pic>
     </p:spTree>
   </p:cSld>
   <p:clrMapOvr>
@@ -27766,6 +25204,37 @@
           <a:chExt cx="0" cy="0"/>
         </a:xfrm>
       </p:grpSpPr>
+      <p:pic>
+        <p:nvPicPr>
+          <p:cNvPr id="12" name="Immagine 11">
+            <a:extLst>
+              <a:ext uri="{FF2B5EF4-FFF2-40B4-BE49-F238E27FC236}">
+                <a16:creationId xmlns:a16="http://schemas.microsoft.com/office/drawing/2014/main" id="{8D342AE3-70CC-BA15-FFC6-975B64D8B829}"/>
+              </a:ext>
+            </a:extLst>
+          </p:cNvPr>
+          <p:cNvPicPr>
+            <a:picLocks noChangeAspect="1"/>
+          </p:cNvPicPr>
+          <p:nvPr/>
+        </p:nvPicPr>
+        <p:blipFill>
+          <a:blip r:embed="rId3"/>
+          <a:srcRect t="14215" b="10322"/>
+          <a:stretch>
+            <a:fillRect/>
+          </a:stretch>
+        </p:blipFill>
+        <p:spPr>
+          <a:xfrm>
+            <a:off x="1239667" y="1646198"/>
+            <a:ext cx="9472596" cy="4023065"/>
+          </a:xfrm>
+          <a:prstGeom prst="rect">
+            <a:avLst/>
+          </a:prstGeom>
+        </p:spPr>
+      </p:pic>
       <p:sp>
         <p:nvSpPr>
           <p:cNvPr id="2" name="Text 0">
@@ -27987,37 +25456,6 @@
           </a:p>
         </p:txBody>
       </p:sp>
-      <p:pic>
-        <p:nvPicPr>
-          <p:cNvPr id="70" name="Immagine 69">
-            <a:extLst>
-              <a:ext uri="{FF2B5EF4-FFF2-40B4-BE49-F238E27FC236}">
-                <a16:creationId xmlns:a16="http://schemas.microsoft.com/office/drawing/2014/main" id="{25472025-B0EC-BA89-8100-EF9B34EF9498}"/>
-              </a:ext>
-            </a:extLst>
-          </p:cNvPr>
-          <p:cNvPicPr>
-            <a:picLocks noChangeAspect="1"/>
-          </p:cNvPicPr>
-          <p:nvPr/>
-        </p:nvPicPr>
-        <p:blipFill>
-          <a:blip r:embed="rId3"/>
-          <a:srcRect t="14113" b="15541"/>
-          <a:stretch>
-            <a:fillRect/>
-          </a:stretch>
-        </p:blipFill>
-        <p:spPr>
-          <a:xfrm>
-            <a:off x="1148227" y="1623656"/>
-            <a:ext cx="9649644" cy="3820367"/>
-          </a:xfrm>
-          <a:prstGeom prst="rect">
-            <a:avLst/>
-          </a:prstGeom>
-        </p:spPr>
-      </p:pic>
       <p:sp>
         <p:nvSpPr>
           <p:cNvPr id="4" name="Rettangolo 3">
@@ -28032,7 +25470,7 @@
         </p:nvSpPr>
         <p:spPr>
           <a:xfrm>
-            <a:off x="3283889" y="2711395"/>
+            <a:off x="3334129" y="2711395"/>
             <a:ext cx="985961" cy="938254"/>
           </a:xfrm>
           <a:prstGeom prst="rect">
@@ -28136,7 +25574,7 @@
         </p:nvSpPr>
         <p:spPr>
           <a:xfrm>
-            <a:off x="8183219" y="2711395"/>
+            <a:off x="8132979" y="2711395"/>
             <a:ext cx="1056198" cy="938254"/>
           </a:xfrm>
           <a:prstGeom prst="rect">
@@ -28305,6 +25743,37 @@
           <a:chExt cx="0" cy="0"/>
         </a:xfrm>
       </p:grpSpPr>
+      <p:pic>
+        <p:nvPicPr>
+          <p:cNvPr id="13" name="Immagine 12">
+            <a:extLst>
+              <a:ext uri="{FF2B5EF4-FFF2-40B4-BE49-F238E27FC236}">
+                <a16:creationId xmlns:a16="http://schemas.microsoft.com/office/drawing/2014/main" id="{064D5552-62AC-87F1-18E0-D801114E73AA}"/>
+              </a:ext>
+            </a:extLst>
+          </p:cNvPr>
+          <p:cNvPicPr>
+            <a:picLocks noChangeAspect="1"/>
+          </p:cNvPicPr>
+          <p:nvPr/>
+        </p:nvPicPr>
+        <p:blipFill>
+          <a:blip r:embed="rId3"/>
+          <a:srcRect t="14215" b="10322"/>
+          <a:stretch>
+            <a:fillRect/>
+          </a:stretch>
+        </p:blipFill>
+        <p:spPr>
+          <a:xfrm>
+            <a:off x="1239667" y="1646198"/>
+            <a:ext cx="9472596" cy="4023065"/>
+          </a:xfrm>
+          <a:prstGeom prst="rect">
+            <a:avLst/>
+          </a:prstGeom>
+        </p:spPr>
+      </p:pic>
       <p:sp>
         <p:nvSpPr>
           <p:cNvPr id="2" name="Text 0">
@@ -28526,37 +25995,6 @@
           </a:p>
         </p:txBody>
       </p:sp>
-      <p:pic>
-        <p:nvPicPr>
-          <p:cNvPr id="70" name="Immagine 69">
-            <a:extLst>
-              <a:ext uri="{FF2B5EF4-FFF2-40B4-BE49-F238E27FC236}">
-                <a16:creationId xmlns:a16="http://schemas.microsoft.com/office/drawing/2014/main" id="{8893AD11-75FA-7478-DEB7-F7006D1E9907}"/>
-              </a:ext>
-            </a:extLst>
-          </p:cNvPr>
-          <p:cNvPicPr>
-            <a:picLocks noChangeAspect="1"/>
-          </p:cNvPicPr>
-          <p:nvPr/>
-        </p:nvPicPr>
-        <p:blipFill>
-          <a:blip r:embed="rId3"/>
-          <a:srcRect t="14113" b="15541"/>
-          <a:stretch>
-            <a:fillRect/>
-          </a:stretch>
-        </p:blipFill>
-        <p:spPr>
-          <a:xfrm>
-            <a:off x="1148227" y="1623656"/>
-            <a:ext cx="9649644" cy="3820367"/>
-          </a:xfrm>
-          <a:prstGeom prst="rect">
-            <a:avLst/>
-          </a:prstGeom>
-        </p:spPr>
-      </p:pic>
       <p:sp>
         <p:nvSpPr>
           <p:cNvPr id="4" name="Rettangolo 3">
@@ -28623,8 +26061,8 @@
         </p:nvSpPr>
         <p:spPr>
           <a:xfrm>
-            <a:off x="6312306" y="2711395"/>
-            <a:ext cx="923382" cy="938254"/>
+            <a:off x="6328490" y="2711395"/>
+            <a:ext cx="859772" cy="938254"/>
           </a:xfrm>
           <a:prstGeom prst="rect">
             <a:avLst/>
@@ -28675,8 +26113,8 @@
         </p:nvSpPr>
         <p:spPr>
           <a:xfrm>
-            <a:off x="7290315" y="2711395"/>
-            <a:ext cx="859772" cy="938254"/>
+            <a:off x="7274131" y="2711395"/>
+            <a:ext cx="801720" cy="938254"/>
           </a:xfrm>
           <a:prstGeom prst="rect">
             <a:avLst/>
@@ -28818,7 +26256,7 @@
         </p:nvSpPr>
         <p:spPr>
           <a:xfrm>
-            <a:off x="5065937" y="4157736"/>
+            <a:off x="5065937" y="4097448"/>
             <a:ext cx="1621109" cy="851586"/>
           </a:xfrm>
           <a:prstGeom prst="rect">
@@ -28892,6 +26330,37 @@
           <a:chExt cx="0" cy="0"/>
         </a:xfrm>
       </p:grpSpPr>
+      <p:pic>
+        <p:nvPicPr>
+          <p:cNvPr id="8" name="Immagine 7">
+            <a:extLst>
+              <a:ext uri="{FF2B5EF4-FFF2-40B4-BE49-F238E27FC236}">
+                <a16:creationId xmlns:a16="http://schemas.microsoft.com/office/drawing/2014/main" id="{8AACC855-32A5-DBB7-9524-80711267AA85}"/>
+              </a:ext>
+            </a:extLst>
+          </p:cNvPr>
+          <p:cNvPicPr>
+            <a:picLocks noChangeAspect="1"/>
+          </p:cNvPicPr>
+          <p:nvPr/>
+        </p:nvPicPr>
+        <p:blipFill>
+          <a:blip r:embed="rId3"/>
+          <a:srcRect t="14215" b="10322"/>
+          <a:stretch>
+            <a:fillRect/>
+          </a:stretch>
+        </p:blipFill>
+        <p:spPr>
+          <a:xfrm>
+            <a:off x="1239667" y="1646198"/>
+            <a:ext cx="9472596" cy="4023065"/>
+          </a:xfrm>
+          <a:prstGeom prst="rect">
+            <a:avLst/>
+          </a:prstGeom>
+        </p:spPr>
+      </p:pic>
       <p:sp>
         <p:nvSpPr>
           <p:cNvPr id="2" name="Text 0">
@@ -29113,37 +26582,6 @@
           </a:p>
         </p:txBody>
       </p:sp>
-      <p:pic>
-        <p:nvPicPr>
-          <p:cNvPr id="70" name="Immagine 69">
-            <a:extLst>
-              <a:ext uri="{FF2B5EF4-FFF2-40B4-BE49-F238E27FC236}">
-                <a16:creationId xmlns:a16="http://schemas.microsoft.com/office/drawing/2014/main" id="{F0CB514B-FC3C-0478-7D01-E015B5F0E41C}"/>
-              </a:ext>
-            </a:extLst>
-          </p:cNvPr>
-          <p:cNvPicPr>
-            <a:picLocks noChangeAspect="1"/>
-          </p:cNvPicPr>
-          <p:nvPr/>
-        </p:nvPicPr>
-        <p:blipFill>
-          <a:blip r:embed="rId3"/>
-          <a:srcRect t="14113" b="15541"/>
-          <a:stretch>
-            <a:fillRect/>
-          </a:stretch>
-        </p:blipFill>
-        <p:spPr>
-          <a:xfrm>
-            <a:off x="1148227" y="1623656"/>
-            <a:ext cx="9649644" cy="3820367"/>
-          </a:xfrm>
-          <a:prstGeom prst="rect">
-            <a:avLst/>
-          </a:prstGeom>
-        </p:spPr>
-      </p:pic>
       <p:sp>
         <p:nvSpPr>
           <p:cNvPr id="4" name="Rettangolo 3">
@@ -29158,7 +26596,7 @@
         </p:nvSpPr>
         <p:spPr>
           <a:xfrm>
-            <a:off x="9336157" y="1658082"/>
+            <a:off x="9275869" y="1634074"/>
             <a:ext cx="1461714" cy="3367141"/>
           </a:xfrm>
           <a:prstGeom prst="rect">
